--- a/lecons/LSA/Climatology/03_LSA_CLIM_L20_Micro_climates.pptx
+++ b/lecons/LSA/Climatology/03_LSA_CLIM_L20_Micro_climates.pptx
@@ -62,9 +62,12 @@
     <p:sldId id="310" r:id="rId56"/>
     <p:sldId id="311" r:id="rId57"/>
     <p:sldId id="312" r:id="rId58"/>
+    <p:sldId id="313" r:id="rId59"/>
+    <p:sldId id="314" r:id="rId60"/>
+    <p:sldId id="315" r:id="rId61"/>
   </p:sldIdLst>
   <p:notesMasterIdLst>
-    <p:notesMasterId r:id="rId59"/>
+    <p:notesMasterId r:id="rId62"/>
   </p:notesMasterIdLst>
   <p:sldSz cx="12192000" cy="6858000"/>
   <p:notesSz cx="6858000" cy="12192000"/>
@@ -646,7 +649,7 @@
           <a:p>
             <a:r>
               <a:rPr lang="en-US" dirty="0"/>
-              <a:t>Listen carefully to this situation from real life. In Yaoundé, it feels hotter in the city centre at Poste Centrale than in the forest at Mefou. On the shores of the Lagdo Lake, people say the air is cooler in the afternoon. Think about it, because I am going to ask you some questions.</a:t>
+              <a:t>Take your time to copy this part; we will continue together.</a:t>
             </a:r>
             <a:endParaRPr lang="en-US" dirty="0"/>
           </a:p>
@@ -734,7 +737,7 @@
           <a:p>
             <a:r>
               <a:rPr lang="en-US" dirty="0"/>
-              <a:t>Question 1: What is the problem in the situation? Think for a moment, then raise your hand to answer.</a:t>
+              <a:t>Listen carefully to this situation from real life. On a very hot May afternoon, you leave your family's compound in Roumdé Adjia, with many trees and bare ground, and take a moto-taxi to the Grand Marché in the centre of Garoua. As you approach the market, the air becomes hotter and more suffocating; heat rises from the tarred roads and concrete buildings. You ask: "Why does such a short distance make such a big difference in temperature?" Think about it, because I am going to ask you some questions.</a:t>
             </a:r>
             <a:endParaRPr lang="en-US" dirty="0"/>
           </a:p>
@@ -822,7 +825,7 @@
           <a:p>
             <a:r>
               <a:rPr lang="en-US" dirty="0"/>
-              <a:t>Good. The climate changes over short distances.</a:t>
+              <a:t>Question 1: What is the problem in the situation? Think for a moment, then raise your hand to answer.</a:t>
             </a:r>
             <a:endParaRPr lang="en-US" dirty="0"/>
           </a:p>
@@ -910,7 +913,7 @@
           <a:p>
             <a:r>
               <a:rPr lang="en-US" dirty="0"/>
-              <a:t>Question 2: What do we call the climate of a small area? Think for a moment, then raise your hand to answer.</a:t>
+              <a:t>Good. The learner does not understand micro-climates and the urban heat island.</a:t>
             </a:r>
             <a:endParaRPr lang="en-US" dirty="0"/>
           </a:p>
@@ -998,7 +1001,7 @@
           <a:p>
             <a:r>
               <a:rPr lang="en-US" dirty="0"/>
-              <a:t>Good. A micro-climate.</a:t>
+              <a:t>Question 2: What is the climate of a small area called? Think for a moment, then raise your hand to answer.</a:t>
             </a:r>
             <a:endParaRPr lang="en-US" dirty="0"/>
           </a:p>
@@ -1086,7 +1089,7 @@
           <a:p>
             <a:r>
               <a:rPr lang="en-US" dirty="0"/>
-              <a:t>Question 3: Why is the city centre hotter? Think for a moment, then raise your hand to answer.</a:t>
+              <a:t>Good. A micro-climate.</a:t>
             </a:r>
             <a:endParaRPr lang="en-US" dirty="0"/>
           </a:p>
@@ -1174,7 +1177,7 @@
           <a:p>
             <a:r>
               <a:rPr lang="en-US" dirty="0"/>
-              <a:t>Good. Buildings and tar store heat, and there are few trees.</a:t>
+              <a:t>Question 3: Why is the town centre hotter? Think for a moment, then raise your hand to answer.</a:t>
             </a:r>
             <a:endParaRPr lang="en-US" dirty="0"/>
           </a:p>
@@ -1262,7 +1265,7 @@
           <a:p>
             <a:r>
               <a:rPr lang="en-US" dirty="0"/>
-              <a:t>From this situation, the action we are working towards in this lesson is the following: improve the climate of our towns by planting trees and creating green spaces.</a:t>
+              <a:t>Good. Tar, concrete, engines and few trees create an urban heat island.</a:t>
             </a:r>
             <a:endParaRPr lang="en-US" dirty="0"/>
           </a:p>
@@ -1350,7 +1353,7 @@
           <a:p>
             <a:r>
               <a:rPr lang="en-US" dirty="0"/>
-              <a:t>Why is this lesson important for you? This lesson helps us to understand the climate of the small places where we live, especially towns.</a:t>
+              <a:t>From this situation, the action we are working towards in this lesson is the following: plant and protect trees and green spaces in town, and use light-coloured roofs.</a:t>
             </a:r>
             <a:endParaRPr lang="en-US" dirty="0"/>
           </a:p>
@@ -1438,7 +1441,7 @@
           <a:p>
             <a:r>
               <a:rPr lang="en-US" dirty="0"/>
-              <a:t>Activity 1. Look carefully at this picture: the centre of Yaoundé. Observe every detail before I ask the question.</a:t>
+              <a:t>Why is this lesson important for you? This lesson helps us to understand local differences of climate and to plan cooler, healthier towns.</a:t>
             </a:r>
             <a:endParaRPr lang="en-US" dirty="0"/>
           </a:p>
@@ -1614,7 +1617,7 @@
           <a:p>
             <a:r>
               <a:rPr lang="en-US" dirty="0"/>
-              <a:t>Here is the question for Activity 1: Why is the climate of a city centre different from the countryside? Take one minute to think and write your answer in your rough notebook.</a:t>
+              <a:t>Activity 1. Look carefully at this picture: types of micro-climates. Observe every detail before I ask the question.</a:t>
             </a:r>
             <a:endParaRPr lang="en-US" dirty="0"/>
           </a:p>
@@ -1702,7 +1705,7 @@
           <a:p>
             <a:r>
               <a:rPr lang="en-US" dirty="0"/>
-              <a:t>Let us check the answer together. Buildings, roads and traffic change heat, wind and humidity.</a:t>
+              <a:t>Here is the question for Activity 1: Give two types of micro-climates. Take one minute to think and write your answer in your rough notebook.</a:t>
             </a:r>
             <a:endParaRPr lang="en-US" dirty="0"/>
           </a:p>
@@ -1790,7 +1793,7 @@
           <a:p>
             <a:r>
               <a:rPr lang="en-US" dirty="0"/>
-              <a:t>Activity 2. Look carefully at this diagram: the urban heat island. Observe every detail before I ask the question.</a:t>
+              <a:t>Let us check the answer together. Urban, mountain, lakeside or forest micro-climates (any two).</a:t>
             </a:r>
             <a:endParaRPr lang="en-US" dirty="0"/>
           </a:p>
@@ -1878,7 +1881,7 @@
           <a:p>
             <a:r>
               <a:rPr lang="en-US" dirty="0"/>
-              <a:t>Here is the question for Activity 2: How much warmer can a city centre be? Take one minute to think and write your answer in your rough notebook.</a:t>
+              <a:t>Activity 2. Look carefully at this picture: a lakeside. Observe every detail before I ask the question.</a:t>
             </a:r>
             <a:endParaRPr lang="en-US" dirty="0"/>
           </a:p>
@@ -1966,7 +1969,7 @@
           <a:p>
             <a:r>
               <a:rPr lang="en-US" dirty="0"/>
-              <a:t>Let us check the answer together. About 3 to 5 °C warmer, especially at night.</a:t>
+              <a:t>Here is the question for Activity 2: Why is the air near Lake Lagdo cooler and more humid? Take one minute to think and write your answer in your rough notebook.</a:t>
             </a:r>
             <a:endParaRPr lang="en-US" dirty="0"/>
           </a:p>
@@ -2054,7 +2057,7 @@
           <a:p>
             <a:r>
               <a:rPr lang="en-US" dirty="0"/>
-              <a:t>Activity 3. Look carefully at this picture: douala seen from above. Observe every detail before I ask the question.</a:t>
+              <a:t>Let us check the answer together. The water evaporates and heats slowly.</a:t>
             </a:r>
             <a:endParaRPr lang="en-US" dirty="0"/>
           </a:p>
@@ -2142,7 +2145,7 @@
           <a:p>
             <a:r>
               <a:rPr lang="en-US" dirty="0"/>
-              <a:t>Here is the question for Activity 3: Give two other features of urban climates. Take one minute to think and write your answer in your rough notebook.</a:t>
+              <a:t>Activity 3. Look carefully at this diagram: the urban heat island. Observe every detail before I ask the question.</a:t>
             </a:r>
             <a:endParaRPr lang="en-US" dirty="0"/>
           </a:p>
@@ -2230,7 +2233,7 @@
           <a:p>
             <a:r>
               <a:rPr lang="en-US" dirty="0"/>
-              <a:t>Let us check the answer together. More haze and pollution, weaker winds, sometimes more storms.</a:t>
+              <a:t>Here is the question for Activity 3: When is the urban heat island strongest? Take one minute to think and write your answer in your rough notebook.</a:t>
             </a:r>
             <a:endParaRPr lang="en-US" dirty="0"/>
           </a:p>
@@ -2318,7 +2321,7 @@
           <a:p>
             <a:r>
               <a:rPr lang="en-US" dirty="0"/>
-              <a:t>Activity 4. Look carefully at this picture: lake Kamburu, Kenya. Observe every detail before I ask the question.</a:t>
+              <a:t>Let us check the answer together. At night, when buildings and roads release stored heat.</a:t>
             </a:r>
             <a:endParaRPr lang="en-US" dirty="0"/>
           </a:p>
@@ -2406,7 +2409,7 @@
           <a:p>
             <a:r>
               <a:rPr lang="en-US" dirty="0"/>
-              <a:t>Here is the question for Activity 4: Why is it cooler near a lake in the afternoon? Take one minute to think and write your answer in your rough notebook.</a:t>
+              <a:t>Activity 4. Look carefully at this picture: a large city. Observe every detail before I ask the question.</a:t>
             </a:r>
             <a:endParaRPr lang="en-US" dirty="0"/>
           </a:p>
@@ -2494,7 +2497,7 @@
           <a:p>
             <a:r>
               <a:rPr lang="en-US" dirty="0"/>
-              <a:t>Our topic is Climates, and the sub-topic is Concept of Micro-climate. The key notions we shall use today are: micro-climate, urban climate, heat island, lakeside climate, forest climate. At the end, you should be able to do this: learners are able to describe micro-climates and explain the climate of towns.</a:t>
+              <a:t>Our topic is Climates, and the sub-topic is Concept of Micro-climate. The key notions we shall use today are: micro-climate, urban climate, urban heat island, anthropogenic heat, evapotranspiration, urban canyon, lakeside climate, forest climate. At the end, you should be able to do this: learners are able to explain micro-climates, especially why the centre of Garoua is hotter than its outskirts, and propose ways to reduce urban heat.</a:t>
             </a:r>
             <a:endParaRPr lang="en-US" dirty="0"/>
           </a:p>
@@ -2582,7 +2585,7 @@
           <a:p>
             <a:r>
               <a:rPr lang="en-US" dirty="0"/>
-              <a:t>Let us check the answer together. The lake stays cooler than the land and gives a lake breeze.</a:t>
+              <a:t>Here is the question for Activity 4: Why is the air of a city drier? Take one minute to think and write your answer in your rough notebook.</a:t>
             </a:r>
             <a:endParaRPr lang="en-US" dirty="0"/>
           </a:p>
@@ -2670,7 +2673,7 @@
           <a:p>
             <a:r>
               <a:rPr lang="en-US" dirty="0"/>
-              <a:t>Activity 5. Look carefully at this picture: inside an equatorial forest. Observe every detail before I ask the question.</a:t>
+              <a:t>Let us check the answer together. There are fewer plants and less open water, so less evapotranspiration.</a:t>
             </a:r>
             <a:endParaRPr lang="en-US" dirty="0"/>
           </a:p>
@@ -2758,7 +2761,7 @@
           <a:p>
             <a:r>
               <a:rPr lang="en-US" dirty="0"/>
-              <a:t>Here is the question for Activity 5: How is the climate inside a forest different? Take one minute to think and write your answer in your rough notebook.</a:t>
+              <a:t>Activity 5. Look carefully at this picture: a forest. Observe every detail before I ask the question.</a:t>
             </a:r>
             <a:endParaRPr lang="en-US" dirty="0"/>
           </a:p>
@@ -2846,7 +2849,7 @@
           <a:p>
             <a:r>
               <a:rPr lang="en-US" dirty="0"/>
-              <a:t>Let us check the answer together. It is shady, cooler by day, more humid and calm.</a:t>
+              <a:t>Here is the question for Activity 5: Why is it cooler under trees? Take one minute to think and write your answer in your rough notebook.</a:t>
             </a:r>
             <a:endParaRPr lang="en-US" dirty="0"/>
           </a:p>
@@ -2934,7 +2937,7 @@
           <a:p>
             <a:r>
               <a:rPr lang="en-US" dirty="0"/>
-              <a:t>Now we are going to copy the board summary. Write the title and the headings neatly in your notebooks. I will give you enough time for each slide, so do not rush.</a:t>
+              <a:t>Let us check the answer together. Trees give shade and cool the air by transpiration.</a:t>
             </a:r>
             <a:endParaRPr lang="en-US" dirty="0"/>
           </a:p>
@@ -3022,7 +3025,7 @@
           <a:p>
             <a:r>
               <a:rPr lang="en-US" dirty="0"/>
-              <a:t>Let us copy Meaning and Classification of Micro-climates. Micro-climates can be understood as follows. On this slide we have Micro-climate. Write each point on a new line, with the key term first, and explain it in your own words when we revise. When you finish, we go to the next slide.</a:t>
+              <a:t>Now we are going to copy the board summary. Write the title and the headings neatly in your notebooks. I will give you enough time for each slide, so do not rush.</a:t>
             </a:r>
             <a:endParaRPr lang="en-US" dirty="0"/>
           </a:p>
@@ -3110,7 +3113,7 @@
           <a:p>
             <a:r>
               <a:rPr lang="en-US" dirty="0"/>
-              <a:t>We continue with Meaning and Classification of Micro-climates. On this slide we have Meso-climate and Classification. Write each point on a new line, with the key term first, and explain it in your own words when we revise.</a:t>
+              <a:t>Let us copy the definitions. The key terms of this lesson are defined as follows. On this slide we have Micro-climate. Write each point on a new line, with the key term first, and explain it in your own words when we revise. When you finish, we go to the next slide.</a:t>
             </a:r>
             <a:endParaRPr lang="en-US" dirty="0"/>
           </a:p>
@@ -3198,7 +3201,7 @@
           <a:p>
             <a:r>
               <a:rPr lang="en-US" dirty="0"/>
-              <a:t>Let us copy Urban Climates. The characteristics of urban climates are. On this slide we have Higher temperatures. Write each point on a new line, with the key term first, and explain it in your own words when we revise. When you finish, we go to the next slide.</a:t>
+              <a:t>We continue with the definitions. On this slide we have Urban heat island and Anthropogenic heat. Write each point on a new line, with the key term first, and explain it in your own words when we revise. When you finish, we go to the next slide.</a:t>
             </a:r>
             <a:endParaRPr lang="en-US" dirty="0"/>
           </a:p>
@@ -3286,7 +3289,7 @@
           <a:p>
             <a:r>
               <a:rPr lang="en-US" dirty="0"/>
-              <a:t>We continue with Urban Climates. On this slide we have Humidity and rain. Write each point on a new line, with the key term first, and explain it in your own words when we revise. When you finish, we go to the next slide.</a:t>
+              <a:t>We continue with the definitions. On this slide we have Evapotranspiration. Write each point on a new line, with the key term first, and explain it in your own words when we revise.</a:t>
             </a:r>
             <a:endParaRPr lang="en-US" dirty="0"/>
           </a:p>
@@ -3374,7 +3377,7 @@
           <a:p>
             <a:r>
               <a:rPr lang="en-US" dirty="0"/>
-              <a:t>We continue with Urban Climates. On this slide we have Winds and pollution. Write each point on a new line, with the key term first, and explain it in your own words when we revise.</a:t>
+              <a:t>Let us copy Meaning and Classification of Micro-climates. Micro-climates are classified as follows. Copy the point on Urban climate on the left, then draw the diagram on the right: types of micro-climates. Give it a title and label it clearly.</a:t>
             </a:r>
             <a:endParaRPr lang="en-US" dirty="0"/>
           </a:p>
@@ -3462,7 +3465,7 @@
           <a:p>
             <a:r>
               <a:rPr lang="en-US" dirty="0"/>
-              <a:t>Before we start the new lesson, let us correct the homework I gave you at the end of Further Study 1: Tropical Weather Disturbances. The question was: Write five safety rules for a thunderstorm in your area. Take out your exercise books.</a:t>
+              <a:t>Before we start the new lesson, let us correct the homework I gave you at the end of Further Study 1: Tropical Weather Disturbances. The question was: Define a micro-climate. Take out your exercise books.</a:t>
             </a:r>
             <a:endParaRPr lang="en-US" dirty="0"/>
           </a:p>
@@ -3550,7 +3553,7 @@
           <a:p>
             <a:r>
               <a:rPr lang="en-US" dirty="0"/>
-              <a:t>Now draw this illustration in your notebook: the urban heat island. Give it a title and label it clearly.</a:t>
+              <a:t>We continue with Meaning and Classification of Micro-climates. On this slide we have Mountain climate. Write each point on a new line, with the key term first, and explain it in your own words when we revise.</a:t>
             </a:r>
             <a:endParaRPr lang="en-US" dirty="0"/>
           </a:p>
@@ -3638,7 +3641,7 @@
           <a:p>
             <a:r>
               <a:rPr lang="en-US" dirty="0"/>
-              <a:t>Let us copy Factors of Urban Climates. Urban climates are caused by the following factors. On this slide we have Building materials. Write each point on a new line, with the key term first, and explain it in your own words when we revise. When you finish, we go to the next slide.</a:t>
+              <a:t>Copy the point on Lakeside climate on the left, then draw the diagram on the right: a lakeside. Give it a title and label it clearly.</a:t>
             </a:r>
             <a:endParaRPr lang="en-US" dirty="0"/>
           </a:p>
@@ -3726,7 +3729,7 @@
           <a:p>
             <a:r>
               <a:rPr lang="en-US" dirty="0"/>
-              <a:t>We continue with Factors of Urban Climates. On this slide we have Human activities. Write each point on a new line, with the key term first, and explain it in your own words when we revise. When you finish, we go to the next slide.</a:t>
+              <a:t>Copy the point on Forest climate on the left, then draw the diagram on the right: a forest. Give it a title and label it clearly.</a:t>
             </a:r>
             <a:endParaRPr lang="en-US" dirty="0"/>
           </a:p>
@@ -3814,7 +3817,7 @@
           <a:p>
             <a:r>
               <a:rPr lang="en-US" dirty="0"/>
-              <a:t>We continue with Factors of Urban Climates. On this slide we have Lack of vegetation and water. Write each point on a new line, with the key term first, and explain it in your own words when we revise.</a:t>
+              <a:t>Let us copy Characteristics of Urban Climates. Compared with the countryside, towns have the following characteristics. Copy the point on Higher temperatures on the left, then draw the diagram on the right: the urban heat island. Give it a title and label it clearly.</a:t>
             </a:r>
             <a:endParaRPr lang="en-US" dirty="0"/>
           </a:p>
@@ -3902,7 +3905,7 @@
           <a:p>
             <a:r>
               <a:rPr lang="en-US" dirty="0"/>
-              <a:t>Let us copy Lakeside and Forest Climates. Other micro-climates include. On this slide we have Lakeside climate. Write each point on a new line, with the key term first, and explain it in your own words when we revise. When you finish, we go to the next slide.</a:t>
+              <a:t>We continue with Characteristics of Urban Climates. On this slide we have Lower humidity, Different winds and More pollution. Write each point on a new line, with the key term first, and explain it in your own words when we revise.</a:t>
             </a:r>
             <a:endParaRPr lang="en-US" dirty="0"/>
           </a:p>
@@ -3990,7 +3993,7 @@
           <a:p>
             <a:r>
               <a:rPr lang="en-US" dirty="0"/>
-              <a:t>We continue with Lakeside and Forest Climates. On this slide we have Forest climate. Write each point on a new line, with the key term first, and explain it in your own words when we revise.</a:t>
+              <a:t>Copy the point on Slightly more rain on the left, then draw the diagram on the right: town and countryside compared. Give it a title and label it clearly.</a:t>
             </a:r>
             <a:endParaRPr lang="en-US" dirty="0"/>
           </a:p>
@@ -4078,7 +4081,7 @@
           <a:p>
             <a:r>
               <a:rPr lang="en-US" dirty="0"/>
-              <a:t>Now let us check what you have understood. Question 1: What is a micro-climate? Answer in your exercise book.</a:t>
+              <a:t>Let us copy Factors of the Urban Heat Island. The urban heat island is caused by the following factors. Copy the point on Surfaces on the left, then draw the diagram on the right: a large city. Give it a title and label it clearly.</a:t>
             </a:r>
             <a:endParaRPr lang="en-US" dirty="0"/>
           </a:p>
@@ -4166,7 +4169,7 @@
           <a:p>
             <a:r>
               <a:rPr lang="en-US" dirty="0"/>
-              <a:t>The expected answer is: the climate of a small area that differs from the area around it. If you got it right, well done.</a:t>
+              <a:t>We continue with Factors of the Urban Heat Island. On this slide we have Anthropogenic heat and Reduced evapotranspiration. Write each point on a new line, with the key term first, and explain it in your own words when we revise. When you finish, we go to the next slide.</a:t>
             </a:r>
             <a:endParaRPr lang="en-US" dirty="0"/>
           </a:p>
@@ -4254,7 +4257,7 @@
           <a:p>
             <a:r>
               <a:rPr lang="en-US" dirty="0"/>
-              <a:t>Now let us check what you have understood. Question 2: Give three characteristics of urban climate. Answer in your exercise book.</a:t>
+              <a:t>We continue with Factors of the Urban Heat Island. On this slide we have Urban geometry and Solutions. Write each point on a new line, with the key term first, and explain it in your own words when we revise.</a:t>
             </a:r>
             <a:endParaRPr lang="en-US" dirty="0"/>
           </a:p>
@@ -4342,7 +4345,7 @@
           <a:p>
             <a:r>
               <a:rPr lang="en-US" dirty="0"/>
-              <a:t>The expected answer is: warmer (heat island), more pollution, weaker winds (sometimes more storms). If you got it right, well done.</a:t>
+              <a:t>Now let us check what you have understood. Question 1: What is the urban heat island, and give two of its causes in Garoua? Answer in your exercise book.</a:t>
             </a:r>
             <a:endParaRPr lang="en-US" dirty="0"/>
           </a:p>
@@ -4430,7 +4433,7 @@
           <a:p>
             <a:r>
               <a:rPr lang="en-US" dirty="0"/>
-              <a:t>Here is a good answer. Stay indoors or in a car; do not shelter under a lone tree; keep away from metal fences and water; unplug electrical appliances; do not use a phone connected to the wall; wait 30 minutes after the last thunder before going out. Compare it with your own answer and correct your work in red.</a:t>
+              <a:t>Here is a good answer. A micro-climate is the climate of a small area that differs from the climate of the surrounding region. Compare it with your own answer and correct your work in red.</a:t>
             </a:r>
             <a:endParaRPr lang="en-US" dirty="0"/>
           </a:p>
@@ -4518,7 +4521,7 @@
           <a:p>
             <a:r>
               <a:rPr lang="en-US" dirty="0"/>
-              <a:t>For those who need more practice, fill in the blanks in your exercise book. The answers are: number 1, micro-climate; number 2, heat island; number 3, humid.</a:t>
+              <a:t>The expected answer is: the town is warmer than the countryside; causes: tar and concrete, heat from vehicles and generators, few trees (any two). If you got it right, well done.</a:t>
             </a:r>
             <a:endParaRPr lang="en-US" dirty="0"/>
           </a:p>
@@ -4606,7 +4609,7 @@
           <a:p>
             <a:r>
               <a:rPr lang="en-US" dirty="0"/>
-              <a:t>For your homework: Measure the temperature at noon in a sunny yard and under a tree. Explain the difference. We shall correct it at the beginning of our next lesson.</a:t>
+              <a:t>Now let us check what you have understood. Question 2: Give two differences between an urban climate and a rural climate. Answer in your exercise book.</a:t>
             </a:r>
             <a:endParaRPr lang="en-US" dirty="0"/>
           </a:p>
@@ -4694,7 +4697,7 @@
           <a:p>
             <a:r>
               <a:rPr lang="en-US" dirty="0"/>
-              <a:t>Our next lesson will be on Lesson 21: Mountain Climates. Thank you for your attention, and see you next time.</a:t>
+              <a:t>The expected answer is: towns are warmer, drier, less windy and more polluted (any two). If you got it right, well done.</a:t>
             </a:r>
             <a:endParaRPr lang="en-US" dirty="0"/>
           </a:p>
@@ -4782,7 +4785,7 @@
           <a:p>
             <a:r>
               <a:rPr lang="en-US" dirty="0"/>
-              <a:t>Let us play the bilingual game. I say a word in English, and you give me the French word. Then we do the reverse.</a:t>
+              <a:t>For those who need more practice, fill in the blanks in your exercise book. The answers are: number 1, micro-climate; number 2, island; number 3, anthropogenic.</a:t>
             </a:r>
             <a:endParaRPr lang="en-US" dirty="0"/>
           </a:p>
@@ -4870,7 +4873,7 @@
           <a:p>
             <a:r>
               <a:rPr lang="en-US" dirty="0"/>
-              <a:t>I record this information in the official logbook of the class after the lesson.</a:t>
+              <a:t>For your homework: State how temperature changes with altitude. We shall correct it at the beginning of our next lesson.</a:t>
             </a:r>
             <a:endParaRPr lang="en-US" dirty="0"/>
           </a:p>
@@ -4958,7 +4961,7 @@
           <a:p>
             <a:r>
               <a:rPr lang="en-US" dirty="0"/>
-              <a:t>I complete the second page of the logbook: the matter taught, the evaluation, the homework and the attendance.</a:t>
+              <a:t>Our next lesson will be on Lesson 21: Mountain Climates. Thank you for your attention, and see you next time.</a:t>
             </a:r>
             <a:endParaRPr lang="en-US" dirty="0"/>
           </a:p>
@@ -5046,7 +5049,7 @@
           <a:p>
             <a:r>
               <a:rPr lang="en-US" dirty="0"/>
-              <a:t>This slide is for me, the teacher: it gives the timing of the lesson and what to do if the projector is not available.</a:t>
+              <a:t>Let us play the bilingual game. I say a word in English, and you give me the French word. Then we do the reverse.</a:t>
             </a:r>
             <a:endParaRPr lang="en-US" dirty="0"/>
           </a:p>
@@ -5134,7 +5137,7 @@
           <a:p>
             <a:r>
               <a:rPr lang="en-US" dirty="0"/>
-              <a:t>These are the references and picture credits used to prepare this lesson.</a:t>
+              <a:t>I record this information in the official logbook of the class after the lesson.</a:t>
             </a:r>
             <a:endParaRPr lang="en-US" dirty="0"/>
           </a:p>
@@ -5158,6 +5161,182 @@
             <a:fld id="{F7021451-1387-4CA6-816F-3879F97B5CBC}" type="slidenum">
               <a:rPr lang="en-US"/>
               <a:t>57</a:t>
+            </a:fld>
+            <a:endParaRPr lang="en-US"/>
+          </a:p>
+        </p:txBody>
+      </p:sp>
+    </p:spTree>
+    <p:extLst>
+      <p:ext uri="{BB962C8B-B14F-4D97-AF65-F5344CB8AC3E}">
+        <p14:creationId xmlns:p14="http://schemas.microsoft.com/office/powerpoint/2010/main" val="1024086991"/>
+      </p:ext>
+    </p:extLst>
+  </p:cSld>
+  <p:clrMapOvr>
+    <a:masterClrMapping/>
+  </p:clrMapOvr>
+</p:notes>
+</file>
+
+<file path=ppt/notesSlides/notesSlide58.xml><?xml version="1.0" encoding="utf-8"?>
+<p:notes xmlns:a="http://schemas.openxmlformats.org/drawingml/2006/main" xmlns:r="http://schemas.openxmlformats.org/officeDocument/2006/relationships" xmlns:p="http://schemas.openxmlformats.org/presentationml/2006/main">
+  <p:cSld>
+    <p:spTree>
+      <p:nvGrpSpPr>
+        <p:cNvPr id="1" name=""/>
+        <p:cNvGrpSpPr/>
+        <p:nvPr/>
+      </p:nvGrpSpPr>
+      <p:grpSpPr>
+        <a:xfrm>
+          <a:off x="0" y="0"/>
+          <a:ext cx="0" cy="0"/>
+          <a:chOff x="0" y="0"/>
+          <a:chExt cx="0" cy="0"/>
+        </a:xfrm>
+      </p:grpSpPr>
+      <p:sp>
+        <p:nvSpPr>
+          <p:cNvPr id="2" name="Slide Image Placeholder 1"/>
+          <p:cNvSpPr>
+            <a:spLocks noGrp="1" noRot="1" noChangeAspect="1"/>
+          </p:cNvSpPr>
+          <p:nvPr>
+            <p:ph type="sldImg"/>
+          </p:nvPr>
+        </p:nvSpPr>
+        <p:spPr/>
+      </p:sp>
+      <p:sp>
+        <p:nvSpPr>
+          <p:cNvPr id="3" name="Notes Placeholder 2"/>
+          <p:cNvSpPr>
+            <a:spLocks noGrp="1"/>
+          </p:cNvSpPr>
+          <p:nvPr>
+            <p:ph type="body" idx="1"/>
+          </p:nvPr>
+        </p:nvSpPr>
+        <p:spPr/>
+        <p:txBody>
+          <a:bodyPr/>
+          <a:lstStyle/>
+          <a:p>
+            <a:r>
+              <a:rPr lang="en-US" dirty="0"/>
+              <a:t>I complete the second page of the logbook: the matter taught, the evaluation, the homework and the attendance.</a:t>
+            </a:r>
+            <a:endParaRPr lang="en-US" dirty="0"/>
+          </a:p>
+        </p:txBody>
+      </p:sp>
+      <p:sp>
+        <p:nvSpPr>
+          <p:cNvPr id="4" name="Slide Number Placeholder 3"/>
+          <p:cNvSpPr>
+            <a:spLocks noGrp="1"/>
+          </p:cNvSpPr>
+          <p:nvPr>
+            <p:ph type="sldNum" sz="quarter" idx="10"/>
+          </p:nvPr>
+        </p:nvSpPr>
+        <p:spPr/>
+        <p:txBody>
+          <a:bodyPr/>
+          <a:lstStyle/>
+          <a:p>
+            <a:fld id="{F7021451-1387-4CA6-816F-3879F97B5CBC}" type="slidenum">
+              <a:rPr lang="en-US"/>
+              <a:t>58</a:t>
+            </a:fld>
+            <a:endParaRPr lang="en-US"/>
+          </a:p>
+        </p:txBody>
+      </p:sp>
+    </p:spTree>
+    <p:extLst>
+      <p:ext uri="{BB962C8B-B14F-4D97-AF65-F5344CB8AC3E}">
+        <p14:creationId xmlns:p14="http://schemas.microsoft.com/office/powerpoint/2010/main" val="1024086991"/>
+      </p:ext>
+    </p:extLst>
+  </p:cSld>
+  <p:clrMapOvr>
+    <a:masterClrMapping/>
+  </p:clrMapOvr>
+</p:notes>
+</file>
+
+<file path=ppt/notesSlides/notesSlide59.xml><?xml version="1.0" encoding="utf-8"?>
+<p:notes xmlns:a="http://schemas.openxmlformats.org/drawingml/2006/main" xmlns:r="http://schemas.openxmlformats.org/officeDocument/2006/relationships" xmlns:p="http://schemas.openxmlformats.org/presentationml/2006/main">
+  <p:cSld>
+    <p:spTree>
+      <p:nvGrpSpPr>
+        <p:cNvPr id="1" name=""/>
+        <p:cNvGrpSpPr/>
+        <p:nvPr/>
+      </p:nvGrpSpPr>
+      <p:grpSpPr>
+        <a:xfrm>
+          <a:off x="0" y="0"/>
+          <a:ext cx="0" cy="0"/>
+          <a:chOff x="0" y="0"/>
+          <a:chExt cx="0" cy="0"/>
+        </a:xfrm>
+      </p:grpSpPr>
+      <p:sp>
+        <p:nvSpPr>
+          <p:cNvPr id="2" name="Slide Image Placeholder 1"/>
+          <p:cNvSpPr>
+            <a:spLocks noGrp="1" noRot="1" noChangeAspect="1"/>
+          </p:cNvSpPr>
+          <p:nvPr>
+            <p:ph type="sldImg"/>
+          </p:nvPr>
+        </p:nvSpPr>
+        <p:spPr/>
+      </p:sp>
+      <p:sp>
+        <p:nvSpPr>
+          <p:cNvPr id="3" name="Notes Placeholder 2"/>
+          <p:cNvSpPr>
+            <a:spLocks noGrp="1"/>
+          </p:cNvSpPr>
+          <p:nvPr>
+            <p:ph type="body" idx="1"/>
+          </p:nvPr>
+        </p:nvSpPr>
+        <p:spPr/>
+        <p:txBody>
+          <a:bodyPr/>
+          <a:lstStyle/>
+          <a:p>
+            <a:r>
+              <a:rPr lang="en-US" dirty="0"/>
+              <a:t>This slide is for me, the teacher: it gives the timing of the lesson and what to do if the projector is not available.</a:t>
+            </a:r>
+            <a:endParaRPr lang="en-US" dirty="0"/>
+          </a:p>
+        </p:txBody>
+      </p:sp>
+      <p:sp>
+        <p:nvSpPr>
+          <p:cNvPr id="4" name="Slide Number Placeholder 3"/>
+          <p:cNvSpPr>
+            <a:spLocks noGrp="1"/>
+          </p:cNvSpPr>
+          <p:nvPr>
+            <p:ph type="sldNum" sz="quarter" idx="10"/>
+          </p:nvPr>
+        </p:nvSpPr>
+        <p:spPr/>
+        <p:txBody>
+          <a:bodyPr/>
+          <a:lstStyle/>
+          <a:p>
+            <a:fld id="{F7021451-1387-4CA6-816F-3879F97B5CBC}" type="slidenum">
+              <a:rPr lang="en-US"/>
+              <a:t>59</a:t>
             </a:fld>
             <a:endParaRPr lang="en-US"/>
           </a:p>
@@ -5264,6 +5443,94 @@
 </p:notes>
 </file>
 
+<file path=ppt/notesSlides/notesSlide60.xml><?xml version="1.0" encoding="utf-8"?>
+<p:notes xmlns:a="http://schemas.openxmlformats.org/drawingml/2006/main" xmlns:r="http://schemas.openxmlformats.org/officeDocument/2006/relationships" xmlns:p="http://schemas.openxmlformats.org/presentationml/2006/main">
+  <p:cSld>
+    <p:spTree>
+      <p:nvGrpSpPr>
+        <p:cNvPr id="1" name=""/>
+        <p:cNvGrpSpPr/>
+        <p:nvPr/>
+      </p:nvGrpSpPr>
+      <p:grpSpPr>
+        <a:xfrm>
+          <a:off x="0" y="0"/>
+          <a:ext cx="0" cy="0"/>
+          <a:chOff x="0" y="0"/>
+          <a:chExt cx="0" cy="0"/>
+        </a:xfrm>
+      </p:grpSpPr>
+      <p:sp>
+        <p:nvSpPr>
+          <p:cNvPr id="2" name="Slide Image Placeholder 1"/>
+          <p:cNvSpPr>
+            <a:spLocks noGrp="1" noRot="1" noChangeAspect="1"/>
+          </p:cNvSpPr>
+          <p:nvPr>
+            <p:ph type="sldImg"/>
+          </p:nvPr>
+        </p:nvSpPr>
+        <p:spPr/>
+      </p:sp>
+      <p:sp>
+        <p:nvSpPr>
+          <p:cNvPr id="3" name="Notes Placeholder 2"/>
+          <p:cNvSpPr>
+            <a:spLocks noGrp="1"/>
+          </p:cNvSpPr>
+          <p:nvPr>
+            <p:ph type="body" idx="1"/>
+          </p:nvPr>
+        </p:nvSpPr>
+        <p:spPr/>
+        <p:txBody>
+          <a:bodyPr/>
+          <a:lstStyle/>
+          <a:p>
+            <a:r>
+              <a:rPr lang="en-US" dirty="0"/>
+              <a:t>These are the references and picture credits used to prepare this lesson.</a:t>
+            </a:r>
+            <a:endParaRPr lang="en-US" dirty="0"/>
+          </a:p>
+        </p:txBody>
+      </p:sp>
+      <p:sp>
+        <p:nvSpPr>
+          <p:cNvPr id="4" name="Slide Number Placeholder 3"/>
+          <p:cNvSpPr>
+            <a:spLocks noGrp="1"/>
+          </p:cNvSpPr>
+          <p:nvPr>
+            <p:ph type="sldNum" sz="quarter" idx="10"/>
+          </p:nvPr>
+        </p:nvSpPr>
+        <p:spPr/>
+        <p:txBody>
+          <a:bodyPr/>
+          <a:lstStyle/>
+          <a:p>
+            <a:fld id="{F7021451-1387-4CA6-816F-3879F97B5CBC}" type="slidenum">
+              <a:rPr lang="en-US"/>
+              <a:t>60</a:t>
+            </a:fld>
+            <a:endParaRPr lang="en-US"/>
+          </a:p>
+        </p:txBody>
+      </p:sp>
+    </p:spTree>
+    <p:extLst>
+      <p:ext uri="{BB962C8B-B14F-4D97-AF65-F5344CB8AC3E}">
+        <p14:creationId xmlns:p14="http://schemas.microsoft.com/office/powerpoint/2010/main" val="1024086991"/>
+      </p:ext>
+    </p:extLst>
+  </p:cSld>
+  <p:clrMapOvr>
+    <a:masterClrMapping/>
+  </p:clrMapOvr>
+</p:notes>
+</file>
+
 <file path=ppt/notesSlides/notesSlide7.xml><?xml version="1.0" encoding="utf-8"?>
 <p:notes xmlns:a="http://schemas.openxmlformats.org/drawingml/2006/main" xmlns:r="http://schemas.openxmlformats.org/officeDocument/2006/relationships" xmlns:p="http://schemas.openxmlformats.org/presentationml/2006/main">
   <p:cSld>
@@ -5398,7 +5665,7 @@
           <a:p>
             <a:r>
               <a:rPr lang="en-US" dirty="0"/>
-              <a:t>By the end of this lesson, you should be able to do three things. Number 1: define micro-climate. Number 2: classify micro-climates (urban, mountain, lakeside, forest). Number 3: explain the characteristics and factors of urban climates.</a:t>
+              <a:t>By the end of this lesson, you should be able to do four things. Number 1: define a micro-climate. Number 2: classify micro-climates. Number 3: describe the characteristics of urban climates. Number 4: explain the factors of the urban heat island.</a:t>
             </a:r>
             <a:endParaRPr lang="en-US" dirty="0"/>
           </a:p>
@@ -5486,7 +5753,7 @@
           <a:p>
             <a:r>
               <a:rPr lang="en-US" dirty="0"/>
-              <a:t>Let us first remember what you already know. Towns are warmer than the countryside. Sea breezes cool coastal towns. Keep this in mind, because we shall build on it today.</a:t>
+              <a:t>Let us first remember what you already know. Tar and concrete absorb heat. Plants cool the air by transpiration. Climate is controlled by several factors. Keep this in mind, because we shall build on it today.</a:t>
             </a:r>
             <a:endParaRPr lang="en-US" dirty="0"/>
           </a:p>
@@ -6866,7 +7133,7 @@
         <p:spPr>
           <a:xfrm>
             <a:off x="0" y="658368"/>
-            <a:ext cx="5120640" cy="5833872"/>
+            <a:ext cx="1463040" cy="5833872"/>
           </a:xfrm>
           <a:prstGeom prst="rect">
             <a:avLst/>
@@ -6881,8 +7148,8 @@
         </p:nvSpPr>
         <p:spPr>
           <a:xfrm>
-            <a:off x="5349240" y="1005840"/>
-            <a:ext cx="6522415" cy="731520"/>
+            <a:off x="1691640" y="1005840"/>
+            <a:ext cx="10180015" cy="731520"/>
           </a:xfrm>
           <a:prstGeom prst="rect">
             <a:avLst/>
@@ -6922,8 +7189,8 @@
         </p:nvSpPr>
         <p:spPr>
           <a:xfrm>
-            <a:off x="5349240" y="1783080"/>
-            <a:ext cx="6522415" cy="4663440"/>
+            <a:off x="1691640" y="1783080"/>
+            <a:ext cx="10180015" cy="4663440"/>
           </a:xfrm>
           <a:prstGeom prst="rect">
             <a:avLst/>
@@ -6950,7 +7217,27 @@
                 <a:ea typeface="Times New Roman" pitchFamily="34" charset="-122"/>
                 <a:cs typeface="Times New Roman" pitchFamily="34" charset="-120"/>
               </a:rPr>
-              <a:t>In Yaoundé, it feels hotter in the city centre at Poste Centrale than in the forest at Mefou. On the shores of the Lagdo Lake, people say the air is cooler in the afternoon.</a:t>
+              <a:t>On a very hot May afternoon, you leave your family's compound in Roumdé Adjia, with many trees and bare ground, and take a moto-taxi to the Grand Marché in the centre of Garoua.</a:t>
+            </a:r>
+            <a:endParaRPr lang="en-US" sz="4000" dirty="0"/>
+          </a:p>
+          <a:p>
+            <a:pPr algn="l" indent="0" marL="0">
+              <a:spcAft>
+                <a:spcPts val="800"/>
+              </a:spcAft>
+              <a:buNone/>
+            </a:pPr>
+            <a:r>
+              <a:rPr lang="en-US" sz="4000" dirty="0">
+                <a:solidFill>
+                  <a:srgbClr val="111111"/>
+                </a:solidFill>
+                <a:latin typeface="Times New Roman" pitchFamily="34" charset="0"/>
+                <a:ea typeface="Times New Roman" pitchFamily="34" charset="-122"/>
+                <a:cs typeface="Times New Roman" pitchFamily="34" charset="-120"/>
+              </a:rPr>
+              <a:t>As you approach the market, the air becomes hotter and more suffocating; heat rises from the tarred roads and concrete buildings.</a:t>
             </a:r>
             <a:endParaRPr lang="en-US" sz="4000" dirty="0"/>
           </a:p>
@@ -7127,7 +7414,7 @@
                 <a:ea typeface="Times New Roman" pitchFamily="34" charset="-122"/>
                 <a:cs typeface="Times New Roman" pitchFamily="34" charset="-120"/>
               </a:rPr>
-              <a:t>Situation: Question 1</a:t>
+              <a:t>Situation in Real Life (continued)</a:t>
             </a:r>
             <a:endParaRPr lang="en-US" sz="3600" dirty="0"/>
           </a:p>
@@ -7169,7 +7456,7 @@
                 <a:ea typeface="Times New Roman" pitchFamily="34" charset="-122"/>
                 <a:cs typeface="Times New Roman" pitchFamily="34" charset="-120"/>
               </a:rPr>
-              <a:t>What is the problem in the situation?</a:t>
+              <a:t>You ask: "Why does such a short distance make such a big difference in temperature?"</a:t>
             </a:r>
             <a:endParaRPr lang="en-US" sz="4000" dirty="0"/>
           </a:p>
@@ -7346,7 +7633,7 @@
                 <a:ea typeface="Times New Roman" pitchFamily="34" charset="-122"/>
                 <a:cs typeface="Times New Roman" pitchFamily="34" charset="-120"/>
               </a:rPr>
-              <a:t>Answer</a:t>
+              <a:t>Situation: Question 1</a:t>
             </a:r>
             <a:endParaRPr lang="en-US" sz="3600" dirty="0"/>
           </a:p>
@@ -7388,7 +7675,7 @@
                 <a:ea typeface="Times New Roman" pitchFamily="34" charset="-122"/>
                 <a:cs typeface="Times New Roman" pitchFamily="34" charset="-120"/>
               </a:rPr>
-              <a:t>The climate changes over short distances.</a:t>
+              <a:t>What is the problem in the situation?</a:t>
             </a:r>
             <a:endParaRPr lang="en-US" sz="4000" dirty="0"/>
           </a:p>
@@ -7565,7 +7852,7 @@
                 <a:ea typeface="Times New Roman" pitchFamily="34" charset="-122"/>
                 <a:cs typeface="Times New Roman" pitchFamily="34" charset="-120"/>
               </a:rPr>
-              <a:t>Situation: Question 2</a:t>
+              <a:t>Answer</a:t>
             </a:r>
             <a:endParaRPr lang="en-US" sz="3600" dirty="0"/>
           </a:p>
@@ -7607,7 +7894,7 @@
                 <a:ea typeface="Times New Roman" pitchFamily="34" charset="-122"/>
                 <a:cs typeface="Times New Roman" pitchFamily="34" charset="-120"/>
               </a:rPr>
-              <a:t>What do we call the climate of a small area?</a:t>
+              <a:t>The learner does not understand micro-climates and the urban heat island.</a:t>
             </a:r>
             <a:endParaRPr lang="en-US" sz="4000" dirty="0"/>
           </a:p>
@@ -7784,7 +8071,7 @@
                 <a:ea typeface="Times New Roman" pitchFamily="34" charset="-122"/>
                 <a:cs typeface="Times New Roman" pitchFamily="34" charset="-120"/>
               </a:rPr>
-              <a:t>Answer</a:t>
+              <a:t>Situation: Question 2</a:t>
             </a:r>
             <a:endParaRPr lang="en-US" sz="3600" dirty="0"/>
           </a:p>
@@ -7826,7 +8113,7 @@
                 <a:ea typeface="Times New Roman" pitchFamily="34" charset="-122"/>
                 <a:cs typeface="Times New Roman" pitchFamily="34" charset="-120"/>
               </a:rPr>
-              <a:t>A micro-climate.</a:t>
+              <a:t>What is the climate of a small area called?</a:t>
             </a:r>
             <a:endParaRPr lang="en-US" sz="4000" dirty="0"/>
           </a:p>
@@ -8003,7 +8290,7 @@
                 <a:ea typeface="Times New Roman" pitchFamily="34" charset="-122"/>
                 <a:cs typeface="Times New Roman" pitchFamily="34" charset="-120"/>
               </a:rPr>
-              <a:t>Situation: Question 3</a:t>
+              <a:t>Answer</a:t>
             </a:r>
             <a:endParaRPr lang="en-US" sz="3600" dirty="0"/>
           </a:p>
@@ -8045,7 +8332,7 @@
                 <a:ea typeface="Times New Roman" pitchFamily="34" charset="-122"/>
                 <a:cs typeface="Times New Roman" pitchFamily="34" charset="-120"/>
               </a:rPr>
-              <a:t>Why is the city centre hotter?</a:t>
+              <a:t>A micro-climate.</a:t>
             </a:r>
             <a:endParaRPr lang="en-US" sz="4000" dirty="0"/>
           </a:p>
@@ -8222,7 +8509,7 @@
                 <a:ea typeface="Times New Roman" pitchFamily="34" charset="-122"/>
                 <a:cs typeface="Times New Roman" pitchFamily="34" charset="-120"/>
               </a:rPr>
-              <a:t>Possible Answer</a:t>
+              <a:t>Situation: Question 3</a:t>
             </a:r>
             <a:endParaRPr lang="en-US" sz="3600" dirty="0"/>
           </a:p>
@@ -8264,7 +8551,7 @@
                 <a:ea typeface="Times New Roman" pitchFamily="34" charset="-122"/>
                 <a:cs typeface="Times New Roman" pitchFamily="34" charset="-120"/>
               </a:rPr>
-              <a:t>Buildings and tar store heat, and there are few trees.</a:t>
+              <a:t>Why is the town centre hotter?</a:t>
             </a:r>
             <a:endParaRPr lang="en-US" sz="4000" dirty="0"/>
           </a:p>
@@ -8376,7 +8663,7 @@
                 <a:ea typeface="Calibri" pitchFamily="34" charset="-122"/>
                 <a:cs typeface="Calibri" pitchFamily="34" charset="-120"/>
               </a:rPr>
-              <a:t>ACTION TO TAKE</a:t>
+              <a:t>REAL-LIFE SITUATION</a:t>
             </a:r>
             <a:endParaRPr lang="en-US" sz="1400" dirty="0"/>
           </a:p>
@@ -8441,7 +8728,7 @@
                 <a:ea typeface="Times New Roman" pitchFamily="34" charset="-122"/>
                 <a:cs typeface="Times New Roman" pitchFamily="34" charset="-120"/>
               </a:rPr>
-              <a:t>Action to Take</a:t>
+              <a:t>Possible Answer</a:t>
             </a:r>
             <a:endParaRPr lang="en-US" sz="3600" dirty="0"/>
           </a:p>
@@ -8483,7 +8770,7 @@
                 <a:ea typeface="Times New Roman" pitchFamily="34" charset="-122"/>
                 <a:cs typeface="Times New Roman" pitchFamily="34" charset="-120"/>
               </a:rPr>
-              <a:t>Improve the climate of our towns by planting trees and creating green spaces.</a:t>
+              <a:t>Tar, concrete, engines and few trees create an urban heat island.</a:t>
             </a:r>
             <a:endParaRPr lang="en-US" sz="4000" dirty="0"/>
           </a:p>
@@ -8595,7 +8882,7 @@
                 <a:ea typeface="Calibri" pitchFamily="34" charset="-122"/>
                 <a:cs typeface="Calibri" pitchFamily="34" charset="-120"/>
               </a:rPr>
-              <a:t>JUSTIFICATION</a:t>
+              <a:t>ACTION TO TAKE</a:t>
             </a:r>
             <a:endParaRPr lang="en-US" sz="1400" dirty="0"/>
           </a:p>
@@ -8660,7 +8947,7 @@
                 <a:ea typeface="Times New Roman" pitchFamily="34" charset="-122"/>
                 <a:cs typeface="Times New Roman" pitchFamily="34" charset="-120"/>
               </a:rPr>
-              <a:t>Justification of the Lesson</a:t>
+              <a:t>Action to Take</a:t>
             </a:r>
             <a:endParaRPr lang="en-US" sz="3600" dirty="0"/>
           </a:p>
@@ -8702,7 +8989,7 @@
                 <a:ea typeface="Times New Roman" pitchFamily="34" charset="-122"/>
                 <a:cs typeface="Times New Roman" pitchFamily="34" charset="-120"/>
               </a:rPr>
-              <a:t>This lesson helps us to understand the climate of the small places where we live, especially towns.</a:t>
+              <a:t>Plant and protect trees and green spaces in town, and use light-coloured roofs.</a:t>
             </a:r>
             <a:endParaRPr lang="en-US" sz="4000" dirty="0"/>
           </a:p>
@@ -8814,54 +9101,15 @@
                 <a:ea typeface="Calibri" pitchFamily="34" charset="-122"/>
                 <a:cs typeface="Calibri" pitchFamily="34" charset="-120"/>
               </a:rPr>
-              <a:t>1. MEANING AND CLASSIFICATION</a:t>
+              <a:t>JUSTIFICATION</a:t>
             </a:r>
             <a:endParaRPr lang="en-US" sz="1400" dirty="0"/>
-          </a:p>
-        </p:txBody>
-      </p:sp>
-      <p:sp>
-        <p:nvSpPr>
-          <p:cNvPr id="3" name="Text 1"/>
-          <p:cNvSpPr/>
-          <p:nvPr/>
-        </p:nvSpPr>
-        <p:spPr>
-          <a:xfrm>
-            <a:off x="457200" y="1005840"/>
-            <a:ext cx="11277295" cy="731520"/>
-          </a:xfrm>
-          <a:prstGeom prst="rect">
-            <a:avLst/>
-          </a:prstGeom>
-          <a:noFill/>
-          <a:ln/>
-        </p:spPr>
-        <p:txBody>
-          <a:bodyPr wrap="square" lIns="0" tIns="0" rIns="0" bIns="0" rtlCol="0" anchor="ctr"/>
-          <a:lstStyle/>
-          <a:p>
-            <a:pPr algn="ctr" indent="0" marL="0">
-              <a:buNone/>
-            </a:pPr>
-            <a:r>
-              <a:rPr lang="en-US" sz="3600" b="1" dirty="0">
-                <a:solidFill>
-                  <a:srgbClr val="990011"/>
-                </a:solidFill>
-                <a:latin typeface="Times New Roman" pitchFamily="34" charset="0"/>
-                <a:ea typeface="Times New Roman" pitchFamily="34" charset="-122"/>
-                <a:cs typeface="Times New Roman" pitchFamily="34" charset="-120"/>
-              </a:rPr>
-              <a:t>Activity 1</a:t>
-            </a:r>
-            <a:endParaRPr lang="en-US" sz="3600" dirty="0"/>
           </a:p>
         </p:txBody>
       </p:sp>
       <p:pic>
         <p:nvPicPr>
-          <p:cNvPr id="4" name="Image 0" descr="/home/claude/f4/img/v2/lsa_yaounde.jpg">    </p:cNvPr>
+          <p:cNvPr id="3" name="Image 0" descr="/home/claude/f4/img/minesec_sheet.png">    </p:cNvPr>
           <p:cNvPicPr>
             <a:picLocks noChangeAspect="1"/>
           </p:cNvPicPr>
@@ -8875,8 +9123,8 @@
         </p:blipFill>
         <p:spPr>
           <a:xfrm>
-            <a:off x="2246610" y="1783080"/>
-            <a:ext cx="7698475" cy="4270248"/>
+            <a:off x="0" y="658368"/>
+            <a:ext cx="5120640" cy="5833872"/>
           </a:xfrm>
           <a:prstGeom prst="rect">
             <a:avLst/>
@@ -8885,14 +9133,14 @@
       </p:pic>
       <p:sp>
         <p:nvSpPr>
-          <p:cNvPr id="5" name="Text 2"/>
+          <p:cNvPr id="4" name="Text 1"/>
           <p:cNvSpPr/>
           <p:nvPr/>
         </p:nvSpPr>
         <p:spPr>
           <a:xfrm>
-            <a:off x="457200" y="6089904"/>
-            <a:ext cx="11277295" cy="347472"/>
+            <a:off x="5349240" y="1005840"/>
+            <a:ext cx="6522415" cy="731520"/>
           </a:xfrm>
           <a:prstGeom prst="rect">
             <a:avLst/>
@@ -8901,24 +9149,68 @@
           <a:ln/>
         </p:spPr>
         <p:txBody>
-          <a:bodyPr wrap="square" lIns="0" tIns="0" rIns="0" bIns="0" rtlCol="0" anchor="ctr"/>
+          <a:bodyPr wrap="square" lIns="0" tIns="0" rIns="0" bIns="0" rtlCol="0" anchor="ctr">
+            <a:normAutofit/>
+          </a:bodyPr>
           <a:lstStyle/>
           <a:p>
             <a:pPr algn="ctr" indent="0" marL="0">
               <a:buNone/>
             </a:pPr>
             <a:r>
-              <a:rPr lang="en-US" sz="1800" i="1" dirty="0">
-                <a:solidFill>
-                  <a:srgbClr val="555555"/>
+              <a:rPr lang="en-US" sz="3600" b="1" dirty="0">
+                <a:solidFill>
+                  <a:srgbClr val="990011"/>
                 </a:solidFill>
                 <a:latin typeface="Times New Roman" pitchFamily="34" charset="0"/>
                 <a:ea typeface="Times New Roman" pitchFamily="34" charset="-122"/>
                 <a:cs typeface="Times New Roman" pitchFamily="34" charset="-120"/>
               </a:rPr>
-              <a:t>The centre of Yaoundé.</a:t>
-            </a:r>
-            <a:endParaRPr lang="en-US" sz="1800" dirty="0"/>
+              <a:t>Justification of the Lesson</a:t>
+            </a:r>
+            <a:endParaRPr lang="en-US" sz="3600" dirty="0"/>
+          </a:p>
+        </p:txBody>
+      </p:sp>
+      <p:sp>
+        <p:nvSpPr>
+          <p:cNvPr id="5" name="Text 2"/>
+          <p:cNvSpPr/>
+          <p:nvPr/>
+        </p:nvSpPr>
+        <p:spPr>
+          <a:xfrm>
+            <a:off x="5349240" y="1783080"/>
+            <a:ext cx="6522415" cy="4663440"/>
+          </a:xfrm>
+          <a:prstGeom prst="rect">
+            <a:avLst/>
+          </a:prstGeom>
+          <a:noFill/>
+          <a:ln/>
+        </p:spPr>
+        <p:txBody>
+          <a:bodyPr wrap="square" lIns="0" tIns="0" rIns="0" bIns="0" rtlCol="0" anchor="t"/>
+          <a:lstStyle/>
+          <a:p>
+            <a:pPr algn="l" indent="0" marL="0">
+              <a:spcAft>
+                <a:spcPts val="800"/>
+              </a:spcAft>
+              <a:buNone/>
+            </a:pPr>
+            <a:r>
+              <a:rPr lang="en-US" sz="4000" dirty="0">
+                <a:solidFill>
+                  <a:srgbClr val="111111"/>
+                </a:solidFill>
+                <a:latin typeface="Times New Roman" pitchFamily="34" charset="0"/>
+                <a:ea typeface="Times New Roman" pitchFamily="34" charset="-122"/>
+                <a:cs typeface="Times New Roman" pitchFamily="34" charset="-120"/>
+              </a:rPr>
+              <a:t>This lesson helps us to understand local differences of climate and to plan cooler, healthier towns.</a:t>
+            </a:r>
+            <a:endParaRPr lang="en-US" sz="4000" dirty="0"/>
           </a:p>
         </p:txBody>
       </p:sp>
@@ -9623,15 +9915,54 @@
                 <a:ea typeface="Calibri" pitchFamily="34" charset="-122"/>
                 <a:cs typeface="Calibri" pitchFamily="34" charset="-120"/>
               </a:rPr>
-              <a:t>1. MEANING AND CLASSIFICATION</a:t>
+              <a:t>1. MEANING</a:t>
             </a:r>
             <a:endParaRPr lang="en-US" sz="1400" dirty="0"/>
+          </a:p>
+        </p:txBody>
+      </p:sp>
+      <p:sp>
+        <p:nvSpPr>
+          <p:cNvPr id="3" name="Text 1"/>
+          <p:cNvSpPr/>
+          <p:nvPr/>
+        </p:nvSpPr>
+        <p:spPr>
+          <a:xfrm>
+            <a:off x="457200" y="1005840"/>
+            <a:ext cx="11277295" cy="731520"/>
+          </a:xfrm>
+          <a:prstGeom prst="rect">
+            <a:avLst/>
+          </a:prstGeom>
+          <a:noFill/>
+          <a:ln/>
+        </p:spPr>
+        <p:txBody>
+          <a:bodyPr wrap="square" lIns="0" tIns="0" rIns="0" bIns="0" rtlCol="0" anchor="ctr"/>
+          <a:lstStyle/>
+          <a:p>
+            <a:pPr algn="ctr" indent="0" marL="0">
+              <a:buNone/>
+            </a:pPr>
+            <a:r>
+              <a:rPr lang="en-US" sz="3600" b="1" dirty="0">
+                <a:solidFill>
+                  <a:srgbClr val="990011"/>
+                </a:solidFill>
+                <a:latin typeface="Times New Roman" pitchFamily="34" charset="0"/>
+                <a:ea typeface="Times New Roman" pitchFamily="34" charset="-122"/>
+                <a:cs typeface="Times New Roman" pitchFamily="34" charset="-120"/>
+              </a:rPr>
+              <a:t>Activity 1</a:t>
+            </a:r>
+            <a:endParaRPr lang="en-US" sz="3600" dirty="0"/>
           </a:p>
         </p:txBody>
       </p:sp>
       <p:pic>
         <p:nvPicPr>
-          <p:cNvPr id="3" name="Image 0" descr="/home/claude/f4/img/minesec_sheet.png">    </p:cNvPr>
+          <p:cNvPr id="4" name="Image 0" descr="/home/claude/f4/img/v2/clim2_micro_types.png">    </p:cNvPr>
           <p:cNvPicPr>
             <a:picLocks noChangeAspect="1"/>
           </p:cNvPicPr>
@@ -9645,8 +9976,8 @@
         </p:blipFill>
         <p:spPr>
           <a:xfrm>
-            <a:off x="0" y="658368"/>
-            <a:ext cx="5120640" cy="5833872"/>
+            <a:off x="629930" y="1783080"/>
+            <a:ext cx="10931835" cy="4270248"/>
           </a:xfrm>
           <a:prstGeom prst="rect">
             <a:avLst/>
@@ -9655,14 +9986,14 @@
       </p:pic>
       <p:sp>
         <p:nvSpPr>
-          <p:cNvPr id="4" name="Text 1"/>
+          <p:cNvPr id="5" name="Text 2"/>
           <p:cNvSpPr/>
           <p:nvPr/>
         </p:nvSpPr>
         <p:spPr>
           <a:xfrm>
-            <a:off x="5349240" y="1005840"/>
-            <a:ext cx="6522415" cy="731520"/>
+            <a:off x="457200" y="6089904"/>
+            <a:ext cx="11277295" cy="347472"/>
           </a:xfrm>
           <a:prstGeom prst="rect">
             <a:avLst/>
@@ -9671,68 +10002,24 @@
           <a:ln/>
         </p:spPr>
         <p:txBody>
-          <a:bodyPr wrap="square" lIns="0" tIns="0" rIns="0" bIns="0" rtlCol="0" anchor="ctr">
-            <a:normAutofit/>
-          </a:bodyPr>
+          <a:bodyPr wrap="square" lIns="0" tIns="0" rIns="0" bIns="0" rtlCol="0" anchor="ctr"/>
           <a:lstStyle/>
           <a:p>
             <a:pPr algn="ctr" indent="0" marL="0">
               <a:buNone/>
             </a:pPr>
             <a:r>
-              <a:rPr lang="en-US" sz="3600" b="1" dirty="0">
-                <a:solidFill>
-                  <a:srgbClr val="990011"/>
+              <a:rPr lang="en-US" sz="1800" i="1" dirty="0">
+                <a:solidFill>
+                  <a:srgbClr val="555555"/>
                 </a:solidFill>
                 <a:latin typeface="Times New Roman" pitchFamily="34" charset="0"/>
                 <a:ea typeface="Times New Roman" pitchFamily="34" charset="-122"/>
                 <a:cs typeface="Times New Roman" pitchFamily="34" charset="-120"/>
               </a:rPr>
-              <a:t>Activity 1: Question</a:t>
-            </a:r>
-            <a:endParaRPr lang="en-US" sz="3600" dirty="0"/>
-          </a:p>
-        </p:txBody>
-      </p:sp>
-      <p:sp>
-        <p:nvSpPr>
-          <p:cNvPr id="5" name="Text 2"/>
-          <p:cNvSpPr/>
-          <p:nvPr/>
-        </p:nvSpPr>
-        <p:spPr>
-          <a:xfrm>
-            <a:off x="5349240" y="1783080"/>
-            <a:ext cx="6522415" cy="4663440"/>
-          </a:xfrm>
-          <a:prstGeom prst="rect">
-            <a:avLst/>
-          </a:prstGeom>
-          <a:noFill/>
-          <a:ln/>
-        </p:spPr>
-        <p:txBody>
-          <a:bodyPr wrap="square" lIns="0" tIns="0" rIns="0" bIns="0" rtlCol="0" anchor="t"/>
-          <a:lstStyle/>
-          <a:p>
-            <a:pPr algn="l" indent="0" marL="0">
-              <a:spcAft>
-                <a:spcPts val="800"/>
-              </a:spcAft>
-              <a:buNone/>
-            </a:pPr>
-            <a:r>
-              <a:rPr lang="en-US" sz="4000" dirty="0">
-                <a:solidFill>
-                  <a:srgbClr val="111111"/>
-                </a:solidFill>
-                <a:latin typeface="Times New Roman" pitchFamily="34" charset="0"/>
-                <a:ea typeface="Times New Roman" pitchFamily="34" charset="-122"/>
-                <a:cs typeface="Times New Roman" pitchFamily="34" charset="-120"/>
-              </a:rPr>
-              <a:t>Why is the climate of a city centre different from the countryside?</a:t>
-            </a:r>
-            <a:endParaRPr lang="en-US" sz="4000" dirty="0"/>
+              <a:t>Types of micro-climates.</a:t>
+            </a:r>
+            <a:endParaRPr lang="en-US" sz="1800" dirty="0"/>
           </a:p>
         </p:txBody>
       </p:sp>
@@ -9842,7 +10129,7 @@
                 <a:ea typeface="Calibri" pitchFamily="34" charset="-122"/>
                 <a:cs typeface="Calibri" pitchFamily="34" charset="-120"/>
               </a:rPr>
-              <a:t>1. MEANING AND CLASSIFICATION</a:t>
+              <a:t>1. MEANING</a:t>
             </a:r>
             <a:endParaRPr lang="en-US" sz="1400" dirty="0"/>
           </a:p>
@@ -9907,7 +10194,7 @@
                 <a:ea typeface="Times New Roman" pitchFamily="34" charset="-122"/>
                 <a:cs typeface="Times New Roman" pitchFamily="34" charset="-120"/>
               </a:rPr>
-              <a:t>Activity 1: Answer</a:t>
+              <a:t>Activity 1: Question</a:t>
             </a:r>
             <a:endParaRPr lang="en-US" sz="3600" dirty="0"/>
           </a:p>
@@ -9949,7 +10236,7 @@
                 <a:ea typeface="Times New Roman" pitchFamily="34" charset="-122"/>
                 <a:cs typeface="Times New Roman" pitchFamily="34" charset="-120"/>
               </a:rPr>
-              <a:t>Buildings, roads and traffic change heat, wind and humidity.</a:t>
+              <a:t>Give two types of micro-climates.</a:t>
             </a:r>
             <a:endParaRPr lang="en-US" sz="4000" dirty="0"/>
           </a:p>
@@ -10061,54 +10348,15 @@
                 <a:ea typeface="Calibri" pitchFamily="34" charset="-122"/>
                 <a:cs typeface="Calibri" pitchFamily="34" charset="-120"/>
               </a:rPr>
-              <a:t>2. URBAN CLIMATE: HEAT ISLAND</a:t>
+              <a:t>1. MEANING</a:t>
             </a:r>
             <a:endParaRPr lang="en-US" sz="1400" dirty="0"/>
-          </a:p>
-        </p:txBody>
-      </p:sp>
-      <p:sp>
-        <p:nvSpPr>
-          <p:cNvPr id="3" name="Text 1"/>
-          <p:cNvSpPr/>
-          <p:nvPr/>
-        </p:nvSpPr>
-        <p:spPr>
-          <a:xfrm>
-            <a:off x="457200" y="1005840"/>
-            <a:ext cx="11277295" cy="731520"/>
-          </a:xfrm>
-          <a:prstGeom prst="rect">
-            <a:avLst/>
-          </a:prstGeom>
-          <a:noFill/>
-          <a:ln/>
-        </p:spPr>
-        <p:txBody>
-          <a:bodyPr wrap="square" lIns="0" tIns="0" rIns="0" bIns="0" rtlCol="0" anchor="ctr"/>
-          <a:lstStyle/>
-          <a:p>
-            <a:pPr algn="ctr" indent="0" marL="0">
-              <a:buNone/>
-            </a:pPr>
-            <a:r>
-              <a:rPr lang="en-US" sz="3600" b="1" dirty="0">
-                <a:solidFill>
-                  <a:srgbClr val="990011"/>
-                </a:solidFill>
-                <a:latin typeface="Times New Roman" pitchFamily="34" charset="0"/>
-                <a:ea typeface="Times New Roman" pitchFamily="34" charset="-122"/>
-                <a:cs typeface="Times New Roman" pitchFamily="34" charset="-120"/>
-              </a:rPr>
-              <a:t>Activity 2</a:t>
-            </a:r>
-            <a:endParaRPr lang="en-US" sz="3600" dirty="0"/>
           </a:p>
         </p:txBody>
       </p:sp>
       <p:pic>
         <p:nvPicPr>
-          <p:cNvPr id="4" name="Image 0" descr="/home/claude/f4/img/v2/heat_island_big.png">    </p:cNvPr>
+          <p:cNvPr id="3" name="Image 0" descr="/home/claude/f4/img/minesec_sheet.png">    </p:cNvPr>
           <p:cNvPicPr>
             <a:picLocks noChangeAspect="1"/>
           </p:cNvPicPr>
@@ -10122,8 +10370,8 @@
         </p:blipFill>
         <p:spPr>
           <a:xfrm>
-            <a:off x="629930" y="1783080"/>
-            <a:ext cx="10931835" cy="4270248"/>
+            <a:off x="0" y="658368"/>
+            <a:ext cx="5120640" cy="5833872"/>
           </a:xfrm>
           <a:prstGeom prst="rect">
             <a:avLst/>
@@ -10132,14 +10380,14 @@
       </p:pic>
       <p:sp>
         <p:nvSpPr>
-          <p:cNvPr id="5" name="Text 2"/>
+          <p:cNvPr id="4" name="Text 1"/>
           <p:cNvSpPr/>
           <p:nvPr/>
         </p:nvSpPr>
         <p:spPr>
           <a:xfrm>
-            <a:off x="457200" y="6089904"/>
-            <a:ext cx="11277295" cy="347472"/>
+            <a:off x="5349240" y="1005840"/>
+            <a:ext cx="6522415" cy="731520"/>
           </a:xfrm>
           <a:prstGeom prst="rect">
             <a:avLst/>
@@ -10148,24 +10396,68 @@
           <a:ln/>
         </p:spPr>
         <p:txBody>
-          <a:bodyPr wrap="square" lIns="0" tIns="0" rIns="0" bIns="0" rtlCol="0" anchor="ctr"/>
+          <a:bodyPr wrap="square" lIns="0" tIns="0" rIns="0" bIns="0" rtlCol="0" anchor="ctr">
+            <a:normAutofit/>
+          </a:bodyPr>
           <a:lstStyle/>
           <a:p>
             <a:pPr algn="ctr" indent="0" marL="0">
               <a:buNone/>
             </a:pPr>
             <a:r>
-              <a:rPr lang="en-US" sz="1800" i="1" dirty="0">
-                <a:solidFill>
-                  <a:srgbClr val="555555"/>
+              <a:rPr lang="en-US" sz="3600" b="1" dirty="0">
+                <a:solidFill>
+                  <a:srgbClr val="990011"/>
                 </a:solidFill>
                 <a:latin typeface="Times New Roman" pitchFamily="34" charset="0"/>
                 <a:ea typeface="Times New Roman" pitchFamily="34" charset="-122"/>
                 <a:cs typeface="Times New Roman" pitchFamily="34" charset="-120"/>
               </a:rPr>
-              <a:t>The urban heat island.</a:t>
-            </a:r>
-            <a:endParaRPr lang="en-US" sz="1800" dirty="0"/>
+              <a:t>Activity 1: Answer</a:t>
+            </a:r>
+            <a:endParaRPr lang="en-US" sz="3600" dirty="0"/>
+          </a:p>
+        </p:txBody>
+      </p:sp>
+      <p:sp>
+        <p:nvSpPr>
+          <p:cNvPr id="5" name="Text 2"/>
+          <p:cNvSpPr/>
+          <p:nvPr/>
+        </p:nvSpPr>
+        <p:spPr>
+          <a:xfrm>
+            <a:off x="5349240" y="1783080"/>
+            <a:ext cx="6522415" cy="4663440"/>
+          </a:xfrm>
+          <a:prstGeom prst="rect">
+            <a:avLst/>
+          </a:prstGeom>
+          <a:noFill/>
+          <a:ln/>
+        </p:spPr>
+        <p:txBody>
+          <a:bodyPr wrap="square" lIns="0" tIns="0" rIns="0" bIns="0" rtlCol="0" anchor="t"/>
+          <a:lstStyle/>
+          <a:p>
+            <a:pPr algn="l" indent="0" marL="0">
+              <a:spcAft>
+                <a:spcPts val="800"/>
+              </a:spcAft>
+              <a:buNone/>
+            </a:pPr>
+            <a:r>
+              <a:rPr lang="en-US" sz="4000" dirty="0">
+                <a:solidFill>
+                  <a:srgbClr val="111111"/>
+                </a:solidFill>
+                <a:latin typeface="Times New Roman" pitchFamily="34" charset="0"/>
+                <a:ea typeface="Times New Roman" pitchFamily="34" charset="-122"/>
+                <a:cs typeface="Times New Roman" pitchFamily="34" charset="-120"/>
+              </a:rPr>
+              <a:t>Urban, mountain, lakeside or forest micro-climates (any two).</a:t>
+            </a:r>
+            <a:endParaRPr lang="en-US" sz="4000" dirty="0"/>
           </a:p>
         </p:txBody>
       </p:sp>
@@ -10275,15 +10567,54 @@
                 <a:ea typeface="Calibri" pitchFamily="34" charset="-122"/>
                 <a:cs typeface="Calibri" pitchFamily="34" charset="-120"/>
               </a:rPr>
-              <a:t>2. URBAN CLIMATE: HEAT ISLAND</a:t>
+              <a:t>1. MEANING</a:t>
             </a:r>
             <a:endParaRPr lang="en-US" sz="1400" dirty="0"/>
+          </a:p>
+        </p:txBody>
+      </p:sp>
+      <p:sp>
+        <p:nvSpPr>
+          <p:cNvPr id="3" name="Text 1"/>
+          <p:cNvSpPr/>
+          <p:nvPr/>
+        </p:nvSpPr>
+        <p:spPr>
+          <a:xfrm>
+            <a:off x="457200" y="1005840"/>
+            <a:ext cx="11277295" cy="731520"/>
+          </a:xfrm>
+          <a:prstGeom prst="rect">
+            <a:avLst/>
+          </a:prstGeom>
+          <a:noFill/>
+          <a:ln/>
+        </p:spPr>
+        <p:txBody>
+          <a:bodyPr wrap="square" lIns="0" tIns="0" rIns="0" bIns="0" rtlCol="0" anchor="ctr"/>
+          <a:lstStyle/>
+          <a:p>
+            <a:pPr algn="ctr" indent="0" marL="0">
+              <a:buNone/>
+            </a:pPr>
+            <a:r>
+              <a:rPr lang="en-US" sz="3600" b="1" dirty="0">
+                <a:solidFill>
+                  <a:srgbClr val="990011"/>
+                </a:solidFill>
+                <a:latin typeface="Times New Roman" pitchFamily="34" charset="0"/>
+                <a:ea typeface="Times New Roman" pitchFamily="34" charset="-122"/>
+                <a:cs typeface="Times New Roman" pitchFamily="34" charset="-120"/>
+              </a:rPr>
+              <a:t>Activity 2</a:t>
+            </a:r>
+            <a:endParaRPr lang="en-US" sz="3600" dirty="0"/>
           </a:p>
         </p:txBody>
       </p:sp>
       <p:pic>
         <p:nvPicPr>
-          <p:cNvPr id="3" name="Image 0" descr="/home/claude/f4/img/minesec_sheet.png">    </p:cNvPr>
+          <p:cNvPr id="4" name="Image 0" descr="/home/claude/f4/img/v2/lsa_lake.jpg">    </p:cNvPr>
           <p:cNvPicPr>
             <a:picLocks noChangeAspect="1"/>
           </p:cNvPicPr>
@@ -10297,8 +10628,8 @@
         </p:blipFill>
         <p:spPr>
           <a:xfrm>
-            <a:off x="0" y="658368"/>
-            <a:ext cx="5120640" cy="5833872"/>
+            <a:off x="2246610" y="1783080"/>
+            <a:ext cx="7698475" cy="4270248"/>
           </a:xfrm>
           <a:prstGeom prst="rect">
             <a:avLst/>
@@ -10307,14 +10638,14 @@
       </p:pic>
       <p:sp>
         <p:nvSpPr>
-          <p:cNvPr id="4" name="Text 1"/>
+          <p:cNvPr id="5" name="Text 2"/>
           <p:cNvSpPr/>
           <p:nvPr/>
         </p:nvSpPr>
         <p:spPr>
           <a:xfrm>
-            <a:off x="5349240" y="1005840"/>
-            <a:ext cx="6522415" cy="731520"/>
+            <a:off x="457200" y="6089904"/>
+            <a:ext cx="11277295" cy="347472"/>
           </a:xfrm>
           <a:prstGeom prst="rect">
             <a:avLst/>
@@ -10323,68 +10654,24 @@
           <a:ln/>
         </p:spPr>
         <p:txBody>
-          <a:bodyPr wrap="square" lIns="0" tIns="0" rIns="0" bIns="0" rtlCol="0" anchor="ctr">
-            <a:normAutofit/>
-          </a:bodyPr>
+          <a:bodyPr wrap="square" lIns="0" tIns="0" rIns="0" bIns="0" rtlCol="0" anchor="ctr"/>
           <a:lstStyle/>
           <a:p>
             <a:pPr algn="ctr" indent="0" marL="0">
               <a:buNone/>
             </a:pPr>
             <a:r>
-              <a:rPr lang="en-US" sz="3600" b="1" dirty="0">
-                <a:solidFill>
-                  <a:srgbClr val="990011"/>
+              <a:rPr lang="en-US" sz="1800" i="1" dirty="0">
+                <a:solidFill>
+                  <a:srgbClr val="555555"/>
                 </a:solidFill>
                 <a:latin typeface="Times New Roman" pitchFamily="34" charset="0"/>
                 <a:ea typeface="Times New Roman" pitchFamily="34" charset="-122"/>
                 <a:cs typeface="Times New Roman" pitchFamily="34" charset="-120"/>
               </a:rPr>
-              <a:t>Activity 2: Question</a:t>
-            </a:r>
-            <a:endParaRPr lang="en-US" sz="3600" dirty="0"/>
-          </a:p>
-        </p:txBody>
-      </p:sp>
-      <p:sp>
-        <p:nvSpPr>
-          <p:cNvPr id="5" name="Text 2"/>
-          <p:cNvSpPr/>
-          <p:nvPr/>
-        </p:nvSpPr>
-        <p:spPr>
-          <a:xfrm>
-            <a:off x="5349240" y="1783080"/>
-            <a:ext cx="6522415" cy="4663440"/>
-          </a:xfrm>
-          <a:prstGeom prst="rect">
-            <a:avLst/>
-          </a:prstGeom>
-          <a:noFill/>
-          <a:ln/>
-        </p:spPr>
-        <p:txBody>
-          <a:bodyPr wrap="square" lIns="0" tIns="0" rIns="0" bIns="0" rtlCol="0" anchor="t"/>
-          <a:lstStyle/>
-          <a:p>
-            <a:pPr algn="l" indent="0" marL="0">
-              <a:spcAft>
-                <a:spcPts val="800"/>
-              </a:spcAft>
-              <a:buNone/>
-            </a:pPr>
-            <a:r>
-              <a:rPr lang="en-US" sz="4000" dirty="0">
-                <a:solidFill>
-                  <a:srgbClr val="111111"/>
-                </a:solidFill>
-                <a:latin typeface="Times New Roman" pitchFamily="34" charset="0"/>
-                <a:ea typeface="Times New Roman" pitchFamily="34" charset="-122"/>
-                <a:cs typeface="Times New Roman" pitchFamily="34" charset="-120"/>
-              </a:rPr>
-              <a:t>How much warmer can a city centre be?</a:t>
-            </a:r>
-            <a:endParaRPr lang="en-US" sz="4000" dirty="0"/>
+              <a:t>A lakeside.</a:t>
+            </a:r>
+            <a:endParaRPr lang="en-US" sz="1800" dirty="0"/>
           </a:p>
         </p:txBody>
       </p:sp>
@@ -10494,7 +10781,7 @@
                 <a:ea typeface="Calibri" pitchFamily="34" charset="-122"/>
                 <a:cs typeface="Calibri" pitchFamily="34" charset="-120"/>
               </a:rPr>
-              <a:t>2. URBAN CLIMATE: HEAT ISLAND</a:t>
+              <a:t>1. MEANING</a:t>
             </a:r>
             <a:endParaRPr lang="en-US" sz="1400" dirty="0"/>
           </a:p>
@@ -10559,7 +10846,7 @@
                 <a:ea typeface="Times New Roman" pitchFamily="34" charset="-122"/>
                 <a:cs typeface="Times New Roman" pitchFamily="34" charset="-120"/>
               </a:rPr>
-              <a:t>Activity 2: Answer</a:t>
+              <a:t>Activity 2: Question</a:t>
             </a:r>
             <a:endParaRPr lang="en-US" sz="3600" dirty="0"/>
           </a:p>
@@ -10601,7 +10888,7 @@
                 <a:ea typeface="Times New Roman" pitchFamily="34" charset="-122"/>
                 <a:cs typeface="Times New Roman" pitchFamily="34" charset="-120"/>
               </a:rPr>
-              <a:t>About 3 to 5 °C warmer, especially at night.</a:t>
+              <a:t>Why is the air near Lake Lagdo cooler and more humid?</a:t>
             </a:r>
             <a:endParaRPr lang="en-US" sz="4000" dirty="0"/>
           </a:p>
@@ -10713,54 +11000,15 @@
                 <a:ea typeface="Calibri" pitchFamily="34" charset="-122"/>
                 <a:cs typeface="Calibri" pitchFamily="34" charset="-120"/>
               </a:rPr>
-              <a:t>2. URBAN CLIMATE: OTHER FEATURES</a:t>
+              <a:t>1. MEANING</a:t>
             </a:r>
             <a:endParaRPr lang="en-US" sz="1400" dirty="0"/>
-          </a:p>
-        </p:txBody>
-      </p:sp>
-      <p:sp>
-        <p:nvSpPr>
-          <p:cNvPr id="3" name="Text 1"/>
-          <p:cNvSpPr/>
-          <p:nvPr/>
-        </p:nvSpPr>
-        <p:spPr>
-          <a:xfrm>
-            <a:off x="457200" y="1005840"/>
-            <a:ext cx="11277295" cy="731520"/>
-          </a:xfrm>
-          <a:prstGeom prst="rect">
-            <a:avLst/>
-          </a:prstGeom>
-          <a:noFill/>
-          <a:ln/>
-        </p:spPr>
-        <p:txBody>
-          <a:bodyPr wrap="square" lIns="0" tIns="0" rIns="0" bIns="0" rtlCol="0" anchor="ctr"/>
-          <a:lstStyle/>
-          <a:p>
-            <a:pPr algn="ctr" indent="0" marL="0">
-              <a:buNone/>
-            </a:pPr>
-            <a:r>
-              <a:rPr lang="en-US" sz="3600" b="1" dirty="0">
-                <a:solidFill>
-                  <a:srgbClr val="990011"/>
-                </a:solidFill>
-                <a:latin typeface="Times New Roman" pitchFamily="34" charset="0"/>
-                <a:ea typeface="Times New Roman" pitchFamily="34" charset="-122"/>
-                <a:cs typeface="Times New Roman" pitchFamily="34" charset="-120"/>
-              </a:rPr>
-              <a:t>Activity 3</a:t>
-            </a:r>
-            <a:endParaRPr lang="en-US" sz="3600" dirty="0"/>
           </a:p>
         </p:txBody>
       </p:sp>
       <p:pic>
         <p:nvPicPr>
-          <p:cNvPr id="4" name="Image 0" descr="/home/claude/f4/img/v2/lsa_douala.jpg">    </p:cNvPr>
+          <p:cNvPr id="3" name="Image 0" descr="/home/claude/f4/img/minesec_sheet.png">    </p:cNvPr>
           <p:cNvPicPr>
             <a:picLocks noChangeAspect="1"/>
           </p:cNvPicPr>
@@ -10774,8 +11022,8 @@
         </p:blipFill>
         <p:spPr>
           <a:xfrm>
-            <a:off x="2246610" y="1783080"/>
-            <a:ext cx="7698475" cy="4270248"/>
+            <a:off x="0" y="658368"/>
+            <a:ext cx="5120640" cy="5833872"/>
           </a:xfrm>
           <a:prstGeom prst="rect">
             <a:avLst/>
@@ -10784,14 +11032,14 @@
       </p:pic>
       <p:sp>
         <p:nvSpPr>
-          <p:cNvPr id="5" name="Text 2"/>
+          <p:cNvPr id="4" name="Text 1"/>
           <p:cNvSpPr/>
           <p:nvPr/>
         </p:nvSpPr>
         <p:spPr>
           <a:xfrm>
-            <a:off x="457200" y="6089904"/>
-            <a:ext cx="11277295" cy="347472"/>
+            <a:off x="5349240" y="1005840"/>
+            <a:ext cx="6522415" cy="731520"/>
           </a:xfrm>
           <a:prstGeom prst="rect">
             <a:avLst/>
@@ -10800,24 +11048,68 @@
           <a:ln/>
         </p:spPr>
         <p:txBody>
-          <a:bodyPr wrap="square" lIns="0" tIns="0" rIns="0" bIns="0" rtlCol="0" anchor="ctr"/>
+          <a:bodyPr wrap="square" lIns="0" tIns="0" rIns="0" bIns="0" rtlCol="0" anchor="ctr">
+            <a:normAutofit/>
+          </a:bodyPr>
           <a:lstStyle/>
           <a:p>
             <a:pPr algn="ctr" indent="0" marL="0">
               <a:buNone/>
             </a:pPr>
             <a:r>
-              <a:rPr lang="en-US" sz="1800" i="1" dirty="0">
-                <a:solidFill>
-                  <a:srgbClr val="555555"/>
+              <a:rPr lang="en-US" sz="3600" b="1" dirty="0">
+                <a:solidFill>
+                  <a:srgbClr val="990011"/>
                 </a:solidFill>
                 <a:latin typeface="Times New Roman" pitchFamily="34" charset="0"/>
                 <a:ea typeface="Times New Roman" pitchFamily="34" charset="-122"/>
                 <a:cs typeface="Times New Roman" pitchFamily="34" charset="-120"/>
               </a:rPr>
-              <a:t>Douala seen from above.</a:t>
-            </a:r>
-            <a:endParaRPr lang="en-US" sz="1800" dirty="0"/>
+              <a:t>Activity 2: Answer</a:t>
+            </a:r>
+            <a:endParaRPr lang="en-US" sz="3600" dirty="0"/>
+          </a:p>
+        </p:txBody>
+      </p:sp>
+      <p:sp>
+        <p:nvSpPr>
+          <p:cNvPr id="5" name="Text 2"/>
+          <p:cNvSpPr/>
+          <p:nvPr/>
+        </p:nvSpPr>
+        <p:spPr>
+          <a:xfrm>
+            <a:off x="5349240" y="1783080"/>
+            <a:ext cx="6522415" cy="4663440"/>
+          </a:xfrm>
+          <a:prstGeom prst="rect">
+            <a:avLst/>
+          </a:prstGeom>
+          <a:noFill/>
+          <a:ln/>
+        </p:spPr>
+        <p:txBody>
+          <a:bodyPr wrap="square" lIns="0" tIns="0" rIns="0" bIns="0" rtlCol="0" anchor="t"/>
+          <a:lstStyle/>
+          <a:p>
+            <a:pPr algn="l" indent="0" marL="0">
+              <a:spcAft>
+                <a:spcPts val="800"/>
+              </a:spcAft>
+              <a:buNone/>
+            </a:pPr>
+            <a:r>
+              <a:rPr lang="en-US" sz="4000" dirty="0">
+                <a:solidFill>
+                  <a:srgbClr val="111111"/>
+                </a:solidFill>
+                <a:latin typeface="Times New Roman" pitchFamily="34" charset="0"/>
+                <a:ea typeface="Times New Roman" pitchFamily="34" charset="-122"/>
+                <a:cs typeface="Times New Roman" pitchFamily="34" charset="-120"/>
+              </a:rPr>
+              <a:t>The water evaporates and heats slowly.</a:t>
+            </a:r>
+            <a:endParaRPr lang="en-US" sz="4000" dirty="0"/>
           </a:p>
         </p:txBody>
       </p:sp>
@@ -10927,15 +11219,54 @@
                 <a:ea typeface="Calibri" pitchFamily="34" charset="-122"/>
                 <a:cs typeface="Calibri" pitchFamily="34" charset="-120"/>
               </a:rPr>
-              <a:t>2. URBAN CLIMATE: OTHER FEATURES</a:t>
+              <a:t>2. URBAN CLIMATE</a:t>
             </a:r>
             <a:endParaRPr lang="en-US" sz="1400" dirty="0"/>
+          </a:p>
+        </p:txBody>
+      </p:sp>
+      <p:sp>
+        <p:nvSpPr>
+          <p:cNvPr id="3" name="Text 1"/>
+          <p:cNvSpPr/>
+          <p:nvPr/>
+        </p:nvSpPr>
+        <p:spPr>
+          <a:xfrm>
+            <a:off x="457200" y="1005840"/>
+            <a:ext cx="11277295" cy="731520"/>
+          </a:xfrm>
+          <a:prstGeom prst="rect">
+            <a:avLst/>
+          </a:prstGeom>
+          <a:noFill/>
+          <a:ln/>
+        </p:spPr>
+        <p:txBody>
+          <a:bodyPr wrap="square" lIns="0" tIns="0" rIns="0" bIns="0" rtlCol="0" anchor="ctr"/>
+          <a:lstStyle/>
+          <a:p>
+            <a:pPr algn="ctr" indent="0" marL="0">
+              <a:buNone/>
+            </a:pPr>
+            <a:r>
+              <a:rPr lang="en-US" sz="3600" b="1" dirty="0">
+                <a:solidFill>
+                  <a:srgbClr val="990011"/>
+                </a:solidFill>
+                <a:latin typeface="Times New Roman" pitchFamily="34" charset="0"/>
+                <a:ea typeface="Times New Roman" pitchFamily="34" charset="-122"/>
+                <a:cs typeface="Times New Roman" pitchFamily="34" charset="-120"/>
+              </a:rPr>
+              <a:t>Activity 3</a:t>
+            </a:r>
+            <a:endParaRPr lang="en-US" sz="3600" dirty="0"/>
           </a:p>
         </p:txBody>
       </p:sp>
       <p:pic>
         <p:nvPicPr>
-          <p:cNvPr id="3" name="Image 0" descr="/home/claude/f4/img/minesec_sheet.png">    </p:cNvPr>
+          <p:cNvPr id="4" name="Image 0" descr="/home/claude/f4/img/v2/heat_island_big.png">    </p:cNvPr>
           <p:cNvPicPr>
             <a:picLocks noChangeAspect="1"/>
           </p:cNvPicPr>
@@ -10949,8 +11280,8 @@
         </p:blipFill>
         <p:spPr>
           <a:xfrm>
-            <a:off x="0" y="658368"/>
-            <a:ext cx="5120640" cy="5833872"/>
+            <a:off x="629930" y="1783080"/>
+            <a:ext cx="10931835" cy="4270248"/>
           </a:xfrm>
           <a:prstGeom prst="rect">
             <a:avLst/>
@@ -10959,14 +11290,14 @@
       </p:pic>
       <p:sp>
         <p:nvSpPr>
-          <p:cNvPr id="4" name="Text 1"/>
+          <p:cNvPr id="5" name="Text 2"/>
           <p:cNvSpPr/>
           <p:nvPr/>
         </p:nvSpPr>
         <p:spPr>
           <a:xfrm>
-            <a:off x="5349240" y="1005840"/>
-            <a:ext cx="6522415" cy="731520"/>
+            <a:off x="457200" y="6089904"/>
+            <a:ext cx="11277295" cy="347472"/>
           </a:xfrm>
           <a:prstGeom prst="rect">
             <a:avLst/>
@@ -10975,68 +11306,24 @@
           <a:ln/>
         </p:spPr>
         <p:txBody>
-          <a:bodyPr wrap="square" lIns="0" tIns="0" rIns="0" bIns="0" rtlCol="0" anchor="ctr">
-            <a:normAutofit/>
-          </a:bodyPr>
+          <a:bodyPr wrap="square" lIns="0" tIns="0" rIns="0" bIns="0" rtlCol="0" anchor="ctr"/>
           <a:lstStyle/>
           <a:p>
             <a:pPr algn="ctr" indent="0" marL="0">
               <a:buNone/>
             </a:pPr>
             <a:r>
-              <a:rPr lang="en-US" sz="3600" b="1" dirty="0">
-                <a:solidFill>
-                  <a:srgbClr val="990011"/>
+              <a:rPr lang="en-US" sz="1800" i="1" dirty="0">
+                <a:solidFill>
+                  <a:srgbClr val="555555"/>
                 </a:solidFill>
                 <a:latin typeface="Times New Roman" pitchFamily="34" charset="0"/>
                 <a:ea typeface="Times New Roman" pitchFamily="34" charset="-122"/>
                 <a:cs typeface="Times New Roman" pitchFamily="34" charset="-120"/>
               </a:rPr>
-              <a:t>Activity 3: Question</a:t>
-            </a:r>
-            <a:endParaRPr lang="en-US" sz="3600" dirty="0"/>
-          </a:p>
-        </p:txBody>
-      </p:sp>
-      <p:sp>
-        <p:nvSpPr>
-          <p:cNvPr id="5" name="Text 2"/>
-          <p:cNvSpPr/>
-          <p:nvPr/>
-        </p:nvSpPr>
-        <p:spPr>
-          <a:xfrm>
-            <a:off x="5349240" y="1783080"/>
-            <a:ext cx="6522415" cy="4663440"/>
-          </a:xfrm>
-          <a:prstGeom prst="rect">
-            <a:avLst/>
-          </a:prstGeom>
-          <a:noFill/>
-          <a:ln/>
-        </p:spPr>
-        <p:txBody>
-          <a:bodyPr wrap="square" lIns="0" tIns="0" rIns="0" bIns="0" rtlCol="0" anchor="t"/>
-          <a:lstStyle/>
-          <a:p>
-            <a:pPr algn="l" indent="0" marL="0">
-              <a:spcAft>
-                <a:spcPts val="800"/>
-              </a:spcAft>
-              <a:buNone/>
-            </a:pPr>
-            <a:r>
-              <a:rPr lang="en-US" sz="4000" dirty="0">
-                <a:solidFill>
-                  <a:srgbClr val="111111"/>
-                </a:solidFill>
-                <a:latin typeface="Times New Roman" pitchFamily="34" charset="0"/>
-                <a:ea typeface="Times New Roman" pitchFamily="34" charset="-122"/>
-                <a:cs typeface="Times New Roman" pitchFamily="34" charset="-120"/>
-              </a:rPr>
-              <a:t>Give two other features of urban climates.</a:t>
-            </a:r>
-            <a:endParaRPr lang="en-US" sz="4000" dirty="0"/>
+              <a:t>The urban heat island.</a:t>
+            </a:r>
+            <a:endParaRPr lang="en-US" sz="1800" dirty="0"/>
           </a:p>
         </p:txBody>
       </p:sp>
@@ -11146,7 +11433,7 @@
                 <a:ea typeface="Calibri" pitchFamily="34" charset="-122"/>
                 <a:cs typeface="Calibri" pitchFamily="34" charset="-120"/>
               </a:rPr>
-              <a:t>2. URBAN CLIMATE: OTHER FEATURES</a:t>
+              <a:t>2. URBAN CLIMATE</a:t>
             </a:r>
             <a:endParaRPr lang="en-US" sz="1400" dirty="0"/>
           </a:p>
@@ -11211,7 +11498,7 @@
                 <a:ea typeface="Times New Roman" pitchFamily="34" charset="-122"/>
                 <a:cs typeface="Times New Roman" pitchFamily="34" charset="-120"/>
               </a:rPr>
-              <a:t>Activity 3: Answer</a:t>
+              <a:t>Activity 3: Question</a:t>
             </a:r>
             <a:endParaRPr lang="en-US" sz="3600" dirty="0"/>
           </a:p>
@@ -11253,7 +11540,7 @@
                 <a:ea typeface="Times New Roman" pitchFamily="34" charset="-122"/>
                 <a:cs typeface="Times New Roman" pitchFamily="34" charset="-120"/>
               </a:rPr>
-              <a:t>More haze and pollution, weaker winds, sometimes more storms.</a:t>
+              <a:t>When is the urban heat island strongest?</a:t>
             </a:r>
             <a:endParaRPr lang="en-US" sz="4000" dirty="0"/>
           </a:p>
@@ -11365,54 +11652,15 @@
                 <a:ea typeface="Calibri" pitchFamily="34" charset="-122"/>
                 <a:cs typeface="Calibri" pitchFamily="34" charset="-120"/>
               </a:rPr>
-              <a:t>3. LAKESIDE CLIMATE</a:t>
+              <a:t>2. URBAN CLIMATE</a:t>
             </a:r>
             <a:endParaRPr lang="en-US" sz="1400" dirty="0"/>
-          </a:p>
-        </p:txBody>
-      </p:sp>
-      <p:sp>
-        <p:nvSpPr>
-          <p:cNvPr id="3" name="Text 1"/>
-          <p:cNvSpPr/>
-          <p:nvPr/>
-        </p:nvSpPr>
-        <p:spPr>
-          <a:xfrm>
-            <a:off x="457200" y="1005840"/>
-            <a:ext cx="11277295" cy="731520"/>
-          </a:xfrm>
-          <a:prstGeom prst="rect">
-            <a:avLst/>
-          </a:prstGeom>
-          <a:noFill/>
-          <a:ln/>
-        </p:spPr>
-        <p:txBody>
-          <a:bodyPr wrap="square" lIns="0" tIns="0" rIns="0" bIns="0" rtlCol="0" anchor="ctr"/>
-          <a:lstStyle/>
-          <a:p>
-            <a:pPr algn="ctr" indent="0" marL="0">
-              <a:buNone/>
-            </a:pPr>
-            <a:r>
-              <a:rPr lang="en-US" sz="3600" b="1" dirty="0">
-                <a:solidFill>
-                  <a:srgbClr val="990011"/>
-                </a:solidFill>
-                <a:latin typeface="Times New Roman" pitchFamily="34" charset="0"/>
-                <a:ea typeface="Times New Roman" pitchFamily="34" charset="-122"/>
-                <a:cs typeface="Times New Roman" pitchFamily="34" charset="-120"/>
-              </a:rPr>
-              <a:t>Activity 4</a:t>
-            </a:r>
-            <a:endParaRPr lang="en-US" sz="3600" dirty="0"/>
           </a:p>
         </p:txBody>
       </p:sp>
       <p:pic>
         <p:nvPicPr>
-          <p:cNvPr id="4" name="Image 0" descr="/home/claude/f4/img/v2/lsa_lake.jpg">    </p:cNvPr>
+          <p:cNvPr id="3" name="Image 0" descr="/home/claude/f4/img/minesec_sheet.png">    </p:cNvPr>
           <p:cNvPicPr>
             <a:picLocks noChangeAspect="1"/>
           </p:cNvPicPr>
@@ -11426,8 +11674,8 @@
         </p:blipFill>
         <p:spPr>
           <a:xfrm>
-            <a:off x="2246610" y="1783080"/>
-            <a:ext cx="7698475" cy="4270248"/>
+            <a:off x="0" y="658368"/>
+            <a:ext cx="5120640" cy="5833872"/>
           </a:xfrm>
           <a:prstGeom prst="rect">
             <a:avLst/>
@@ -11436,14 +11684,14 @@
       </p:pic>
       <p:sp>
         <p:nvSpPr>
-          <p:cNvPr id="5" name="Text 2"/>
+          <p:cNvPr id="4" name="Text 1"/>
           <p:cNvSpPr/>
           <p:nvPr/>
         </p:nvSpPr>
         <p:spPr>
           <a:xfrm>
-            <a:off x="457200" y="6089904"/>
-            <a:ext cx="11277295" cy="347472"/>
+            <a:off x="5349240" y="1005840"/>
+            <a:ext cx="6522415" cy="731520"/>
           </a:xfrm>
           <a:prstGeom prst="rect">
             <a:avLst/>
@@ -11452,24 +11700,68 @@
           <a:ln/>
         </p:spPr>
         <p:txBody>
-          <a:bodyPr wrap="square" lIns="0" tIns="0" rIns="0" bIns="0" rtlCol="0" anchor="ctr"/>
+          <a:bodyPr wrap="square" lIns="0" tIns="0" rIns="0" bIns="0" rtlCol="0" anchor="ctr">
+            <a:normAutofit/>
+          </a:bodyPr>
           <a:lstStyle/>
           <a:p>
             <a:pPr algn="ctr" indent="0" marL="0">
               <a:buNone/>
             </a:pPr>
             <a:r>
-              <a:rPr lang="en-US" sz="1800" i="1" dirty="0">
-                <a:solidFill>
-                  <a:srgbClr val="555555"/>
+              <a:rPr lang="en-US" sz="3600" b="1" dirty="0">
+                <a:solidFill>
+                  <a:srgbClr val="990011"/>
                 </a:solidFill>
                 <a:latin typeface="Times New Roman" pitchFamily="34" charset="0"/>
                 <a:ea typeface="Times New Roman" pitchFamily="34" charset="-122"/>
                 <a:cs typeface="Times New Roman" pitchFamily="34" charset="-120"/>
               </a:rPr>
-              <a:t>Lake Kamburu, Kenya.</a:t>
-            </a:r>
-            <a:endParaRPr lang="en-US" sz="1800" dirty="0"/>
+              <a:t>Activity 3: Answer</a:t>
+            </a:r>
+            <a:endParaRPr lang="en-US" sz="3600" dirty="0"/>
+          </a:p>
+        </p:txBody>
+      </p:sp>
+      <p:sp>
+        <p:nvSpPr>
+          <p:cNvPr id="5" name="Text 2"/>
+          <p:cNvSpPr/>
+          <p:nvPr/>
+        </p:nvSpPr>
+        <p:spPr>
+          <a:xfrm>
+            <a:off x="5349240" y="1783080"/>
+            <a:ext cx="6522415" cy="4663440"/>
+          </a:xfrm>
+          <a:prstGeom prst="rect">
+            <a:avLst/>
+          </a:prstGeom>
+          <a:noFill/>
+          <a:ln/>
+        </p:spPr>
+        <p:txBody>
+          <a:bodyPr wrap="square" lIns="0" tIns="0" rIns="0" bIns="0" rtlCol="0" anchor="t"/>
+          <a:lstStyle/>
+          <a:p>
+            <a:pPr algn="l" indent="0" marL="0">
+              <a:spcAft>
+                <a:spcPts val="800"/>
+              </a:spcAft>
+              <a:buNone/>
+            </a:pPr>
+            <a:r>
+              <a:rPr lang="en-US" sz="4000" dirty="0">
+                <a:solidFill>
+                  <a:srgbClr val="111111"/>
+                </a:solidFill>
+                <a:latin typeface="Times New Roman" pitchFamily="34" charset="0"/>
+                <a:ea typeface="Times New Roman" pitchFamily="34" charset="-122"/>
+                <a:cs typeface="Times New Roman" pitchFamily="34" charset="-120"/>
+              </a:rPr>
+              <a:t>At night, when buildings and roads release stored heat.</a:t>
+            </a:r>
+            <a:endParaRPr lang="en-US" sz="4000" dirty="0"/>
           </a:p>
         </p:txBody>
       </p:sp>
@@ -11579,15 +11871,54 @@
                 <a:ea typeface="Calibri" pitchFamily="34" charset="-122"/>
                 <a:cs typeface="Calibri" pitchFamily="34" charset="-120"/>
               </a:rPr>
-              <a:t>3. LAKESIDE CLIMATE</a:t>
+              <a:t>2. URBAN CLIMATE</a:t>
             </a:r>
             <a:endParaRPr lang="en-US" sz="1400" dirty="0"/>
+          </a:p>
+        </p:txBody>
+      </p:sp>
+      <p:sp>
+        <p:nvSpPr>
+          <p:cNvPr id="3" name="Text 1"/>
+          <p:cNvSpPr/>
+          <p:nvPr/>
+        </p:nvSpPr>
+        <p:spPr>
+          <a:xfrm>
+            <a:off x="457200" y="1005840"/>
+            <a:ext cx="11277295" cy="731520"/>
+          </a:xfrm>
+          <a:prstGeom prst="rect">
+            <a:avLst/>
+          </a:prstGeom>
+          <a:noFill/>
+          <a:ln/>
+        </p:spPr>
+        <p:txBody>
+          <a:bodyPr wrap="square" lIns="0" tIns="0" rIns="0" bIns="0" rtlCol="0" anchor="ctr"/>
+          <a:lstStyle/>
+          <a:p>
+            <a:pPr algn="ctr" indent="0" marL="0">
+              <a:buNone/>
+            </a:pPr>
+            <a:r>
+              <a:rPr lang="en-US" sz="3600" b="1" dirty="0">
+                <a:solidFill>
+                  <a:srgbClr val="990011"/>
+                </a:solidFill>
+                <a:latin typeface="Times New Roman" pitchFamily="34" charset="0"/>
+                <a:ea typeface="Times New Roman" pitchFamily="34" charset="-122"/>
+                <a:cs typeface="Times New Roman" pitchFamily="34" charset="-120"/>
+              </a:rPr>
+              <a:t>Activity 4</a:t>
+            </a:r>
+            <a:endParaRPr lang="en-US" sz="3600" dirty="0"/>
           </a:p>
         </p:txBody>
       </p:sp>
       <p:pic>
         <p:nvPicPr>
-          <p:cNvPr id="3" name="Image 0" descr="/home/claude/f4/img/minesec_sheet.png">    </p:cNvPr>
+          <p:cNvPr id="4" name="Image 0" descr="/home/claude/f4/img/v2/lsa_douala.jpg">    </p:cNvPr>
           <p:cNvPicPr>
             <a:picLocks noChangeAspect="1"/>
           </p:cNvPicPr>
@@ -11601,8 +11932,8 @@
         </p:blipFill>
         <p:spPr>
           <a:xfrm>
-            <a:off x="0" y="658368"/>
-            <a:ext cx="5120640" cy="5833872"/>
+            <a:off x="2246610" y="1783080"/>
+            <a:ext cx="7698475" cy="4270248"/>
           </a:xfrm>
           <a:prstGeom prst="rect">
             <a:avLst/>
@@ -11611,14 +11942,14 @@
       </p:pic>
       <p:sp>
         <p:nvSpPr>
-          <p:cNvPr id="4" name="Text 1"/>
+          <p:cNvPr id="5" name="Text 2"/>
           <p:cNvSpPr/>
           <p:nvPr/>
         </p:nvSpPr>
         <p:spPr>
           <a:xfrm>
-            <a:off x="5349240" y="1005840"/>
-            <a:ext cx="6522415" cy="731520"/>
+            <a:off x="457200" y="6089904"/>
+            <a:ext cx="11277295" cy="347472"/>
           </a:xfrm>
           <a:prstGeom prst="rect">
             <a:avLst/>
@@ -11627,68 +11958,24 @@
           <a:ln/>
         </p:spPr>
         <p:txBody>
-          <a:bodyPr wrap="square" lIns="0" tIns="0" rIns="0" bIns="0" rtlCol="0" anchor="ctr">
-            <a:normAutofit/>
-          </a:bodyPr>
+          <a:bodyPr wrap="square" lIns="0" tIns="0" rIns="0" bIns="0" rtlCol="0" anchor="ctr"/>
           <a:lstStyle/>
           <a:p>
             <a:pPr algn="ctr" indent="0" marL="0">
               <a:buNone/>
             </a:pPr>
             <a:r>
-              <a:rPr lang="en-US" sz="3600" b="1" dirty="0">
-                <a:solidFill>
-                  <a:srgbClr val="990011"/>
+              <a:rPr lang="en-US" sz="1800" i="1" dirty="0">
+                <a:solidFill>
+                  <a:srgbClr val="555555"/>
                 </a:solidFill>
                 <a:latin typeface="Times New Roman" pitchFamily="34" charset="0"/>
                 <a:ea typeface="Times New Roman" pitchFamily="34" charset="-122"/>
                 <a:cs typeface="Times New Roman" pitchFamily="34" charset="-120"/>
               </a:rPr>
-              <a:t>Activity 4: Question</a:t>
-            </a:r>
-            <a:endParaRPr lang="en-US" sz="3600" dirty="0"/>
-          </a:p>
-        </p:txBody>
-      </p:sp>
-      <p:sp>
-        <p:nvSpPr>
-          <p:cNvPr id="5" name="Text 2"/>
-          <p:cNvSpPr/>
-          <p:nvPr/>
-        </p:nvSpPr>
-        <p:spPr>
-          <a:xfrm>
-            <a:off x="5349240" y="1783080"/>
-            <a:ext cx="6522415" cy="4663440"/>
-          </a:xfrm>
-          <a:prstGeom prst="rect">
-            <a:avLst/>
-          </a:prstGeom>
-          <a:noFill/>
-          <a:ln/>
-        </p:spPr>
-        <p:txBody>
-          <a:bodyPr wrap="square" lIns="0" tIns="0" rIns="0" bIns="0" rtlCol="0" anchor="t"/>
-          <a:lstStyle/>
-          <a:p>
-            <a:pPr algn="l" indent="0" marL="0">
-              <a:spcAft>
-                <a:spcPts val="800"/>
-              </a:spcAft>
-              <a:buNone/>
-            </a:pPr>
-            <a:r>
-              <a:rPr lang="en-US" sz="4000" dirty="0">
-                <a:solidFill>
-                  <a:srgbClr val="111111"/>
-                </a:solidFill>
-                <a:latin typeface="Times New Roman" pitchFamily="34" charset="0"/>
-                <a:ea typeface="Times New Roman" pitchFamily="34" charset="-122"/>
-                <a:cs typeface="Times New Roman" pitchFamily="34" charset="-120"/>
-              </a:rPr>
-              <a:t>Why is it cooler near a lake in the afternoon?</a:t>
-            </a:r>
-            <a:endParaRPr lang="en-US" sz="4000" dirty="0"/>
+              <a:t>A large city.</a:t>
+            </a:r>
+            <a:endParaRPr lang="en-US" sz="1800" dirty="0"/>
           </a:p>
         </p:txBody>
       </p:sp>
@@ -12369,7 +12656,7 @@
                           <a:ea typeface="Calibri" pitchFamily="34" charset="-122"/>
                           <a:cs typeface="Calibri" pitchFamily="34" charset="-120"/>
                         </a:rPr>
-                        <a:t>Micro-climate, urban climate, heat island, lakeside climate, forest climate.</a:t>
+                        <a:t>Micro-climate, urban climate, urban heat island, anthropogenic heat, evapotranspiration, urban canyon, lakeside climate, forest climate.</a:t>
                       </a:r>
                       <a:endParaRPr lang="en-US" sz="1700" dirty="0">
                         <a:latin typeface="Calibri" charset="0"/>
@@ -12507,7 +12794,7 @@
                           <a:ea typeface="Calibri" pitchFamily="34" charset="-122"/>
                           <a:cs typeface="Calibri" pitchFamily="34" charset="-120"/>
                         </a:rPr>
-                        <a:t>Meaning and classification of micro-climates; characteristics and factors of urban climates.</a:t>
+                        <a:t>Meaning and classification of micro-climates; characteristics of urban climates; factors of the urban heat island.</a:t>
                       </a:r>
                       <a:endParaRPr lang="en-US" sz="1700" dirty="0">
                         <a:latin typeface="Calibri" charset="0"/>
@@ -12645,7 +12932,7 @@
                           <a:ea typeface="Calibri" pitchFamily="34" charset="-122"/>
                           <a:cs typeface="Calibri" pitchFamily="34" charset="-120"/>
                         </a:rPr>
-                        <a:t>Learners are able to describe micro-climates and explain the climate of towns.</a:t>
+                        <a:t>Learners are able to explain micro-climates, especially why the centre of Garoua is hotter than its outskirts, and propose ways to reduce urban heat.</a:t>
                       </a:r>
                       <a:endParaRPr lang="en-US" sz="1700" dirty="0">
                         <a:latin typeface="Calibri" charset="0"/>
@@ -12807,7 +13094,7 @@
                 <a:ea typeface="Calibri" pitchFamily="34" charset="-122"/>
                 <a:cs typeface="Calibri" pitchFamily="34" charset="-120"/>
               </a:rPr>
-              <a:t>3. LAKESIDE CLIMATE</a:t>
+              <a:t>2. URBAN CLIMATE</a:t>
             </a:r>
             <a:endParaRPr lang="en-US" sz="1400" dirty="0"/>
           </a:p>
@@ -12872,7 +13159,7 @@
                 <a:ea typeface="Times New Roman" pitchFamily="34" charset="-122"/>
                 <a:cs typeface="Times New Roman" pitchFamily="34" charset="-120"/>
               </a:rPr>
-              <a:t>Activity 4: Answer</a:t>
+              <a:t>Activity 4: Question</a:t>
             </a:r>
             <a:endParaRPr lang="en-US" sz="3600" dirty="0"/>
           </a:p>
@@ -12914,7 +13201,7 @@
                 <a:ea typeface="Times New Roman" pitchFamily="34" charset="-122"/>
                 <a:cs typeface="Times New Roman" pitchFamily="34" charset="-120"/>
               </a:rPr>
-              <a:t>The lake stays cooler than the land and gives a lake breeze.</a:t>
+              <a:t>Why is the air of a city drier?</a:t>
             </a:r>
             <a:endParaRPr lang="en-US" sz="4000" dirty="0"/>
           </a:p>
@@ -13026,54 +13313,15 @@
                 <a:ea typeface="Calibri" pitchFamily="34" charset="-122"/>
                 <a:cs typeface="Calibri" pitchFamily="34" charset="-120"/>
               </a:rPr>
-              <a:t>3. FOREST CLIMATE</a:t>
+              <a:t>2. URBAN CLIMATE</a:t>
             </a:r>
             <a:endParaRPr lang="en-US" sz="1400" dirty="0"/>
-          </a:p>
-        </p:txBody>
-      </p:sp>
-      <p:sp>
-        <p:nvSpPr>
-          <p:cNvPr id="3" name="Text 1"/>
-          <p:cNvSpPr/>
-          <p:nvPr/>
-        </p:nvSpPr>
-        <p:spPr>
-          <a:xfrm>
-            <a:off x="457200" y="1005840"/>
-            <a:ext cx="11277295" cy="731520"/>
-          </a:xfrm>
-          <a:prstGeom prst="rect">
-            <a:avLst/>
-          </a:prstGeom>
-          <a:noFill/>
-          <a:ln/>
-        </p:spPr>
-        <p:txBody>
-          <a:bodyPr wrap="square" lIns="0" tIns="0" rIns="0" bIns="0" rtlCol="0" anchor="ctr"/>
-          <a:lstStyle/>
-          <a:p>
-            <a:pPr algn="ctr" indent="0" marL="0">
-              <a:buNone/>
-            </a:pPr>
-            <a:r>
-              <a:rPr lang="en-US" sz="3600" b="1" dirty="0">
-                <a:solidFill>
-                  <a:srgbClr val="990011"/>
-                </a:solidFill>
-                <a:latin typeface="Times New Roman" pitchFamily="34" charset="0"/>
-                <a:ea typeface="Times New Roman" pitchFamily="34" charset="-122"/>
-                <a:cs typeface="Times New Roman" pitchFamily="34" charset="-120"/>
-              </a:rPr>
-              <a:t>Activity 5</a:t>
-            </a:r>
-            <a:endParaRPr lang="en-US" sz="3600" dirty="0"/>
           </a:p>
         </p:txBody>
       </p:sp>
       <p:pic>
         <p:nvPicPr>
-          <p:cNvPr id="4" name="Image 0" descr="/home/claude/f4/img/v2/f2t_rainforest.jpg">    </p:cNvPr>
+          <p:cNvPr id="3" name="Image 0" descr="/home/claude/f4/img/minesec_sheet.png">    </p:cNvPr>
           <p:cNvPicPr>
             <a:picLocks noChangeAspect="1"/>
           </p:cNvPicPr>
@@ -13087,8 +13335,8 @@
         </p:blipFill>
         <p:spPr>
           <a:xfrm>
-            <a:off x="2246610" y="1783080"/>
-            <a:ext cx="7698475" cy="4270248"/>
+            <a:off x="0" y="658368"/>
+            <a:ext cx="5120640" cy="5833872"/>
           </a:xfrm>
           <a:prstGeom prst="rect">
             <a:avLst/>
@@ -13097,14 +13345,14 @@
       </p:pic>
       <p:sp>
         <p:nvSpPr>
-          <p:cNvPr id="5" name="Text 2"/>
+          <p:cNvPr id="4" name="Text 1"/>
           <p:cNvSpPr/>
           <p:nvPr/>
         </p:nvSpPr>
         <p:spPr>
           <a:xfrm>
-            <a:off x="457200" y="6089904"/>
-            <a:ext cx="11277295" cy="347472"/>
+            <a:off x="5349240" y="1005840"/>
+            <a:ext cx="6522415" cy="731520"/>
           </a:xfrm>
           <a:prstGeom prst="rect">
             <a:avLst/>
@@ -13113,24 +13361,68 @@
           <a:ln/>
         </p:spPr>
         <p:txBody>
-          <a:bodyPr wrap="square" lIns="0" tIns="0" rIns="0" bIns="0" rtlCol="0" anchor="ctr"/>
+          <a:bodyPr wrap="square" lIns="0" tIns="0" rIns="0" bIns="0" rtlCol="0" anchor="ctr">
+            <a:normAutofit/>
+          </a:bodyPr>
           <a:lstStyle/>
           <a:p>
             <a:pPr algn="ctr" indent="0" marL="0">
               <a:buNone/>
             </a:pPr>
             <a:r>
-              <a:rPr lang="en-US" sz="1800" i="1" dirty="0">
-                <a:solidFill>
-                  <a:srgbClr val="555555"/>
+              <a:rPr lang="en-US" sz="3600" b="1" dirty="0">
+                <a:solidFill>
+                  <a:srgbClr val="990011"/>
                 </a:solidFill>
                 <a:latin typeface="Times New Roman" pitchFamily="34" charset="0"/>
                 <a:ea typeface="Times New Roman" pitchFamily="34" charset="-122"/>
                 <a:cs typeface="Times New Roman" pitchFamily="34" charset="-120"/>
               </a:rPr>
-              <a:t>Inside an equatorial forest.</a:t>
-            </a:r>
-            <a:endParaRPr lang="en-US" sz="1800" dirty="0"/>
+              <a:t>Activity 4: Answer</a:t>
+            </a:r>
+            <a:endParaRPr lang="en-US" sz="3600" dirty="0"/>
+          </a:p>
+        </p:txBody>
+      </p:sp>
+      <p:sp>
+        <p:nvSpPr>
+          <p:cNvPr id="5" name="Text 2"/>
+          <p:cNvSpPr/>
+          <p:nvPr/>
+        </p:nvSpPr>
+        <p:spPr>
+          <a:xfrm>
+            <a:off x="5349240" y="1783080"/>
+            <a:ext cx="6522415" cy="4663440"/>
+          </a:xfrm>
+          <a:prstGeom prst="rect">
+            <a:avLst/>
+          </a:prstGeom>
+          <a:noFill/>
+          <a:ln/>
+        </p:spPr>
+        <p:txBody>
+          <a:bodyPr wrap="square" lIns="0" tIns="0" rIns="0" bIns="0" rtlCol="0" anchor="t"/>
+          <a:lstStyle/>
+          <a:p>
+            <a:pPr algn="l" indent="0" marL="0">
+              <a:spcAft>
+                <a:spcPts val="800"/>
+              </a:spcAft>
+              <a:buNone/>
+            </a:pPr>
+            <a:r>
+              <a:rPr lang="en-US" sz="4000" dirty="0">
+                <a:solidFill>
+                  <a:srgbClr val="111111"/>
+                </a:solidFill>
+                <a:latin typeface="Times New Roman" pitchFamily="34" charset="0"/>
+                <a:ea typeface="Times New Roman" pitchFamily="34" charset="-122"/>
+                <a:cs typeface="Times New Roman" pitchFamily="34" charset="-120"/>
+              </a:rPr>
+              <a:t>There are fewer plants and less open water, so less evapotranspiration.</a:t>
+            </a:r>
+            <a:endParaRPr lang="en-US" sz="4000" dirty="0"/>
           </a:p>
         </p:txBody>
       </p:sp>
@@ -13240,15 +13532,54 @@
                 <a:ea typeface="Calibri" pitchFamily="34" charset="-122"/>
                 <a:cs typeface="Calibri" pitchFamily="34" charset="-120"/>
               </a:rPr>
-              <a:t>3. FOREST CLIMATE</a:t>
+              <a:t>3. FACTORS</a:t>
             </a:r>
             <a:endParaRPr lang="en-US" sz="1400" dirty="0"/>
+          </a:p>
+        </p:txBody>
+      </p:sp>
+      <p:sp>
+        <p:nvSpPr>
+          <p:cNvPr id="3" name="Text 1"/>
+          <p:cNvSpPr/>
+          <p:nvPr/>
+        </p:nvSpPr>
+        <p:spPr>
+          <a:xfrm>
+            <a:off x="457200" y="1005840"/>
+            <a:ext cx="11277295" cy="731520"/>
+          </a:xfrm>
+          <a:prstGeom prst="rect">
+            <a:avLst/>
+          </a:prstGeom>
+          <a:noFill/>
+          <a:ln/>
+        </p:spPr>
+        <p:txBody>
+          <a:bodyPr wrap="square" lIns="0" tIns="0" rIns="0" bIns="0" rtlCol="0" anchor="ctr"/>
+          <a:lstStyle/>
+          <a:p>
+            <a:pPr algn="ctr" indent="0" marL="0">
+              <a:buNone/>
+            </a:pPr>
+            <a:r>
+              <a:rPr lang="en-US" sz="3600" b="1" dirty="0">
+                <a:solidFill>
+                  <a:srgbClr val="990011"/>
+                </a:solidFill>
+                <a:latin typeface="Times New Roman" pitchFamily="34" charset="0"/>
+                <a:ea typeface="Times New Roman" pitchFamily="34" charset="-122"/>
+                <a:cs typeface="Times New Roman" pitchFamily="34" charset="-120"/>
+              </a:rPr>
+              <a:t>Activity 5</a:t>
+            </a:r>
+            <a:endParaRPr lang="en-US" sz="3600" dirty="0"/>
           </a:p>
         </p:txBody>
       </p:sp>
       <p:pic>
         <p:nvPicPr>
-          <p:cNvPr id="3" name="Image 0" descr="/home/claude/f4/img/minesec_sheet.png">    </p:cNvPr>
+          <p:cNvPr id="4" name="Image 0" descr="/home/claude/f4/img/v2/f2t_rainforest.jpg">    </p:cNvPr>
           <p:cNvPicPr>
             <a:picLocks noChangeAspect="1"/>
           </p:cNvPicPr>
@@ -13262,8 +13593,8 @@
         </p:blipFill>
         <p:spPr>
           <a:xfrm>
-            <a:off x="0" y="658368"/>
-            <a:ext cx="5120640" cy="5833872"/>
+            <a:off x="2246610" y="1783080"/>
+            <a:ext cx="7698475" cy="4270248"/>
           </a:xfrm>
           <a:prstGeom prst="rect">
             <a:avLst/>
@@ -13272,14 +13603,14 @@
       </p:pic>
       <p:sp>
         <p:nvSpPr>
-          <p:cNvPr id="4" name="Text 1"/>
+          <p:cNvPr id="5" name="Text 2"/>
           <p:cNvSpPr/>
           <p:nvPr/>
         </p:nvSpPr>
         <p:spPr>
           <a:xfrm>
-            <a:off x="5349240" y="1005840"/>
-            <a:ext cx="6522415" cy="731520"/>
+            <a:off x="457200" y="6089904"/>
+            <a:ext cx="11277295" cy="347472"/>
           </a:xfrm>
           <a:prstGeom prst="rect">
             <a:avLst/>
@@ -13288,68 +13619,24 @@
           <a:ln/>
         </p:spPr>
         <p:txBody>
-          <a:bodyPr wrap="square" lIns="0" tIns="0" rIns="0" bIns="0" rtlCol="0" anchor="ctr">
-            <a:normAutofit/>
-          </a:bodyPr>
+          <a:bodyPr wrap="square" lIns="0" tIns="0" rIns="0" bIns="0" rtlCol="0" anchor="ctr"/>
           <a:lstStyle/>
           <a:p>
             <a:pPr algn="ctr" indent="0" marL="0">
               <a:buNone/>
             </a:pPr>
             <a:r>
-              <a:rPr lang="en-US" sz="3600" b="1" dirty="0">
-                <a:solidFill>
-                  <a:srgbClr val="990011"/>
+              <a:rPr lang="en-US" sz="1800" i="1" dirty="0">
+                <a:solidFill>
+                  <a:srgbClr val="555555"/>
                 </a:solidFill>
                 <a:latin typeface="Times New Roman" pitchFamily="34" charset="0"/>
                 <a:ea typeface="Times New Roman" pitchFamily="34" charset="-122"/>
                 <a:cs typeface="Times New Roman" pitchFamily="34" charset="-120"/>
               </a:rPr>
-              <a:t>Activity 5: Question</a:t>
-            </a:r>
-            <a:endParaRPr lang="en-US" sz="3600" dirty="0"/>
-          </a:p>
-        </p:txBody>
-      </p:sp>
-      <p:sp>
-        <p:nvSpPr>
-          <p:cNvPr id="5" name="Text 2"/>
-          <p:cNvSpPr/>
-          <p:nvPr/>
-        </p:nvSpPr>
-        <p:spPr>
-          <a:xfrm>
-            <a:off x="5349240" y="1783080"/>
-            <a:ext cx="6522415" cy="4663440"/>
-          </a:xfrm>
-          <a:prstGeom prst="rect">
-            <a:avLst/>
-          </a:prstGeom>
-          <a:noFill/>
-          <a:ln/>
-        </p:spPr>
-        <p:txBody>
-          <a:bodyPr wrap="square" lIns="0" tIns="0" rIns="0" bIns="0" rtlCol="0" anchor="t"/>
-          <a:lstStyle/>
-          <a:p>
-            <a:pPr algn="l" indent="0" marL="0">
-              <a:spcAft>
-                <a:spcPts val="800"/>
-              </a:spcAft>
-              <a:buNone/>
-            </a:pPr>
-            <a:r>
-              <a:rPr lang="en-US" sz="4000" dirty="0">
-                <a:solidFill>
-                  <a:srgbClr val="111111"/>
-                </a:solidFill>
-                <a:latin typeface="Times New Roman" pitchFamily="34" charset="0"/>
-                <a:ea typeface="Times New Roman" pitchFamily="34" charset="-122"/>
-                <a:cs typeface="Times New Roman" pitchFamily="34" charset="-120"/>
-              </a:rPr>
-              <a:t>How is the climate inside a forest different?</a:t>
-            </a:r>
-            <a:endParaRPr lang="en-US" sz="4000" dirty="0"/>
+              <a:t>A forest.</a:t>
+            </a:r>
+            <a:endParaRPr lang="en-US" sz="1800" dirty="0"/>
           </a:p>
         </p:txBody>
       </p:sp>
@@ -13459,7 +13746,7 @@
                 <a:ea typeface="Calibri" pitchFamily="34" charset="-122"/>
                 <a:cs typeface="Calibri" pitchFamily="34" charset="-120"/>
               </a:rPr>
-              <a:t>3. FOREST CLIMATE</a:t>
+              <a:t>3. FACTORS</a:t>
             </a:r>
             <a:endParaRPr lang="en-US" sz="1400" dirty="0"/>
           </a:p>
@@ -13524,7 +13811,7 @@
                 <a:ea typeface="Times New Roman" pitchFamily="34" charset="-122"/>
                 <a:cs typeface="Times New Roman" pitchFamily="34" charset="-120"/>
               </a:rPr>
-              <a:t>Activity 5: Answer</a:t>
+              <a:t>Activity 5: Question</a:t>
             </a:r>
             <a:endParaRPr lang="en-US" sz="3600" dirty="0"/>
           </a:p>
@@ -13566,7 +13853,7 @@
                 <a:ea typeface="Times New Roman" pitchFamily="34" charset="-122"/>
                 <a:cs typeface="Times New Roman" pitchFamily="34" charset="-120"/>
               </a:rPr>
-              <a:t>It is shady, cooler by day, more humid and calm.</a:t>
+              <a:t>Why is it cooler under trees?</a:t>
             </a:r>
             <a:endParaRPr lang="en-US" sz="4000" dirty="0"/>
           </a:p>
@@ -13678,7 +13965,7 @@
                 <a:ea typeface="Calibri" pitchFamily="34" charset="-122"/>
                 <a:cs typeface="Calibri" pitchFamily="34" charset="-120"/>
               </a:rPr>
-              <a:t>BOARD SUMMARY</a:t>
+              <a:t>3. FACTORS</a:t>
             </a:r>
             <a:endParaRPr lang="en-US" sz="1400" dirty="0"/>
           </a:p>
@@ -13743,7 +14030,7 @@
                 <a:ea typeface="Times New Roman" pitchFamily="34" charset="-122"/>
                 <a:cs typeface="Times New Roman" pitchFamily="34" charset="-120"/>
               </a:rPr>
-              <a:t>Board Summary</a:t>
+              <a:t>Activity 5: Answer</a:t>
             </a:r>
             <a:endParaRPr lang="en-US" sz="3600" dirty="0"/>
           </a:p>
@@ -13777,7 +14064,7 @@
               <a:buNone/>
             </a:pPr>
             <a:r>
-              <a:rPr lang="en-US" sz="4000" b="1" dirty="0">
+              <a:rPr lang="en-US" sz="4000" dirty="0">
                 <a:solidFill>
                   <a:srgbClr val="111111"/>
                 </a:solidFill>
@@ -13785,47 +14072,7 @@
                 <a:ea typeface="Times New Roman" pitchFamily="34" charset="-122"/>
                 <a:cs typeface="Times New Roman" pitchFamily="34" charset="-120"/>
               </a:rPr>
-              <a:t>Topic: Climates</a:t>
-            </a:r>
-            <a:endParaRPr lang="en-US" sz="4000" dirty="0"/>
-          </a:p>
-          <a:p>
-            <a:pPr algn="l" indent="0" marL="0">
-              <a:spcAft>
-                <a:spcPts val="800"/>
-              </a:spcAft>
-              <a:buNone/>
-            </a:pPr>
-            <a:r>
-              <a:rPr lang="en-US" sz="4000" b="1" dirty="0">
-                <a:solidFill>
-                  <a:srgbClr val="111111"/>
-                </a:solidFill>
-                <a:latin typeface="Times New Roman" pitchFamily="34" charset="0"/>
-                <a:ea typeface="Times New Roman" pitchFamily="34" charset="-122"/>
-                <a:cs typeface="Times New Roman" pitchFamily="34" charset="-120"/>
-              </a:rPr>
-              <a:t>Sub-topic: Concept of Micro-climate</a:t>
-            </a:r>
-            <a:endParaRPr lang="en-US" sz="4000" dirty="0"/>
-          </a:p>
-          <a:p>
-            <a:pPr algn="l" indent="0" marL="0">
-              <a:spcAft>
-                <a:spcPts val="800"/>
-              </a:spcAft>
-              <a:buNone/>
-            </a:pPr>
-            <a:r>
-              <a:rPr lang="en-US" sz="4000" b="1" dirty="0">
-                <a:solidFill>
-                  <a:srgbClr val="990011"/>
-                </a:solidFill>
-                <a:latin typeface="Times New Roman" pitchFamily="34" charset="0"/>
-                <a:ea typeface="Times New Roman" pitchFamily="34" charset="-122"/>
-                <a:cs typeface="Times New Roman" pitchFamily="34" charset="-120"/>
-              </a:rPr>
-              <a:t>Lesson 20: Micro-climates</a:t>
+              <a:t>Trees give shade and cool the air by transpiration.</a:t>
             </a:r>
             <a:endParaRPr lang="en-US" sz="4000" dirty="0"/>
           </a:p>
@@ -14002,7 +14249,7 @@
                 <a:ea typeface="Times New Roman" pitchFamily="34" charset="-122"/>
                 <a:cs typeface="Times New Roman" pitchFamily="34" charset="-120"/>
               </a:rPr>
-              <a:t>1. Meaning and Classification of Micro-climates</a:t>
+              <a:t>Board Summary</a:t>
             </a:r>
             <a:endParaRPr lang="en-US" sz="3600" dirty="0"/>
           </a:p>
@@ -14036,7 +14283,7 @@
               <a:buNone/>
             </a:pPr>
             <a:r>
-              <a:rPr lang="en-US" sz="4000" i="1" dirty="0">
+              <a:rPr lang="en-US" sz="4000" b="1" dirty="0">
                 <a:solidFill>
                   <a:srgbClr val="111111"/>
                 </a:solidFill>
@@ -14044,7 +14291,7 @@
                 <a:ea typeface="Times New Roman" pitchFamily="34" charset="-122"/>
                 <a:cs typeface="Times New Roman" pitchFamily="34" charset="-120"/>
               </a:rPr>
-              <a:t>Micro-climates can be understood as follows:</a:t>
+              <a:t>Topic: Climates</a:t>
             </a:r>
             <a:endParaRPr lang="en-US" sz="4000" dirty="0"/>
           </a:p>
@@ -14064,8 +14311,11 @@
                 <a:ea typeface="Times New Roman" pitchFamily="34" charset="-122"/>
                 <a:cs typeface="Times New Roman" pitchFamily="34" charset="-120"/>
               </a:rPr>
-              <a:t>Micro-climate: </a:t>
-            </a:r>
+              <a:t>Sub-topic: Concept of Micro-climate</a:t>
+            </a:r>
+            <a:endParaRPr lang="en-US" sz="4000" dirty="0"/>
+          </a:p>
+          <a:p>
             <a:pPr algn="l" indent="0" marL="0">
               <a:spcAft>
                 <a:spcPts val="800"/>
@@ -14073,15 +14323,15 @@
               <a:buNone/>
             </a:pPr>
             <a:r>
-              <a:rPr lang="en-US" sz="4000" dirty="0">
-                <a:solidFill>
-                  <a:srgbClr val="111111"/>
+              <a:rPr lang="en-US" sz="4000" b="1" dirty="0">
+                <a:solidFill>
+                  <a:srgbClr val="990011"/>
                 </a:solidFill>
                 <a:latin typeface="Times New Roman" pitchFamily="34" charset="0"/>
                 <a:ea typeface="Times New Roman" pitchFamily="34" charset="-122"/>
                 <a:cs typeface="Times New Roman" pitchFamily="34" charset="-120"/>
               </a:rPr>
-              <a:t>It is the climate of a small area, such as a town, a forest or a lakeside, which differs from the climate around it.</a:t>
+              <a:t>Lesson 20: Micro-climates</a:t>
             </a:r>
             <a:endParaRPr lang="en-US" sz="4000" dirty="0"/>
           </a:p>
@@ -14216,7 +14466,7 @@
         <p:spPr>
           <a:xfrm>
             <a:off x="0" y="658368"/>
-            <a:ext cx="2468880" cy="5833872"/>
+            <a:ext cx="5120640" cy="5833872"/>
           </a:xfrm>
           <a:prstGeom prst="rect">
             <a:avLst/>
@@ -14231,8 +14481,8 @@
         </p:nvSpPr>
         <p:spPr>
           <a:xfrm>
-            <a:off x="2697480" y="1005840"/>
-            <a:ext cx="9174175" cy="731520"/>
+            <a:off x="5349240" y="1005840"/>
+            <a:ext cx="6522415" cy="731520"/>
           </a:xfrm>
           <a:prstGeom prst="rect">
             <a:avLst/>
@@ -14258,7 +14508,7 @@
                 <a:ea typeface="Times New Roman" pitchFamily="34" charset="-122"/>
                 <a:cs typeface="Times New Roman" pitchFamily="34" charset="-120"/>
               </a:rPr>
-              <a:t>1. Meaning and Classification of Micro-climates (continued)</a:t>
+              <a:t>DEFINITIONS</a:t>
             </a:r>
             <a:endParaRPr lang="en-US" sz="3600" dirty="0"/>
           </a:p>
@@ -14272,8 +14522,8 @@
         </p:nvSpPr>
         <p:spPr>
           <a:xfrm>
-            <a:off x="2697480" y="1783080"/>
-            <a:ext cx="9174175" cy="4663440"/>
+            <a:off x="5349240" y="1783080"/>
+            <a:ext cx="6522415" cy="4663440"/>
           </a:xfrm>
           <a:prstGeom prst="rect">
             <a:avLst/>
@@ -14292,7 +14542,7 @@
               <a:buNone/>
             </a:pPr>
             <a:r>
-              <a:rPr lang="en-US" sz="4000" b="1" dirty="0">
+              <a:rPr lang="en-US" sz="4000" i="1" dirty="0">
                 <a:solidFill>
                   <a:srgbClr val="111111"/>
                 </a:solidFill>
@@ -14300,8 +14550,11 @@
                 <a:ea typeface="Times New Roman" pitchFamily="34" charset="-122"/>
                 <a:cs typeface="Times New Roman" pitchFamily="34" charset="-120"/>
               </a:rPr>
-              <a:t>Meso-climate: </a:t>
-            </a:r>
+              <a:t>The key terms of this lesson are defined as follows:</a:t>
+            </a:r>
+            <a:endParaRPr lang="en-US" sz="4000" dirty="0"/>
+          </a:p>
+          <a:p>
             <a:pPr algn="l" indent="0" marL="0">
               <a:spcAft>
                 <a:spcPts val="800"/>
@@ -14309,7 +14562,7 @@
               <a:buNone/>
             </a:pPr>
             <a:r>
-              <a:rPr lang="en-US" sz="4000" dirty="0">
+              <a:rPr lang="en-US" sz="4000" b="1" dirty="0">
                 <a:solidFill>
                   <a:srgbClr val="111111"/>
                 </a:solidFill>
@@ -14317,11 +14570,8 @@
                 <a:ea typeface="Times New Roman" pitchFamily="34" charset="-122"/>
                 <a:cs typeface="Times New Roman" pitchFamily="34" charset="-120"/>
               </a:rPr>
-              <a:t>It is the climate of a medium-sized area, such as a valley or a mountain range.</a:t>
-            </a:r>
-            <a:endParaRPr lang="en-US" sz="4000" dirty="0"/>
-          </a:p>
-          <a:p>
+              <a:t>Micro-climate: </a:t>
+            </a:r>
             <a:pPr algn="l" indent="0" marL="0">
               <a:spcAft>
                 <a:spcPts val="800"/>
@@ -14329,7 +14579,7 @@
               <a:buNone/>
             </a:pPr>
             <a:r>
-              <a:rPr lang="en-US" sz="4000" b="1" dirty="0">
+              <a:rPr lang="en-US" sz="4000" dirty="0">
                 <a:solidFill>
                   <a:srgbClr val="111111"/>
                 </a:solidFill>
@@ -14337,24 +14587,7 @@
                 <a:ea typeface="Times New Roman" pitchFamily="34" charset="-122"/>
                 <a:cs typeface="Times New Roman" pitchFamily="34" charset="-120"/>
               </a:rPr>
-              <a:t>Classification: </a:t>
-            </a:r>
-            <a:pPr algn="l" indent="0" marL="0">
-              <a:spcAft>
-                <a:spcPts val="800"/>
-              </a:spcAft>
-              <a:buNone/>
-            </a:pPr>
-            <a:r>
-              <a:rPr lang="en-US" sz="4000" dirty="0">
-                <a:solidFill>
-                  <a:srgbClr val="111111"/>
-                </a:solidFill>
-                <a:latin typeface="Times New Roman" pitchFamily="34" charset="0"/>
-                <a:ea typeface="Times New Roman" pitchFamily="34" charset="-122"/>
-                <a:cs typeface="Times New Roman" pitchFamily="34" charset="-120"/>
-              </a:rPr>
-              <a:t>Micro-climates include urban, mountain, lakeside and forest climates. They are caused by local surfaces and relief.</a:t>
+              <a:t>It is the climate of a small area that differs from the climate of the surrounding region.</a:t>
             </a:r>
             <a:endParaRPr lang="en-US" sz="4000" dirty="0"/>
           </a:p>
@@ -14489,7 +14722,7 @@
         <p:spPr>
           <a:xfrm>
             <a:off x="0" y="658368"/>
-            <a:ext cx="3840480" cy="5833872"/>
+            <a:ext cx="2468880" cy="5833872"/>
           </a:xfrm>
           <a:prstGeom prst="rect">
             <a:avLst/>
@@ -14504,8 +14737,8 @@
         </p:nvSpPr>
         <p:spPr>
           <a:xfrm>
-            <a:off x="4069080" y="1005840"/>
-            <a:ext cx="7802575" cy="731520"/>
+            <a:off x="2697480" y="1005840"/>
+            <a:ext cx="9174175" cy="731520"/>
           </a:xfrm>
           <a:prstGeom prst="rect">
             <a:avLst/>
@@ -14531,7 +14764,7 @@
                 <a:ea typeface="Times New Roman" pitchFamily="34" charset="-122"/>
                 <a:cs typeface="Times New Roman" pitchFamily="34" charset="-120"/>
               </a:rPr>
-              <a:t>2. Urban Climates</a:t>
+              <a:t>DEFINITIONS (continued)</a:t>
             </a:r>
             <a:endParaRPr lang="en-US" sz="3600" dirty="0"/>
           </a:p>
@@ -14545,8 +14778,8 @@
         </p:nvSpPr>
         <p:spPr>
           <a:xfrm>
-            <a:off x="4069080" y="1783080"/>
-            <a:ext cx="7802575" cy="4663440"/>
+            <a:off x="2697480" y="1783080"/>
+            <a:ext cx="9174175" cy="4663440"/>
           </a:xfrm>
           <a:prstGeom prst="rect">
             <a:avLst/>
@@ -14565,7 +14798,7 @@
               <a:buNone/>
             </a:pPr>
             <a:r>
-              <a:rPr lang="en-US" sz="4000" i="1" dirty="0">
+              <a:rPr lang="en-US" sz="4000" b="1" dirty="0">
                 <a:solidFill>
                   <a:srgbClr val="111111"/>
                 </a:solidFill>
@@ -14573,11 +14806,8 @@
                 <a:ea typeface="Times New Roman" pitchFamily="34" charset="-122"/>
                 <a:cs typeface="Times New Roman" pitchFamily="34" charset="-120"/>
               </a:rPr>
-              <a:t>The characteristics of urban climates are:</a:t>
-            </a:r>
-            <a:endParaRPr lang="en-US" sz="4000" dirty="0"/>
-          </a:p>
-          <a:p>
+              <a:t>Urban heat island: </a:t>
+            </a:r>
             <a:pPr algn="l" indent="0" marL="0">
               <a:spcAft>
                 <a:spcPts val="800"/>
@@ -14585,7 +14815,7 @@
               <a:buNone/>
             </a:pPr>
             <a:r>
-              <a:rPr lang="en-US" sz="4000" b="1" dirty="0">
+              <a:rPr lang="en-US" sz="4000" dirty="0">
                 <a:solidFill>
                   <a:srgbClr val="111111"/>
                 </a:solidFill>
@@ -14593,8 +14823,11 @@
                 <a:ea typeface="Times New Roman" pitchFamily="34" charset="-122"/>
                 <a:cs typeface="Times New Roman" pitchFamily="34" charset="-120"/>
               </a:rPr>
-              <a:t>Higher temperatures: </a:t>
-            </a:r>
+              <a:t>It is the higher temperature of a town compared with the surrounding countryside.</a:t>
+            </a:r>
+            <a:endParaRPr lang="en-US" sz="4000" dirty="0"/>
+          </a:p>
+          <a:p>
             <a:pPr algn="l" indent="0" marL="0">
               <a:spcAft>
                 <a:spcPts val="800"/>
@@ -14602,7 +14835,7 @@
               <a:buNone/>
             </a:pPr>
             <a:r>
-              <a:rPr lang="en-US" sz="4000" dirty="0">
+              <a:rPr lang="en-US" sz="4000" b="1" dirty="0">
                 <a:solidFill>
                   <a:srgbClr val="111111"/>
                 </a:solidFill>
@@ -14610,7 +14843,24 @@
                 <a:ea typeface="Times New Roman" pitchFamily="34" charset="-122"/>
                 <a:cs typeface="Times New Roman" pitchFamily="34" charset="-120"/>
               </a:rPr>
-              <a:t>Towns are warmer than the countryside, especially at night; this is the urban heat island. The difference can reach 2–10 °C.</a:t>
+              <a:t>Anthropogenic heat: </a:t>
+            </a:r>
+            <a:pPr algn="l" indent="0" marL="0">
+              <a:spcAft>
+                <a:spcPts val="800"/>
+              </a:spcAft>
+              <a:buNone/>
+            </a:pPr>
+            <a:r>
+              <a:rPr lang="en-US" sz="4000" dirty="0">
+                <a:solidFill>
+                  <a:srgbClr val="111111"/>
+                </a:solidFill>
+                <a:latin typeface="Times New Roman" pitchFamily="34" charset="0"/>
+                <a:ea typeface="Times New Roman" pitchFamily="34" charset="-122"/>
+                <a:cs typeface="Times New Roman" pitchFamily="34" charset="-120"/>
+              </a:rPr>
+              <a:t>It is the heat released by human activities (vehicles, machines, air conditioners).</a:t>
             </a:r>
             <a:endParaRPr lang="en-US" sz="4000" dirty="0"/>
           </a:p>
@@ -14787,7 +15037,7 @@
                 <a:ea typeface="Times New Roman" pitchFamily="34" charset="-122"/>
                 <a:cs typeface="Times New Roman" pitchFamily="34" charset="-120"/>
               </a:rPr>
-              <a:t>2. Urban Climates (continued)</a:t>
+              <a:t>DEFINITIONS (continued)</a:t>
             </a:r>
             <a:endParaRPr lang="en-US" sz="3600" dirty="0"/>
           </a:p>
@@ -14829,7 +15079,7 @@
                 <a:ea typeface="Times New Roman" pitchFamily="34" charset="-122"/>
                 <a:cs typeface="Times New Roman" pitchFamily="34" charset="-120"/>
               </a:rPr>
-              <a:t>Humidity and rain: </a:t>
+              <a:t>Evapotranspiration: </a:t>
             </a:r>
             <a:pPr algn="l" indent="0" marL="0">
               <a:spcAft>
@@ -14846,7 +15096,7 @@
                 <a:ea typeface="Times New Roman" pitchFamily="34" charset="-122"/>
                 <a:cs typeface="Times New Roman" pitchFamily="34" charset="-120"/>
               </a:rPr>
-              <a:t>Relative humidity is lower because there are few plants and water drains away quickly. Convectional storms can be more frequent.</a:t>
+              <a:t>It is the combined loss of water by evaporation and by plant transpiration.</a:t>
             </a:r>
             <a:endParaRPr lang="en-US" sz="4000" dirty="0"/>
           </a:p>
@@ -14964,9 +15214,129 @@
           </a:p>
         </p:txBody>
       </p:sp>
+      <p:sp>
+        <p:nvSpPr>
+          <p:cNvPr id="3" name="Text 1"/>
+          <p:cNvSpPr/>
+          <p:nvPr/>
+        </p:nvSpPr>
+        <p:spPr>
+          <a:xfrm>
+            <a:off x="365760" y="1005840"/>
+            <a:ext cx="11460175" cy="731520"/>
+          </a:xfrm>
+          <a:prstGeom prst="rect">
+            <a:avLst/>
+          </a:prstGeom>
+          <a:noFill/>
+          <a:ln/>
+        </p:spPr>
+        <p:txBody>
+          <a:bodyPr wrap="square" lIns="0" tIns="0" rIns="0" bIns="0" rtlCol="0" anchor="ctr">
+            <a:normAutofit/>
+          </a:bodyPr>
+          <a:lstStyle/>
+          <a:p>
+            <a:pPr algn="ctr" indent="0" marL="0">
+              <a:buNone/>
+            </a:pPr>
+            <a:r>
+              <a:rPr lang="en-US" sz="3600" b="1" dirty="0">
+                <a:solidFill>
+                  <a:srgbClr val="990011"/>
+                </a:solidFill>
+                <a:latin typeface="Times New Roman" pitchFamily="34" charset="0"/>
+                <a:ea typeface="Times New Roman" pitchFamily="34" charset="-122"/>
+                <a:cs typeface="Times New Roman" pitchFamily="34" charset="-120"/>
+              </a:rPr>
+              <a:t>1. Meaning and Classification of Micro-climates</a:t>
+            </a:r>
+            <a:endParaRPr lang="en-US" sz="3600" dirty="0"/>
+          </a:p>
+        </p:txBody>
+      </p:sp>
+      <p:sp>
+        <p:nvSpPr>
+          <p:cNvPr id="4" name="Text 2"/>
+          <p:cNvSpPr/>
+          <p:nvPr/>
+        </p:nvSpPr>
+        <p:spPr>
+          <a:xfrm>
+            <a:off x="365760" y="1783080"/>
+            <a:ext cx="4846320" cy="4617720"/>
+          </a:xfrm>
+          <a:prstGeom prst="rect">
+            <a:avLst/>
+          </a:prstGeom>
+          <a:noFill/>
+          <a:ln/>
+        </p:spPr>
+        <p:txBody>
+          <a:bodyPr wrap="square" lIns="0" tIns="0" rIns="0" bIns="0" rtlCol="0" anchor="t"/>
+          <a:lstStyle/>
+          <a:p>
+            <a:pPr algn="l" indent="0" marL="0">
+              <a:spcAft>
+                <a:spcPts val="800"/>
+              </a:spcAft>
+              <a:buNone/>
+            </a:pPr>
+            <a:r>
+              <a:rPr lang="en-US" sz="3600" i="1" dirty="0">
+                <a:solidFill>
+                  <a:srgbClr val="111111"/>
+                </a:solidFill>
+                <a:latin typeface="Times New Roman" pitchFamily="34" charset="0"/>
+                <a:ea typeface="Times New Roman" pitchFamily="34" charset="-122"/>
+                <a:cs typeface="Times New Roman" pitchFamily="34" charset="-120"/>
+              </a:rPr>
+              <a:t>Micro-climates are classified as follows:</a:t>
+            </a:r>
+            <a:endParaRPr lang="en-US" sz="3600" dirty="0"/>
+          </a:p>
+          <a:p>
+            <a:pPr algn="l" indent="0" marL="0">
+              <a:spcAft>
+                <a:spcPts val="800"/>
+              </a:spcAft>
+              <a:buNone/>
+            </a:pPr>
+            <a:r>
+              <a:rPr lang="en-US" sz="3600" b="1" dirty="0">
+                <a:solidFill>
+                  <a:srgbClr val="111111"/>
+                </a:solidFill>
+                <a:latin typeface="Times New Roman" pitchFamily="34" charset="0"/>
+                <a:ea typeface="Times New Roman" pitchFamily="34" charset="-122"/>
+                <a:cs typeface="Times New Roman" pitchFamily="34" charset="-120"/>
+              </a:rPr>
+              <a:t>Urban climate: </a:t>
+            </a:r>
+            <a:pPr algn="l" indent="0" marL="0">
+              <a:spcAft>
+                <a:spcPts val="800"/>
+              </a:spcAft>
+              <a:buNone/>
+            </a:pPr>
+            <a:r>
+              <a:rPr lang="en-US" sz="3600" dirty="0">
+                <a:solidFill>
+                  <a:srgbClr val="111111"/>
+                </a:solidFill>
+                <a:latin typeface="Times New Roman" pitchFamily="34" charset="0"/>
+                <a:ea typeface="Times New Roman" pitchFamily="34" charset="-122"/>
+                <a:cs typeface="Times New Roman" pitchFamily="34" charset="-120"/>
+              </a:rPr>
+              <a:t>The climate of a town, warmer, drier and more polluted than the countryside.</a:t>
+            </a:r>
+            <a:endParaRPr lang="en-US" sz="3600" dirty="0"/>
+          </a:p>
+        </p:txBody>
+      </p:sp>
       <p:pic>
         <p:nvPicPr>
-          <p:cNvPr id="3" name="Image 0" descr="/home/claude/f4/img/minesec_sheet.png">    </p:cNvPr>
+          <p:cNvPr id="5" name="Image 0" descr="/home/claude/f4/img/v2/clim2_micro_types.png">    </p:cNvPr>
           <p:cNvPicPr>
             <a:picLocks noChangeAspect="1"/>
           </p:cNvPicPr>
@@ -14980,8 +15350,8 @@
         </p:blipFill>
         <p:spPr>
           <a:xfrm>
-            <a:off x="0" y="658368"/>
-            <a:ext cx="5120640" cy="5833872"/>
+            <a:off x="5349240" y="2617506"/>
+            <a:ext cx="6659575" cy="2601397"/>
           </a:xfrm>
           <a:prstGeom prst="rect">
             <a:avLst/>
@@ -14990,14 +15360,14 @@
       </p:pic>
       <p:sp>
         <p:nvSpPr>
-          <p:cNvPr id="4" name="Text 1"/>
+          <p:cNvPr id="6" name="Text 3"/>
           <p:cNvSpPr/>
           <p:nvPr/>
         </p:nvSpPr>
         <p:spPr>
           <a:xfrm>
-            <a:off x="5349240" y="1005840"/>
-            <a:ext cx="6522415" cy="731520"/>
+            <a:off x="5349240" y="6089904"/>
+            <a:ext cx="6659575" cy="347472"/>
           </a:xfrm>
           <a:prstGeom prst="rect">
             <a:avLst/>
@@ -15006,85 +15376,24 @@
           <a:ln/>
         </p:spPr>
         <p:txBody>
-          <a:bodyPr wrap="square" lIns="0" tIns="0" rIns="0" bIns="0" rtlCol="0" anchor="ctr">
-            <a:normAutofit/>
-          </a:bodyPr>
+          <a:bodyPr wrap="square" lIns="0" tIns="0" rIns="0" bIns="0" rtlCol="0" anchor="ctr"/>
           <a:lstStyle/>
           <a:p>
             <a:pPr algn="ctr" indent="0" marL="0">
               <a:buNone/>
             </a:pPr>
             <a:r>
-              <a:rPr lang="en-US" sz="3600" b="1" dirty="0">
-                <a:solidFill>
-                  <a:srgbClr val="990011"/>
+              <a:rPr lang="en-US" sz="1600" i="1" dirty="0">
+                <a:solidFill>
+                  <a:srgbClr val="555555"/>
                 </a:solidFill>
                 <a:latin typeface="Times New Roman" pitchFamily="34" charset="0"/>
                 <a:ea typeface="Times New Roman" pitchFamily="34" charset="-122"/>
                 <a:cs typeface="Times New Roman" pitchFamily="34" charset="-120"/>
               </a:rPr>
-              <a:t>2. Urban Climates (continued)</a:t>
-            </a:r>
-            <a:endParaRPr lang="en-US" sz="3600" dirty="0"/>
-          </a:p>
-        </p:txBody>
-      </p:sp>
-      <p:sp>
-        <p:nvSpPr>
-          <p:cNvPr id="5" name="Text 2"/>
-          <p:cNvSpPr/>
-          <p:nvPr/>
-        </p:nvSpPr>
-        <p:spPr>
-          <a:xfrm>
-            <a:off x="5349240" y="1783080"/>
-            <a:ext cx="6522415" cy="4663440"/>
-          </a:xfrm>
-          <a:prstGeom prst="rect">
-            <a:avLst/>
-          </a:prstGeom>
-          <a:noFill/>
-          <a:ln/>
-        </p:spPr>
-        <p:txBody>
-          <a:bodyPr wrap="square" lIns="0" tIns="0" rIns="0" bIns="0" rtlCol="0" anchor="t"/>
-          <a:lstStyle/>
-          <a:p>
-            <a:pPr algn="l" indent="0" marL="0">
-              <a:spcAft>
-                <a:spcPts val="800"/>
-              </a:spcAft>
-              <a:buNone/>
-            </a:pPr>
-            <a:r>
-              <a:rPr lang="en-US" sz="4000" b="1" dirty="0">
-                <a:solidFill>
-                  <a:srgbClr val="111111"/>
-                </a:solidFill>
-                <a:latin typeface="Times New Roman" pitchFamily="34" charset="0"/>
-                <a:ea typeface="Times New Roman" pitchFamily="34" charset="-122"/>
-                <a:cs typeface="Times New Roman" pitchFamily="34" charset="-120"/>
-              </a:rPr>
-              <a:t>Winds and pollution: </a:t>
-            </a:r>
-            <a:pPr algn="l" indent="0" marL="0">
-              <a:spcAft>
-                <a:spcPts val="800"/>
-              </a:spcAft>
-              <a:buNone/>
-            </a:pPr>
-            <a:r>
-              <a:rPr lang="en-US" sz="4000" dirty="0">
-                <a:solidFill>
-                  <a:srgbClr val="111111"/>
-                </a:solidFill>
-                <a:latin typeface="Times New Roman" pitchFamily="34" charset="0"/>
-                <a:ea typeface="Times New Roman" pitchFamily="34" charset="-122"/>
-                <a:cs typeface="Times New Roman" pitchFamily="34" charset="-120"/>
-              </a:rPr>
-              <a:t>Buildings slow the wind but create strong gusts between tall buildings. Smoke and dust give more fog and smog.</a:t>
-            </a:r>
-            <a:endParaRPr lang="en-US" sz="4000" dirty="0"/>
+              <a:t>Illustration: types of micro-climates</a:t>
+            </a:r>
+            <a:endParaRPr lang="en-US" sz="1600" dirty="0"/>
           </a:p>
         </p:txBody>
       </p:sp>
@@ -15321,7 +15630,7 @@
                 <a:ea typeface="Times New Roman" pitchFamily="34" charset="-122"/>
                 <a:cs typeface="Times New Roman" pitchFamily="34" charset="-120"/>
               </a:rPr>
-              <a:t>Write five safety rules for a thunderstorm in your area.</a:t>
+              <a:t>Define a micro-climate.</a:t>
             </a:r>
             <a:endParaRPr lang="en-US" sz="4000" dirty="0"/>
           </a:p>
@@ -15439,48 +15748,9 @@
           </a:p>
         </p:txBody>
       </p:sp>
-      <p:sp>
-        <p:nvSpPr>
-          <p:cNvPr id="3" name="Text 1"/>
-          <p:cNvSpPr/>
-          <p:nvPr/>
-        </p:nvSpPr>
-        <p:spPr>
-          <a:xfrm>
-            <a:off x="457200" y="1005840"/>
-            <a:ext cx="11277295" cy="731520"/>
-          </a:xfrm>
-          <a:prstGeom prst="rect">
-            <a:avLst/>
-          </a:prstGeom>
-          <a:noFill/>
-          <a:ln/>
-        </p:spPr>
-        <p:txBody>
-          <a:bodyPr wrap="square" lIns="0" tIns="0" rIns="0" bIns="0" rtlCol="0" anchor="ctr"/>
-          <a:lstStyle/>
-          <a:p>
-            <a:pPr algn="ctr" indent="0" marL="0">
-              <a:buNone/>
-            </a:pPr>
-            <a:r>
-              <a:rPr lang="en-US" sz="3600" b="1" dirty="0">
-                <a:solidFill>
-                  <a:srgbClr val="990011"/>
-                </a:solidFill>
-                <a:latin typeface="Times New Roman" pitchFamily="34" charset="0"/>
-                <a:ea typeface="Times New Roman" pitchFamily="34" charset="-122"/>
-                <a:cs typeface="Times New Roman" pitchFamily="34" charset="-120"/>
-              </a:rPr>
-              <a:t>2. Urban Climates</a:t>
-            </a:r>
-            <a:endParaRPr lang="en-US" sz="3600" dirty="0"/>
-          </a:p>
-        </p:txBody>
-      </p:sp>
       <p:pic>
         <p:nvPicPr>
-          <p:cNvPr id="4" name="Image 0" descr="/home/claude/f4/img/v2/heat_island_big.png">    </p:cNvPr>
+          <p:cNvPr id="3" name="Image 0" descr="/home/claude/f4/img/minesec_sheet.png">    </p:cNvPr>
           <p:cNvPicPr>
             <a:picLocks noChangeAspect="1"/>
           </p:cNvPicPr>
@@ -15494,8 +15764,8 @@
         </p:blipFill>
         <p:spPr>
           <a:xfrm>
-            <a:off x="629930" y="1783080"/>
-            <a:ext cx="10931835" cy="4270248"/>
+            <a:off x="0" y="658368"/>
+            <a:ext cx="5120640" cy="5833872"/>
           </a:xfrm>
           <a:prstGeom prst="rect">
             <a:avLst/>
@@ -15504,14 +15774,14 @@
       </p:pic>
       <p:sp>
         <p:nvSpPr>
-          <p:cNvPr id="5" name="Text 2"/>
+          <p:cNvPr id="4" name="Text 1"/>
           <p:cNvSpPr/>
           <p:nvPr/>
         </p:nvSpPr>
         <p:spPr>
           <a:xfrm>
-            <a:off x="457200" y="6089904"/>
-            <a:ext cx="11277295" cy="347472"/>
+            <a:off x="5349240" y="1005840"/>
+            <a:ext cx="6522415" cy="731520"/>
           </a:xfrm>
           <a:prstGeom prst="rect">
             <a:avLst/>
@@ -15520,24 +15790,85 @@
           <a:ln/>
         </p:spPr>
         <p:txBody>
-          <a:bodyPr wrap="square" lIns="0" tIns="0" rIns="0" bIns="0" rtlCol="0" anchor="ctr"/>
+          <a:bodyPr wrap="square" lIns="0" tIns="0" rIns="0" bIns="0" rtlCol="0" anchor="ctr">
+            <a:normAutofit/>
+          </a:bodyPr>
           <a:lstStyle/>
           <a:p>
             <a:pPr algn="ctr" indent="0" marL="0">
               <a:buNone/>
             </a:pPr>
             <a:r>
-              <a:rPr lang="en-US" sz="1800" i="1" dirty="0">
-                <a:solidFill>
-                  <a:srgbClr val="555555"/>
+              <a:rPr lang="en-US" sz="3600" b="1" dirty="0">
+                <a:solidFill>
+                  <a:srgbClr val="990011"/>
                 </a:solidFill>
                 <a:latin typeface="Times New Roman" pitchFamily="34" charset="0"/>
                 <a:ea typeface="Times New Roman" pitchFamily="34" charset="-122"/>
                 <a:cs typeface="Times New Roman" pitchFamily="34" charset="-120"/>
               </a:rPr>
-              <a:t>Illustration: the urban heat island</a:t>
-            </a:r>
-            <a:endParaRPr lang="en-US" sz="1800" dirty="0"/>
+              <a:t>1. Meaning and Classification of Micro-climates</a:t>
+            </a:r>
+            <a:endParaRPr lang="en-US" sz="3600" dirty="0"/>
+          </a:p>
+        </p:txBody>
+      </p:sp>
+      <p:sp>
+        <p:nvSpPr>
+          <p:cNvPr id="5" name="Text 2"/>
+          <p:cNvSpPr/>
+          <p:nvPr/>
+        </p:nvSpPr>
+        <p:spPr>
+          <a:xfrm>
+            <a:off x="5349240" y="1783080"/>
+            <a:ext cx="6522415" cy="4663440"/>
+          </a:xfrm>
+          <a:prstGeom prst="rect">
+            <a:avLst/>
+          </a:prstGeom>
+          <a:noFill/>
+          <a:ln/>
+        </p:spPr>
+        <p:txBody>
+          <a:bodyPr wrap="square" lIns="0" tIns="0" rIns="0" bIns="0" rtlCol="0" anchor="t"/>
+          <a:lstStyle/>
+          <a:p>
+            <a:pPr algn="l" indent="0" marL="0">
+              <a:spcAft>
+                <a:spcPts val="800"/>
+              </a:spcAft>
+              <a:buNone/>
+            </a:pPr>
+            <a:r>
+              <a:rPr lang="en-US" sz="4000" b="1" dirty="0">
+                <a:solidFill>
+                  <a:srgbClr val="111111"/>
+                </a:solidFill>
+                <a:latin typeface="Times New Roman" pitchFamily="34" charset="0"/>
+                <a:ea typeface="Times New Roman" pitchFamily="34" charset="-122"/>
+                <a:cs typeface="Times New Roman" pitchFamily="34" charset="-120"/>
+              </a:rPr>
+              <a:t>Mountain climate: </a:t>
+            </a:r>
+            <a:pPr algn="l" indent="0" marL="0">
+              <a:spcAft>
+                <a:spcPts val="800"/>
+              </a:spcAft>
+              <a:buNone/>
+            </a:pPr>
+            <a:r>
+              <a:rPr lang="en-US" sz="4000" dirty="0">
+                <a:solidFill>
+                  <a:srgbClr val="111111"/>
+                </a:solidFill>
+                <a:latin typeface="Times New Roman" pitchFamily="34" charset="0"/>
+                <a:ea typeface="Times New Roman" pitchFamily="34" charset="-122"/>
+                <a:cs typeface="Times New Roman" pitchFamily="34" charset="-120"/>
+              </a:rPr>
+              <a:t>Conditions vary with altitude and with the side of the mountain.</a:t>
+            </a:r>
+            <a:endParaRPr lang="en-US" sz="4000" dirty="0"/>
           </a:p>
         </p:txBody>
       </p:sp>
@@ -15653,9 +15984,109 @@
           </a:p>
         </p:txBody>
       </p:sp>
+      <p:sp>
+        <p:nvSpPr>
+          <p:cNvPr id="3" name="Text 1"/>
+          <p:cNvSpPr/>
+          <p:nvPr/>
+        </p:nvSpPr>
+        <p:spPr>
+          <a:xfrm>
+            <a:off x="365760" y="1005840"/>
+            <a:ext cx="11460175" cy="731520"/>
+          </a:xfrm>
+          <a:prstGeom prst="rect">
+            <a:avLst/>
+          </a:prstGeom>
+          <a:noFill/>
+          <a:ln/>
+        </p:spPr>
+        <p:txBody>
+          <a:bodyPr wrap="square" lIns="0" tIns="0" rIns="0" bIns="0" rtlCol="0" anchor="ctr">
+            <a:normAutofit/>
+          </a:bodyPr>
+          <a:lstStyle/>
+          <a:p>
+            <a:pPr algn="ctr" indent="0" marL="0">
+              <a:buNone/>
+            </a:pPr>
+            <a:r>
+              <a:rPr lang="en-US" sz="3600" b="1" dirty="0">
+                <a:solidFill>
+                  <a:srgbClr val="990011"/>
+                </a:solidFill>
+                <a:latin typeface="Times New Roman" pitchFamily="34" charset="0"/>
+                <a:ea typeface="Times New Roman" pitchFamily="34" charset="-122"/>
+                <a:cs typeface="Times New Roman" pitchFamily="34" charset="-120"/>
+              </a:rPr>
+              <a:t>1. Meaning and Classification of Micro-climates</a:t>
+            </a:r>
+            <a:endParaRPr lang="en-US" sz="3600" dirty="0"/>
+          </a:p>
+        </p:txBody>
+      </p:sp>
+      <p:sp>
+        <p:nvSpPr>
+          <p:cNvPr id="4" name="Text 2"/>
+          <p:cNvSpPr/>
+          <p:nvPr/>
+        </p:nvSpPr>
+        <p:spPr>
+          <a:xfrm>
+            <a:off x="365760" y="1783080"/>
+            <a:ext cx="4846320" cy="4617720"/>
+          </a:xfrm>
+          <a:prstGeom prst="rect">
+            <a:avLst/>
+          </a:prstGeom>
+          <a:noFill/>
+          <a:ln/>
+        </p:spPr>
+        <p:txBody>
+          <a:bodyPr wrap="square" lIns="0" tIns="0" rIns="0" bIns="0" rtlCol="0" anchor="t"/>
+          <a:lstStyle/>
+          <a:p>
+            <a:pPr algn="l" indent="0" marL="0">
+              <a:spcAft>
+                <a:spcPts val="800"/>
+              </a:spcAft>
+              <a:buNone/>
+            </a:pPr>
+            <a:r>
+              <a:rPr lang="en-US" sz="3600" b="1" dirty="0">
+                <a:solidFill>
+                  <a:srgbClr val="111111"/>
+                </a:solidFill>
+                <a:latin typeface="Times New Roman" pitchFamily="34" charset="0"/>
+                <a:ea typeface="Times New Roman" pitchFamily="34" charset="-122"/>
+                <a:cs typeface="Times New Roman" pitchFamily="34" charset="-120"/>
+              </a:rPr>
+              <a:t>Lakeside climate: </a:t>
+            </a:r>
+            <a:pPr algn="l" indent="0" marL="0">
+              <a:spcAft>
+                <a:spcPts val="800"/>
+              </a:spcAft>
+              <a:buNone/>
+            </a:pPr>
+            <a:r>
+              <a:rPr lang="en-US" sz="3600" dirty="0">
+                <a:solidFill>
+                  <a:srgbClr val="111111"/>
+                </a:solidFill>
+                <a:latin typeface="Times New Roman" pitchFamily="34" charset="0"/>
+                <a:ea typeface="Times New Roman" pitchFamily="34" charset="-122"/>
+                <a:cs typeface="Times New Roman" pitchFamily="34" charset="-120"/>
+              </a:rPr>
+              <a:t>Along a large lake such as Lake Lagdo, the air is cooler and more humid.</a:t>
+            </a:r>
+            <a:endParaRPr lang="en-US" sz="3600" dirty="0"/>
+          </a:p>
+        </p:txBody>
+      </p:sp>
       <p:pic>
         <p:nvPicPr>
-          <p:cNvPr id="3" name="Image 0" descr="/home/claude/f4/img/minesec_sheet.png">    </p:cNvPr>
+          <p:cNvPr id="5" name="Image 0" descr="/home/claude/f4/img/v2/lsa_lake.jpg">    </p:cNvPr>
           <p:cNvPicPr>
             <a:picLocks noChangeAspect="1"/>
           </p:cNvPicPr>
@@ -15669,8 +16100,8 @@
         </p:blipFill>
         <p:spPr>
           <a:xfrm>
-            <a:off x="0" y="658368"/>
-            <a:ext cx="3840480" cy="5833872"/>
+            <a:off x="5349240" y="2071212"/>
+            <a:ext cx="6659575" cy="3693983"/>
           </a:xfrm>
           <a:prstGeom prst="rect">
             <a:avLst/>
@@ -15679,14 +16110,14 @@
       </p:pic>
       <p:sp>
         <p:nvSpPr>
-          <p:cNvPr id="4" name="Text 1"/>
+          <p:cNvPr id="6" name="Text 3"/>
           <p:cNvSpPr/>
           <p:nvPr/>
         </p:nvSpPr>
         <p:spPr>
           <a:xfrm>
-            <a:off x="4069080" y="1005840"/>
-            <a:ext cx="7802575" cy="731520"/>
+            <a:off x="5349240" y="6089904"/>
+            <a:ext cx="6659575" cy="347472"/>
           </a:xfrm>
           <a:prstGeom prst="rect">
             <a:avLst/>
@@ -15695,144 +16126,24 @@
           <a:ln/>
         </p:spPr>
         <p:txBody>
-          <a:bodyPr wrap="square" lIns="0" tIns="0" rIns="0" bIns="0" rtlCol="0" anchor="ctr">
-            <a:normAutofit/>
-          </a:bodyPr>
+          <a:bodyPr wrap="square" lIns="0" tIns="0" rIns="0" bIns="0" rtlCol="0" anchor="ctr"/>
           <a:lstStyle/>
           <a:p>
             <a:pPr algn="ctr" indent="0" marL="0">
               <a:buNone/>
             </a:pPr>
             <a:r>
-              <a:rPr lang="en-US" sz="3600" b="1" dirty="0">
-                <a:solidFill>
-                  <a:srgbClr val="990011"/>
+              <a:rPr lang="en-US" sz="1600" i="1" dirty="0">
+                <a:solidFill>
+                  <a:srgbClr val="555555"/>
                 </a:solidFill>
                 <a:latin typeface="Times New Roman" pitchFamily="34" charset="0"/>
                 <a:ea typeface="Times New Roman" pitchFamily="34" charset="-122"/>
                 <a:cs typeface="Times New Roman" pitchFamily="34" charset="-120"/>
               </a:rPr>
-              <a:t>2. Urban Climates</a:t>
-            </a:r>
-            <a:endParaRPr lang="en-US" sz="3600" dirty="0"/>
-          </a:p>
-        </p:txBody>
-      </p:sp>
-      <p:sp>
-        <p:nvSpPr>
-          <p:cNvPr id="5" name="Text 2"/>
-          <p:cNvSpPr/>
-          <p:nvPr/>
-        </p:nvSpPr>
-        <p:spPr>
-          <a:xfrm>
-            <a:off x="4069080" y="1737360"/>
-            <a:ext cx="7802575" cy="457200"/>
-          </a:xfrm>
-          <a:prstGeom prst="rect">
-            <a:avLst/>
-          </a:prstGeom>
-          <a:noFill/>
-          <a:ln/>
-        </p:spPr>
-        <p:txBody>
-          <a:bodyPr wrap="square" lIns="0" tIns="0" rIns="0" bIns="0" rtlCol="0" anchor="ctr"/>
-          <a:lstStyle/>
-          <a:p>
-            <a:pPr algn="l" indent="0" marL="0">
-              <a:buNone/>
-            </a:pPr>
-            <a:r>
-              <a:rPr lang="en-US" sz="3200" b="1" dirty="0">
-                <a:solidFill>
-                  <a:srgbClr val="990011"/>
-                </a:solidFill>
-                <a:latin typeface="Times New Roman" pitchFamily="34" charset="0"/>
-                <a:ea typeface="Times New Roman" pitchFamily="34" charset="-122"/>
-                <a:cs typeface="Times New Roman" pitchFamily="34" charset="-120"/>
-              </a:rPr>
-              <a:t>Factors of Urban Climates</a:t>
-            </a:r>
-            <a:endParaRPr lang="en-US" sz="3200" dirty="0"/>
-          </a:p>
-        </p:txBody>
-      </p:sp>
-      <p:sp>
-        <p:nvSpPr>
-          <p:cNvPr id="6" name="Text 3"/>
-          <p:cNvSpPr/>
-          <p:nvPr/>
-        </p:nvSpPr>
-        <p:spPr>
-          <a:xfrm>
-            <a:off x="4069080" y="2240280"/>
-            <a:ext cx="7802575" cy="4206240"/>
-          </a:xfrm>
-          <a:prstGeom prst="rect">
-            <a:avLst/>
-          </a:prstGeom>
-          <a:noFill/>
-          <a:ln/>
-        </p:spPr>
-        <p:txBody>
-          <a:bodyPr wrap="square" lIns="0" tIns="0" rIns="0" bIns="0" rtlCol="0" anchor="t"/>
-          <a:lstStyle/>
-          <a:p>
-            <a:pPr algn="l" indent="0" marL="0">
-              <a:spcAft>
-                <a:spcPts val="800"/>
-              </a:spcAft>
-              <a:buNone/>
-            </a:pPr>
-            <a:r>
-              <a:rPr lang="en-US" sz="4000" i="1" dirty="0">
-                <a:solidFill>
-                  <a:srgbClr val="111111"/>
-                </a:solidFill>
-                <a:latin typeface="Times New Roman" pitchFamily="34" charset="0"/>
-                <a:ea typeface="Times New Roman" pitchFamily="34" charset="-122"/>
-                <a:cs typeface="Times New Roman" pitchFamily="34" charset="-120"/>
-              </a:rPr>
-              <a:t>Urban climates are caused by the following factors:</a:t>
-            </a:r>
-            <a:endParaRPr lang="en-US" sz="4000" dirty="0"/>
-          </a:p>
-          <a:p>
-            <a:pPr algn="l" indent="0" marL="0">
-              <a:spcAft>
-                <a:spcPts val="800"/>
-              </a:spcAft>
-              <a:buNone/>
-            </a:pPr>
-            <a:r>
-              <a:rPr lang="en-US" sz="4000" b="1" dirty="0">
-                <a:solidFill>
-                  <a:srgbClr val="111111"/>
-                </a:solidFill>
-                <a:latin typeface="Times New Roman" pitchFamily="34" charset="0"/>
-                <a:ea typeface="Times New Roman" pitchFamily="34" charset="-122"/>
-                <a:cs typeface="Times New Roman" pitchFamily="34" charset="-120"/>
-              </a:rPr>
-              <a:t>Building materials: </a:t>
-            </a:r>
-            <a:pPr algn="l" indent="0" marL="0">
-              <a:spcAft>
-                <a:spcPts val="800"/>
-              </a:spcAft>
-              <a:buNone/>
-            </a:pPr>
-            <a:r>
-              <a:rPr lang="en-US" sz="4000" dirty="0">
-                <a:solidFill>
-                  <a:srgbClr val="111111"/>
-                </a:solidFill>
-                <a:latin typeface="Times New Roman" pitchFamily="34" charset="0"/>
-                <a:ea typeface="Times New Roman" pitchFamily="34" charset="-122"/>
-                <a:cs typeface="Times New Roman" pitchFamily="34" charset="-120"/>
-              </a:rPr>
-              <a:t>Concrete, tar and iron sheets absorb heat by day and release it at night. Their low albedo increases heating.</a:t>
-            </a:r>
-            <a:endParaRPr lang="en-US" sz="4000" dirty="0"/>
+              <a:t>Illustration: a lakeside</a:t>
+            </a:r>
+            <a:endParaRPr lang="en-US" sz="1600" dirty="0"/>
           </a:p>
         </p:txBody>
       </p:sp>
@@ -15948,9 +16259,109 @@
           </a:p>
         </p:txBody>
       </p:sp>
+      <p:sp>
+        <p:nvSpPr>
+          <p:cNvPr id="3" name="Text 1"/>
+          <p:cNvSpPr/>
+          <p:nvPr/>
+        </p:nvSpPr>
+        <p:spPr>
+          <a:xfrm>
+            <a:off x="365760" y="1005840"/>
+            <a:ext cx="11460175" cy="731520"/>
+          </a:xfrm>
+          <a:prstGeom prst="rect">
+            <a:avLst/>
+          </a:prstGeom>
+          <a:noFill/>
+          <a:ln/>
+        </p:spPr>
+        <p:txBody>
+          <a:bodyPr wrap="square" lIns="0" tIns="0" rIns="0" bIns="0" rtlCol="0" anchor="ctr">
+            <a:normAutofit/>
+          </a:bodyPr>
+          <a:lstStyle/>
+          <a:p>
+            <a:pPr algn="ctr" indent="0" marL="0">
+              <a:buNone/>
+            </a:pPr>
+            <a:r>
+              <a:rPr lang="en-US" sz="3600" b="1" dirty="0">
+                <a:solidFill>
+                  <a:srgbClr val="990011"/>
+                </a:solidFill>
+                <a:latin typeface="Times New Roman" pitchFamily="34" charset="0"/>
+                <a:ea typeface="Times New Roman" pitchFamily="34" charset="-122"/>
+                <a:cs typeface="Times New Roman" pitchFamily="34" charset="-120"/>
+              </a:rPr>
+              <a:t>1. Meaning and Classification of Micro-climates</a:t>
+            </a:r>
+            <a:endParaRPr lang="en-US" sz="3600" dirty="0"/>
+          </a:p>
+        </p:txBody>
+      </p:sp>
+      <p:sp>
+        <p:nvSpPr>
+          <p:cNvPr id="4" name="Text 2"/>
+          <p:cNvSpPr/>
+          <p:nvPr/>
+        </p:nvSpPr>
+        <p:spPr>
+          <a:xfrm>
+            <a:off x="365760" y="1783080"/>
+            <a:ext cx="4846320" cy="4617720"/>
+          </a:xfrm>
+          <a:prstGeom prst="rect">
+            <a:avLst/>
+          </a:prstGeom>
+          <a:noFill/>
+          <a:ln/>
+        </p:spPr>
+        <p:txBody>
+          <a:bodyPr wrap="square" lIns="0" tIns="0" rIns="0" bIns="0" rtlCol="0" anchor="t"/>
+          <a:lstStyle/>
+          <a:p>
+            <a:pPr algn="l" indent="0" marL="0">
+              <a:spcAft>
+                <a:spcPts val="800"/>
+              </a:spcAft>
+              <a:buNone/>
+            </a:pPr>
+            <a:r>
+              <a:rPr lang="en-US" sz="3600" b="1" dirty="0">
+                <a:solidFill>
+                  <a:srgbClr val="111111"/>
+                </a:solidFill>
+                <a:latin typeface="Times New Roman" pitchFamily="34" charset="0"/>
+                <a:ea typeface="Times New Roman" pitchFamily="34" charset="-122"/>
+                <a:cs typeface="Times New Roman" pitchFamily="34" charset="-120"/>
+              </a:rPr>
+              <a:t>Forest climate: </a:t>
+            </a:r>
+            <a:pPr algn="l" indent="0" marL="0">
+              <a:spcAft>
+                <a:spcPts val="800"/>
+              </a:spcAft>
+              <a:buNone/>
+            </a:pPr>
+            <a:r>
+              <a:rPr lang="en-US" sz="3600" dirty="0">
+                <a:solidFill>
+                  <a:srgbClr val="111111"/>
+                </a:solidFill>
+                <a:latin typeface="Times New Roman" pitchFamily="34" charset="0"/>
+                <a:ea typeface="Times New Roman" pitchFamily="34" charset="-122"/>
+                <a:cs typeface="Times New Roman" pitchFamily="34" charset="-120"/>
+              </a:rPr>
+              <a:t>Inside a forest, the air is shady, cool, humid and calm.</a:t>
+            </a:r>
+            <a:endParaRPr lang="en-US" sz="3600" dirty="0"/>
+          </a:p>
+        </p:txBody>
+      </p:sp>
       <p:pic>
         <p:nvPicPr>
-          <p:cNvPr id="3" name="Image 0" descr="/home/claude/f4/img/minesec_sheet.png">    </p:cNvPr>
+          <p:cNvPr id="5" name="Image 0" descr="/home/claude/f4/img/v2/f2t_rainforest.jpg">    </p:cNvPr>
           <p:cNvPicPr>
             <a:picLocks noChangeAspect="1"/>
           </p:cNvPicPr>
@@ -15964,8 +16375,8 @@
         </p:blipFill>
         <p:spPr>
           <a:xfrm>
-            <a:off x="0" y="658368"/>
-            <a:ext cx="5120640" cy="5833872"/>
+            <a:off x="5349240" y="2071212"/>
+            <a:ext cx="6659575" cy="3693983"/>
           </a:xfrm>
           <a:prstGeom prst="rect">
             <a:avLst/>
@@ -15974,14 +16385,14 @@
       </p:pic>
       <p:sp>
         <p:nvSpPr>
-          <p:cNvPr id="4" name="Text 1"/>
+          <p:cNvPr id="6" name="Text 3"/>
           <p:cNvSpPr/>
           <p:nvPr/>
         </p:nvSpPr>
         <p:spPr>
           <a:xfrm>
-            <a:off x="5349240" y="1005840"/>
-            <a:ext cx="6522415" cy="731520"/>
+            <a:off x="5349240" y="6089904"/>
+            <a:ext cx="6659575" cy="347472"/>
           </a:xfrm>
           <a:prstGeom prst="rect">
             <a:avLst/>
@@ -15990,124 +16401,24 @@
           <a:ln/>
         </p:spPr>
         <p:txBody>
-          <a:bodyPr wrap="square" lIns="0" tIns="0" rIns="0" bIns="0" rtlCol="0" anchor="ctr">
-            <a:normAutofit/>
-          </a:bodyPr>
+          <a:bodyPr wrap="square" lIns="0" tIns="0" rIns="0" bIns="0" rtlCol="0" anchor="ctr"/>
           <a:lstStyle/>
           <a:p>
             <a:pPr algn="ctr" indent="0" marL="0">
               <a:buNone/>
             </a:pPr>
             <a:r>
-              <a:rPr lang="en-US" sz="3600" b="1" dirty="0">
-                <a:solidFill>
-                  <a:srgbClr val="990011"/>
+              <a:rPr lang="en-US" sz="1600" i="1" dirty="0">
+                <a:solidFill>
+                  <a:srgbClr val="555555"/>
                 </a:solidFill>
                 <a:latin typeface="Times New Roman" pitchFamily="34" charset="0"/>
                 <a:ea typeface="Times New Roman" pitchFamily="34" charset="-122"/>
                 <a:cs typeface="Times New Roman" pitchFamily="34" charset="-120"/>
               </a:rPr>
-              <a:t>2. Urban Climates</a:t>
-            </a:r>
-            <a:endParaRPr lang="en-US" sz="3600" dirty="0"/>
-          </a:p>
-        </p:txBody>
-      </p:sp>
-      <p:sp>
-        <p:nvSpPr>
-          <p:cNvPr id="5" name="Text 2"/>
-          <p:cNvSpPr/>
-          <p:nvPr/>
-        </p:nvSpPr>
-        <p:spPr>
-          <a:xfrm>
-            <a:off x="5349240" y="1737360"/>
-            <a:ext cx="6522415" cy="457200"/>
-          </a:xfrm>
-          <a:prstGeom prst="rect">
-            <a:avLst/>
-          </a:prstGeom>
-          <a:noFill/>
-          <a:ln/>
-        </p:spPr>
-        <p:txBody>
-          <a:bodyPr wrap="square" lIns="0" tIns="0" rIns="0" bIns="0" rtlCol="0" anchor="ctr"/>
-          <a:lstStyle/>
-          <a:p>
-            <a:pPr algn="l" indent="0" marL="0">
-              <a:buNone/>
-            </a:pPr>
-            <a:r>
-              <a:rPr lang="en-US" sz="2700" b="1" dirty="0">
-                <a:solidFill>
-                  <a:srgbClr val="990011"/>
-                </a:solidFill>
-                <a:latin typeface="Times New Roman" pitchFamily="34" charset="0"/>
-                <a:ea typeface="Times New Roman" pitchFamily="34" charset="-122"/>
-                <a:cs typeface="Times New Roman" pitchFamily="34" charset="-120"/>
-              </a:rPr>
-              <a:t>Factors of Urban Climates (continued)</a:t>
-            </a:r>
-            <a:endParaRPr lang="en-US" sz="2700" dirty="0"/>
-          </a:p>
-        </p:txBody>
-      </p:sp>
-      <p:sp>
-        <p:nvSpPr>
-          <p:cNvPr id="6" name="Text 3"/>
-          <p:cNvSpPr/>
-          <p:nvPr/>
-        </p:nvSpPr>
-        <p:spPr>
-          <a:xfrm>
-            <a:off x="5349240" y="2240280"/>
-            <a:ext cx="6522415" cy="4206240"/>
-          </a:xfrm>
-          <a:prstGeom prst="rect">
-            <a:avLst/>
-          </a:prstGeom>
-          <a:noFill/>
-          <a:ln/>
-        </p:spPr>
-        <p:txBody>
-          <a:bodyPr wrap="square" lIns="0" tIns="0" rIns="0" bIns="0" rtlCol="0" anchor="t"/>
-          <a:lstStyle/>
-          <a:p>
-            <a:pPr algn="l" indent="0" marL="0">
-              <a:spcAft>
-                <a:spcPts val="800"/>
-              </a:spcAft>
-              <a:buNone/>
-            </a:pPr>
-            <a:r>
-              <a:rPr lang="en-US" sz="4000" b="1" dirty="0">
-                <a:solidFill>
-                  <a:srgbClr val="111111"/>
-                </a:solidFill>
-                <a:latin typeface="Times New Roman" pitchFamily="34" charset="0"/>
-                <a:ea typeface="Times New Roman" pitchFamily="34" charset="-122"/>
-                <a:cs typeface="Times New Roman" pitchFamily="34" charset="-120"/>
-              </a:rPr>
-              <a:t>Human activities: </a:t>
-            </a:r>
-            <a:pPr algn="l" indent="0" marL="0">
-              <a:spcAft>
-                <a:spcPts val="800"/>
-              </a:spcAft>
-              <a:buNone/>
-            </a:pPr>
-            <a:r>
-              <a:rPr lang="en-US" sz="4000" dirty="0">
-                <a:solidFill>
-                  <a:srgbClr val="111111"/>
-                </a:solidFill>
-                <a:latin typeface="Times New Roman" pitchFamily="34" charset="0"/>
-                <a:ea typeface="Times New Roman" pitchFamily="34" charset="-122"/>
-                <a:cs typeface="Times New Roman" pitchFamily="34" charset="-120"/>
-              </a:rPr>
-              <a:t>Cars, factories and air conditioners produce heat and pollution. Pollution traps heat and adds condensation nuclei.</a:t>
-            </a:r>
-            <a:endParaRPr lang="en-US" sz="4000" dirty="0"/>
+              <a:t>Illustration: a forest</a:t>
+            </a:r>
+            <a:endParaRPr lang="en-US" sz="1600" dirty="0"/>
           </a:p>
         </p:txBody>
       </p:sp>
@@ -16223,9 +16534,129 @@
           </a:p>
         </p:txBody>
       </p:sp>
+      <p:sp>
+        <p:nvSpPr>
+          <p:cNvPr id="3" name="Text 1"/>
+          <p:cNvSpPr/>
+          <p:nvPr/>
+        </p:nvSpPr>
+        <p:spPr>
+          <a:xfrm>
+            <a:off x="365760" y="1005840"/>
+            <a:ext cx="11460175" cy="731520"/>
+          </a:xfrm>
+          <a:prstGeom prst="rect">
+            <a:avLst/>
+          </a:prstGeom>
+          <a:noFill/>
+          <a:ln/>
+        </p:spPr>
+        <p:txBody>
+          <a:bodyPr wrap="square" lIns="0" tIns="0" rIns="0" bIns="0" rtlCol="0" anchor="ctr">
+            <a:normAutofit/>
+          </a:bodyPr>
+          <a:lstStyle/>
+          <a:p>
+            <a:pPr algn="ctr" indent="0" marL="0">
+              <a:buNone/>
+            </a:pPr>
+            <a:r>
+              <a:rPr lang="en-US" sz="3600" b="1" dirty="0">
+                <a:solidFill>
+                  <a:srgbClr val="990011"/>
+                </a:solidFill>
+                <a:latin typeface="Times New Roman" pitchFamily="34" charset="0"/>
+                <a:ea typeface="Times New Roman" pitchFamily="34" charset="-122"/>
+                <a:cs typeface="Times New Roman" pitchFamily="34" charset="-120"/>
+              </a:rPr>
+              <a:t>2. Characteristics of Urban Climates</a:t>
+            </a:r>
+            <a:endParaRPr lang="en-US" sz="3600" dirty="0"/>
+          </a:p>
+        </p:txBody>
+      </p:sp>
+      <p:sp>
+        <p:nvSpPr>
+          <p:cNvPr id="4" name="Text 2"/>
+          <p:cNvSpPr/>
+          <p:nvPr/>
+        </p:nvSpPr>
+        <p:spPr>
+          <a:xfrm>
+            <a:off x="365760" y="1783080"/>
+            <a:ext cx="4846320" cy="4617720"/>
+          </a:xfrm>
+          <a:prstGeom prst="rect">
+            <a:avLst/>
+          </a:prstGeom>
+          <a:noFill/>
+          <a:ln/>
+        </p:spPr>
+        <p:txBody>
+          <a:bodyPr wrap="square" lIns="0" tIns="0" rIns="0" bIns="0" rtlCol="0" anchor="t"/>
+          <a:lstStyle/>
+          <a:p>
+            <a:pPr algn="l" indent="0" marL="0">
+              <a:spcAft>
+                <a:spcPts val="800"/>
+              </a:spcAft>
+              <a:buNone/>
+            </a:pPr>
+            <a:r>
+              <a:rPr lang="en-US" sz="3200" i="1" dirty="0">
+                <a:solidFill>
+                  <a:srgbClr val="111111"/>
+                </a:solidFill>
+                <a:latin typeface="Times New Roman" pitchFamily="34" charset="0"/>
+                <a:ea typeface="Times New Roman" pitchFamily="34" charset="-122"/>
+                <a:cs typeface="Times New Roman" pitchFamily="34" charset="-120"/>
+              </a:rPr>
+              <a:t>Compared with the countryside, towns have the following characteristics:</a:t>
+            </a:r>
+            <a:endParaRPr lang="en-US" sz="3200" dirty="0"/>
+          </a:p>
+          <a:p>
+            <a:pPr algn="l" indent="0" marL="0">
+              <a:spcAft>
+                <a:spcPts val="800"/>
+              </a:spcAft>
+              <a:buNone/>
+            </a:pPr>
+            <a:r>
+              <a:rPr lang="en-US" sz="3200" b="1" dirty="0">
+                <a:solidFill>
+                  <a:srgbClr val="111111"/>
+                </a:solidFill>
+                <a:latin typeface="Times New Roman" pitchFamily="34" charset="0"/>
+                <a:ea typeface="Times New Roman" pitchFamily="34" charset="-122"/>
+                <a:cs typeface="Times New Roman" pitchFamily="34" charset="-120"/>
+              </a:rPr>
+              <a:t>Higher temperatures: </a:t>
+            </a:r>
+            <a:pPr algn="l" indent="0" marL="0">
+              <a:spcAft>
+                <a:spcPts val="800"/>
+              </a:spcAft>
+              <a:buNone/>
+            </a:pPr>
+            <a:r>
+              <a:rPr lang="en-US" sz="3200" dirty="0">
+                <a:solidFill>
+                  <a:srgbClr val="111111"/>
+                </a:solidFill>
+                <a:latin typeface="Times New Roman" pitchFamily="34" charset="0"/>
+                <a:ea typeface="Times New Roman" pitchFamily="34" charset="-122"/>
+                <a:cs typeface="Times New Roman" pitchFamily="34" charset="-120"/>
+              </a:rPr>
+              <a:t>Towns are warmer, especially at night: this is the urban heat island.</a:t>
+            </a:r>
+            <a:endParaRPr lang="en-US" sz="3200" dirty="0"/>
+          </a:p>
+        </p:txBody>
+      </p:sp>
       <p:pic>
         <p:nvPicPr>
-          <p:cNvPr id="3" name="Image 0" descr="/home/claude/f4/img/minesec_sheet.png">    </p:cNvPr>
+          <p:cNvPr id="5" name="Image 0" descr="/home/claude/f4/img/v2/heat_island_big.png">    </p:cNvPr>
           <p:cNvPicPr>
             <a:picLocks noChangeAspect="1"/>
           </p:cNvPicPr>
@@ -16239,8 +16670,8 @@
         </p:blipFill>
         <p:spPr>
           <a:xfrm>
-            <a:off x="0" y="658368"/>
-            <a:ext cx="5120640" cy="5833872"/>
+            <a:off x="5349240" y="2617506"/>
+            <a:ext cx="6659575" cy="2601397"/>
           </a:xfrm>
           <a:prstGeom prst="rect">
             <a:avLst/>
@@ -16249,14 +16680,14 @@
       </p:pic>
       <p:sp>
         <p:nvSpPr>
-          <p:cNvPr id="4" name="Text 1"/>
+          <p:cNvPr id="6" name="Text 3"/>
           <p:cNvSpPr/>
           <p:nvPr/>
         </p:nvSpPr>
         <p:spPr>
           <a:xfrm>
-            <a:off x="5349240" y="1005840"/>
-            <a:ext cx="6522415" cy="731520"/>
+            <a:off x="5349240" y="6089904"/>
+            <a:ext cx="6659575" cy="347472"/>
           </a:xfrm>
           <a:prstGeom prst="rect">
             <a:avLst/>
@@ -16265,124 +16696,24 @@
           <a:ln/>
         </p:spPr>
         <p:txBody>
-          <a:bodyPr wrap="square" lIns="0" tIns="0" rIns="0" bIns="0" rtlCol="0" anchor="ctr">
-            <a:normAutofit/>
-          </a:bodyPr>
+          <a:bodyPr wrap="square" lIns="0" tIns="0" rIns="0" bIns="0" rtlCol="0" anchor="ctr"/>
           <a:lstStyle/>
           <a:p>
             <a:pPr algn="ctr" indent="0" marL="0">
               <a:buNone/>
             </a:pPr>
             <a:r>
-              <a:rPr lang="en-US" sz="3600" b="1" dirty="0">
-                <a:solidFill>
-                  <a:srgbClr val="990011"/>
+              <a:rPr lang="en-US" sz="1600" i="1" dirty="0">
+                <a:solidFill>
+                  <a:srgbClr val="555555"/>
                 </a:solidFill>
                 <a:latin typeface="Times New Roman" pitchFamily="34" charset="0"/>
                 <a:ea typeface="Times New Roman" pitchFamily="34" charset="-122"/>
                 <a:cs typeface="Times New Roman" pitchFamily="34" charset="-120"/>
               </a:rPr>
-              <a:t>2. Urban Climates</a:t>
-            </a:r>
-            <a:endParaRPr lang="en-US" sz="3600" dirty="0"/>
-          </a:p>
-        </p:txBody>
-      </p:sp>
-      <p:sp>
-        <p:nvSpPr>
-          <p:cNvPr id="5" name="Text 2"/>
-          <p:cNvSpPr/>
-          <p:nvPr/>
-        </p:nvSpPr>
-        <p:spPr>
-          <a:xfrm>
-            <a:off x="5349240" y="1737360"/>
-            <a:ext cx="6522415" cy="457200"/>
-          </a:xfrm>
-          <a:prstGeom prst="rect">
-            <a:avLst/>
-          </a:prstGeom>
-          <a:noFill/>
-          <a:ln/>
-        </p:spPr>
-        <p:txBody>
-          <a:bodyPr wrap="square" lIns="0" tIns="0" rIns="0" bIns="0" rtlCol="0" anchor="ctr"/>
-          <a:lstStyle/>
-          <a:p>
-            <a:pPr algn="l" indent="0" marL="0">
-              <a:buNone/>
-            </a:pPr>
-            <a:r>
-              <a:rPr lang="en-US" sz="2700" b="1" dirty="0">
-                <a:solidFill>
-                  <a:srgbClr val="990011"/>
-                </a:solidFill>
-                <a:latin typeface="Times New Roman" pitchFamily="34" charset="0"/>
-                <a:ea typeface="Times New Roman" pitchFamily="34" charset="-122"/>
-                <a:cs typeface="Times New Roman" pitchFamily="34" charset="-120"/>
-              </a:rPr>
-              <a:t>Factors of Urban Climates (continued)</a:t>
-            </a:r>
-            <a:endParaRPr lang="en-US" sz="2700" dirty="0"/>
-          </a:p>
-        </p:txBody>
-      </p:sp>
-      <p:sp>
-        <p:nvSpPr>
-          <p:cNvPr id="6" name="Text 3"/>
-          <p:cNvSpPr/>
-          <p:nvPr/>
-        </p:nvSpPr>
-        <p:spPr>
-          <a:xfrm>
-            <a:off x="5349240" y="2240280"/>
-            <a:ext cx="6522415" cy="4206240"/>
-          </a:xfrm>
-          <a:prstGeom prst="rect">
-            <a:avLst/>
-          </a:prstGeom>
-          <a:noFill/>
-          <a:ln/>
-        </p:spPr>
-        <p:txBody>
-          <a:bodyPr wrap="square" lIns="0" tIns="0" rIns="0" bIns="0" rtlCol="0" anchor="t"/>
-          <a:lstStyle/>
-          <a:p>
-            <a:pPr algn="l" indent="0" marL="0">
-              <a:spcAft>
-                <a:spcPts val="800"/>
-              </a:spcAft>
-              <a:buNone/>
-            </a:pPr>
-            <a:r>
-              <a:rPr lang="en-US" sz="4000" b="1" dirty="0">
-                <a:solidFill>
-                  <a:srgbClr val="111111"/>
-                </a:solidFill>
-                <a:latin typeface="Times New Roman" pitchFamily="34" charset="0"/>
-                <a:ea typeface="Times New Roman" pitchFamily="34" charset="-122"/>
-                <a:cs typeface="Times New Roman" pitchFamily="34" charset="-120"/>
-              </a:rPr>
-              <a:t>Lack of vegetation and water: </a:t>
-            </a:r>
-            <a:pPr algn="l" indent="0" marL="0">
-              <a:spcAft>
-                <a:spcPts val="800"/>
-              </a:spcAft>
-              <a:buNone/>
-            </a:pPr>
-            <a:r>
-              <a:rPr lang="en-US" sz="4000" dirty="0">
-                <a:solidFill>
-                  <a:srgbClr val="111111"/>
-                </a:solidFill>
-                <a:latin typeface="Times New Roman" pitchFamily="34" charset="0"/>
-                <a:ea typeface="Times New Roman" pitchFamily="34" charset="-122"/>
-                <a:cs typeface="Times New Roman" pitchFamily="34" charset="-120"/>
-              </a:rPr>
-              <a:t>There is little evapotranspiration to cool the air. Drains remove rainwater quickly.</a:t>
-            </a:r>
-            <a:endParaRPr lang="en-US" sz="4000" dirty="0"/>
+              <a:t>Illustration: the urban heat island</a:t>
+            </a:r>
+            <a:endParaRPr lang="en-US" sz="1600" dirty="0"/>
           </a:p>
         </p:txBody>
       </p:sp>
@@ -16515,7 +16846,7 @@
         <p:spPr>
           <a:xfrm>
             <a:off x="0" y="658368"/>
-            <a:ext cx="3840480" cy="5833872"/>
+            <a:ext cx="1463040" cy="5833872"/>
           </a:xfrm>
           <a:prstGeom prst="rect">
             <a:avLst/>
@@ -16530,8 +16861,8 @@
         </p:nvSpPr>
         <p:spPr>
           <a:xfrm>
-            <a:off x="4069080" y="1005840"/>
-            <a:ext cx="7802575" cy="731520"/>
+            <a:off x="1691640" y="1005840"/>
+            <a:ext cx="10180015" cy="731520"/>
           </a:xfrm>
           <a:prstGeom prst="rect">
             <a:avLst/>
@@ -16557,7 +16888,7 @@
                 <a:ea typeface="Times New Roman" pitchFamily="34" charset="-122"/>
                 <a:cs typeface="Times New Roman" pitchFamily="34" charset="-120"/>
               </a:rPr>
-              <a:t>3. Lakeside and Forest Climates</a:t>
+              <a:t>2. Characteristics of Urban Climates</a:t>
             </a:r>
             <a:endParaRPr lang="en-US" sz="3600" dirty="0"/>
           </a:p>
@@ -16571,8 +16902,8 @@
         </p:nvSpPr>
         <p:spPr>
           <a:xfrm>
-            <a:off x="4069080" y="1783080"/>
-            <a:ext cx="7802575" cy="4663440"/>
+            <a:off x="1691640" y="1783080"/>
+            <a:ext cx="10180015" cy="4663440"/>
           </a:xfrm>
           <a:prstGeom prst="rect">
             <a:avLst/>
@@ -16591,7 +16922,7 @@
               <a:buNone/>
             </a:pPr>
             <a:r>
-              <a:rPr lang="en-US" sz="4000" i="1" dirty="0">
+              <a:rPr lang="en-US" sz="4000" b="1" dirty="0">
                 <a:solidFill>
                   <a:srgbClr val="111111"/>
                 </a:solidFill>
@@ -16599,11 +16930,8 @@
                 <a:ea typeface="Times New Roman" pitchFamily="34" charset="-122"/>
                 <a:cs typeface="Times New Roman" pitchFamily="34" charset="-120"/>
               </a:rPr>
-              <a:t>Other micro-climates include:</a:t>
-            </a:r>
-            <a:endParaRPr lang="en-US" sz="4000" dirty="0"/>
-          </a:p>
-          <a:p>
+              <a:t>Lower humidity: </a:t>
+            </a:r>
             <a:pPr algn="l" indent="0" marL="0">
               <a:spcAft>
                 <a:spcPts val="800"/>
@@ -16611,7 +16939,7 @@
               <a:buNone/>
             </a:pPr>
             <a:r>
-              <a:rPr lang="en-US" sz="4000" b="1" dirty="0">
+              <a:rPr lang="en-US" sz="4000" dirty="0">
                 <a:solidFill>
                   <a:srgbClr val="111111"/>
                 </a:solidFill>
@@ -16619,8 +16947,11 @@
                 <a:ea typeface="Times New Roman" pitchFamily="34" charset="-122"/>
                 <a:cs typeface="Times New Roman" pitchFamily="34" charset="-120"/>
               </a:rPr>
-              <a:t>Lakeside climate: </a:t>
-            </a:r>
+              <a:t>Fewer plants and less water mean less evapotranspiration and drier air.</a:t>
+            </a:r>
+            <a:endParaRPr lang="en-US" sz="4000" dirty="0"/>
+          </a:p>
+          <a:p>
             <a:pPr algn="l" indent="0" marL="0">
               <a:spcAft>
                 <a:spcPts val="800"/>
@@ -16628,7 +16959,7 @@
               <a:buNone/>
             </a:pPr>
             <a:r>
-              <a:rPr lang="en-US" sz="4000" dirty="0">
+              <a:rPr lang="en-US" sz="4000" b="1" dirty="0">
                 <a:solidFill>
                   <a:srgbClr val="111111"/>
                 </a:solidFill>
@@ -16636,7 +16967,61 @@
                 <a:ea typeface="Times New Roman" pitchFamily="34" charset="-122"/>
                 <a:cs typeface="Times New Roman" pitchFamily="34" charset="-120"/>
               </a:rPr>
-              <a:t>Lakes heat and cool slowly, so lakeside areas have smaller temperature ranges and lake breezes. Humidity and fog are higher, as around Lake Chad.</a:t>
+              <a:t>Different winds: </a:t>
+            </a:r>
+            <a:pPr algn="l" indent="0" marL="0">
+              <a:spcAft>
+                <a:spcPts val="800"/>
+              </a:spcAft>
+              <a:buNone/>
+            </a:pPr>
+            <a:r>
+              <a:rPr lang="en-US" sz="4000" dirty="0">
+                <a:solidFill>
+                  <a:srgbClr val="111111"/>
+                </a:solidFill>
+                <a:latin typeface="Times New Roman" pitchFamily="34" charset="0"/>
+                <a:ea typeface="Times New Roman" pitchFamily="34" charset="-122"/>
+                <a:cs typeface="Times New Roman" pitchFamily="34" charset="-120"/>
+              </a:rPr>
+              <a:t>Buildings slow the wind or channel it along streets (canyon effect).</a:t>
+            </a:r>
+            <a:endParaRPr lang="en-US" sz="4000" dirty="0"/>
+          </a:p>
+          <a:p>
+            <a:pPr algn="l" indent="0" marL="0">
+              <a:spcAft>
+                <a:spcPts val="800"/>
+              </a:spcAft>
+              <a:buNone/>
+            </a:pPr>
+            <a:r>
+              <a:rPr lang="en-US" sz="4000" b="1" dirty="0">
+                <a:solidFill>
+                  <a:srgbClr val="111111"/>
+                </a:solidFill>
+                <a:latin typeface="Times New Roman" pitchFamily="34" charset="0"/>
+                <a:ea typeface="Times New Roman" pitchFamily="34" charset="-122"/>
+                <a:cs typeface="Times New Roman" pitchFamily="34" charset="-120"/>
+              </a:rPr>
+              <a:t>More pollution: </a:t>
+            </a:r>
+            <a:pPr algn="l" indent="0" marL="0">
+              <a:spcAft>
+                <a:spcPts val="800"/>
+              </a:spcAft>
+              <a:buNone/>
+            </a:pPr>
+            <a:r>
+              <a:rPr lang="en-US" sz="4000" dirty="0">
+                <a:solidFill>
+                  <a:srgbClr val="111111"/>
+                </a:solidFill>
+                <a:latin typeface="Times New Roman" pitchFamily="34" charset="0"/>
+                <a:ea typeface="Times New Roman" pitchFamily="34" charset="-122"/>
+                <a:cs typeface="Times New Roman" pitchFamily="34" charset="-120"/>
+              </a:rPr>
+              <a:t>Dust, smoke and gases from vehicles, generators and industries are concentrated.</a:t>
             </a:r>
             <a:endParaRPr lang="en-US" sz="4000" dirty="0"/>
           </a:p>
@@ -16754,9 +17139,109 @@
           </a:p>
         </p:txBody>
       </p:sp>
+      <p:sp>
+        <p:nvSpPr>
+          <p:cNvPr id="3" name="Text 1"/>
+          <p:cNvSpPr/>
+          <p:nvPr/>
+        </p:nvSpPr>
+        <p:spPr>
+          <a:xfrm>
+            <a:off x="365760" y="1005840"/>
+            <a:ext cx="11460175" cy="731520"/>
+          </a:xfrm>
+          <a:prstGeom prst="rect">
+            <a:avLst/>
+          </a:prstGeom>
+          <a:noFill/>
+          <a:ln/>
+        </p:spPr>
+        <p:txBody>
+          <a:bodyPr wrap="square" lIns="0" tIns="0" rIns="0" bIns="0" rtlCol="0" anchor="ctr">
+            <a:normAutofit/>
+          </a:bodyPr>
+          <a:lstStyle/>
+          <a:p>
+            <a:pPr algn="ctr" indent="0" marL="0">
+              <a:buNone/>
+            </a:pPr>
+            <a:r>
+              <a:rPr lang="en-US" sz="3600" b="1" dirty="0">
+                <a:solidFill>
+                  <a:srgbClr val="990011"/>
+                </a:solidFill>
+                <a:latin typeface="Times New Roman" pitchFamily="34" charset="0"/>
+                <a:ea typeface="Times New Roman" pitchFamily="34" charset="-122"/>
+                <a:cs typeface="Times New Roman" pitchFamily="34" charset="-120"/>
+              </a:rPr>
+              <a:t>2. Characteristics of Urban Climates</a:t>
+            </a:r>
+            <a:endParaRPr lang="en-US" sz="3600" dirty="0"/>
+          </a:p>
+        </p:txBody>
+      </p:sp>
+      <p:sp>
+        <p:nvSpPr>
+          <p:cNvPr id="4" name="Text 2"/>
+          <p:cNvSpPr/>
+          <p:nvPr/>
+        </p:nvSpPr>
+        <p:spPr>
+          <a:xfrm>
+            <a:off x="365760" y="1783080"/>
+            <a:ext cx="4846320" cy="4617720"/>
+          </a:xfrm>
+          <a:prstGeom prst="rect">
+            <a:avLst/>
+          </a:prstGeom>
+          <a:noFill/>
+          <a:ln/>
+        </p:spPr>
+        <p:txBody>
+          <a:bodyPr wrap="square" lIns="0" tIns="0" rIns="0" bIns="0" rtlCol="0" anchor="t"/>
+          <a:lstStyle/>
+          <a:p>
+            <a:pPr algn="l" indent="0" marL="0">
+              <a:spcAft>
+                <a:spcPts val="800"/>
+              </a:spcAft>
+              <a:buNone/>
+            </a:pPr>
+            <a:r>
+              <a:rPr lang="en-US" sz="3600" b="1" dirty="0">
+                <a:solidFill>
+                  <a:srgbClr val="111111"/>
+                </a:solidFill>
+                <a:latin typeface="Times New Roman" pitchFamily="34" charset="0"/>
+                <a:ea typeface="Times New Roman" pitchFamily="34" charset="-122"/>
+                <a:cs typeface="Times New Roman" pitchFamily="34" charset="-120"/>
+              </a:rPr>
+              <a:t>Slightly more rain: </a:t>
+            </a:r>
+            <a:pPr algn="l" indent="0" marL="0">
+              <a:spcAft>
+                <a:spcPts val="800"/>
+              </a:spcAft>
+              <a:buNone/>
+            </a:pPr>
+            <a:r>
+              <a:rPr lang="en-US" sz="3600" dirty="0">
+                <a:solidFill>
+                  <a:srgbClr val="111111"/>
+                </a:solidFill>
+                <a:latin typeface="Times New Roman" pitchFamily="34" charset="0"/>
+                <a:ea typeface="Times New Roman" pitchFamily="34" charset="-122"/>
+                <a:cs typeface="Times New Roman" pitchFamily="34" charset="-120"/>
+              </a:rPr>
+              <a:t>Extra heat and particles can trigger convectional storms over the city.</a:t>
+            </a:r>
+            <a:endParaRPr lang="en-US" sz="3600" dirty="0"/>
+          </a:p>
+        </p:txBody>
+      </p:sp>
       <p:pic>
         <p:nvPicPr>
-          <p:cNvPr id="3" name="Image 0" descr="/home/claude/f4/img/minesec_sheet.png">    </p:cNvPr>
+          <p:cNvPr id="5" name="Image 0" descr="/home/claude/f4/img/v2/clim2_urban.png">    </p:cNvPr>
           <p:cNvPicPr>
             <a:picLocks noChangeAspect="1"/>
           </p:cNvPicPr>
@@ -16770,8 +17255,8 @@
         </p:blipFill>
         <p:spPr>
           <a:xfrm>
-            <a:off x="0" y="658368"/>
-            <a:ext cx="5120640" cy="5833872"/>
+            <a:off x="5349240" y="2617506"/>
+            <a:ext cx="6659575" cy="2601397"/>
           </a:xfrm>
           <a:prstGeom prst="rect">
             <a:avLst/>
@@ -16780,14 +17265,14 @@
       </p:pic>
       <p:sp>
         <p:nvSpPr>
-          <p:cNvPr id="4" name="Text 1"/>
+          <p:cNvPr id="6" name="Text 3"/>
           <p:cNvSpPr/>
           <p:nvPr/>
         </p:nvSpPr>
         <p:spPr>
           <a:xfrm>
-            <a:off x="5349240" y="1005840"/>
-            <a:ext cx="6522415" cy="731520"/>
+            <a:off x="5349240" y="6089904"/>
+            <a:ext cx="6659575" cy="347472"/>
           </a:xfrm>
           <a:prstGeom prst="rect">
             <a:avLst/>
@@ -16796,85 +17281,24 @@
           <a:ln/>
         </p:spPr>
         <p:txBody>
-          <a:bodyPr wrap="square" lIns="0" tIns="0" rIns="0" bIns="0" rtlCol="0" anchor="ctr">
-            <a:normAutofit/>
-          </a:bodyPr>
+          <a:bodyPr wrap="square" lIns="0" tIns="0" rIns="0" bIns="0" rtlCol="0" anchor="ctr"/>
           <a:lstStyle/>
           <a:p>
             <a:pPr algn="ctr" indent="0" marL="0">
               <a:buNone/>
             </a:pPr>
             <a:r>
-              <a:rPr lang="en-US" sz="3600" b="1" dirty="0">
-                <a:solidFill>
-                  <a:srgbClr val="990011"/>
+              <a:rPr lang="en-US" sz="1600" i="1" dirty="0">
+                <a:solidFill>
+                  <a:srgbClr val="555555"/>
                 </a:solidFill>
                 <a:latin typeface="Times New Roman" pitchFamily="34" charset="0"/>
                 <a:ea typeface="Times New Roman" pitchFamily="34" charset="-122"/>
                 <a:cs typeface="Times New Roman" pitchFamily="34" charset="-120"/>
               </a:rPr>
-              <a:t>3. Lakeside and Forest Climates (continued)</a:t>
-            </a:r>
-            <a:endParaRPr lang="en-US" sz="3600" dirty="0"/>
-          </a:p>
-        </p:txBody>
-      </p:sp>
-      <p:sp>
-        <p:nvSpPr>
-          <p:cNvPr id="5" name="Text 2"/>
-          <p:cNvSpPr/>
-          <p:nvPr/>
-        </p:nvSpPr>
-        <p:spPr>
-          <a:xfrm>
-            <a:off x="5349240" y="1783080"/>
-            <a:ext cx="6522415" cy="4663440"/>
-          </a:xfrm>
-          <a:prstGeom prst="rect">
-            <a:avLst/>
-          </a:prstGeom>
-          <a:noFill/>
-          <a:ln/>
-        </p:spPr>
-        <p:txBody>
-          <a:bodyPr wrap="square" lIns="0" tIns="0" rIns="0" bIns="0" rtlCol="0" anchor="t"/>
-          <a:lstStyle/>
-          <a:p>
-            <a:pPr algn="l" indent="0" marL="0">
-              <a:spcAft>
-                <a:spcPts val="800"/>
-              </a:spcAft>
-              <a:buNone/>
-            </a:pPr>
-            <a:r>
-              <a:rPr lang="en-US" sz="4000" b="1" dirty="0">
-                <a:solidFill>
-                  <a:srgbClr val="111111"/>
-                </a:solidFill>
-                <a:latin typeface="Times New Roman" pitchFamily="34" charset="0"/>
-                <a:ea typeface="Times New Roman" pitchFamily="34" charset="-122"/>
-                <a:cs typeface="Times New Roman" pitchFamily="34" charset="-120"/>
-              </a:rPr>
-              <a:t>Forest climate: </a:t>
-            </a:r>
-            <a:pPr algn="l" indent="0" marL="0">
-              <a:spcAft>
-                <a:spcPts val="800"/>
-              </a:spcAft>
-              <a:buNone/>
-            </a:pPr>
-            <a:r>
-              <a:rPr lang="en-US" sz="4000" dirty="0">
-                <a:solidFill>
-                  <a:srgbClr val="111111"/>
-                </a:solidFill>
-                <a:latin typeface="Times New Roman" pitchFamily="34" charset="0"/>
-                <a:ea typeface="Times New Roman" pitchFamily="34" charset="-122"/>
-                <a:cs typeface="Times New Roman" pitchFamily="34" charset="-120"/>
-              </a:rPr>
-              <a:t>Under the forest canopy it is cooler, darker and more humid than outside. The wind is weak and the daily range is small.</a:t>
-            </a:r>
-            <a:endParaRPr lang="en-US" sz="4000" dirty="0"/>
+              <a:t>Illustration: town and countryside compared</a:t>
+            </a:r>
+            <a:endParaRPr lang="en-US" sz="1600" dirty="0"/>
           </a:p>
         </p:txBody>
       </p:sp>
@@ -16984,15 +17408,135 @@
                 <a:ea typeface="Calibri" pitchFamily="34" charset="-122"/>
                 <a:cs typeface="Calibri" pitchFamily="34" charset="-120"/>
               </a:rPr>
-              <a:t>FORMATIVE EVALUATION</a:t>
+              <a:t>BOARD SUMMARY</a:t>
             </a:r>
             <a:endParaRPr lang="en-US" sz="1400" dirty="0"/>
+          </a:p>
+        </p:txBody>
+      </p:sp>
+      <p:sp>
+        <p:nvSpPr>
+          <p:cNvPr id="3" name="Text 1"/>
+          <p:cNvSpPr/>
+          <p:nvPr/>
+        </p:nvSpPr>
+        <p:spPr>
+          <a:xfrm>
+            <a:off x="365760" y="1005840"/>
+            <a:ext cx="11460175" cy="731520"/>
+          </a:xfrm>
+          <a:prstGeom prst="rect">
+            <a:avLst/>
+          </a:prstGeom>
+          <a:noFill/>
+          <a:ln/>
+        </p:spPr>
+        <p:txBody>
+          <a:bodyPr wrap="square" lIns="0" tIns="0" rIns="0" bIns="0" rtlCol="0" anchor="ctr">
+            <a:normAutofit/>
+          </a:bodyPr>
+          <a:lstStyle/>
+          <a:p>
+            <a:pPr algn="ctr" indent="0" marL="0">
+              <a:buNone/>
+            </a:pPr>
+            <a:r>
+              <a:rPr lang="en-US" sz="3600" b="1" dirty="0">
+                <a:solidFill>
+                  <a:srgbClr val="990011"/>
+                </a:solidFill>
+                <a:latin typeface="Times New Roman" pitchFamily="34" charset="0"/>
+                <a:ea typeface="Times New Roman" pitchFamily="34" charset="-122"/>
+                <a:cs typeface="Times New Roman" pitchFamily="34" charset="-120"/>
+              </a:rPr>
+              <a:t>3. Factors of the Urban Heat Island</a:t>
+            </a:r>
+            <a:endParaRPr lang="en-US" sz="3600" dirty="0"/>
+          </a:p>
+        </p:txBody>
+      </p:sp>
+      <p:sp>
+        <p:nvSpPr>
+          <p:cNvPr id="4" name="Text 2"/>
+          <p:cNvSpPr/>
+          <p:nvPr/>
+        </p:nvSpPr>
+        <p:spPr>
+          <a:xfrm>
+            <a:off x="365760" y="1783080"/>
+            <a:ext cx="4846320" cy="4617720"/>
+          </a:xfrm>
+          <a:prstGeom prst="rect">
+            <a:avLst/>
+          </a:prstGeom>
+          <a:noFill/>
+          <a:ln/>
+        </p:spPr>
+        <p:txBody>
+          <a:bodyPr wrap="square" lIns="0" tIns="0" rIns="0" bIns="0" rtlCol="0" anchor="t"/>
+          <a:lstStyle/>
+          <a:p>
+            <a:pPr algn="l" indent="0" marL="0">
+              <a:spcAft>
+                <a:spcPts val="800"/>
+              </a:spcAft>
+              <a:buNone/>
+            </a:pPr>
+            <a:r>
+              <a:rPr lang="en-US" sz="3600" i="1" dirty="0">
+                <a:solidFill>
+                  <a:srgbClr val="111111"/>
+                </a:solidFill>
+                <a:latin typeface="Times New Roman" pitchFamily="34" charset="0"/>
+                <a:ea typeface="Times New Roman" pitchFamily="34" charset="-122"/>
+                <a:cs typeface="Times New Roman" pitchFamily="34" charset="-120"/>
+              </a:rPr>
+              <a:t>The urban heat island is caused by the following factors:</a:t>
+            </a:r>
+            <a:endParaRPr lang="en-US" sz="3600" dirty="0"/>
+          </a:p>
+          <a:p>
+            <a:pPr algn="l" indent="0" marL="0">
+              <a:spcAft>
+                <a:spcPts val="800"/>
+              </a:spcAft>
+              <a:buNone/>
+            </a:pPr>
+            <a:r>
+              <a:rPr lang="en-US" sz="3600" b="1" dirty="0">
+                <a:solidFill>
+                  <a:srgbClr val="111111"/>
+                </a:solidFill>
+                <a:latin typeface="Times New Roman" pitchFamily="34" charset="0"/>
+                <a:ea typeface="Times New Roman" pitchFamily="34" charset="-122"/>
+                <a:cs typeface="Times New Roman" pitchFamily="34" charset="-120"/>
+              </a:rPr>
+              <a:t>Surfaces: </a:t>
+            </a:r>
+            <a:pPr algn="l" indent="0" marL="0">
+              <a:spcAft>
+                <a:spcPts val="800"/>
+              </a:spcAft>
+              <a:buNone/>
+            </a:pPr>
+            <a:r>
+              <a:rPr lang="en-US" sz="3600" dirty="0">
+                <a:solidFill>
+                  <a:srgbClr val="111111"/>
+                </a:solidFill>
+                <a:latin typeface="Times New Roman" pitchFamily="34" charset="0"/>
+                <a:ea typeface="Times New Roman" pitchFamily="34" charset="-122"/>
+                <a:cs typeface="Times New Roman" pitchFamily="34" charset="-120"/>
+              </a:rPr>
+              <a:t>Tarred roads, concrete and bricks absorb solar energy by day and release it slowly at night.</a:t>
+            </a:r>
+            <a:endParaRPr lang="en-US" sz="3600" dirty="0"/>
           </a:p>
         </p:txBody>
       </p:sp>
       <p:pic>
         <p:nvPicPr>
-          <p:cNvPr id="3" name="Image 0" descr="/home/claude/f4/img/minesec_sheet.png">    </p:cNvPr>
+          <p:cNvPr id="5" name="Image 0" descr="/home/claude/f4/img/v2/lsa_douala.jpg">    </p:cNvPr>
           <p:cNvPicPr>
             <a:picLocks noChangeAspect="1"/>
           </p:cNvPicPr>
@@ -17006,8 +17550,8 @@
         </p:blipFill>
         <p:spPr>
           <a:xfrm>
-            <a:off x="0" y="658368"/>
-            <a:ext cx="5120640" cy="5833872"/>
+            <a:off x="5349240" y="2071212"/>
+            <a:ext cx="6659575" cy="3693983"/>
           </a:xfrm>
           <a:prstGeom prst="rect">
             <a:avLst/>
@@ -17016,14 +17560,14 @@
       </p:pic>
       <p:sp>
         <p:nvSpPr>
-          <p:cNvPr id="4" name="Text 1"/>
+          <p:cNvPr id="6" name="Text 3"/>
           <p:cNvSpPr/>
           <p:nvPr/>
         </p:nvSpPr>
         <p:spPr>
           <a:xfrm>
-            <a:off x="5349240" y="1005840"/>
-            <a:ext cx="6522415" cy="731520"/>
+            <a:off x="5349240" y="6089904"/>
+            <a:ext cx="6659575" cy="347472"/>
           </a:xfrm>
           <a:prstGeom prst="rect">
             <a:avLst/>
@@ -17032,68 +17576,24 @@
           <a:ln/>
         </p:spPr>
         <p:txBody>
-          <a:bodyPr wrap="square" lIns="0" tIns="0" rIns="0" bIns="0" rtlCol="0" anchor="ctr">
-            <a:normAutofit/>
-          </a:bodyPr>
+          <a:bodyPr wrap="square" lIns="0" tIns="0" rIns="0" bIns="0" rtlCol="0" anchor="ctr"/>
           <a:lstStyle/>
           <a:p>
             <a:pPr algn="ctr" indent="0" marL="0">
               <a:buNone/>
             </a:pPr>
             <a:r>
-              <a:rPr lang="en-US" sz="3600" b="1" dirty="0">
-                <a:solidFill>
-                  <a:srgbClr val="990011"/>
+              <a:rPr lang="en-US" sz="1600" i="1" dirty="0">
+                <a:solidFill>
+                  <a:srgbClr val="555555"/>
                 </a:solidFill>
                 <a:latin typeface="Times New Roman" pitchFamily="34" charset="0"/>
                 <a:ea typeface="Times New Roman" pitchFamily="34" charset="-122"/>
                 <a:cs typeface="Times New Roman" pitchFamily="34" charset="-120"/>
               </a:rPr>
-              <a:t>Evaluation 1</a:t>
-            </a:r>
-            <a:endParaRPr lang="en-US" sz="3600" dirty="0"/>
-          </a:p>
-        </p:txBody>
-      </p:sp>
-      <p:sp>
-        <p:nvSpPr>
-          <p:cNvPr id="5" name="Text 2"/>
-          <p:cNvSpPr/>
-          <p:nvPr/>
-        </p:nvSpPr>
-        <p:spPr>
-          <a:xfrm>
-            <a:off x="5349240" y="1783080"/>
-            <a:ext cx="6522415" cy="4663440"/>
-          </a:xfrm>
-          <a:prstGeom prst="rect">
-            <a:avLst/>
-          </a:prstGeom>
-          <a:noFill/>
-          <a:ln/>
-        </p:spPr>
-        <p:txBody>
-          <a:bodyPr wrap="square" lIns="0" tIns="0" rIns="0" bIns="0" rtlCol="0" anchor="t"/>
-          <a:lstStyle/>
-          <a:p>
-            <a:pPr algn="l" indent="0" marL="0">
-              <a:spcAft>
-                <a:spcPts val="800"/>
-              </a:spcAft>
-              <a:buNone/>
-            </a:pPr>
-            <a:r>
-              <a:rPr lang="en-US" sz="4000" dirty="0">
-                <a:solidFill>
-                  <a:srgbClr val="111111"/>
-                </a:solidFill>
-                <a:latin typeface="Times New Roman" pitchFamily="34" charset="0"/>
-                <a:ea typeface="Times New Roman" pitchFamily="34" charset="-122"/>
-                <a:cs typeface="Times New Roman" pitchFamily="34" charset="-120"/>
-              </a:rPr>
-              <a:t>What is a micro-climate?</a:t>
-            </a:r>
-            <a:endParaRPr lang="en-US" sz="4000" dirty="0"/>
+              <a:t>Illustration: a large city</a:t>
+            </a:r>
+            <a:endParaRPr lang="en-US" sz="1600" dirty="0"/>
           </a:p>
         </p:txBody>
       </p:sp>
@@ -17203,7 +17703,7 @@
                 <a:ea typeface="Calibri" pitchFamily="34" charset="-122"/>
                 <a:cs typeface="Calibri" pitchFamily="34" charset="-120"/>
               </a:rPr>
-              <a:t>FORMATIVE EVALUATION</a:t>
+              <a:t>BOARD SUMMARY</a:t>
             </a:r>
             <a:endParaRPr lang="en-US" sz="1400" dirty="0"/>
           </a:p>
@@ -17226,7 +17726,7 @@
         <p:spPr>
           <a:xfrm>
             <a:off x="0" y="658368"/>
-            <a:ext cx="5120640" cy="5833872"/>
+            <a:ext cx="3840480" cy="5833872"/>
           </a:xfrm>
           <a:prstGeom prst="rect">
             <a:avLst/>
@@ -17241,8 +17741,8 @@
         </p:nvSpPr>
         <p:spPr>
           <a:xfrm>
-            <a:off x="5349240" y="1005840"/>
-            <a:ext cx="6522415" cy="731520"/>
+            <a:off x="4069080" y="1005840"/>
+            <a:ext cx="7802575" cy="731520"/>
           </a:xfrm>
           <a:prstGeom prst="rect">
             <a:avLst/>
@@ -17268,7 +17768,7 @@
                 <a:ea typeface="Times New Roman" pitchFamily="34" charset="-122"/>
                 <a:cs typeface="Times New Roman" pitchFamily="34" charset="-120"/>
               </a:rPr>
-              <a:t>Expected Answer</a:t>
+              <a:t>3. Factors of the Urban Heat Island</a:t>
             </a:r>
             <a:endParaRPr lang="en-US" sz="3600" dirty="0"/>
           </a:p>
@@ -17282,8 +17782,8 @@
         </p:nvSpPr>
         <p:spPr>
           <a:xfrm>
-            <a:off x="5349240" y="1783080"/>
-            <a:ext cx="6522415" cy="4663440"/>
+            <a:off x="4069080" y="1783080"/>
+            <a:ext cx="7802575" cy="4663440"/>
           </a:xfrm>
           <a:prstGeom prst="rect">
             <a:avLst/>
@@ -17302,7 +17802,7 @@
               <a:buNone/>
             </a:pPr>
             <a:r>
-              <a:rPr lang="en-US" sz="4000" dirty="0">
+              <a:rPr lang="en-US" sz="4000" b="1" dirty="0">
                 <a:solidFill>
                   <a:srgbClr val="111111"/>
                 </a:solidFill>
@@ -17310,7 +17810,61 @@
                 <a:ea typeface="Times New Roman" pitchFamily="34" charset="-122"/>
                 <a:cs typeface="Times New Roman" pitchFamily="34" charset="-120"/>
               </a:rPr>
-              <a:t>The climate of a small area that differs from the area around it.</a:t>
+              <a:t>Anthropogenic heat: </a:t>
+            </a:r>
+            <a:pPr algn="l" indent="0" marL="0">
+              <a:spcAft>
+                <a:spcPts val="800"/>
+              </a:spcAft>
+              <a:buNone/>
+            </a:pPr>
+            <a:r>
+              <a:rPr lang="en-US" sz="4000" dirty="0">
+                <a:solidFill>
+                  <a:srgbClr val="111111"/>
+                </a:solidFill>
+                <a:latin typeface="Times New Roman" pitchFamily="34" charset="0"/>
+                <a:ea typeface="Times New Roman" pitchFamily="34" charset="-122"/>
+                <a:cs typeface="Times New Roman" pitchFamily="34" charset="-120"/>
+              </a:rPr>
+              <a:t>Cars, moto-taxis, generators, air conditioners, factories and crowds release heat.</a:t>
+            </a:r>
+            <a:endParaRPr lang="en-US" sz="4000" dirty="0"/>
+          </a:p>
+          <a:p>
+            <a:pPr algn="l" indent="0" marL="0">
+              <a:spcAft>
+                <a:spcPts val="800"/>
+              </a:spcAft>
+              <a:buNone/>
+            </a:pPr>
+            <a:r>
+              <a:rPr lang="en-US" sz="4000" b="1" dirty="0">
+                <a:solidFill>
+                  <a:srgbClr val="111111"/>
+                </a:solidFill>
+                <a:latin typeface="Times New Roman" pitchFamily="34" charset="0"/>
+                <a:ea typeface="Times New Roman" pitchFamily="34" charset="-122"/>
+                <a:cs typeface="Times New Roman" pitchFamily="34" charset="-120"/>
+              </a:rPr>
+              <a:t>Reduced evapotranspiration: </a:t>
+            </a:r>
+            <a:pPr algn="l" indent="0" marL="0">
+              <a:spcAft>
+                <a:spcPts val="800"/>
+              </a:spcAft>
+              <a:buNone/>
+            </a:pPr>
+            <a:r>
+              <a:rPr lang="en-US" sz="4000" dirty="0">
+                <a:solidFill>
+                  <a:srgbClr val="111111"/>
+                </a:solidFill>
+                <a:latin typeface="Times New Roman" pitchFamily="34" charset="0"/>
+                <a:ea typeface="Times New Roman" pitchFamily="34" charset="-122"/>
+                <a:cs typeface="Times New Roman" pitchFamily="34" charset="-120"/>
+              </a:rPr>
+              <a:t>Few trees, gardens and open soils mean little natural cooling.</a:t>
             </a:r>
             <a:endParaRPr lang="en-US" sz="4000" dirty="0"/>
           </a:p>
@@ -17422,7 +17976,7 @@
                 <a:ea typeface="Calibri" pitchFamily="34" charset="-122"/>
                 <a:cs typeface="Calibri" pitchFamily="34" charset="-120"/>
               </a:rPr>
-              <a:t>FORMATIVE EVALUATION</a:t>
+              <a:t>BOARD SUMMARY</a:t>
             </a:r>
             <a:endParaRPr lang="en-US" sz="1400" dirty="0"/>
           </a:p>
@@ -17445,7 +17999,7 @@
         <p:spPr>
           <a:xfrm>
             <a:off x="0" y="658368"/>
-            <a:ext cx="5120640" cy="5833872"/>
+            <a:ext cx="3840480" cy="5833872"/>
           </a:xfrm>
           <a:prstGeom prst="rect">
             <a:avLst/>
@@ -17460,8 +18014,8 @@
         </p:nvSpPr>
         <p:spPr>
           <a:xfrm>
-            <a:off x="5349240" y="1005840"/>
-            <a:ext cx="6522415" cy="731520"/>
+            <a:off x="4069080" y="1005840"/>
+            <a:ext cx="7802575" cy="731520"/>
           </a:xfrm>
           <a:prstGeom prst="rect">
             <a:avLst/>
@@ -17487,7 +18041,7 @@
                 <a:ea typeface="Times New Roman" pitchFamily="34" charset="-122"/>
                 <a:cs typeface="Times New Roman" pitchFamily="34" charset="-120"/>
               </a:rPr>
-              <a:t>Evaluation 2</a:t>
+              <a:t>3. Factors of the Urban Heat Island (continued)</a:t>
             </a:r>
             <a:endParaRPr lang="en-US" sz="3600" dirty="0"/>
           </a:p>
@@ -17501,8 +18055,8 @@
         </p:nvSpPr>
         <p:spPr>
           <a:xfrm>
-            <a:off x="5349240" y="1783080"/>
-            <a:ext cx="6522415" cy="4663440"/>
+            <a:off x="4069080" y="1783080"/>
+            <a:ext cx="7802575" cy="4663440"/>
           </a:xfrm>
           <a:prstGeom prst="rect">
             <a:avLst/>
@@ -17521,7 +18075,7 @@
               <a:buNone/>
             </a:pPr>
             <a:r>
-              <a:rPr lang="en-US" sz="4000" dirty="0">
+              <a:rPr lang="en-US" sz="4000" b="1" dirty="0">
                 <a:solidFill>
                   <a:srgbClr val="111111"/>
                 </a:solidFill>
@@ -17529,7 +18083,61 @@
                 <a:ea typeface="Times New Roman" pitchFamily="34" charset="-122"/>
                 <a:cs typeface="Times New Roman" pitchFamily="34" charset="-120"/>
               </a:rPr>
-              <a:t>Give three characteristics of urban climate.</a:t>
+              <a:t>Urban geometry: </a:t>
+            </a:r>
+            <a:pPr algn="l" indent="0" marL="0">
+              <a:spcAft>
+                <a:spcPts val="800"/>
+              </a:spcAft>
+              <a:buNone/>
+            </a:pPr>
+            <a:r>
+              <a:rPr lang="en-US" sz="4000" dirty="0">
+                <a:solidFill>
+                  <a:srgbClr val="111111"/>
+                </a:solidFill>
+                <a:latin typeface="Times New Roman" pitchFamily="34" charset="0"/>
+                <a:ea typeface="Times New Roman" pitchFamily="34" charset="-122"/>
+                <a:cs typeface="Times New Roman" pitchFamily="34" charset="-120"/>
+              </a:rPr>
+              <a:t>Tall buildings and narrow streets form "urban canyons" that trap heat and block the wind.</a:t>
+            </a:r>
+            <a:endParaRPr lang="en-US" sz="4000" dirty="0"/>
+          </a:p>
+          <a:p>
+            <a:pPr algn="l" indent="0" marL="0">
+              <a:spcAft>
+                <a:spcPts val="800"/>
+              </a:spcAft>
+              <a:buNone/>
+            </a:pPr>
+            <a:r>
+              <a:rPr lang="en-US" sz="4000" b="1" dirty="0">
+                <a:solidFill>
+                  <a:srgbClr val="111111"/>
+                </a:solidFill>
+                <a:latin typeface="Times New Roman" pitchFamily="34" charset="0"/>
+                <a:ea typeface="Times New Roman" pitchFamily="34" charset="-122"/>
+                <a:cs typeface="Times New Roman" pitchFamily="34" charset="-120"/>
+              </a:rPr>
+              <a:t>Solutions: </a:t>
+            </a:r>
+            <a:pPr algn="l" indent="0" marL="0">
+              <a:spcAft>
+                <a:spcPts val="800"/>
+              </a:spcAft>
+              <a:buNone/>
+            </a:pPr>
+            <a:r>
+              <a:rPr lang="en-US" sz="4000" dirty="0">
+                <a:solidFill>
+                  <a:srgbClr val="111111"/>
+                </a:solidFill>
+                <a:latin typeface="Times New Roman" pitchFamily="34" charset="0"/>
+                <a:ea typeface="Times New Roman" pitchFamily="34" charset="-122"/>
+                <a:cs typeface="Times New Roman" pitchFamily="34" charset="-120"/>
+              </a:rPr>
+              <a:t>Trees, parks, light roofs and less traffic reduce urban heat.</a:t>
             </a:r>
             <a:endParaRPr lang="en-US" sz="4000" dirty="0"/>
           </a:p>
@@ -17706,7 +18314,7 @@
                 <a:ea typeface="Times New Roman" pitchFamily="34" charset="-122"/>
                 <a:cs typeface="Times New Roman" pitchFamily="34" charset="-120"/>
               </a:rPr>
-              <a:t>Expected Answer</a:t>
+              <a:t>Evaluation 1</a:t>
             </a:r>
             <a:endParaRPr lang="en-US" sz="3600" dirty="0"/>
           </a:p>
@@ -17748,7 +18356,7 @@
                 <a:ea typeface="Times New Roman" pitchFamily="34" charset="-122"/>
                 <a:cs typeface="Times New Roman" pitchFamily="34" charset="-120"/>
               </a:rPr>
-              <a:t>Warmer (heat island), more pollution, weaker winds (sometimes more storms).</a:t>
+              <a:t>What is the urban heat island, and give two of its causes in Garoua?</a:t>
             </a:r>
             <a:endParaRPr lang="en-US" sz="4000" dirty="0"/>
           </a:p>
@@ -17883,7 +18491,7 @@
         <p:spPr>
           <a:xfrm>
             <a:off x="0" y="658368"/>
-            <a:ext cx="3840480" cy="5833872"/>
+            <a:ext cx="5120640" cy="5833872"/>
           </a:xfrm>
           <a:prstGeom prst="rect">
             <a:avLst/>
@@ -17898,8 +18506,8 @@
         </p:nvSpPr>
         <p:spPr>
           <a:xfrm>
-            <a:off x="4069080" y="1005840"/>
-            <a:ext cx="7802575" cy="731520"/>
+            <a:off x="5349240" y="1005840"/>
+            <a:ext cx="6522415" cy="731520"/>
           </a:xfrm>
           <a:prstGeom prst="rect">
             <a:avLst/>
@@ -17939,8 +18547,8 @@
         </p:nvSpPr>
         <p:spPr>
           <a:xfrm>
-            <a:off x="4069080" y="1783080"/>
-            <a:ext cx="7802575" cy="4663440"/>
+            <a:off x="5349240" y="1783080"/>
+            <a:ext cx="6522415" cy="4663440"/>
           </a:xfrm>
           <a:prstGeom prst="rect">
             <a:avLst/>
@@ -17967,7 +18575,7 @@
                 <a:ea typeface="Times New Roman" pitchFamily="34" charset="-122"/>
                 <a:cs typeface="Times New Roman" pitchFamily="34" charset="-120"/>
               </a:rPr>
-              <a:t>Stay indoors or in a car; do not shelter under a lone tree; keep away from metal fences and water; unplug electrical appliances; do not use a phone connected to the wall; wait 30 minutes after the last thunder before going out.</a:t>
+              <a:t>A micro-climate is the climate of a small area that differs from the climate of the surrounding region.</a:t>
             </a:r>
             <a:endParaRPr lang="en-US" sz="4000" dirty="0"/>
           </a:p>
@@ -18079,7 +18687,7 @@
                 <a:ea typeface="Calibri" pitchFamily="34" charset="-122"/>
                 <a:cs typeface="Calibri" pitchFamily="34" charset="-120"/>
               </a:rPr>
-              <a:t>REMEDIATION</a:t>
+              <a:t>FORMATIVE EVALUATION</a:t>
             </a:r>
             <a:endParaRPr lang="en-US" sz="1400" dirty="0"/>
           </a:p>
@@ -18102,7 +18710,7 @@
         <p:spPr>
           <a:xfrm>
             <a:off x="0" y="658368"/>
-            <a:ext cx="2468880" cy="5833872"/>
+            <a:ext cx="5120640" cy="5833872"/>
           </a:xfrm>
           <a:prstGeom prst="rect">
             <a:avLst/>
@@ -18117,8 +18725,8 @@
         </p:nvSpPr>
         <p:spPr>
           <a:xfrm>
-            <a:off x="2697480" y="1005840"/>
-            <a:ext cx="9174175" cy="731520"/>
+            <a:off x="5349240" y="1005840"/>
+            <a:ext cx="6522415" cy="731520"/>
           </a:xfrm>
           <a:prstGeom prst="rect">
             <a:avLst/>
@@ -18144,7 +18752,7 @@
                 <a:ea typeface="Times New Roman" pitchFamily="34" charset="-122"/>
                 <a:cs typeface="Times New Roman" pitchFamily="34" charset="-120"/>
               </a:rPr>
-              <a:t>Remediation</a:t>
+              <a:t>Expected Answer</a:t>
             </a:r>
             <a:endParaRPr lang="en-US" sz="3600" dirty="0"/>
           </a:p>
@@ -18158,8 +18766,8 @@
         </p:nvSpPr>
         <p:spPr>
           <a:xfrm>
-            <a:off x="2697480" y="1783080"/>
-            <a:ext cx="9174175" cy="4663440"/>
+            <a:off x="5349240" y="1783080"/>
+            <a:ext cx="6522415" cy="4663440"/>
           </a:xfrm>
           <a:prstGeom prst="rect">
             <a:avLst/>
@@ -18178,7 +18786,7 @@
               <a:buNone/>
             </a:pPr>
             <a:r>
-              <a:rPr lang="en-US" sz="4000" b="1" dirty="0">
+              <a:rPr lang="en-US" sz="4000" dirty="0">
                 <a:solidFill>
                   <a:srgbClr val="111111"/>
                 </a:solidFill>
@@ -18186,73 +18794,7 @@
                 <a:ea typeface="Times New Roman" pitchFamily="34" charset="-122"/>
                 <a:cs typeface="Times New Roman" pitchFamily="34" charset="-120"/>
               </a:rPr>
-              <a:t>Fill in the blanks:</a:t>
-            </a:r>
-            <a:endParaRPr lang="en-US" sz="4000" dirty="0"/>
-          </a:p>
-          <a:p>
-            <a:pPr algn="l" marL="342900" indent="-342900">
-              <a:spcAft>
-                <a:spcPts val="800"/>
-              </a:spcAft>
-              <a:buSzPct val="100000"/>
-              <a:buFont typeface="+mj-lt"/>
-              <a:buAutoNum type="arabicPeriod" startAt="1"/>
-            </a:pPr>
-            <a:r>
-              <a:rPr lang="en-US" sz="4000" dirty="0">
-                <a:solidFill>
-                  <a:srgbClr val="111111"/>
-                </a:solidFill>
-                <a:latin typeface="Times New Roman" pitchFamily="34" charset="0"/>
-                <a:ea typeface="Times New Roman" pitchFamily="34" charset="-122"/>
-                <a:cs typeface="Times New Roman" pitchFamily="34" charset="-120"/>
-              </a:rPr>
-              <a:t>The climate of a small area is a ______.</a:t>
-            </a:r>
-            <a:endParaRPr lang="en-US" sz="4000" dirty="0"/>
-          </a:p>
-          <a:p>
-            <a:pPr algn="l" marL="342900" indent="-342900">
-              <a:spcAft>
-                <a:spcPts val="800"/>
-              </a:spcAft>
-              <a:buSzPct val="100000"/>
-              <a:buFont typeface="+mj-lt"/>
-              <a:buAutoNum type="arabicPeriod" startAt="1"/>
-            </a:pPr>
-            <a:r>
-              <a:rPr lang="en-US" sz="4000" dirty="0">
-                <a:solidFill>
-                  <a:srgbClr val="111111"/>
-                </a:solidFill>
-                <a:latin typeface="Times New Roman" pitchFamily="34" charset="0"/>
-                <a:ea typeface="Times New Roman" pitchFamily="34" charset="-122"/>
-                <a:cs typeface="Times New Roman" pitchFamily="34" charset="-120"/>
-              </a:rPr>
-              <a:t>Towns are warmer because of the urban ______.</a:t>
-            </a:r>
-            <a:endParaRPr lang="en-US" sz="4000" dirty="0"/>
-          </a:p>
-          <a:p>
-            <a:pPr algn="l" marL="342900" indent="-342900">
-              <a:spcAft>
-                <a:spcPts val="800"/>
-              </a:spcAft>
-              <a:buSzPct val="100000"/>
-              <a:buFont typeface="+mj-lt"/>
-              <a:buAutoNum type="arabicPeriod" startAt="1"/>
-            </a:pPr>
-            <a:r>
-              <a:rPr lang="en-US" sz="4000" dirty="0">
-                <a:solidFill>
-                  <a:srgbClr val="111111"/>
-                </a:solidFill>
-                <a:latin typeface="Times New Roman" pitchFamily="34" charset="0"/>
-                <a:ea typeface="Times New Roman" pitchFamily="34" charset="-122"/>
-                <a:cs typeface="Times New Roman" pitchFamily="34" charset="-120"/>
-              </a:rPr>
-              <a:t>Forests are cooler and more ______.</a:t>
+              <a:t>The town is warmer than the countryside; causes: tar and concrete, heat from vehicles and generators, few trees (any two).</a:t>
             </a:r>
             <a:endParaRPr lang="en-US" sz="4000" dirty="0"/>
           </a:p>
@@ -18364,7 +18906,7 @@
                 <a:ea typeface="Calibri" pitchFamily="34" charset="-122"/>
                 <a:cs typeface="Calibri" pitchFamily="34" charset="-120"/>
               </a:rPr>
-              <a:t>HOMEWORK</a:t>
+              <a:t>FORMATIVE EVALUATION</a:t>
             </a:r>
             <a:endParaRPr lang="en-US" sz="1400" dirty="0"/>
           </a:p>
@@ -18429,7 +18971,7 @@
                 <a:ea typeface="Times New Roman" pitchFamily="34" charset="-122"/>
                 <a:cs typeface="Times New Roman" pitchFamily="34" charset="-120"/>
               </a:rPr>
-              <a:t>Homework</a:t>
+              <a:t>Evaluation 2</a:t>
             </a:r>
             <a:endParaRPr lang="en-US" sz="3600" dirty="0"/>
           </a:p>
@@ -18471,7 +19013,7 @@
                 <a:ea typeface="Times New Roman" pitchFamily="34" charset="-122"/>
                 <a:cs typeface="Times New Roman" pitchFamily="34" charset="-120"/>
               </a:rPr>
-              <a:t>Measure the temperature at noon in a sunny yard and under a tree. Explain the difference.</a:t>
+              <a:t>Give two differences between an urban climate and a rural climate.</a:t>
             </a:r>
             <a:endParaRPr lang="en-US" sz="4000" dirty="0"/>
           </a:p>
@@ -18583,7 +19125,7 @@
                 <a:ea typeface="Calibri" pitchFamily="34" charset="-122"/>
                 <a:cs typeface="Calibri" pitchFamily="34" charset="-120"/>
               </a:rPr>
-              <a:t>NEXT LESSON</a:t>
+              <a:t>FORMATIVE EVALUATION</a:t>
             </a:r>
             <a:endParaRPr lang="en-US" sz="1400" dirty="0"/>
           </a:p>
@@ -18648,7 +19190,7 @@
                 <a:ea typeface="Times New Roman" pitchFamily="34" charset="-122"/>
                 <a:cs typeface="Times New Roman" pitchFamily="34" charset="-120"/>
               </a:rPr>
-              <a:t>Next Lesson</a:t>
+              <a:t>Expected Answer</a:t>
             </a:r>
             <a:endParaRPr lang="en-US" sz="3600" dirty="0"/>
           </a:p>
@@ -18672,17 +19214,17 @@
           <a:ln/>
         </p:spPr>
         <p:txBody>
-          <a:bodyPr wrap="square" lIns="0" tIns="0" rIns="0" bIns="0" rtlCol="0" anchor="ctr"/>
-          <a:lstStyle/>
-          <a:p>
-            <a:pPr algn="ctr" indent="0" marL="0">
+          <a:bodyPr wrap="square" lIns="0" tIns="0" rIns="0" bIns="0" rtlCol="0" anchor="t"/>
+          <a:lstStyle/>
+          <a:p>
+            <a:pPr algn="l" indent="0" marL="0">
               <a:spcAft>
                 <a:spcPts val="800"/>
               </a:spcAft>
               <a:buNone/>
             </a:pPr>
             <a:r>
-              <a:rPr lang="en-US" sz="4000" b="1" dirty="0">
+              <a:rPr lang="en-US" sz="4000" dirty="0">
                 <a:solidFill>
                   <a:srgbClr val="111111"/>
                 </a:solidFill>
@@ -18690,27 +19232,7 @@
                 <a:ea typeface="Times New Roman" pitchFamily="34" charset="-122"/>
                 <a:cs typeface="Times New Roman" pitchFamily="34" charset="-120"/>
               </a:rPr>
-              <a:t>Our next lesson will be on:</a:t>
-            </a:r>
-            <a:endParaRPr lang="en-US" sz="4000" dirty="0"/>
-          </a:p>
-          <a:p>
-            <a:pPr algn="ctr" indent="0" marL="0">
-              <a:spcAft>
-                <a:spcPts val="800"/>
-              </a:spcAft>
-              <a:buNone/>
-            </a:pPr>
-            <a:r>
-              <a:rPr lang="en-US" sz="4000" b="1" dirty="0">
-                <a:solidFill>
-                  <a:srgbClr val="990011"/>
-                </a:solidFill>
-                <a:latin typeface="Times New Roman" pitchFamily="34" charset="0"/>
-                <a:ea typeface="Times New Roman" pitchFamily="34" charset="-122"/>
-                <a:cs typeface="Times New Roman" pitchFamily="34" charset="-120"/>
-              </a:rPr>
-              <a:t>Lesson 21: Mountain Climates</a:t>
+              <a:t>Towns are warmer, drier, less windy and more polluted (any two).</a:t>
             </a:r>
             <a:endParaRPr lang="en-US" sz="4000" dirty="0"/>
           </a:p>
@@ -18822,6 +19344,749 @@
                 <a:ea typeface="Calibri" pitchFamily="34" charset="-122"/>
                 <a:cs typeface="Calibri" pitchFamily="34" charset="-120"/>
               </a:rPr>
+              <a:t>REMEDIATION</a:t>
+            </a:r>
+            <a:endParaRPr lang="en-US" sz="1400" dirty="0"/>
+          </a:p>
+        </p:txBody>
+      </p:sp>
+      <p:pic>
+        <p:nvPicPr>
+          <p:cNvPr id="3" name="Image 0" descr="/home/claude/f4/img/minesec_sheet.png">    </p:cNvPr>
+          <p:cNvPicPr>
+            <a:picLocks noChangeAspect="1"/>
+          </p:cNvPicPr>
+          <p:nvPr/>
+        </p:nvPicPr>
+        <p:blipFill>
+          <a:blip r:embed="rId1"/>
+          <a:stretch>
+            <a:fillRect/>
+          </a:stretch>
+        </p:blipFill>
+        <p:spPr>
+          <a:xfrm>
+            <a:off x="0" y="658368"/>
+            <a:ext cx="1463040" cy="5833872"/>
+          </a:xfrm>
+          <a:prstGeom prst="rect">
+            <a:avLst/>
+          </a:prstGeom>
+        </p:spPr>
+      </p:pic>
+      <p:sp>
+        <p:nvSpPr>
+          <p:cNvPr id="4" name="Text 1"/>
+          <p:cNvSpPr/>
+          <p:nvPr/>
+        </p:nvSpPr>
+        <p:spPr>
+          <a:xfrm>
+            <a:off x="1691640" y="1005840"/>
+            <a:ext cx="10180015" cy="731520"/>
+          </a:xfrm>
+          <a:prstGeom prst="rect">
+            <a:avLst/>
+          </a:prstGeom>
+          <a:noFill/>
+          <a:ln/>
+        </p:spPr>
+        <p:txBody>
+          <a:bodyPr wrap="square" lIns="0" tIns="0" rIns="0" bIns="0" rtlCol="0" anchor="ctr">
+            <a:normAutofit/>
+          </a:bodyPr>
+          <a:lstStyle/>
+          <a:p>
+            <a:pPr algn="ctr" indent="0" marL="0">
+              <a:buNone/>
+            </a:pPr>
+            <a:r>
+              <a:rPr lang="en-US" sz="3600" b="1" dirty="0">
+                <a:solidFill>
+                  <a:srgbClr val="990011"/>
+                </a:solidFill>
+                <a:latin typeface="Times New Roman" pitchFamily="34" charset="0"/>
+                <a:ea typeface="Times New Roman" pitchFamily="34" charset="-122"/>
+                <a:cs typeface="Times New Roman" pitchFamily="34" charset="-120"/>
+              </a:rPr>
+              <a:t>Remediation</a:t>
+            </a:r>
+            <a:endParaRPr lang="en-US" sz="3600" dirty="0"/>
+          </a:p>
+        </p:txBody>
+      </p:sp>
+      <p:sp>
+        <p:nvSpPr>
+          <p:cNvPr id="5" name="Text 2"/>
+          <p:cNvSpPr/>
+          <p:nvPr/>
+        </p:nvSpPr>
+        <p:spPr>
+          <a:xfrm>
+            <a:off x="1691640" y="1783080"/>
+            <a:ext cx="10180015" cy="4663440"/>
+          </a:xfrm>
+          <a:prstGeom prst="rect">
+            <a:avLst/>
+          </a:prstGeom>
+          <a:noFill/>
+          <a:ln/>
+        </p:spPr>
+        <p:txBody>
+          <a:bodyPr wrap="square" lIns="0" tIns="0" rIns="0" bIns="0" rtlCol="0" anchor="t"/>
+          <a:lstStyle/>
+          <a:p>
+            <a:pPr algn="l" indent="0" marL="0">
+              <a:spcAft>
+                <a:spcPts val="800"/>
+              </a:spcAft>
+              <a:buNone/>
+            </a:pPr>
+            <a:r>
+              <a:rPr lang="en-US" sz="4000" b="1" dirty="0">
+                <a:solidFill>
+                  <a:srgbClr val="111111"/>
+                </a:solidFill>
+                <a:latin typeface="Times New Roman" pitchFamily="34" charset="0"/>
+                <a:ea typeface="Times New Roman" pitchFamily="34" charset="-122"/>
+                <a:cs typeface="Times New Roman" pitchFamily="34" charset="-120"/>
+              </a:rPr>
+              <a:t>Fill in the blanks:</a:t>
+            </a:r>
+            <a:endParaRPr lang="en-US" sz="4000" dirty="0"/>
+          </a:p>
+          <a:p>
+            <a:pPr algn="l" marL="342900" indent="-342900">
+              <a:spcAft>
+                <a:spcPts val="800"/>
+              </a:spcAft>
+              <a:buSzPct val="100000"/>
+              <a:buFont typeface="+mj-lt"/>
+              <a:buAutoNum type="arabicPeriod" startAt="1"/>
+            </a:pPr>
+            <a:r>
+              <a:rPr lang="en-US" sz="4000" dirty="0">
+                <a:solidFill>
+                  <a:srgbClr val="111111"/>
+                </a:solidFill>
+                <a:latin typeface="Times New Roman" pitchFamily="34" charset="0"/>
+                <a:ea typeface="Times New Roman" pitchFamily="34" charset="-122"/>
+                <a:cs typeface="Times New Roman" pitchFamily="34" charset="-120"/>
+              </a:rPr>
+              <a:t>The climate of a small area is a ______.</a:t>
+            </a:r>
+            <a:endParaRPr lang="en-US" sz="4000" dirty="0"/>
+          </a:p>
+          <a:p>
+            <a:pPr algn="l" marL="342900" indent="-342900">
+              <a:spcAft>
+                <a:spcPts val="800"/>
+              </a:spcAft>
+              <a:buSzPct val="100000"/>
+              <a:buFont typeface="+mj-lt"/>
+              <a:buAutoNum type="arabicPeriod" startAt="1"/>
+            </a:pPr>
+            <a:r>
+              <a:rPr lang="en-US" sz="4000" dirty="0">
+                <a:solidFill>
+                  <a:srgbClr val="111111"/>
+                </a:solidFill>
+                <a:latin typeface="Times New Roman" pitchFamily="34" charset="0"/>
+                <a:ea typeface="Times New Roman" pitchFamily="34" charset="-122"/>
+                <a:cs typeface="Times New Roman" pitchFamily="34" charset="-120"/>
+              </a:rPr>
+              <a:t>A town warmer than the countryside is an urban heat ______.</a:t>
+            </a:r>
+            <a:endParaRPr lang="en-US" sz="4000" dirty="0"/>
+          </a:p>
+          <a:p>
+            <a:pPr algn="l" marL="342900" indent="-342900">
+              <a:spcAft>
+                <a:spcPts val="800"/>
+              </a:spcAft>
+              <a:buSzPct val="100000"/>
+              <a:buFont typeface="+mj-lt"/>
+              <a:buAutoNum type="arabicPeriod" startAt="1"/>
+            </a:pPr>
+            <a:r>
+              <a:rPr lang="en-US" sz="4000" dirty="0">
+                <a:solidFill>
+                  <a:srgbClr val="111111"/>
+                </a:solidFill>
+                <a:latin typeface="Times New Roman" pitchFamily="34" charset="0"/>
+                <a:ea typeface="Times New Roman" pitchFamily="34" charset="-122"/>
+                <a:cs typeface="Times New Roman" pitchFamily="34" charset="-120"/>
+              </a:rPr>
+              <a:t>Heat from vehicles and machines is ______ heat.</a:t>
+            </a:r>
+            <a:endParaRPr lang="en-US" sz="4000" dirty="0"/>
+          </a:p>
+        </p:txBody>
+      </p:sp>
+      <p:sp>
+        <p:nvSpPr>
+          <p:cNvPr id="25" name="Slide Number Placeholder 0"/>
+          <p:cNvSpPr>
+            <a:spLocks noGrp="1"/>
+          </p:cNvSpPr>
+          <p:nvPr>
+            <p:ph type="sldNum" sz="quarter" idx="4294967295"/>
+          </p:nvPr>
+        </p:nvSpPr>
+        <p:spPr>
+          <a:xfrm>
+            <a:off x="27432" y="91440"/>
+            <a:ext cx="585216" cy="475488"/>
+          </a:xfrm>
+          <a:prstGeom prst="rect">
+            <a:avLst/>
+          </a:prstGeom>
+          <a:extLst>
+            <a:ext uri="{C572A759-6A51-4108-AA02-DFA0A04FC94B}">
+              <ma14:wrappingTextBoxFlag xmlns:ma14="http://schemas.microsoft.com/office/mac/drawingml/2011/main" val="0"/>
+            </a:ext>
+          </a:extLst>
+        </p:spPr>
+        <p:txBody>
+          <a:bodyPr/>
+          <a:lstStyle>
+            <a:lvl1pPr>
+              <a:defRPr sz="2000">
+                <a:solidFill>
+                  <a:srgbClr val="FFFFFF"/>
+                </a:solidFill>
+                <a:latin typeface="Calibri"/>
+                <a:ea typeface="Calibri"/>
+                <a:cs typeface="Calibri"/>
+              </a:defRPr>
+            </a:lvl1pPr>
+          </a:lstStyle>
+          <a:p>
+            <a:pPr algn="ctr"/>
+            <a:fld id="{F7021451-1387-4CA6-816F-3879F97B5CBC}" type="slidenum">
+              <a:rPr b="1" lang="en-US"/>
+              <a:t>53</a:t>
+            </a:fld>
+            <a:endParaRPr lang="en-US"/>
+          </a:p>
+        </p:txBody>
+      </p:sp>
+    </p:spTree>
+  </p:cSld>
+  <p:clrMapOvr>
+    <a:masterClrMapping/>
+  </p:clrMapOvr>
+</p:sld>
+</file>
+
+<file path=ppt/slides/slide54.xml><?xml version="1.0" encoding="utf-8"?>
+<p:sld xmlns:a="http://schemas.openxmlformats.org/drawingml/2006/main" xmlns:r="http://schemas.openxmlformats.org/officeDocument/2006/relationships" xmlns:p="http://schemas.openxmlformats.org/presentationml/2006/main">
+  <p:cSld name="Slide 54">
+    <p:spTree>
+      <p:nvGrpSpPr>
+        <p:cNvPr id="1" name=""/>
+        <p:cNvGrpSpPr/>
+        <p:nvPr/>
+      </p:nvGrpSpPr>
+      <p:grpSpPr>
+        <a:xfrm>
+          <a:off x="0" y="0"/>
+          <a:ext cx="0" cy="0"/>
+          <a:chOff x="0" y="0"/>
+          <a:chExt cx="0" cy="0"/>
+        </a:xfrm>
+      </p:grpSpPr>
+      <p:sp>
+        <p:nvSpPr>
+          <p:cNvPr id="2" name="Text 0"/>
+          <p:cNvSpPr/>
+          <p:nvPr/>
+        </p:nvSpPr>
+        <p:spPr>
+          <a:xfrm>
+            <a:off x="457200" y="713232"/>
+            <a:ext cx="11368735" cy="274320"/>
+          </a:xfrm>
+          <a:prstGeom prst="rect">
+            <a:avLst/>
+          </a:prstGeom>
+          <a:noFill/>
+          <a:ln/>
+        </p:spPr>
+        <p:txBody>
+          <a:bodyPr wrap="square" lIns="0" tIns="0" rIns="0" bIns="0" rtlCol="0" anchor="ctr"/>
+          <a:lstStyle/>
+          <a:p>
+            <a:pPr algn="r" indent="0" marL="0">
+              <a:buNone/>
+            </a:pPr>
+            <a:r>
+              <a:rPr lang="en-US" sz="1400" b="1" dirty="0">
+                <a:solidFill>
+                  <a:srgbClr val="1C3F6E"/>
+                </a:solidFill>
+                <a:latin typeface="Calibri" pitchFamily="34" charset="0"/>
+                <a:ea typeface="Calibri" pitchFamily="34" charset="-122"/>
+                <a:cs typeface="Calibri" pitchFamily="34" charset="-120"/>
+              </a:rPr>
+              <a:t>HOMEWORK</a:t>
+            </a:r>
+            <a:endParaRPr lang="en-US" sz="1400" dirty="0"/>
+          </a:p>
+        </p:txBody>
+      </p:sp>
+      <p:pic>
+        <p:nvPicPr>
+          <p:cNvPr id="3" name="Image 0" descr="/home/claude/f4/img/minesec_sheet.png">    </p:cNvPr>
+          <p:cNvPicPr>
+            <a:picLocks noChangeAspect="1"/>
+          </p:cNvPicPr>
+          <p:nvPr/>
+        </p:nvPicPr>
+        <p:blipFill>
+          <a:blip r:embed="rId1"/>
+          <a:stretch>
+            <a:fillRect/>
+          </a:stretch>
+        </p:blipFill>
+        <p:spPr>
+          <a:xfrm>
+            <a:off x="0" y="658368"/>
+            <a:ext cx="5120640" cy="5833872"/>
+          </a:xfrm>
+          <a:prstGeom prst="rect">
+            <a:avLst/>
+          </a:prstGeom>
+        </p:spPr>
+      </p:pic>
+      <p:sp>
+        <p:nvSpPr>
+          <p:cNvPr id="4" name="Text 1"/>
+          <p:cNvSpPr/>
+          <p:nvPr/>
+        </p:nvSpPr>
+        <p:spPr>
+          <a:xfrm>
+            <a:off x="5349240" y="1005840"/>
+            <a:ext cx="6522415" cy="731520"/>
+          </a:xfrm>
+          <a:prstGeom prst="rect">
+            <a:avLst/>
+          </a:prstGeom>
+          <a:noFill/>
+          <a:ln/>
+        </p:spPr>
+        <p:txBody>
+          <a:bodyPr wrap="square" lIns="0" tIns="0" rIns="0" bIns="0" rtlCol="0" anchor="ctr">
+            <a:normAutofit/>
+          </a:bodyPr>
+          <a:lstStyle/>
+          <a:p>
+            <a:pPr algn="ctr" indent="0" marL="0">
+              <a:buNone/>
+            </a:pPr>
+            <a:r>
+              <a:rPr lang="en-US" sz="3600" b="1" dirty="0">
+                <a:solidFill>
+                  <a:srgbClr val="990011"/>
+                </a:solidFill>
+                <a:latin typeface="Times New Roman" pitchFamily="34" charset="0"/>
+                <a:ea typeface="Times New Roman" pitchFamily="34" charset="-122"/>
+                <a:cs typeface="Times New Roman" pitchFamily="34" charset="-120"/>
+              </a:rPr>
+              <a:t>Homework</a:t>
+            </a:r>
+            <a:endParaRPr lang="en-US" sz="3600" dirty="0"/>
+          </a:p>
+        </p:txBody>
+      </p:sp>
+      <p:sp>
+        <p:nvSpPr>
+          <p:cNvPr id="5" name="Text 2"/>
+          <p:cNvSpPr/>
+          <p:nvPr/>
+        </p:nvSpPr>
+        <p:spPr>
+          <a:xfrm>
+            <a:off x="5349240" y="1783080"/>
+            <a:ext cx="6522415" cy="4663440"/>
+          </a:xfrm>
+          <a:prstGeom prst="rect">
+            <a:avLst/>
+          </a:prstGeom>
+          <a:noFill/>
+          <a:ln/>
+        </p:spPr>
+        <p:txBody>
+          <a:bodyPr wrap="square" lIns="0" tIns="0" rIns="0" bIns="0" rtlCol="0" anchor="t"/>
+          <a:lstStyle/>
+          <a:p>
+            <a:pPr algn="l" indent="0" marL="0">
+              <a:spcAft>
+                <a:spcPts val="800"/>
+              </a:spcAft>
+              <a:buNone/>
+            </a:pPr>
+            <a:r>
+              <a:rPr lang="en-US" sz="4000" dirty="0">
+                <a:solidFill>
+                  <a:srgbClr val="111111"/>
+                </a:solidFill>
+                <a:latin typeface="Times New Roman" pitchFamily="34" charset="0"/>
+                <a:ea typeface="Times New Roman" pitchFamily="34" charset="-122"/>
+                <a:cs typeface="Times New Roman" pitchFamily="34" charset="-120"/>
+              </a:rPr>
+              <a:t>State how temperature changes with altitude.</a:t>
+            </a:r>
+            <a:endParaRPr lang="en-US" sz="4000" dirty="0"/>
+          </a:p>
+        </p:txBody>
+      </p:sp>
+      <p:sp>
+        <p:nvSpPr>
+          <p:cNvPr id="25" name="Slide Number Placeholder 0"/>
+          <p:cNvSpPr>
+            <a:spLocks noGrp="1"/>
+          </p:cNvSpPr>
+          <p:nvPr>
+            <p:ph type="sldNum" sz="quarter" idx="4294967295"/>
+          </p:nvPr>
+        </p:nvSpPr>
+        <p:spPr>
+          <a:xfrm>
+            <a:off x="27432" y="91440"/>
+            <a:ext cx="585216" cy="475488"/>
+          </a:xfrm>
+          <a:prstGeom prst="rect">
+            <a:avLst/>
+          </a:prstGeom>
+          <a:extLst>
+            <a:ext uri="{C572A759-6A51-4108-AA02-DFA0A04FC94B}">
+              <ma14:wrappingTextBoxFlag xmlns:ma14="http://schemas.microsoft.com/office/mac/drawingml/2011/main" val="0"/>
+            </a:ext>
+          </a:extLst>
+        </p:spPr>
+        <p:txBody>
+          <a:bodyPr/>
+          <a:lstStyle>
+            <a:lvl1pPr>
+              <a:defRPr sz="2000">
+                <a:solidFill>
+                  <a:srgbClr val="FFFFFF"/>
+                </a:solidFill>
+                <a:latin typeface="Calibri"/>
+                <a:ea typeface="Calibri"/>
+                <a:cs typeface="Calibri"/>
+              </a:defRPr>
+            </a:lvl1pPr>
+          </a:lstStyle>
+          <a:p>
+            <a:pPr algn="ctr"/>
+            <a:fld id="{F7021451-1387-4CA6-816F-3879F97B5CBC}" type="slidenum">
+              <a:rPr b="1" lang="en-US"/>
+              <a:t>54</a:t>
+            </a:fld>
+            <a:endParaRPr lang="en-US"/>
+          </a:p>
+        </p:txBody>
+      </p:sp>
+    </p:spTree>
+  </p:cSld>
+  <p:clrMapOvr>
+    <a:masterClrMapping/>
+  </p:clrMapOvr>
+</p:sld>
+</file>
+
+<file path=ppt/slides/slide55.xml><?xml version="1.0" encoding="utf-8"?>
+<p:sld xmlns:a="http://schemas.openxmlformats.org/drawingml/2006/main" xmlns:r="http://schemas.openxmlformats.org/officeDocument/2006/relationships" xmlns:p="http://schemas.openxmlformats.org/presentationml/2006/main">
+  <p:cSld name="Slide 55">
+    <p:spTree>
+      <p:nvGrpSpPr>
+        <p:cNvPr id="1" name=""/>
+        <p:cNvGrpSpPr/>
+        <p:nvPr/>
+      </p:nvGrpSpPr>
+      <p:grpSpPr>
+        <a:xfrm>
+          <a:off x="0" y="0"/>
+          <a:ext cx="0" cy="0"/>
+          <a:chOff x="0" y="0"/>
+          <a:chExt cx="0" cy="0"/>
+        </a:xfrm>
+      </p:grpSpPr>
+      <p:sp>
+        <p:nvSpPr>
+          <p:cNvPr id="2" name="Text 0"/>
+          <p:cNvSpPr/>
+          <p:nvPr/>
+        </p:nvSpPr>
+        <p:spPr>
+          <a:xfrm>
+            <a:off x="457200" y="713232"/>
+            <a:ext cx="11368735" cy="274320"/>
+          </a:xfrm>
+          <a:prstGeom prst="rect">
+            <a:avLst/>
+          </a:prstGeom>
+          <a:noFill/>
+          <a:ln/>
+        </p:spPr>
+        <p:txBody>
+          <a:bodyPr wrap="square" lIns="0" tIns="0" rIns="0" bIns="0" rtlCol="0" anchor="ctr"/>
+          <a:lstStyle/>
+          <a:p>
+            <a:pPr algn="r" indent="0" marL="0">
+              <a:buNone/>
+            </a:pPr>
+            <a:r>
+              <a:rPr lang="en-US" sz="1400" b="1" dirty="0">
+                <a:solidFill>
+                  <a:srgbClr val="1C3F6E"/>
+                </a:solidFill>
+                <a:latin typeface="Calibri" pitchFamily="34" charset="0"/>
+                <a:ea typeface="Calibri" pitchFamily="34" charset="-122"/>
+                <a:cs typeface="Calibri" pitchFamily="34" charset="-120"/>
+              </a:rPr>
+              <a:t>NEXT LESSON</a:t>
+            </a:r>
+            <a:endParaRPr lang="en-US" sz="1400" dirty="0"/>
+          </a:p>
+        </p:txBody>
+      </p:sp>
+      <p:pic>
+        <p:nvPicPr>
+          <p:cNvPr id="3" name="Image 0" descr="/home/claude/f4/img/minesec_sheet.png">    </p:cNvPr>
+          <p:cNvPicPr>
+            <a:picLocks noChangeAspect="1"/>
+          </p:cNvPicPr>
+          <p:nvPr/>
+        </p:nvPicPr>
+        <p:blipFill>
+          <a:blip r:embed="rId1"/>
+          <a:stretch>
+            <a:fillRect/>
+          </a:stretch>
+        </p:blipFill>
+        <p:spPr>
+          <a:xfrm>
+            <a:off x="0" y="658368"/>
+            <a:ext cx="5120640" cy="5833872"/>
+          </a:xfrm>
+          <a:prstGeom prst="rect">
+            <a:avLst/>
+          </a:prstGeom>
+        </p:spPr>
+      </p:pic>
+      <p:sp>
+        <p:nvSpPr>
+          <p:cNvPr id="4" name="Text 1"/>
+          <p:cNvSpPr/>
+          <p:nvPr/>
+        </p:nvSpPr>
+        <p:spPr>
+          <a:xfrm>
+            <a:off x="5349240" y="1005840"/>
+            <a:ext cx="6522415" cy="731520"/>
+          </a:xfrm>
+          <a:prstGeom prst="rect">
+            <a:avLst/>
+          </a:prstGeom>
+          <a:noFill/>
+          <a:ln/>
+        </p:spPr>
+        <p:txBody>
+          <a:bodyPr wrap="square" lIns="0" tIns="0" rIns="0" bIns="0" rtlCol="0" anchor="ctr">
+            <a:normAutofit/>
+          </a:bodyPr>
+          <a:lstStyle/>
+          <a:p>
+            <a:pPr algn="ctr" indent="0" marL="0">
+              <a:buNone/>
+            </a:pPr>
+            <a:r>
+              <a:rPr lang="en-US" sz="3600" b="1" dirty="0">
+                <a:solidFill>
+                  <a:srgbClr val="990011"/>
+                </a:solidFill>
+                <a:latin typeface="Times New Roman" pitchFamily="34" charset="0"/>
+                <a:ea typeface="Times New Roman" pitchFamily="34" charset="-122"/>
+                <a:cs typeface="Times New Roman" pitchFamily="34" charset="-120"/>
+              </a:rPr>
+              <a:t>Next Lesson</a:t>
+            </a:r>
+            <a:endParaRPr lang="en-US" sz="3600" dirty="0"/>
+          </a:p>
+        </p:txBody>
+      </p:sp>
+      <p:sp>
+        <p:nvSpPr>
+          <p:cNvPr id="5" name="Text 2"/>
+          <p:cNvSpPr/>
+          <p:nvPr/>
+        </p:nvSpPr>
+        <p:spPr>
+          <a:xfrm>
+            <a:off x="5349240" y="1783080"/>
+            <a:ext cx="6522415" cy="4663440"/>
+          </a:xfrm>
+          <a:prstGeom prst="rect">
+            <a:avLst/>
+          </a:prstGeom>
+          <a:noFill/>
+          <a:ln/>
+        </p:spPr>
+        <p:txBody>
+          <a:bodyPr wrap="square" lIns="0" tIns="0" rIns="0" bIns="0" rtlCol="0" anchor="ctr"/>
+          <a:lstStyle/>
+          <a:p>
+            <a:pPr algn="ctr" indent="0" marL="0">
+              <a:spcAft>
+                <a:spcPts val="800"/>
+              </a:spcAft>
+              <a:buNone/>
+            </a:pPr>
+            <a:r>
+              <a:rPr lang="en-US" sz="4000" b="1" dirty="0">
+                <a:solidFill>
+                  <a:srgbClr val="111111"/>
+                </a:solidFill>
+                <a:latin typeface="Times New Roman" pitchFamily="34" charset="0"/>
+                <a:ea typeface="Times New Roman" pitchFamily="34" charset="-122"/>
+                <a:cs typeface="Times New Roman" pitchFamily="34" charset="-120"/>
+              </a:rPr>
+              <a:t>Our next lesson will be on:</a:t>
+            </a:r>
+            <a:endParaRPr lang="en-US" sz="4000" dirty="0"/>
+          </a:p>
+          <a:p>
+            <a:pPr algn="ctr" indent="0" marL="0">
+              <a:spcAft>
+                <a:spcPts val="800"/>
+              </a:spcAft>
+              <a:buNone/>
+            </a:pPr>
+            <a:r>
+              <a:rPr lang="en-US" sz="4000" b="1" dirty="0">
+                <a:solidFill>
+                  <a:srgbClr val="990011"/>
+                </a:solidFill>
+                <a:latin typeface="Times New Roman" pitchFamily="34" charset="0"/>
+                <a:ea typeface="Times New Roman" pitchFamily="34" charset="-122"/>
+                <a:cs typeface="Times New Roman" pitchFamily="34" charset="-120"/>
+              </a:rPr>
+              <a:t>Lesson 21: Mountain Climates</a:t>
+            </a:r>
+            <a:endParaRPr lang="en-US" sz="4000" dirty="0"/>
+          </a:p>
+        </p:txBody>
+      </p:sp>
+      <p:sp>
+        <p:nvSpPr>
+          <p:cNvPr id="25" name="Slide Number Placeholder 0"/>
+          <p:cNvSpPr>
+            <a:spLocks noGrp="1"/>
+          </p:cNvSpPr>
+          <p:nvPr>
+            <p:ph type="sldNum" sz="quarter" idx="4294967295"/>
+          </p:nvPr>
+        </p:nvSpPr>
+        <p:spPr>
+          <a:xfrm>
+            <a:off x="27432" y="91440"/>
+            <a:ext cx="585216" cy="475488"/>
+          </a:xfrm>
+          <a:prstGeom prst="rect">
+            <a:avLst/>
+          </a:prstGeom>
+          <a:extLst>
+            <a:ext uri="{C572A759-6A51-4108-AA02-DFA0A04FC94B}">
+              <ma14:wrappingTextBoxFlag xmlns:ma14="http://schemas.microsoft.com/office/mac/drawingml/2011/main" val="0"/>
+            </a:ext>
+          </a:extLst>
+        </p:spPr>
+        <p:txBody>
+          <a:bodyPr/>
+          <a:lstStyle>
+            <a:lvl1pPr>
+              <a:defRPr sz="2000">
+                <a:solidFill>
+                  <a:srgbClr val="FFFFFF"/>
+                </a:solidFill>
+                <a:latin typeface="Calibri"/>
+                <a:ea typeface="Calibri"/>
+                <a:cs typeface="Calibri"/>
+              </a:defRPr>
+            </a:lvl1pPr>
+          </a:lstStyle>
+          <a:p>
+            <a:pPr algn="ctr"/>
+            <a:fld id="{F7021451-1387-4CA6-816F-3879F97B5CBC}" type="slidenum">
+              <a:rPr b="1" lang="en-US"/>
+              <a:t>55</a:t>
+            </a:fld>
+            <a:endParaRPr lang="en-US"/>
+          </a:p>
+        </p:txBody>
+      </p:sp>
+    </p:spTree>
+  </p:cSld>
+  <p:clrMapOvr>
+    <a:masterClrMapping/>
+  </p:clrMapOvr>
+</p:sld>
+</file>
+
+<file path=ppt/slides/slide56.xml><?xml version="1.0" encoding="utf-8"?>
+<p:sld xmlns:a="http://schemas.openxmlformats.org/drawingml/2006/main" xmlns:r="http://schemas.openxmlformats.org/officeDocument/2006/relationships" xmlns:p="http://schemas.openxmlformats.org/presentationml/2006/main">
+  <p:cSld name="Slide 56">
+    <p:spTree>
+      <p:nvGrpSpPr>
+        <p:cNvPr id="1" name=""/>
+        <p:cNvGrpSpPr/>
+        <p:nvPr/>
+      </p:nvGrpSpPr>
+      <p:grpSpPr>
+        <a:xfrm>
+          <a:off x="0" y="0"/>
+          <a:ext cx="0" cy="0"/>
+          <a:chOff x="0" y="0"/>
+          <a:chExt cx="0" cy="0"/>
+        </a:xfrm>
+      </p:grpSpPr>
+      <p:sp>
+        <p:nvSpPr>
+          <p:cNvPr id="2" name="Text 0"/>
+          <p:cNvSpPr/>
+          <p:nvPr/>
+        </p:nvSpPr>
+        <p:spPr>
+          <a:xfrm>
+            <a:off x="457200" y="713232"/>
+            <a:ext cx="11368735" cy="274320"/>
+          </a:xfrm>
+          <a:prstGeom prst="rect">
+            <a:avLst/>
+          </a:prstGeom>
+          <a:noFill/>
+          <a:ln/>
+        </p:spPr>
+        <p:txBody>
+          <a:bodyPr wrap="square" lIns="0" tIns="0" rIns="0" bIns="0" rtlCol="0" anchor="ctr"/>
+          <a:lstStyle/>
+          <a:p>
+            <a:pPr algn="r" indent="0" marL="0">
+              <a:buNone/>
+            </a:pPr>
+            <a:r>
+              <a:rPr lang="en-US" sz="1400" b="1" dirty="0">
+                <a:solidFill>
+                  <a:srgbClr val="1C3F6E"/>
+                </a:solidFill>
+                <a:latin typeface="Calibri" pitchFamily="34" charset="0"/>
+                <a:ea typeface="Calibri" pitchFamily="34" charset="-122"/>
+                <a:cs typeface="Calibri" pitchFamily="34" charset="-120"/>
+              </a:rPr>
               <a:t>BILINGUAL GAME</a:t>
             </a:r>
             <a:endParaRPr lang="en-US" sz="1400" dirty="0"/>
@@ -18869,7 +20134,7 @@
       </p:sp>
       <p:graphicFrame>
         <p:nvGraphicFramePr>
-          <p:cNvPr id="54" name="Table 0"/>
+          <p:cNvPr id="57" name="Table 0"/>
           <p:cNvGraphicFramePr>
             <a:graphicFrameLocks noGrp="1"/>
           </p:cNvGraphicFramePr>
@@ -19187,7 +20452,7 @@
                           <a:ea typeface="Calibri" pitchFamily="34" charset="-122"/>
                           <a:cs typeface="Calibri" pitchFamily="34" charset="-120"/>
                         </a:rPr>
-                        <a:t>Town</a:t>
+                        <a:t>Urban climate</a:t>
                       </a:r>
                       <a:endParaRPr lang="en-US" sz="2200" dirty="0">
                         <a:latin typeface="Calibri" charset="0"/>
@@ -19255,7 +20520,7 @@
                           <a:ea typeface="Calibri" pitchFamily="34" charset="-122"/>
                           <a:cs typeface="Calibri" pitchFamily="34" charset="-120"/>
                         </a:rPr>
-                        <a:t>La ville</a:t>
+                        <a:t>Le climat urbain</a:t>
                       </a:r>
                       <a:endParaRPr lang="en-US" sz="2200" dirty="0">
                         <a:latin typeface="Calibri" charset="0"/>
@@ -19325,7 +20590,7 @@
                           <a:ea typeface="Calibri" pitchFamily="34" charset="-122"/>
                           <a:cs typeface="Calibri" pitchFamily="34" charset="-120"/>
                         </a:rPr>
-                        <a:t>Heat island</a:t>
+                        <a:t>Urban heat island</a:t>
                       </a:r>
                       <a:endParaRPr lang="en-US" sz="2200" dirty="0">
                         <a:latin typeface="Calibri" charset="0"/>
@@ -19393,7 +20658,7 @@
                           <a:ea typeface="Calibri" pitchFamily="34" charset="-122"/>
                           <a:cs typeface="Calibri" pitchFamily="34" charset="-120"/>
                         </a:rPr>
-                        <a:t>Îlot de chaleur urbain</a:t>
+                        <a:t>L'îlot de chaleur urbain</a:t>
                       </a:r>
                       <a:endParaRPr lang="en-US" sz="2200" dirty="0">
                         <a:latin typeface="Calibri" charset="0"/>
@@ -19601,7 +20866,7 @@
                           <a:ea typeface="Calibri" pitchFamily="34" charset="-122"/>
                           <a:cs typeface="Calibri" pitchFamily="34" charset="-120"/>
                         </a:rPr>
-                        <a:t>Lake</a:t>
+                        <a:t>Evapotranspiration</a:t>
                       </a:r>
                       <a:endParaRPr lang="en-US" sz="2200" dirty="0">
                         <a:latin typeface="Calibri" charset="0"/>
@@ -19669,7 +20934,7 @@
                           <a:ea typeface="Calibri" pitchFamily="34" charset="-122"/>
                           <a:cs typeface="Calibri" pitchFamily="34" charset="-120"/>
                         </a:rPr>
-                        <a:t>Le lac</a:t>
+                        <a:t>L'évapotranspiration</a:t>
                       </a:r>
                       <a:endParaRPr lang="en-US" sz="2200" dirty="0">
                         <a:latin typeface="Calibri" charset="0"/>
@@ -19739,7 +21004,7 @@
                           <a:ea typeface="Calibri" pitchFamily="34" charset="-122"/>
                           <a:cs typeface="Calibri" pitchFamily="34" charset="-120"/>
                         </a:rPr>
-                        <a:t>Shade</a:t>
+                        <a:t>Green space</a:t>
                       </a:r>
                       <a:endParaRPr lang="en-US" sz="2200" dirty="0">
                         <a:latin typeface="Calibri" charset="0"/>
@@ -19807,7 +21072,7 @@
                           <a:ea typeface="Calibri" pitchFamily="34" charset="-122"/>
                           <a:cs typeface="Calibri" pitchFamily="34" charset="-120"/>
                         </a:rPr>
-                        <a:t>L'ombre</a:t>
+                        <a:t>L'espace vert</a:t>
                       </a:r>
                       <a:endParaRPr lang="en-US" sz="2200" dirty="0">
                         <a:latin typeface="Calibri" charset="0"/>
@@ -19905,7 +21170,7 @@
             <a:pPr algn="ctr"/>
             <a:fld id="{F7021451-1387-4CA6-816F-3879F97B5CBC}" type="slidenum">
               <a:rPr b="1" lang="en-US"/>
-              <a:t>53</a:t>
+              <a:t>56</a:t>
             </a:fld>
             <a:endParaRPr lang="en-US"/>
           </a:p>
@@ -19919,9 +21184,9 @@
 </p:sld>
 </file>
 
-<file path=ppt/slides/slide54.xml><?xml version="1.0" encoding="utf-8"?>
+<file path=ppt/slides/slide57.xml><?xml version="1.0" encoding="utf-8"?>
 <p:sld xmlns:a="http://schemas.openxmlformats.org/drawingml/2006/main" xmlns:r="http://schemas.openxmlformats.org/officeDocument/2006/relationships" xmlns:p="http://schemas.openxmlformats.org/presentationml/2006/main">
-  <p:cSld name="Slide 54">
+  <p:cSld name="Slide 57">
     <p:spTree>
       <p:nvGrpSpPr>
         <p:cNvPr id="1" name=""/>
@@ -20016,7 +21281,7 @@
       </p:sp>
       <p:graphicFrame>
         <p:nvGraphicFramePr>
-          <p:cNvPr id="55" name="Table 0"/>
+          <p:cNvPr id="58" name="Table 0"/>
           <p:cNvGraphicFramePr>
             <a:graphicFrameLocks noGrp="1"/>
           </p:cNvGraphicFramePr>
@@ -20402,7 +21667,7 @@
                           <a:ea typeface="Calibri" pitchFamily="34" charset="-122"/>
                           <a:cs typeface="Calibri" pitchFamily="34" charset="-120"/>
                         </a:rPr>
-                        <a:t>Define micro-climate. Classify micro-climates (urban, mountain, lakeside, forest). Explain the characteristics and factors of urban climates.</a:t>
+                        <a:t>Define a micro-climate. Classify micro-climates. Describe the characteristics of urban climates. Explain the factors of the urban heat island.</a:t>
                       </a:r>
                       <a:endParaRPr lang="en-US" sz="1600" dirty="0">
                         <a:latin typeface="Calibri" charset="0"/>
@@ -20540,7 +21805,7 @@
                           <a:ea typeface="Calibri" pitchFamily="34" charset="-122"/>
                           <a:cs typeface="Calibri" pitchFamily="34" charset="-120"/>
                         </a:rPr>
-                        <a:t>Learners are able to describe micro-climates and explain the climate of towns.</a:t>
+                        <a:t>Learners are able to explain micro-climates, especially why the centre of Garoua is hotter than its outskirts, and propose ways to reduce urban heat.</a:t>
                       </a:r>
                       <a:endParaRPr lang="en-US" sz="1600" dirty="0">
                         <a:latin typeface="Calibri" charset="0"/>
@@ -20638,7 +21903,7 @@
             <a:pPr algn="ctr"/>
             <a:fld id="{F7021451-1387-4CA6-816F-3879F97B5CBC}" type="slidenum">
               <a:rPr b="1" lang="en-US"/>
-              <a:t>54</a:t>
+              <a:t>57</a:t>
             </a:fld>
             <a:endParaRPr lang="en-US"/>
           </a:p>
@@ -20652,9 +21917,9 @@
 </p:sld>
 </file>
 
-<file path=ppt/slides/slide55.xml><?xml version="1.0" encoding="utf-8"?>
+<file path=ppt/slides/slide58.xml><?xml version="1.0" encoding="utf-8"?>
 <p:sld xmlns:a="http://schemas.openxmlformats.org/drawingml/2006/main" xmlns:r="http://schemas.openxmlformats.org/officeDocument/2006/relationships" xmlns:p="http://schemas.openxmlformats.org/presentationml/2006/main">
-  <p:cSld name="Slide 55">
+  <p:cSld name="Slide 58">
     <p:spTree>
       <p:nvGrpSpPr>
         <p:cNvPr id="1" name=""/>
@@ -20749,7 +22014,7 @@
       </p:sp>
       <p:graphicFrame>
         <p:nvGraphicFramePr>
-          <p:cNvPr id="56" name="Table 0"/>
+          <p:cNvPr id="59" name="Table 0"/>
           <p:cNvGraphicFramePr>
             <a:graphicFrameLocks noGrp="1"/>
           </p:cNvGraphicFramePr>
@@ -20859,7 +22124,7 @@
                           <a:ea typeface="Calibri" pitchFamily="34" charset="-122"/>
                           <a:cs typeface="Calibri" pitchFamily="34" charset="-120"/>
                         </a:rPr>
-                        <a:t>Meaning and Classification of Micro-climates; Urban Climates; Factors of Urban Climates; Lakeside and Forest Climates.</a:t>
+                        <a:t>DEFINITIONS; Meaning and Classification of Micro-climates; Characteristics of Urban Climates; Factors of the Urban Heat Island.</a:t>
                       </a:r>
                       <a:endParaRPr lang="en-US" sz="1600" dirty="0">
                         <a:latin typeface="Calibri" charset="0"/>
@@ -21135,7 +22400,7 @@
                           <a:ea typeface="Calibri" pitchFamily="34" charset="-122"/>
                           <a:cs typeface="Calibri" pitchFamily="34" charset="-120"/>
                         </a:rPr>
-                        <a:t>Measure the temperature at noon in a sunny yard and under a tree. Explain the difference.</a:t>
+                        <a:t>State how temperature changes with altitude.</a:t>
                       </a:r>
                       <a:endParaRPr lang="en-US" sz="1600" dirty="0">
                         <a:latin typeface="Calibri" charset="0"/>
@@ -21509,7 +22774,7 @@
             <a:pPr algn="ctr"/>
             <a:fld id="{F7021451-1387-4CA6-816F-3879F97B5CBC}" type="slidenum">
               <a:rPr b="1" lang="en-US"/>
-              <a:t>55</a:t>
+              <a:t>58</a:t>
             </a:fld>
             <a:endParaRPr lang="en-US"/>
           </a:p>
@@ -21523,9 +22788,9 @@
 </p:sld>
 </file>
 
-<file path=ppt/slides/slide56.xml><?xml version="1.0" encoding="utf-8"?>
+<file path=ppt/slides/slide59.xml><?xml version="1.0" encoding="utf-8"?>
 <p:sld xmlns:a="http://schemas.openxmlformats.org/drawingml/2006/main" xmlns:r="http://schemas.openxmlformats.org/officeDocument/2006/relationships" xmlns:p="http://schemas.openxmlformats.org/presentationml/2006/main">
-  <p:cSld name="Slide 56">
+  <p:cSld name="Slide 59">
     <p:spTree>
       <p:nvGrpSpPr>
         <p:cNvPr id="1" name=""/>
@@ -21702,7 +22967,7 @@
                 <a:ea typeface="Calibri" pitchFamily="34" charset="-122"/>
                 <a:cs typeface="Calibri" pitchFamily="34" charset="-120"/>
               </a:rPr>
-              <a:t>Without the projector (Activity 1): compare the town centre and a village.</a:t>
+              <a:t>Without the projector (Activity 1): list micro-climates around Garoua.</a:t>
             </a:r>
             <a:endParaRPr lang="en-US" sz="2000" dirty="0"/>
           </a:p>
@@ -21723,7 +22988,7 @@
                 <a:ea typeface="Calibri" pitchFamily="34" charset="-122"/>
                 <a:cs typeface="Calibri" pitchFamily="34" charset="-120"/>
               </a:rPr>
-              <a:t>Without the projector (Activity 2): draw the heat dome over a town.</a:t>
+              <a:t>Without the projector (Activity 2): describe a lakeside.</a:t>
             </a:r>
             <a:endParaRPr lang="en-US" sz="2000" dirty="0"/>
           </a:p>
@@ -21744,7 +23009,7 @@
                 <a:ea typeface="Calibri" pitchFamily="34" charset="-122"/>
                 <a:cs typeface="Calibri" pitchFamily="34" charset="-120"/>
               </a:rPr>
-              <a:t>Without the projector (Activity 3): describe traffic smoke.</a:t>
+              <a:t>Without the projector (Activity 3): draw the temperature profile.</a:t>
             </a:r>
             <a:endParaRPr lang="en-US" sz="2000" dirty="0"/>
           </a:p>
@@ -21765,7 +23030,7 @@
                 <a:ea typeface="Calibri" pitchFamily="34" charset="-122"/>
                 <a:cs typeface="Calibri" pitchFamily="34" charset="-120"/>
               </a:rPr>
-              <a:t>Without the projector (Activity 4): mention the Lagdo Lake.</a:t>
+              <a:t>Without the projector (Activity 4): compare a street and a garden.</a:t>
             </a:r>
             <a:endParaRPr lang="en-US" sz="2000" dirty="0"/>
           </a:p>
@@ -21786,7 +23051,7 @@
                 <a:ea typeface="Calibri" pitchFamily="34" charset="-122"/>
                 <a:cs typeface="Calibri" pitchFamily="34" charset="-120"/>
               </a:rPr>
-              <a:t>Without the projector (Activity 5): describe walking into a forest.</a:t>
+              <a:t>Without the projector (Activity 5): stand in the sun and in the shade of a mango tree.</a:t>
             </a:r>
             <a:endParaRPr lang="en-US" sz="2000" dirty="0"/>
           </a:p>
@@ -21834,332 +23099,7 @@
             <a:pPr algn="ctr"/>
             <a:fld id="{F7021451-1387-4CA6-816F-3879F97B5CBC}" type="slidenum">
               <a:rPr b="1" lang="en-US"/>
-              <a:t>56</a:t>
-            </a:fld>
-            <a:endParaRPr lang="en-US"/>
-          </a:p>
-        </p:txBody>
-      </p:sp>
-    </p:spTree>
-  </p:cSld>
-  <p:clrMapOvr>
-    <a:masterClrMapping/>
-  </p:clrMapOvr>
-</p:sld>
-</file>
-
-<file path=ppt/slides/slide57.xml><?xml version="1.0" encoding="utf-8"?>
-<p:sld xmlns:a="http://schemas.openxmlformats.org/drawingml/2006/main" xmlns:r="http://schemas.openxmlformats.org/officeDocument/2006/relationships" xmlns:p="http://schemas.openxmlformats.org/presentationml/2006/main">
-  <p:cSld name="Slide 57">
-    <p:spTree>
-      <p:nvGrpSpPr>
-        <p:cNvPr id="1" name=""/>
-        <p:cNvGrpSpPr/>
-        <p:nvPr/>
-      </p:nvGrpSpPr>
-      <p:grpSpPr>
-        <a:xfrm>
-          <a:off x="0" y="0"/>
-          <a:ext cx="0" cy="0"/>
-          <a:chOff x="0" y="0"/>
-          <a:chExt cx="0" cy="0"/>
-        </a:xfrm>
-      </p:grpSpPr>
-      <p:sp>
-        <p:nvSpPr>
-          <p:cNvPr id="2" name="Text 0"/>
-          <p:cNvSpPr/>
-          <p:nvPr/>
-        </p:nvSpPr>
-        <p:spPr>
-          <a:xfrm>
-            <a:off x="457200" y="713232"/>
-            <a:ext cx="11368735" cy="274320"/>
-          </a:xfrm>
-          <a:prstGeom prst="rect">
-            <a:avLst/>
-          </a:prstGeom>
-          <a:noFill/>
-          <a:ln/>
-        </p:spPr>
-        <p:txBody>
-          <a:bodyPr wrap="square" lIns="0" tIns="0" rIns="0" bIns="0" rtlCol="0" anchor="ctr"/>
-          <a:lstStyle/>
-          <a:p>
-            <a:pPr algn="r" indent="0" marL="0">
-              <a:buNone/>
-            </a:pPr>
-            <a:r>
-              <a:rPr lang="en-US" sz="1400" b="1" dirty="0">
-                <a:solidFill>
-                  <a:srgbClr val="1C3F6E"/>
-                </a:solidFill>
-                <a:latin typeface="Calibri" pitchFamily="34" charset="0"/>
-                <a:ea typeface="Calibri" pitchFamily="34" charset="-122"/>
-                <a:cs typeface="Calibri" pitchFamily="34" charset="-120"/>
-              </a:rPr>
-              <a:t>REFERENCES</a:t>
-            </a:r>
-            <a:endParaRPr lang="en-US" sz="1400" dirty="0"/>
-          </a:p>
-        </p:txBody>
-      </p:sp>
-      <p:pic>
-        <p:nvPicPr>
-          <p:cNvPr id="3" name="Image 0" descr="/home/claude/f4/img/minesec_sheet.png">    </p:cNvPr>
-          <p:cNvPicPr>
-            <a:picLocks noChangeAspect="1"/>
-          </p:cNvPicPr>
-          <p:nvPr/>
-        </p:nvPicPr>
-        <p:blipFill>
-          <a:blip r:embed="rId1"/>
-          <a:stretch>
-            <a:fillRect/>
-          </a:stretch>
-        </p:blipFill>
-        <p:spPr>
-          <a:xfrm>
-            <a:off x="0" y="658368"/>
-            <a:ext cx="3840480" cy="5833872"/>
-          </a:xfrm>
-          <a:prstGeom prst="rect">
-            <a:avLst/>
-          </a:prstGeom>
-        </p:spPr>
-      </p:pic>
-      <p:sp>
-        <p:nvSpPr>
-          <p:cNvPr id="4" name="Text 1"/>
-          <p:cNvSpPr/>
-          <p:nvPr/>
-        </p:nvSpPr>
-        <p:spPr>
-          <a:xfrm>
-            <a:off x="4069080" y="1005840"/>
-            <a:ext cx="7802575" cy="731520"/>
-          </a:xfrm>
-          <a:prstGeom prst="rect">
-            <a:avLst/>
-          </a:prstGeom>
-          <a:noFill/>
-          <a:ln/>
-        </p:spPr>
-        <p:txBody>
-          <a:bodyPr wrap="square" lIns="0" tIns="0" rIns="0" bIns="0" rtlCol="0" anchor="ctr">
-            <a:normAutofit/>
-          </a:bodyPr>
-          <a:lstStyle/>
-          <a:p>
-            <a:pPr algn="ctr" indent="0" marL="0">
-              <a:buNone/>
-            </a:pPr>
-            <a:r>
-              <a:rPr lang="en-US" sz="3600" b="1" dirty="0">
-                <a:solidFill>
-                  <a:srgbClr val="990011"/>
-                </a:solidFill>
-                <a:latin typeface="Times New Roman" pitchFamily="34" charset="0"/>
-                <a:ea typeface="Times New Roman" pitchFamily="34" charset="-122"/>
-                <a:cs typeface="Times New Roman" pitchFamily="34" charset="-120"/>
-              </a:rPr>
-              <a:t>References</a:t>
-            </a:r>
-            <a:endParaRPr lang="en-US" sz="3600" dirty="0"/>
-          </a:p>
-        </p:txBody>
-      </p:sp>
-      <p:sp>
-        <p:nvSpPr>
-          <p:cNvPr id="5" name="Text 2"/>
-          <p:cNvSpPr/>
-          <p:nvPr/>
-        </p:nvSpPr>
-        <p:spPr>
-          <a:xfrm>
-            <a:off x="4069080" y="1783080"/>
-            <a:ext cx="7802575" cy="4663440"/>
-          </a:xfrm>
-          <a:prstGeom prst="rect">
-            <a:avLst/>
-          </a:prstGeom>
-          <a:noFill/>
-          <a:ln/>
-        </p:spPr>
-        <p:txBody>
-          <a:bodyPr wrap="square" lIns="0" tIns="0" rIns="0" bIns="0" rtlCol="0" anchor="t"/>
-          <a:lstStyle/>
-          <a:p>
-            <a:pPr algn="l" marL="342900" indent="-342900">
-              <a:spcAft>
-                <a:spcPts val="800"/>
-              </a:spcAft>
-              <a:buSzPct val="100000"/>
-              <a:buChar char="•"/>
-            </a:pPr>
-            <a:r>
-              <a:rPr lang="en-US" sz="1800" dirty="0">
-                <a:solidFill>
-                  <a:srgbClr val="111111"/>
-                </a:solidFill>
-                <a:latin typeface="Calibri" pitchFamily="34" charset="0"/>
-                <a:ea typeface="Calibri" pitchFamily="34" charset="-122"/>
-                <a:cs typeface="Calibri" pitchFamily="34" charset="-120"/>
-              </a:rPr>
-              <a:t>National Geography Syllabus, MINESEC/IGE/IP-SS, 2019 — Module 1 (Meteorology, Climatology &amp; Hydrology).</a:t>
-            </a:r>
-            <a:endParaRPr lang="en-US" sz="1800" dirty="0"/>
-          </a:p>
-          <a:p>
-            <a:pPr algn="l" marL="342900" indent="-342900">
-              <a:spcAft>
-                <a:spcPts val="800"/>
-              </a:spcAft>
-              <a:buSzPct val="100000"/>
-              <a:buChar char="•"/>
-            </a:pPr>
-            <a:r>
-              <a:rPr lang="en-US" sz="1800" dirty="0">
-                <a:solidFill>
-                  <a:srgbClr val="111111"/>
-                </a:solidFill>
-                <a:latin typeface="Calibri" pitchFamily="34" charset="0"/>
-                <a:ea typeface="Calibri" pitchFamily="34" charset="-122"/>
-                <a:cs typeface="Calibri" pitchFamily="34" charset="-120"/>
-              </a:rPr>
-              <a:t>Photo, Activity 1: “Yaoundé” by wili_hybrid, CC BY-NC 2.0, via Flickr (https://www.flickr.com/photos/62223880@N00/5677034246)</a:t>
-            </a:r>
-            <a:endParaRPr lang="en-US" sz="1800" dirty="0"/>
-          </a:p>
-          <a:p>
-            <a:pPr algn="l" marL="342900" indent="-342900">
-              <a:spcAft>
-                <a:spcPts val="800"/>
-              </a:spcAft>
-              <a:buSzPct val="100000"/>
-              <a:buChar char="•"/>
-            </a:pPr>
-            <a:r>
-              <a:rPr lang="en-US" sz="1800" dirty="0">
-                <a:solidFill>
-                  <a:srgbClr val="111111"/>
-                </a:solidFill>
-                <a:latin typeface="Calibri" pitchFamily="34" charset="0"/>
-                <a:ea typeface="Calibri" pitchFamily="34" charset="-122"/>
-                <a:cs typeface="Calibri" pitchFamily="34" charset="-120"/>
-              </a:rPr>
-              <a:t>Photo, Activity 3: “Douala” by christing-O-, CC BY 2.0, via Flickr (https://www.flickr.com/photos/76187282@N00/7227535754)</a:t>
-            </a:r>
-            <a:endParaRPr lang="en-US" sz="1800" dirty="0"/>
-          </a:p>
-          <a:p>
-            <a:pPr algn="l" marL="342900" indent="-342900">
-              <a:spcAft>
-                <a:spcPts val="800"/>
-              </a:spcAft>
-              <a:buSzPct val="100000"/>
-              <a:buChar char="•"/>
-            </a:pPr>
-            <a:r>
-              <a:rPr lang="en-US" sz="1800" dirty="0">
-                <a:solidFill>
-                  <a:srgbClr val="111111"/>
-                </a:solidFill>
-                <a:latin typeface="Calibri" pitchFamily="34" charset="0"/>
-                <a:ea typeface="Calibri" pitchFamily="34" charset="-122"/>
-                <a:cs typeface="Calibri" pitchFamily="34" charset="-120"/>
-              </a:rPr>
-              <a:t>Photo, Activity 4: “Lake Kamburu” by World Bank Photo Collection, CC BY-NC-ND 2.0, via Flickr (https://www.flickr.com/photos/10816734@N03/25644146245)</a:t>
-            </a:r>
-            <a:endParaRPr lang="en-US" sz="1800" dirty="0"/>
-          </a:p>
-          <a:p>
-            <a:pPr algn="l" marL="342900" indent="-342900">
-              <a:spcAft>
-                <a:spcPts val="800"/>
-              </a:spcAft>
-              <a:buSzPct val="100000"/>
-              <a:buChar char="•"/>
-            </a:pPr>
-            <a:r>
-              <a:rPr lang="en-US" sz="1800" dirty="0">
-                <a:solidFill>
-                  <a:srgbClr val="111111"/>
-                </a:solidFill>
-                <a:latin typeface="Calibri" pitchFamily="34" charset="0"/>
-                <a:ea typeface="Calibri" pitchFamily="34" charset="-122"/>
-                <a:cs typeface="Calibri" pitchFamily="34" charset="-120"/>
-              </a:rPr>
-              <a:t>Photo, Activity 5: “Amazon 11” by CIAT International Center for Tropical Agriculture, CC BY-SA 2.0, via Flickr (https://www.flickr.com/photos/38476503@N08/5641587148)</a:t>
-            </a:r>
-            <a:endParaRPr lang="en-US" sz="1800" dirty="0"/>
-          </a:p>
-          <a:p>
-            <a:pPr algn="l" marL="342900" indent="-342900">
-              <a:spcAft>
-                <a:spcPts val="800"/>
-              </a:spcAft>
-              <a:buSzPct val="100000"/>
-              <a:buChar char="•"/>
-            </a:pPr>
-            <a:r>
-              <a:rPr lang="en-US" sz="1800" dirty="0">
-                <a:solidFill>
-                  <a:srgbClr val="111111"/>
-                </a:solidFill>
-                <a:latin typeface="Calibri" pitchFamily="34" charset="0"/>
-                <a:ea typeface="Calibri" pitchFamily="34" charset="-122"/>
-                <a:cs typeface="Calibri" pitchFamily="34" charset="-120"/>
-              </a:rPr>
-              <a:t>Diagrams and animations: drawn for this lesson (Geography Department).</a:t>
-            </a:r>
-            <a:endParaRPr lang="en-US" sz="1800" dirty="0"/>
-          </a:p>
-        </p:txBody>
-      </p:sp>
-      <p:sp>
-        <p:nvSpPr>
-          <p:cNvPr id="25" name="Slide Number Placeholder 0"/>
-          <p:cNvSpPr>
-            <a:spLocks noGrp="1"/>
-          </p:cNvSpPr>
-          <p:nvPr>
-            <p:ph type="sldNum" sz="quarter" idx="4294967295"/>
-          </p:nvPr>
-        </p:nvSpPr>
-        <p:spPr>
-          <a:xfrm>
-            <a:off x="27432" y="91440"/>
-            <a:ext cx="585216" cy="475488"/>
-          </a:xfrm>
-          <a:prstGeom prst="rect">
-            <a:avLst/>
-          </a:prstGeom>
-          <a:extLst>
-            <a:ext uri="{C572A759-6A51-4108-AA02-DFA0A04FC94B}">
-              <ma14:wrappingTextBoxFlag xmlns:ma14="http://schemas.microsoft.com/office/mac/drawingml/2011/main" val="0"/>
-            </a:ext>
-          </a:extLst>
-        </p:spPr>
-        <p:txBody>
-          <a:bodyPr/>
-          <a:lstStyle>
-            <a:lvl1pPr>
-              <a:defRPr sz="2000">
-                <a:solidFill>
-                  <a:srgbClr val="FFFFFF"/>
-                </a:solidFill>
-                <a:latin typeface="Calibri"/>
-                <a:ea typeface="Calibri"/>
-                <a:cs typeface="Calibri"/>
-              </a:defRPr>
-            </a:lvl1pPr>
-          </a:lstStyle>
-          <a:p>
-            <a:pPr algn="ctr"/>
-            <a:fld id="{F7021451-1387-4CA6-816F-3879F97B5CBC}" type="slidenum">
-              <a:rPr b="1" lang="en-US"/>
-              <a:t>57</a:t>
+              <a:t>59</a:t>
             </a:fld>
             <a:endParaRPr lang="en-US"/>
           </a:p>
@@ -22504,6 +23444,331 @@
 </p:sld>
 </file>
 
+<file path=ppt/slides/slide60.xml><?xml version="1.0" encoding="utf-8"?>
+<p:sld xmlns:a="http://schemas.openxmlformats.org/drawingml/2006/main" xmlns:r="http://schemas.openxmlformats.org/officeDocument/2006/relationships" xmlns:p="http://schemas.openxmlformats.org/presentationml/2006/main">
+  <p:cSld name="Slide 60">
+    <p:spTree>
+      <p:nvGrpSpPr>
+        <p:cNvPr id="1" name=""/>
+        <p:cNvGrpSpPr/>
+        <p:nvPr/>
+      </p:nvGrpSpPr>
+      <p:grpSpPr>
+        <a:xfrm>
+          <a:off x="0" y="0"/>
+          <a:ext cx="0" cy="0"/>
+          <a:chOff x="0" y="0"/>
+          <a:chExt cx="0" cy="0"/>
+        </a:xfrm>
+      </p:grpSpPr>
+      <p:sp>
+        <p:nvSpPr>
+          <p:cNvPr id="2" name="Text 0"/>
+          <p:cNvSpPr/>
+          <p:nvPr/>
+        </p:nvSpPr>
+        <p:spPr>
+          <a:xfrm>
+            <a:off x="457200" y="713232"/>
+            <a:ext cx="11368735" cy="274320"/>
+          </a:xfrm>
+          <a:prstGeom prst="rect">
+            <a:avLst/>
+          </a:prstGeom>
+          <a:noFill/>
+          <a:ln/>
+        </p:spPr>
+        <p:txBody>
+          <a:bodyPr wrap="square" lIns="0" tIns="0" rIns="0" bIns="0" rtlCol="0" anchor="ctr"/>
+          <a:lstStyle/>
+          <a:p>
+            <a:pPr algn="r" indent="0" marL="0">
+              <a:buNone/>
+            </a:pPr>
+            <a:r>
+              <a:rPr lang="en-US" sz="1400" b="1" dirty="0">
+                <a:solidFill>
+                  <a:srgbClr val="1C3F6E"/>
+                </a:solidFill>
+                <a:latin typeface="Calibri" pitchFamily="34" charset="0"/>
+                <a:ea typeface="Calibri" pitchFamily="34" charset="-122"/>
+                <a:cs typeface="Calibri" pitchFamily="34" charset="-120"/>
+              </a:rPr>
+              <a:t>REFERENCES</a:t>
+            </a:r>
+            <a:endParaRPr lang="en-US" sz="1400" dirty="0"/>
+          </a:p>
+        </p:txBody>
+      </p:sp>
+      <p:pic>
+        <p:nvPicPr>
+          <p:cNvPr id="3" name="Image 0" descr="/home/claude/f4/img/minesec_sheet.png">    </p:cNvPr>
+          <p:cNvPicPr>
+            <a:picLocks noChangeAspect="1"/>
+          </p:cNvPicPr>
+          <p:nvPr/>
+        </p:nvPicPr>
+        <p:blipFill>
+          <a:blip r:embed="rId1"/>
+          <a:stretch>
+            <a:fillRect/>
+          </a:stretch>
+        </p:blipFill>
+        <p:spPr>
+          <a:xfrm>
+            <a:off x="0" y="658368"/>
+            <a:ext cx="3840480" cy="5833872"/>
+          </a:xfrm>
+          <a:prstGeom prst="rect">
+            <a:avLst/>
+          </a:prstGeom>
+        </p:spPr>
+      </p:pic>
+      <p:sp>
+        <p:nvSpPr>
+          <p:cNvPr id="4" name="Text 1"/>
+          <p:cNvSpPr/>
+          <p:nvPr/>
+        </p:nvSpPr>
+        <p:spPr>
+          <a:xfrm>
+            <a:off x="4069080" y="1005840"/>
+            <a:ext cx="7802575" cy="731520"/>
+          </a:xfrm>
+          <a:prstGeom prst="rect">
+            <a:avLst/>
+          </a:prstGeom>
+          <a:noFill/>
+          <a:ln/>
+        </p:spPr>
+        <p:txBody>
+          <a:bodyPr wrap="square" lIns="0" tIns="0" rIns="0" bIns="0" rtlCol="0" anchor="ctr">
+            <a:normAutofit/>
+          </a:bodyPr>
+          <a:lstStyle/>
+          <a:p>
+            <a:pPr algn="ctr" indent="0" marL="0">
+              <a:buNone/>
+            </a:pPr>
+            <a:r>
+              <a:rPr lang="en-US" sz="3600" b="1" dirty="0">
+                <a:solidFill>
+                  <a:srgbClr val="990011"/>
+                </a:solidFill>
+                <a:latin typeface="Times New Roman" pitchFamily="34" charset="0"/>
+                <a:ea typeface="Times New Roman" pitchFamily="34" charset="-122"/>
+                <a:cs typeface="Times New Roman" pitchFamily="34" charset="-120"/>
+              </a:rPr>
+              <a:t>References</a:t>
+            </a:r>
+            <a:endParaRPr lang="en-US" sz="3600" dirty="0"/>
+          </a:p>
+        </p:txBody>
+      </p:sp>
+      <p:sp>
+        <p:nvSpPr>
+          <p:cNvPr id="5" name="Text 2"/>
+          <p:cNvSpPr/>
+          <p:nvPr/>
+        </p:nvSpPr>
+        <p:spPr>
+          <a:xfrm>
+            <a:off x="4069080" y="1783080"/>
+            <a:ext cx="7802575" cy="4663440"/>
+          </a:xfrm>
+          <a:prstGeom prst="rect">
+            <a:avLst/>
+          </a:prstGeom>
+          <a:noFill/>
+          <a:ln/>
+        </p:spPr>
+        <p:txBody>
+          <a:bodyPr wrap="square" lIns="0" tIns="0" rIns="0" bIns="0" rtlCol="0" anchor="t"/>
+          <a:lstStyle/>
+          <a:p>
+            <a:pPr algn="l" marL="342900" indent="-342900">
+              <a:spcAft>
+                <a:spcPts val="800"/>
+              </a:spcAft>
+              <a:buSzPct val="100000"/>
+              <a:buChar char="•"/>
+            </a:pPr>
+            <a:r>
+              <a:rPr lang="en-US" sz="1800" dirty="0">
+                <a:solidFill>
+                  <a:srgbClr val="111111"/>
+                </a:solidFill>
+                <a:latin typeface="Calibri" pitchFamily="34" charset="0"/>
+                <a:ea typeface="Calibri" pitchFamily="34" charset="-122"/>
+                <a:cs typeface="Calibri" pitchFamily="34" charset="-120"/>
+              </a:rPr>
+              <a:t>Geography Syllabus for Sixth Forms (Lower and Upper Sixth), MINESEC, 2019 — Module 1 (Meteorology, Climatology &amp; Hydrology).</a:t>
+            </a:r>
+            <a:endParaRPr lang="en-US" sz="1800" dirty="0"/>
+          </a:p>
+          <a:p>
+            <a:pPr algn="l" marL="342900" indent="-342900">
+              <a:spcAft>
+                <a:spcPts val="800"/>
+              </a:spcAft>
+              <a:buSzPct val="100000"/>
+              <a:buChar char="•"/>
+            </a:pPr>
+            <a:r>
+              <a:rPr lang="en-US" sz="1800" dirty="0">
+                <a:solidFill>
+                  <a:srgbClr val="111111"/>
+                </a:solidFill>
+                <a:latin typeface="Calibri" pitchFamily="34" charset="0"/>
+                <a:ea typeface="Calibri" pitchFamily="34" charset="-122"/>
+                <a:cs typeface="Calibri" pitchFamily="34" charset="-120"/>
+              </a:rPr>
+              <a:t>Teacher's course notes: Mr KAMDEM E., Meteorology and Climatology (LSA), GBHS Garoua, 2026.</a:t>
+            </a:r>
+            <a:endParaRPr lang="en-US" sz="1800" dirty="0"/>
+          </a:p>
+          <a:p>
+            <a:pPr algn="l" marL="342900" indent="-342900">
+              <a:spcAft>
+                <a:spcPts val="800"/>
+              </a:spcAft>
+              <a:buSzPct val="100000"/>
+              <a:buChar char="•"/>
+            </a:pPr>
+            <a:r>
+              <a:rPr lang="en-US" sz="1800" dirty="0">
+                <a:solidFill>
+                  <a:srgbClr val="111111"/>
+                </a:solidFill>
+                <a:latin typeface="Calibri" pitchFamily="34" charset="0"/>
+                <a:ea typeface="Calibri" pitchFamily="34" charset="-122"/>
+                <a:cs typeface="Calibri" pitchFamily="34" charset="-120"/>
+              </a:rPr>
+              <a:t>Photo, Activity 2: “Lake Kamburu” by World Bank Photo Collection, CC BY-NC-ND 2.0, via Flickr (https://www.flickr.com/photos/10816734@N03/25644146245)</a:t>
+            </a:r>
+            <a:endParaRPr lang="en-US" sz="1800" dirty="0"/>
+          </a:p>
+          <a:p>
+            <a:pPr algn="l" marL="342900" indent="-342900">
+              <a:spcAft>
+                <a:spcPts val="800"/>
+              </a:spcAft>
+              <a:buSzPct val="100000"/>
+              <a:buChar char="•"/>
+            </a:pPr>
+            <a:r>
+              <a:rPr lang="en-US" sz="1800" dirty="0">
+                <a:solidFill>
+                  <a:srgbClr val="111111"/>
+                </a:solidFill>
+                <a:latin typeface="Calibri" pitchFamily="34" charset="0"/>
+                <a:ea typeface="Calibri" pitchFamily="34" charset="-122"/>
+                <a:cs typeface="Calibri" pitchFamily="34" charset="-120"/>
+              </a:rPr>
+              <a:t>Photo, Activity 4: “Douala” by christing-O-, CC BY 2.0, via Flickr (https://www.flickr.com/photos/76187282@N00/7227535754)</a:t>
+            </a:r>
+            <a:endParaRPr lang="en-US" sz="1800" dirty="0"/>
+          </a:p>
+          <a:p>
+            <a:pPr algn="l" marL="342900" indent="-342900">
+              <a:spcAft>
+                <a:spcPts val="800"/>
+              </a:spcAft>
+              <a:buSzPct val="100000"/>
+              <a:buChar char="•"/>
+            </a:pPr>
+            <a:r>
+              <a:rPr lang="en-US" sz="1800" dirty="0">
+                <a:solidFill>
+                  <a:srgbClr val="111111"/>
+                </a:solidFill>
+                <a:latin typeface="Calibri" pitchFamily="34" charset="0"/>
+                <a:ea typeface="Calibri" pitchFamily="34" charset="-122"/>
+                <a:cs typeface="Calibri" pitchFamily="34" charset="-120"/>
+              </a:rPr>
+              <a:t>Photo, Activity 5: “Amazon 11” by CIAT International Center for Tropical Agriculture, CC BY-SA 2.0, via Flickr (https://www.flickr.com/photos/38476503@N08/5641587148)</a:t>
+            </a:r>
+            <a:endParaRPr lang="en-US" sz="1800" dirty="0"/>
+          </a:p>
+          <a:p>
+            <a:pPr algn="l" marL="342900" indent="-342900">
+              <a:spcAft>
+                <a:spcPts val="800"/>
+              </a:spcAft>
+              <a:buSzPct val="100000"/>
+              <a:buChar char="•"/>
+            </a:pPr>
+            <a:r>
+              <a:rPr lang="en-US" sz="1800" dirty="0">
+                <a:solidFill>
+                  <a:srgbClr val="111111"/>
+                </a:solidFill>
+                <a:latin typeface="Calibri" pitchFamily="34" charset="0"/>
+                <a:ea typeface="Calibri" pitchFamily="34" charset="-122"/>
+                <a:cs typeface="Calibri" pitchFamily="34" charset="-120"/>
+              </a:rPr>
+              <a:t>Diagrams and animations: drawn for this lesson (Geography Department).</a:t>
+            </a:r>
+            <a:endParaRPr lang="en-US" sz="1800" dirty="0"/>
+          </a:p>
+        </p:txBody>
+      </p:sp>
+      <p:sp>
+        <p:nvSpPr>
+          <p:cNvPr id="25" name="Slide Number Placeholder 0"/>
+          <p:cNvSpPr>
+            <a:spLocks noGrp="1"/>
+          </p:cNvSpPr>
+          <p:nvPr>
+            <p:ph type="sldNum" sz="quarter" idx="4294967295"/>
+          </p:nvPr>
+        </p:nvSpPr>
+        <p:spPr>
+          <a:xfrm>
+            <a:off x="27432" y="91440"/>
+            <a:ext cx="585216" cy="475488"/>
+          </a:xfrm>
+          <a:prstGeom prst="rect">
+            <a:avLst/>
+          </a:prstGeom>
+          <a:extLst>
+            <a:ext uri="{C572A759-6A51-4108-AA02-DFA0A04FC94B}">
+              <ma14:wrappingTextBoxFlag xmlns:ma14="http://schemas.microsoft.com/office/mac/drawingml/2011/main" val="0"/>
+            </a:ext>
+          </a:extLst>
+        </p:spPr>
+        <p:txBody>
+          <a:bodyPr/>
+          <a:lstStyle>
+            <a:lvl1pPr>
+              <a:defRPr sz="2000">
+                <a:solidFill>
+                  <a:srgbClr val="FFFFFF"/>
+                </a:solidFill>
+                <a:latin typeface="Calibri"/>
+                <a:ea typeface="Calibri"/>
+                <a:cs typeface="Calibri"/>
+              </a:defRPr>
+            </a:lvl1pPr>
+          </a:lstStyle>
+          <a:p>
+            <a:pPr algn="ctr"/>
+            <a:fld id="{F7021451-1387-4CA6-816F-3879F97B5CBC}" type="slidenum">
+              <a:rPr b="1" lang="en-US"/>
+              <a:t>60</a:t>
+            </a:fld>
+            <a:endParaRPr lang="en-US"/>
+          </a:p>
+        </p:txBody>
+      </p:sp>
+    </p:spTree>
+  </p:cSld>
+  <p:clrMapOvr>
+    <a:masterClrMapping/>
+  </p:clrMapOvr>
+</p:sld>
+</file>
+
 <file path=ppt/slides/slide7.xml><?xml version="1.0" encoding="utf-8"?>
 <p:sld xmlns:a="http://schemas.openxmlformats.org/drawingml/2006/main" xmlns:r="http://schemas.openxmlformats.org/officeDocument/2006/relationships" xmlns:p="http://schemas.openxmlformats.org/presentationml/2006/main">
   <p:cSld name="Slide 7">
@@ -22577,7 +23842,7 @@
         <p:spPr>
           <a:xfrm>
             <a:off x="0" y="658368"/>
-            <a:ext cx="5120640" cy="5833872"/>
+            <a:ext cx="3840480" cy="5833872"/>
           </a:xfrm>
           <a:prstGeom prst="rect">
             <a:avLst/>
@@ -22592,8 +23857,8 @@
         </p:nvSpPr>
         <p:spPr>
           <a:xfrm>
-            <a:off x="5349240" y="1005840"/>
-            <a:ext cx="6522415" cy="731520"/>
+            <a:off x="4069080" y="1005840"/>
+            <a:ext cx="7802575" cy="731520"/>
           </a:xfrm>
           <a:prstGeom prst="rect">
             <a:avLst/>
@@ -22633,8 +23898,8 @@
         </p:nvSpPr>
         <p:spPr>
           <a:xfrm>
-            <a:off x="5349240" y="1783080"/>
-            <a:ext cx="6522415" cy="4663440"/>
+            <a:off x="4069080" y="1783080"/>
+            <a:ext cx="7802575" cy="4663440"/>
           </a:xfrm>
           <a:prstGeom prst="rect">
             <a:avLst/>
@@ -22683,7 +23948,7 @@
                 <a:ea typeface="Times New Roman" pitchFamily="34" charset="-122"/>
                 <a:cs typeface="Times New Roman" pitchFamily="34" charset="-120"/>
               </a:rPr>
-              <a:t>Define micro-climate.</a:t>
+              <a:t>Define a micro-climate.</a:t>
             </a:r>
             <a:endParaRPr lang="en-US" sz="4000" dirty="0"/>
           </a:p>
@@ -22705,7 +23970,29 @@
                 <a:ea typeface="Times New Roman" pitchFamily="34" charset="-122"/>
                 <a:cs typeface="Times New Roman" pitchFamily="34" charset="-120"/>
               </a:rPr>
-              <a:t>Classify micro-climates (urban, mountain, lakeside, forest).</a:t>
+              <a:t>Classify micro-climates.</a:t>
+            </a:r>
+            <a:endParaRPr lang="en-US" sz="4000" dirty="0"/>
+          </a:p>
+          <a:p>
+            <a:pPr algn="l" marL="342900" indent="-342900">
+              <a:spcAft>
+                <a:spcPts val="800"/>
+              </a:spcAft>
+              <a:buSzPct val="100000"/>
+              <a:buFont typeface="+mj-lt"/>
+              <a:buAutoNum type="arabicPeriod" startAt="1"/>
+            </a:pPr>
+            <a:r>
+              <a:rPr lang="en-US" sz="4000" dirty="0">
+                <a:solidFill>
+                  <a:srgbClr val="111111"/>
+                </a:solidFill>
+                <a:latin typeface="Times New Roman" pitchFamily="34" charset="0"/>
+                <a:ea typeface="Times New Roman" pitchFamily="34" charset="-122"/>
+                <a:cs typeface="Times New Roman" pitchFamily="34" charset="-120"/>
+              </a:rPr>
+              <a:t>Describe the characteristics of urban climates.</a:t>
             </a:r>
             <a:endParaRPr lang="en-US" sz="4000" dirty="0"/>
           </a:p>
@@ -22926,7 +24213,7 @@
                 <a:ea typeface="Times New Roman" pitchFamily="34" charset="-122"/>
                 <a:cs typeface="Times New Roman" pitchFamily="34" charset="-120"/>
               </a:rPr>
-              <a:t>Explain the characteristics and factors of urban climates.</a:t>
+              <a:t>Explain the factors of the urban heat island.</a:t>
             </a:r>
             <a:endParaRPr lang="en-US" sz="4000" dirty="0"/>
           </a:p>
@@ -23146,7 +24433,7 @@
                 <a:ea typeface="Times New Roman" pitchFamily="34" charset="-122"/>
                 <a:cs typeface="Times New Roman" pitchFamily="34" charset="-120"/>
               </a:rPr>
-              <a:t>Towns are warmer than the countryside.</a:t>
+              <a:t>Tar and concrete absorb heat.</a:t>
             </a:r>
             <a:endParaRPr lang="en-US" sz="4000" dirty="0"/>
           </a:p>
@@ -23167,7 +24454,28 @@
                 <a:ea typeface="Times New Roman" pitchFamily="34" charset="-122"/>
                 <a:cs typeface="Times New Roman" pitchFamily="34" charset="-120"/>
               </a:rPr>
-              <a:t>Sea breezes cool coastal towns.</a:t>
+              <a:t>Plants cool the air by transpiration.</a:t>
+            </a:r>
+            <a:endParaRPr lang="en-US" sz="4000" dirty="0"/>
+          </a:p>
+          <a:p>
+            <a:pPr algn="l" marL="342900" indent="-342900">
+              <a:spcAft>
+                <a:spcPts val="800"/>
+              </a:spcAft>
+              <a:buSzPct val="100000"/>
+              <a:buChar char="•"/>
+            </a:pPr>
+            <a:r>
+              <a:rPr lang="en-US" sz="4000" dirty="0">
+                <a:solidFill>
+                  <a:srgbClr val="111111"/>
+                </a:solidFill>
+                <a:latin typeface="Times New Roman" pitchFamily="34" charset="0"/>
+                <a:ea typeface="Times New Roman" pitchFamily="34" charset="-122"/>
+                <a:cs typeface="Times New Roman" pitchFamily="34" charset="-120"/>
+              </a:rPr>
+              <a:t>Climate is controlled by several factors.</a:t>
             </a:r>
             <a:endParaRPr lang="en-US" sz="4000" dirty="0"/>
           </a:p>

--- a/lecons/LSA/Climatology/03_LSA_CLIM_L20_Micro_climates.pptx
+++ b/lecons/LSA/Climatology/03_LSA_CLIM_L20_Micro_climates.pptx
@@ -65,9 +65,13 @@
     <p:sldId id="313" r:id="rId59"/>
     <p:sldId id="314" r:id="rId60"/>
     <p:sldId id="315" r:id="rId61"/>
+    <p:sldId id="316" r:id="rId62"/>
+    <p:sldId id="317" r:id="rId63"/>
+    <p:sldId id="318" r:id="rId64"/>
+    <p:sldId id="319" r:id="rId65"/>
   </p:sldIdLst>
   <p:notesMasterIdLst>
-    <p:notesMasterId r:id="rId62"/>
+    <p:notesMasterId r:id="rId66"/>
   </p:notesMasterIdLst>
   <p:sldSz cx="12192000" cy="6858000"/>
   <p:notesSz cx="6858000" cy="12192000"/>
@@ -3201,7 +3205,7 @@
           <a:p>
             <a:r>
               <a:rPr lang="en-US" dirty="0"/>
-              <a:t>We continue with the definitions. On this slide we have Urban heat island and Anthropogenic heat. Write each point on a new line, with the key term first, and explain it in your own words when we revise. When you finish, we go to the next slide.</a:t>
+              <a:t>We continue with the definitions. On this slide we have Meso-climate and Heat island. Write each point on a new line, with the key term first, and explain it in your own words when we revise. When you finish, we go to the next slide.</a:t>
             </a:r>
             <a:endParaRPr lang="en-US" dirty="0"/>
           </a:p>
@@ -3289,7 +3293,7 @@
           <a:p>
             <a:r>
               <a:rPr lang="en-US" dirty="0"/>
-              <a:t>We continue with the definitions. On this slide we have Evapotranspiration. Write each point on a new line, with the key term first, and explain it in your own words when we revise.</a:t>
+              <a:t>We continue with the definitions. On this slide we have Anthropogenic heat. Write each point on a new line, with the key term first, and explain it in your own words when we revise.</a:t>
             </a:r>
             <a:endParaRPr lang="en-US" dirty="0"/>
           </a:p>
@@ -3377,7 +3381,7 @@
           <a:p>
             <a:r>
               <a:rPr lang="en-US" dirty="0"/>
-              <a:t>Let us copy Meaning and Classification of Micro-climates. Micro-climates are classified as follows. Copy the point on Urban climate on the left, then draw the diagram on the right: types of micro-climates. Give it a title and label it clearly.</a:t>
+              <a:t>Let us copy Meaning of Micro-climates. Micro-climates are explained as follows. Copy the point on Micro-climate on the left, then draw the diagram on the right: types of micro-climates. Give it a title and label it clearly.</a:t>
             </a:r>
             <a:endParaRPr lang="en-US" dirty="0"/>
           </a:p>
@@ -3553,7 +3557,7 @@
           <a:p>
             <a:r>
               <a:rPr lang="en-US" dirty="0"/>
-              <a:t>We continue with Meaning and Classification of Micro-climates. On this slide we have Mountain climate. Write each point on a new line, with the key term first, and explain it in your own words when we revise.</a:t>
+              <a:t>We continue with Meaning of Micro-climates. Copy the point on Micro- and meso-climates: write the key term first, then its explanation.</a:t>
             </a:r>
             <a:endParaRPr lang="en-US" dirty="0"/>
           </a:p>
@@ -3641,7 +3645,7 @@
           <a:p>
             <a:r>
               <a:rPr lang="en-US" dirty="0"/>
-              <a:t>Copy the point on Lakeside climate on the left, then draw the diagram on the right: a lakeside. Give it a title and label it clearly.</a:t>
+              <a:t>Let us copy Classification of Micro-climates. Micro-climates are classified into the following types. Copy the point on Urban climate on the left, then draw the diagram on the right: douala. Give it a title and label it clearly.</a:t>
             </a:r>
             <a:endParaRPr lang="en-US" dirty="0"/>
           </a:p>
@@ -3729,7 +3733,7 @@
           <a:p>
             <a:r>
               <a:rPr lang="en-US" dirty="0"/>
-              <a:t>Copy the point on Forest climate on the left, then draw the diagram on the right: a forest. Give it a title and label it clearly.</a:t>
+              <a:t>We continue with Classification of Micro-climates. Copy the point on Mountain climate: write the key term first, then its explanation.</a:t>
             </a:r>
             <a:endParaRPr lang="en-US" dirty="0"/>
           </a:p>
@@ -3817,7 +3821,7 @@
           <a:p>
             <a:r>
               <a:rPr lang="en-US" dirty="0"/>
-              <a:t>Let us copy Characteristics of Urban Climates. Compared with the countryside, towns have the following characteristics. Copy the point on Higher temperatures on the left, then draw the diagram on the right: the urban heat island. Give it a title and label it clearly.</a:t>
+              <a:t>Copy the point on Lakeside climate on the left, then draw the diagram on the right: a lake shore. Give it a title and label it clearly.</a:t>
             </a:r>
             <a:endParaRPr lang="en-US" dirty="0"/>
           </a:p>
@@ -3905,7 +3909,7 @@
           <a:p>
             <a:r>
               <a:rPr lang="en-US" dirty="0"/>
-              <a:t>We continue with Characteristics of Urban Climates. On this slide we have Lower humidity, Different winds and More pollution. Write each point on a new line, with the key term first, and explain it in your own words when we revise.</a:t>
+              <a:t>Copy the point on Forest climate on the left, then draw the diagram on the right: a forest. Give it a title and label it clearly.</a:t>
             </a:r>
             <a:endParaRPr lang="en-US" dirty="0"/>
           </a:p>
@@ -3993,7 +3997,7 @@
           <a:p>
             <a:r>
               <a:rPr lang="en-US" dirty="0"/>
-              <a:t>Copy the point on Slightly more rain on the left, then draw the diagram on the right: town and countryside compared. Give it a title and label it clearly.</a:t>
+              <a:t>Let us copy Characteristics of Urban Climates. Compared with the countryside, towns have the following climatic characteristics. Copy the point on Higher temperatures on the left, then draw the diagram on the right: the urban heat island. Give it a title and label it clearly.</a:t>
             </a:r>
             <a:endParaRPr lang="en-US" dirty="0"/>
           </a:p>
@@ -4081,7 +4085,7 @@
           <a:p>
             <a:r>
               <a:rPr lang="en-US" dirty="0"/>
-              <a:t>Let us copy Factors of the Urban Heat Island. The urban heat island is caused by the following factors. Copy the point on Surfaces on the left, then draw the diagram on the right: a large city. Give it a title and label it clearly.</a:t>
+              <a:t>We continue with Characteristics of Urban Climates. Copy the point on Lower humidity: write the key term first, then its explanation.</a:t>
             </a:r>
             <a:endParaRPr lang="en-US" dirty="0"/>
           </a:p>
@@ -4169,7 +4173,7 @@
           <a:p>
             <a:r>
               <a:rPr lang="en-US" dirty="0"/>
-              <a:t>We continue with Factors of the Urban Heat Island. On this slide we have Anthropogenic heat and Reduced evapotranspiration. Write each point on a new line, with the key term first, and explain it in your own words when we revise. When you finish, we go to the next slide.</a:t>
+              <a:t>We continue with Characteristics of Urban Climates. Copy the point on Modified winds: write the key term first, then its explanation.</a:t>
             </a:r>
             <a:endParaRPr lang="en-US" dirty="0"/>
           </a:p>
@@ -4257,7 +4261,7 @@
           <a:p>
             <a:r>
               <a:rPr lang="en-US" dirty="0"/>
-              <a:t>We continue with Factors of the Urban Heat Island. On this slide we have Urban geometry and Solutions. Write each point on a new line, with the key term first, and explain it in your own words when we revise.</a:t>
+              <a:t>Copy the point on More pollution and more rain on the left, then draw the diagram on the right: the urban climate. Give it a title and label it clearly.</a:t>
             </a:r>
             <a:endParaRPr lang="en-US" dirty="0"/>
           </a:p>
@@ -4345,7 +4349,7 @@
           <a:p>
             <a:r>
               <a:rPr lang="en-US" dirty="0"/>
-              <a:t>Now let us check what you have understood. Question 1: What is the urban heat island, and give two of its causes in Garoua? Answer in your exercise book.</a:t>
+              <a:t>Let us copy Factors of Urban Climates. The urban climate is explained by the following factors. Copy the point on Artificial surfaces: write the key term first, then its explanation.</a:t>
             </a:r>
             <a:endParaRPr lang="en-US" dirty="0"/>
           </a:p>
@@ -4521,7 +4525,7 @@
           <a:p>
             <a:r>
               <a:rPr lang="en-US" dirty="0"/>
-              <a:t>The expected answer is: the town is warmer than the countryside; causes: tar and concrete, heat from vehicles and generators, few trees (any two). If you got it right, well done.</a:t>
+              <a:t>We continue with Factors of Urban Climates. Copy the point on Anthropogenic heat: write the key term first, then its explanation.</a:t>
             </a:r>
             <a:endParaRPr lang="en-US" dirty="0"/>
           </a:p>
@@ -4609,7 +4613,7 @@
           <a:p>
             <a:r>
               <a:rPr lang="en-US" dirty="0"/>
-              <a:t>Now let us check what you have understood. Question 2: Give two differences between an urban climate and a rural climate. Answer in your exercise book.</a:t>
+              <a:t>We continue with Factors of Urban Climates. Copy the point on Reduced evapotranspiration: write the key term first, then its explanation.</a:t>
             </a:r>
             <a:endParaRPr lang="en-US" dirty="0"/>
           </a:p>
@@ -4697,7 +4701,7 @@
           <a:p>
             <a:r>
               <a:rPr lang="en-US" dirty="0"/>
-              <a:t>The expected answer is: towns are warmer, drier, less windy and more polluted (any two). If you got it right, well done.</a:t>
+              <a:t>We continue with Factors of Urban Climates. Copy the point on Urban geometry: write the key term first, then its explanation.</a:t>
             </a:r>
             <a:endParaRPr lang="en-US" dirty="0"/>
           </a:p>
@@ -4785,7 +4789,7 @@
           <a:p>
             <a:r>
               <a:rPr lang="en-US" dirty="0"/>
-              <a:t>For those who need more practice, fill in the blanks in your exercise book. The answers are: number 1, micro-climate; number 2, island; number 3, anthropogenic.</a:t>
+              <a:t>Now let us check what you have understood. Question 1: What is the urban heat island, and give two of its causes in Garoua? Answer in your exercise book.</a:t>
             </a:r>
             <a:endParaRPr lang="en-US" dirty="0"/>
           </a:p>
@@ -4873,7 +4877,7 @@
           <a:p>
             <a:r>
               <a:rPr lang="en-US" dirty="0"/>
-              <a:t>For your homework: State how temperature changes with altitude. We shall correct it at the beginning of our next lesson.</a:t>
+              <a:t>The expected answer is: the town is warmer than the countryside; causes: tar and concrete, heat from vehicles and generators, few trees (any two). If you got it right, well done.</a:t>
             </a:r>
             <a:endParaRPr lang="en-US" dirty="0"/>
           </a:p>
@@ -4961,7 +4965,7 @@
           <a:p>
             <a:r>
               <a:rPr lang="en-US" dirty="0"/>
-              <a:t>Our next lesson will be on Lesson 21: Mountain Climates. Thank you for your attention, and see you next time.</a:t>
+              <a:t>Now let us check what you have understood. Question 2: Give two differences between an urban climate and a rural climate. Answer in your exercise book.</a:t>
             </a:r>
             <a:endParaRPr lang="en-US" dirty="0"/>
           </a:p>
@@ -5049,7 +5053,7 @@
           <a:p>
             <a:r>
               <a:rPr lang="en-US" dirty="0"/>
-              <a:t>Let us play the bilingual game. I say a word in English, and you give me the French word. Then we do the reverse.</a:t>
+              <a:t>The expected answer is: towns are warmer, drier, less windy and more polluted (any two). If you got it right, well done.</a:t>
             </a:r>
             <a:endParaRPr lang="en-US" dirty="0"/>
           </a:p>
@@ -5137,7 +5141,7 @@
           <a:p>
             <a:r>
               <a:rPr lang="en-US" dirty="0"/>
-              <a:t>I record this information in the official logbook of the class after the lesson.</a:t>
+              <a:t>For those who need more practice, fill in the blanks in your exercise book. The answers are: number 1, micro-climate; number 2, island; number 3, anthropogenic.</a:t>
             </a:r>
             <a:endParaRPr lang="en-US" dirty="0"/>
           </a:p>
@@ -5225,7 +5229,7 @@
           <a:p>
             <a:r>
               <a:rPr lang="en-US" dirty="0"/>
-              <a:t>I complete the second page of the logbook: the matter taught, the evaluation, the homework and the attendance.</a:t>
+              <a:t>For your homework: State how temperature changes with altitude. We shall correct it at the beginning of our next lesson.</a:t>
             </a:r>
             <a:endParaRPr lang="en-US" dirty="0"/>
           </a:p>
@@ -5313,7 +5317,7 @@
           <a:p>
             <a:r>
               <a:rPr lang="en-US" dirty="0"/>
-              <a:t>This slide is for me, the teacher: it gives the timing of the lesson and what to do if the projector is not available.</a:t>
+              <a:t>Our next lesson will be on Lesson 21: Mountain Climates. Thank you for your attention, and see you next time.</a:t>
             </a:r>
             <a:endParaRPr lang="en-US" dirty="0"/>
           </a:p>
@@ -5489,7 +5493,7 @@
           <a:p>
             <a:r>
               <a:rPr lang="en-US" dirty="0"/>
-              <a:t>These are the references and picture credits used to prepare this lesson.</a:t>
+              <a:t>Let us play the bilingual game. I say a word in English, and you give me the French word. Then we do the reverse.</a:t>
             </a:r>
             <a:endParaRPr lang="en-US" dirty="0"/>
           </a:p>
@@ -5513,6 +5517,358 @@
             <a:fld id="{F7021451-1387-4CA6-816F-3879F97B5CBC}" type="slidenum">
               <a:rPr lang="en-US"/>
               <a:t>60</a:t>
+            </a:fld>
+            <a:endParaRPr lang="en-US"/>
+          </a:p>
+        </p:txBody>
+      </p:sp>
+    </p:spTree>
+    <p:extLst>
+      <p:ext uri="{BB962C8B-B14F-4D97-AF65-F5344CB8AC3E}">
+        <p14:creationId xmlns:p14="http://schemas.microsoft.com/office/powerpoint/2010/main" val="1024086991"/>
+      </p:ext>
+    </p:extLst>
+  </p:cSld>
+  <p:clrMapOvr>
+    <a:masterClrMapping/>
+  </p:clrMapOvr>
+</p:notes>
+</file>
+
+<file path=ppt/notesSlides/notesSlide61.xml><?xml version="1.0" encoding="utf-8"?>
+<p:notes xmlns:a="http://schemas.openxmlformats.org/drawingml/2006/main" xmlns:r="http://schemas.openxmlformats.org/officeDocument/2006/relationships" xmlns:p="http://schemas.openxmlformats.org/presentationml/2006/main">
+  <p:cSld>
+    <p:spTree>
+      <p:nvGrpSpPr>
+        <p:cNvPr id="1" name=""/>
+        <p:cNvGrpSpPr/>
+        <p:nvPr/>
+      </p:nvGrpSpPr>
+      <p:grpSpPr>
+        <a:xfrm>
+          <a:off x="0" y="0"/>
+          <a:ext cx="0" cy="0"/>
+          <a:chOff x="0" y="0"/>
+          <a:chExt cx="0" cy="0"/>
+        </a:xfrm>
+      </p:grpSpPr>
+      <p:sp>
+        <p:nvSpPr>
+          <p:cNvPr id="2" name="Slide Image Placeholder 1"/>
+          <p:cNvSpPr>
+            <a:spLocks noGrp="1" noRot="1" noChangeAspect="1"/>
+          </p:cNvSpPr>
+          <p:nvPr>
+            <p:ph type="sldImg"/>
+          </p:nvPr>
+        </p:nvSpPr>
+        <p:spPr/>
+      </p:sp>
+      <p:sp>
+        <p:nvSpPr>
+          <p:cNvPr id="3" name="Notes Placeholder 2"/>
+          <p:cNvSpPr>
+            <a:spLocks noGrp="1"/>
+          </p:cNvSpPr>
+          <p:nvPr>
+            <p:ph type="body" idx="1"/>
+          </p:nvPr>
+        </p:nvSpPr>
+        <p:spPr/>
+        <p:txBody>
+          <a:bodyPr/>
+          <a:lstStyle/>
+          <a:p>
+            <a:r>
+              <a:rPr lang="en-US" dirty="0"/>
+              <a:t>I record this information in the official logbook of the class after the lesson.</a:t>
+            </a:r>
+            <a:endParaRPr lang="en-US" dirty="0"/>
+          </a:p>
+        </p:txBody>
+      </p:sp>
+      <p:sp>
+        <p:nvSpPr>
+          <p:cNvPr id="4" name="Slide Number Placeholder 3"/>
+          <p:cNvSpPr>
+            <a:spLocks noGrp="1"/>
+          </p:cNvSpPr>
+          <p:nvPr>
+            <p:ph type="sldNum" sz="quarter" idx="10"/>
+          </p:nvPr>
+        </p:nvSpPr>
+        <p:spPr/>
+        <p:txBody>
+          <a:bodyPr/>
+          <a:lstStyle/>
+          <a:p>
+            <a:fld id="{F7021451-1387-4CA6-816F-3879F97B5CBC}" type="slidenum">
+              <a:rPr lang="en-US"/>
+              <a:t>61</a:t>
+            </a:fld>
+            <a:endParaRPr lang="en-US"/>
+          </a:p>
+        </p:txBody>
+      </p:sp>
+    </p:spTree>
+    <p:extLst>
+      <p:ext uri="{BB962C8B-B14F-4D97-AF65-F5344CB8AC3E}">
+        <p14:creationId xmlns:p14="http://schemas.microsoft.com/office/powerpoint/2010/main" val="1024086991"/>
+      </p:ext>
+    </p:extLst>
+  </p:cSld>
+  <p:clrMapOvr>
+    <a:masterClrMapping/>
+  </p:clrMapOvr>
+</p:notes>
+</file>
+
+<file path=ppt/notesSlides/notesSlide62.xml><?xml version="1.0" encoding="utf-8"?>
+<p:notes xmlns:a="http://schemas.openxmlformats.org/drawingml/2006/main" xmlns:r="http://schemas.openxmlformats.org/officeDocument/2006/relationships" xmlns:p="http://schemas.openxmlformats.org/presentationml/2006/main">
+  <p:cSld>
+    <p:spTree>
+      <p:nvGrpSpPr>
+        <p:cNvPr id="1" name=""/>
+        <p:cNvGrpSpPr/>
+        <p:nvPr/>
+      </p:nvGrpSpPr>
+      <p:grpSpPr>
+        <a:xfrm>
+          <a:off x="0" y="0"/>
+          <a:ext cx="0" cy="0"/>
+          <a:chOff x="0" y="0"/>
+          <a:chExt cx="0" cy="0"/>
+        </a:xfrm>
+      </p:grpSpPr>
+      <p:sp>
+        <p:nvSpPr>
+          <p:cNvPr id="2" name="Slide Image Placeholder 1"/>
+          <p:cNvSpPr>
+            <a:spLocks noGrp="1" noRot="1" noChangeAspect="1"/>
+          </p:cNvSpPr>
+          <p:nvPr>
+            <p:ph type="sldImg"/>
+          </p:nvPr>
+        </p:nvSpPr>
+        <p:spPr/>
+      </p:sp>
+      <p:sp>
+        <p:nvSpPr>
+          <p:cNvPr id="3" name="Notes Placeholder 2"/>
+          <p:cNvSpPr>
+            <a:spLocks noGrp="1"/>
+          </p:cNvSpPr>
+          <p:nvPr>
+            <p:ph type="body" idx="1"/>
+          </p:nvPr>
+        </p:nvSpPr>
+        <p:spPr/>
+        <p:txBody>
+          <a:bodyPr/>
+          <a:lstStyle/>
+          <a:p>
+            <a:r>
+              <a:rPr lang="en-US" dirty="0"/>
+              <a:t>I complete the second page of the logbook: the matter taught, the evaluation, the homework and the attendance.</a:t>
+            </a:r>
+            <a:endParaRPr lang="en-US" dirty="0"/>
+          </a:p>
+        </p:txBody>
+      </p:sp>
+      <p:sp>
+        <p:nvSpPr>
+          <p:cNvPr id="4" name="Slide Number Placeholder 3"/>
+          <p:cNvSpPr>
+            <a:spLocks noGrp="1"/>
+          </p:cNvSpPr>
+          <p:nvPr>
+            <p:ph type="sldNum" sz="quarter" idx="10"/>
+          </p:nvPr>
+        </p:nvSpPr>
+        <p:spPr/>
+        <p:txBody>
+          <a:bodyPr/>
+          <a:lstStyle/>
+          <a:p>
+            <a:fld id="{F7021451-1387-4CA6-816F-3879F97B5CBC}" type="slidenum">
+              <a:rPr lang="en-US"/>
+              <a:t>62</a:t>
+            </a:fld>
+            <a:endParaRPr lang="en-US"/>
+          </a:p>
+        </p:txBody>
+      </p:sp>
+    </p:spTree>
+    <p:extLst>
+      <p:ext uri="{BB962C8B-B14F-4D97-AF65-F5344CB8AC3E}">
+        <p14:creationId xmlns:p14="http://schemas.microsoft.com/office/powerpoint/2010/main" val="1024086991"/>
+      </p:ext>
+    </p:extLst>
+  </p:cSld>
+  <p:clrMapOvr>
+    <a:masterClrMapping/>
+  </p:clrMapOvr>
+</p:notes>
+</file>
+
+<file path=ppt/notesSlides/notesSlide63.xml><?xml version="1.0" encoding="utf-8"?>
+<p:notes xmlns:a="http://schemas.openxmlformats.org/drawingml/2006/main" xmlns:r="http://schemas.openxmlformats.org/officeDocument/2006/relationships" xmlns:p="http://schemas.openxmlformats.org/presentationml/2006/main">
+  <p:cSld>
+    <p:spTree>
+      <p:nvGrpSpPr>
+        <p:cNvPr id="1" name=""/>
+        <p:cNvGrpSpPr/>
+        <p:nvPr/>
+      </p:nvGrpSpPr>
+      <p:grpSpPr>
+        <a:xfrm>
+          <a:off x="0" y="0"/>
+          <a:ext cx="0" cy="0"/>
+          <a:chOff x="0" y="0"/>
+          <a:chExt cx="0" cy="0"/>
+        </a:xfrm>
+      </p:grpSpPr>
+      <p:sp>
+        <p:nvSpPr>
+          <p:cNvPr id="2" name="Slide Image Placeholder 1"/>
+          <p:cNvSpPr>
+            <a:spLocks noGrp="1" noRot="1" noChangeAspect="1"/>
+          </p:cNvSpPr>
+          <p:nvPr>
+            <p:ph type="sldImg"/>
+          </p:nvPr>
+        </p:nvSpPr>
+        <p:spPr/>
+      </p:sp>
+      <p:sp>
+        <p:nvSpPr>
+          <p:cNvPr id="3" name="Notes Placeholder 2"/>
+          <p:cNvSpPr>
+            <a:spLocks noGrp="1"/>
+          </p:cNvSpPr>
+          <p:nvPr>
+            <p:ph type="body" idx="1"/>
+          </p:nvPr>
+        </p:nvSpPr>
+        <p:spPr/>
+        <p:txBody>
+          <a:bodyPr/>
+          <a:lstStyle/>
+          <a:p>
+            <a:r>
+              <a:rPr lang="en-US" dirty="0"/>
+              <a:t>This slide is for me, the teacher: it gives the timing of the lesson and what to do if the projector is not available.</a:t>
+            </a:r>
+            <a:endParaRPr lang="en-US" dirty="0"/>
+          </a:p>
+        </p:txBody>
+      </p:sp>
+      <p:sp>
+        <p:nvSpPr>
+          <p:cNvPr id="4" name="Slide Number Placeholder 3"/>
+          <p:cNvSpPr>
+            <a:spLocks noGrp="1"/>
+          </p:cNvSpPr>
+          <p:nvPr>
+            <p:ph type="sldNum" sz="quarter" idx="10"/>
+          </p:nvPr>
+        </p:nvSpPr>
+        <p:spPr/>
+        <p:txBody>
+          <a:bodyPr/>
+          <a:lstStyle/>
+          <a:p>
+            <a:fld id="{F7021451-1387-4CA6-816F-3879F97B5CBC}" type="slidenum">
+              <a:rPr lang="en-US"/>
+              <a:t>63</a:t>
+            </a:fld>
+            <a:endParaRPr lang="en-US"/>
+          </a:p>
+        </p:txBody>
+      </p:sp>
+    </p:spTree>
+    <p:extLst>
+      <p:ext uri="{BB962C8B-B14F-4D97-AF65-F5344CB8AC3E}">
+        <p14:creationId xmlns:p14="http://schemas.microsoft.com/office/powerpoint/2010/main" val="1024086991"/>
+      </p:ext>
+    </p:extLst>
+  </p:cSld>
+  <p:clrMapOvr>
+    <a:masterClrMapping/>
+  </p:clrMapOvr>
+</p:notes>
+</file>
+
+<file path=ppt/notesSlides/notesSlide64.xml><?xml version="1.0" encoding="utf-8"?>
+<p:notes xmlns:a="http://schemas.openxmlformats.org/drawingml/2006/main" xmlns:r="http://schemas.openxmlformats.org/officeDocument/2006/relationships" xmlns:p="http://schemas.openxmlformats.org/presentationml/2006/main">
+  <p:cSld>
+    <p:spTree>
+      <p:nvGrpSpPr>
+        <p:cNvPr id="1" name=""/>
+        <p:cNvGrpSpPr/>
+        <p:nvPr/>
+      </p:nvGrpSpPr>
+      <p:grpSpPr>
+        <a:xfrm>
+          <a:off x="0" y="0"/>
+          <a:ext cx="0" cy="0"/>
+          <a:chOff x="0" y="0"/>
+          <a:chExt cx="0" cy="0"/>
+        </a:xfrm>
+      </p:grpSpPr>
+      <p:sp>
+        <p:nvSpPr>
+          <p:cNvPr id="2" name="Slide Image Placeholder 1"/>
+          <p:cNvSpPr>
+            <a:spLocks noGrp="1" noRot="1" noChangeAspect="1"/>
+          </p:cNvSpPr>
+          <p:nvPr>
+            <p:ph type="sldImg"/>
+          </p:nvPr>
+        </p:nvSpPr>
+        <p:spPr/>
+      </p:sp>
+      <p:sp>
+        <p:nvSpPr>
+          <p:cNvPr id="3" name="Notes Placeholder 2"/>
+          <p:cNvSpPr>
+            <a:spLocks noGrp="1"/>
+          </p:cNvSpPr>
+          <p:nvPr>
+            <p:ph type="body" idx="1"/>
+          </p:nvPr>
+        </p:nvSpPr>
+        <p:spPr/>
+        <p:txBody>
+          <a:bodyPr/>
+          <a:lstStyle/>
+          <a:p>
+            <a:r>
+              <a:rPr lang="en-US" dirty="0"/>
+              <a:t>These are the references and picture credits used to prepare this lesson.</a:t>
+            </a:r>
+            <a:endParaRPr lang="en-US" dirty="0"/>
+          </a:p>
+        </p:txBody>
+      </p:sp>
+      <p:sp>
+        <p:nvSpPr>
+          <p:cNvPr id="4" name="Slide Number Placeholder 3"/>
+          <p:cNvSpPr>
+            <a:spLocks noGrp="1"/>
+          </p:cNvSpPr>
+          <p:nvPr>
+            <p:ph type="sldNum" sz="quarter" idx="10"/>
+          </p:nvPr>
+        </p:nvSpPr>
+        <p:spPr/>
+        <p:txBody>
+          <a:bodyPr/>
+          <a:lstStyle/>
+          <a:p>
+            <a:fld id="{F7021451-1387-4CA6-816F-3879F97B5CBC}" type="slidenum">
+              <a:rPr lang="en-US"/>
+              <a:t>64</a:t>
             </a:fld>
             <a:endParaRPr lang="en-US"/>
           </a:p>
@@ -14806,7 +15162,7 @@
                 <a:ea typeface="Times New Roman" pitchFamily="34" charset="-122"/>
                 <a:cs typeface="Times New Roman" pitchFamily="34" charset="-120"/>
               </a:rPr>
-              <a:t>Urban heat island: </a:t>
+              <a:t>Meso-climate: </a:t>
             </a:r>
             <a:pPr algn="l" indent="0" marL="0">
               <a:spcAft>
@@ -14823,7 +15179,7 @@
                 <a:ea typeface="Times New Roman" pitchFamily="34" charset="-122"/>
                 <a:cs typeface="Times New Roman" pitchFamily="34" charset="-120"/>
               </a:rPr>
-              <a:t>It is the higher temperature of a town compared with the surrounding countryside.</a:t>
+              <a:t>It is the climate of a medium-sized area, such as a town, a valley or a lake shore, a few kilometres to tens of kilometres wide.</a:t>
             </a:r>
             <a:endParaRPr lang="en-US" sz="4000" dirty="0"/>
           </a:p>
@@ -14843,7 +15199,7 @@
                 <a:ea typeface="Times New Roman" pitchFamily="34" charset="-122"/>
                 <a:cs typeface="Times New Roman" pitchFamily="34" charset="-120"/>
               </a:rPr>
-              <a:t>Anthropogenic heat: </a:t>
+              <a:t>Heat island: </a:t>
             </a:r>
             <a:pPr algn="l" indent="0" marL="0">
               <a:spcAft>
@@ -14860,7 +15216,7 @@
                 <a:ea typeface="Times New Roman" pitchFamily="34" charset="-122"/>
                 <a:cs typeface="Times New Roman" pitchFamily="34" charset="-120"/>
               </a:rPr>
-              <a:t>It is the heat released by human activities (vehicles, machines, air conditioners).</a:t>
+              <a:t>It is the higher temperature of a town compared with the surrounding countryside.</a:t>
             </a:r>
             <a:endParaRPr lang="en-US" sz="4000" dirty="0"/>
           </a:p>
@@ -15079,7 +15435,7 @@
                 <a:ea typeface="Times New Roman" pitchFamily="34" charset="-122"/>
                 <a:cs typeface="Times New Roman" pitchFamily="34" charset="-120"/>
               </a:rPr>
-              <a:t>Evapotranspiration: </a:t>
+              <a:t>Anthropogenic heat: </a:t>
             </a:r>
             <a:pPr algn="l" indent="0" marL="0">
               <a:spcAft>
@@ -15096,7 +15452,7 @@
                 <a:ea typeface="Times New Roman" pitchFamily="34" charset="-122"/>
                 <a:cs typeface="Times New Roman" pitchFamily="34" charset="-120"/>
               </a:rPr>
-              <a:t>It is the combined loss of water by evaporation and by plant transpiration.</a:t>
+              <a:t>It is the heat released by human activities (vehicles, machines, air conditioners).</a:t>
             </a:r>
             <a:endParaRPr lang="en-US" sz="4000" dirty="0"/>
           </a:p>
@@ -15249,7 +15605,7 @@
                 <a:ea typeface="Times New Roman" pitchFamily="34" charset="-122"/>
                 <a:cs typeface="Times New Roman" pitchFamily="34" charset="-120"/>
               </a:rPr>
-              <a:t>1. Meaning and Classification of Micro-climates</a:t>
+              <a:t>1. Meaning of Micro-climates</a:t>
             </a:r>
             <a:endParaRPr lang="en-US" sz="3600" dirty="0"/>
           </a:p>
@@ -15264,7 +15620,7 @@
         <p:spPr>
           <a:xfrm>
             <a:off x="365760" y="1783080"/>
-            <a:ext cx="4846320" cy="4617720"/>
+            <a:ext cx="6035040" cy="4617720"/>
           </a:xfrm>
           <a:prstGeom prst="rect">
             <a:avLst/>
@@ -15283,7 +15639,7 @@
               <a:buNone/>
             </a:pPr>
             <a:r>
-              <a:rPr lang="en-US" sz="3600" i="1" dirty="0">
+              <a:rPr lang="en-US" sz="2800" i="1" dirty="0">
                 <a:solidFill>
                   <a:srgbClr val="111111"/>
                 </a:solidFill>
@@ -15291,9 +15647,9 @@
                 <a:ea typeface="Times New Roman" pitchFamily="34" charset="-122"/>
                 <a:cs typeface="Times New Roman" pitchFamily="34" charset="-120"/>
               </a:rPr>
-              <a:t>Micro-climates are classified as follows:</a:t>
-            </a:r>
-            <a:endParaRPr lang="en-US" sz="3600" dirty="0"/>
+              <a:t>Micro-climates are explained as follows:</a:t>
+            </a:r>
+            <a:endParaRPr lang="en-US" sz="2800" dirty="0"/>
           </a:p>
           <a:p>
             <a:pPr algn="l" indent="0" marL="0">
@@ -15303,7 +15659,7 @@
               <a:buNone/>
             </a:pPr>
             <a:r>
-              <a:rPr lang="en-US" sz="3600" b="1" dirty="0">
+              <a:rPr lang="en-US" sz="2800" b="1" dirty="0">
                 <a:solidFill>
                   <a:srgbClr val="111111"/>
                 </a:solidFill>
@@ -15311,7 +15667,7 @@
                 <a:ea typeface="Times New Roman" pitchFamily="34" charset="-122"/>
                 <a:cs typeface="Times New Roman" pitchFamily="34" charset="-120"/>
               </a:rPr>
-              <a:t>Urban climate: </a:t>
+              <a:t>Micro-climate: </a:t>
             </a:r>
             <a:pPr algn="l" indent="0" marL="0">
               <a:spcAft>
@@ -15320,7 +15676,7 @@
               <a:buNone/>
             </a:pPr>
             <a:r>
-              <a:rPr lang="en-US" sz="3600" dirty="0">
+              <a:rPr lang="en-US" sz="2800" dirty="0">
                 <a:solidFill>
                   <a:srgbClr val="111111"/>
                 </a:solidFill>
@@ -15328,9 +15684,9 @@
                 <a:ea typeface="Times New Roman" pitchFamily="34" charset="-122"/>
                 <a:cs typeface="Times New Roman" pitchFamily="34" charset="-120"/>
               </a:rPr>
-              <a:t>The climate of a town, warmer, drier and more polluted than the countryside.</a:t>
-            </a:r>
-            <a:endParaRPr lang="en-US" sz="3600" dirty="0"/>
+              <a:t>A micro-climate is the special climate of a small area, from a few metres to a few kilometres, such as a garden, a forest clearing or a street. It differs from the regional climate because of local surfaces, relief, water or vegetation.</a:t>
+            </a:r>
+            <a:endParaRPr lang="en-US" sz="2800" dirty="0"/>
           </a:p>
         </p:txBody>
       </p:sp>
@@ -15350,8 +15706,8 @@
         </p:blipFill>
         <p:spPr>
           <a:xfrm>
-            <a:off x="5349240" y="2617506"/>
-            <a:ext cx="6659575" cy="2601397"/>
+            <a:off x="6537960" y="2849678"/>
+            <a:ext cx="5470855" cy="2137053"/>
           </a:xfrm>
           <a:prstGeom prst="rect">
             <a:avLst/>
@@ -15366,8 +15722,8 @@
         </p:nvSpPr>
         <p:spPr>
           <a:xfrm>
-            <a:off x="5349240" y="6089904"/>
-            <a:ext cx="6659575" cy="347472"/>
+            <a:off x="6537960" y="6089904"/>
+            <a:ext cx="5470855" cy="347472"/>
           </a:xfrm>
           <a:prstGeom prst="rect">
             <a:avLst/>
@@ -15765,7 +16121,7 @@
         <p:spPr>
           <a:xfrm>
             <a:off x="0" y="658368"/>
-            <a:ext cx="5120640" cy="5833872"/>
+            <a:ext cx="2468880" cy="5833872"/>
           </a:xfrm>
           <a:prstGeom prst="rect">
             <a:avLst/>
@@ -15780,8 +16136,8 @@
         </p:nvSpPr>
         <p:spPr>
           <a:xfrm>
-            <a:off x="5349240" y="1005840"/>
-            <a:ext cx="6522415" cy="731520"/>
+            <a:off x="2697480" y="1005840"/>
+            <a:ext cx="9174175" cy="731520"/>
           </a:xfrm>
           <a:prstGeom prst="rect">
             <a:avLst/>
@@ -15807,7 +16163,7 @@
                 <a:ea typeface="Times New Roman" pitchFamily="34" charset="-122"/>
                 <a:cs typeface="Times New Roman" pitchFamily="34" charset="-120"/>
               </a:rPr>
-              <a:t>1. Meaning and Classification of Micro-climates</a:t>
+              <a:t>1. Meaning of Micro-climates</a:t>
             </a:r>
             <a:endParaRPr lang="en-US" sz="3600" dirty="0"/>
           </a:p>
@@ -15821,8 +16177,8 @@
         </p:nvSpPr>
         <p:spPr>
           <a:xfrm>
-            <a:off x="5349240" y="1783080"/>
-            <a:ext cx="6522415" cy="4663440"/>
+            <a:off x="2697480" y="1783080"/>
+            <a:ext cx="9174175" cy="4663440"/>
           </a:xfrm>
           <a:prstGeom prst="rect">
             <a:avLst/>
@@ -15849,7 +16205,7 @@
                 <a:ea typeface="Times New Roman" pitchFamily="34" charset="-122"/>
                 <a:cs typeface="Times New Roman" pitchFamily="34" charset="-120"/>
               </a:rPr>
-              <a:t>Mountain climate: </a:t>
+              <a:t>Micro- and meso-climates: </a:t>
             </a:r>
             <a:pPr algn="l" indent="0" marL="0">
               <a:spcAft>
@@ -15866,7 +16222,7 @@
                 <a:ea typeface="Times New Roman" pitchFamily="34" charset="-122"/>
                 <a:cs typeface="Times New Roman" pitchFamily="34" charset="-120"/>
               </a:rPr>
-              <a:t>Conditions vary with altitude and with the side of the mountain.</a:t>
+              <a:t>The climate of a larger area, such as a whole town or a valley, is called a meso-climate. In practice, both are studied together as local climates, different from the macro-climate of a region.</a:t>
             </a:r>
             <a:endParaRPr lang="en-US" sz="4000" dirty="0"/>
           </a:p>
@@ -16019,7 +16375,7 @@
                 <a:ea typeface="Times New Roman" pitchFamily="34" charset="-122"/>
                 <a:cs typeface="Times New Roman" pitchFamily="34" charset="-120"/>
               </a:rPr>
-              <a:t>1. Meaning and Classification of Micro-climates</a:t>
+              <a:t>2. Classification of Micro-climates</a:t>
             </a:r>
             <a:endParaRPr lang="en-US" sz="3600" dirty="0"/>
           </a:p>
@@ -16034,7 +16390,7 @@
         <p:spPr>
           <a:xfrm>
             <a:off x="365760" y="1783080"/>
-            <a:ext cx="4846320" cy="4617720"/>
+            <a:ext cx="6035040" cy="4617720"/>
           </a:xfrm>
           <a:prstGeom prst="rect">
             <a:avLst/>
@@ -16053,7 +16409,7 @@
               <a:buNone/>
             </a:pPr>
             <a:r>
-              <a:rPr lang="en-US" sz="3600" b="1" dirty="0">
+              <a:rPr lang="en-US" sz="3400" i="1" dirty="0">
                 <a:solidFill>
                   <a:srgbClr val="111111"/>
                 </a:solidFill>
@@ -16061,8 +16417,11 @@
                 <a:ea typeface="Times New Roman" pitchFamily="34" charset="-122"/>
                 <a:cs typeface="Times New Roman" pitchFamily="34" charset="-120"/>
               </a:rPr>
-              <a:t>Lakeside climate: </a:t>
-            </a:r>
+              <a:t>Micro-climates are classified into the following types:</a:t>
+            </a:r>
+            <a:endParaRPr lang="en-US" sz="3400" dirty="0"/>
+          </a:p>
+          <a:p>
             <a:pPr algn="l" indent="0" marL="0">
               <a:spcAft>
                 <a:spcPts val="800"/>
@@ -16070,7 +16429,7 @@
               <a:buNone/>
             </a:pPr>
             <a:r>
-              <a:rPr lang="en-US" sz="3600" dirty="0">
+              <a:rPr lang="en-US" sz="3400" b="1" dirty="0">
                 <a:solidFill>
                   <a:srgbClr val="111111"/>
                 </a:solidFill>
@@ -16078,15 +16437,32 @@
                 <a:ea typeface="Times New Roman" pitchFamily="34" charset="-122"/>
                 <a:cs typeface="Times New Roman" pitchFamily="34" charset="-120"/>
               </a:rPr>
-              <a:t>Along a large lake such as Lake Lagdo, the air is cooler and more humid.</a:t>
-            </a:r>
-            <a:endParaRPr lang="en-US" sz="3600" dirty="0"/>
+              <a:t>Urban climate: </a:t>
+            </a:r>
+            <a:pPr algn="l" indent="0" marL="0">
+              <a:spcAft>
+                <a:spcPts val="800"/>
+              </a:spcAft>
+              <a:buNone/>
+            </a:pPr>
+            <a:r>
+              <a:rPr lang="en-US" sz="3400" dirty="0">
+                <a:solidFill>
+                  <a:srgbClr val="111111"/>
+                </a:solidFill>
+                <a:latin typeface="Times New Roman" pitchFamily="34" charset="0"/>
+                <a:ea typeface="Times New Roman" pitchFamily="34" charset="-122"/>
+                <a:cs typeface="Times New Roman" pitchFamily="34" charset="-120"/>
+              </a:rPr>
+              <a:t>The climate of a town is warmer, drier and more polluted than that of the surrounding countryside. It is created by buildings, roads, vehicles and industries.</a:t>
+            </a:r>
+            <a:endParaRPr lang="en-US" sz="3400" dirty="0"/>
           </a:p>
         </p:txBody>
       </p:sp>
       <p:pic>
         <p:nvPicPr>
-          <p:cNvPr id="5" name="Image 0" descr="/home/claude/f4/img/v2/lsa_lake.jpg">    </p:cNvPr>
+          <p:cNvPr id="5" name="Image 0" descr="/home/claude/f4/img/v2/lsa_douala.jpg">    </p:cNvPr>
           <p:cNvPicPr>
             <a:picLocks noChangeAspect="1"/>
           </p:cNvPicPr>
@@ -16100,8 +16476,8 @@
         </p:blipFill>
         <p:spPr>
           <a:xfrm>
-            <a:off x="5349240" y="2071212"/>
-            <a:ext cx="6659575" cy="3693983"/>
+            <a:off x="6537960" y="2400897"/>
+            <a:ext cx="5470855" cy="3034615"/>
           </a:xfrm>
           <a:prstGeom prst="rect">
             <a:avLst/>
@@ -16116,8 +16492,8 @@
         </p:nvSpPr>
         <p:spPr>
           <a:xfrm>
-            <a:off x="5349240" y="6089904"/>
-            <a:ext cx="6659575" cy="347472"/>
+            <a:off x="6537960" y="6089904"/>
+            <a:ext cx="5470855" cy="347472"/>
           </a:xfrm>
           <a:prstGeom prst="rect">
             <a:avLst/>
@@ -16141,7 +16517,7 @@
                 <a:ea typeface="Times New Roman" pitchFamily="34" charset="-122"/>
                 <a:cs typeface="Times New Roman" pitchFamily="34" charset="-120"/>
               </a:rPr>
-              <a:t>Illustration: a lakeside</a:t>
+              <a:t>Illustration: Douala</a:t>
             </a:r>
             <a:endParaRPr lang="en-US" sz="1600" dirty="0"/>
           </a:p>
@@ -16259,109 +16635,9 @@
           </a:p>
         </p:txBody>
       </p:sp>
-      <p:sp>
-        <p:nvSpPr>
-          <p:cNvPr id="3" name="Text 1"/>
-          <p:cNvSpPr/>
-          <p:nvPr/>
-        </p:nvSpPr>
-        <p:spPr>
-          <a:xfrm>
-            <a:off x="365760" y="1005840"/>
-            <a:ext cx="11460175" cy="731520"/>
-          </a:xfrm>
-          <a:prstGeom prst="rect">
-            <a:avLst/>
-          </a:prstGeom>
-          <a:noFill/>
-          <a:ln/>
-        </p:spPr>
-        <p:txBody>
-          <a:bodyPr wrap="square" lIns="0" tIns="0" rIns="0" bIns="0" rtlCol="0" anchor="ctr">
-            <a:normAutofit/>
-          </a:bodyPr>
-          <a:lstStyle/>
-          <a:p>
-            <a:pPr algn="ctr" indent="0" marL="0">
-              <a:buNone/>
-            </a:pPr>
-            <a:r>
-              <a:rPr lang="en-US" sz="3600" b="1" dirty="0">
-                <a:solidFill>
-                  <a:srgbClr val="990011"/>
-                </a:solidFill>
-                <a:latin typeface="Times New Roman" pitchFamily="34" charset="0"/>
-                <a:ea typeface="Times New Roman" pitchFamily="34" charset="-122"/>
-                <a:cs typeface="Times New Roman" pitchFamily="34" charset="-120"/>
-              </a:rPr>
-              <a:t>1. Meaning and Classification of Micro-climates</a:t>
-            </a:r>
-            <a:endParaRPr lang="en-US" sz="3600" dirty="0"/>
-          </a:p>
-        </p:txBody>
-      </p:sp>
-      <p:sp>
-        <p:nvSpPr>
-          <p:cNvPr id="4" name="Text 2"/>
-          <p:cNvSpPr/>
-          <p:nvPr/>
-        </p:nvSpPr>
-        <p:spPr>
-          <a:xfrm>
-            <a:off x="365760" y="1783080"/>
-            <a:ext cx="4846320" cy="4617720"/>
-          </a:xfrm>
-          <a:prstGeom prst="rect">
-            <a:avLst/>
-          </a:prstGeom>
-          <a:noFill/>
-          <a:ln/>
-        </p:spPr>
-        <p:txBody>
-          <a:bodyPr wrap="square" lIns="0" tIns="0" rIns="0" bIns="0" rtlCol="0" anchor="t"/>
-          <a:lstStyle/>
-          <a:p>
-            <a:pPr algn="l" indent="0" marL="0">
-              <a:spcAft>
-                <a:spcPts val="800"/>
-              </a:spcAft>
-              <a:buNone/>
-            </a:pPr>
-            <a:r>
-              <a:rPr lang="en-US" sz="3600" b="1" dirty="0">
-                <a:solidFill>
-                  <a:srgbClr val="111111"/>
-                </a:solidFill>
-                <a:latin typeface="Times New Roman" pitchFamily="34" charset="0"/>
-                <a:ea typeface="Times New Roman" pitchFamily="34" charset="-122"/>
-                <a:cs typeface="Times New Roman" pitchFamily="34" charset="-120"/>
-              </a:rPr>
-              <a:t>Forest climate: </a:t>
-            </a:r>
-            <a:pPr algn="l" indent="0" marL="0">
-              <a:spcAft>
-                <a:spcPts val="800"/>
-              </a:spcAft>
-              <a:buNone/>
-            </a:pPr>
-            <a:r>
-              <a:rPr lang="en-US" sz="3600" dirty="0">
-                <a:solidFill>
-                  <a:srgbClr val="111111"/>
-                </a:solidFill>
-                <a:latin typeface="Times New Roman" pitchFamily="34" charset="0"/>
-                <a:ea typeface="Times New Roman" pitchFamily="34" charset="-122"/>
-                <a:cs typeface="Times New Roman" pitchFamily="34" charset="-120"/>
-              </a:rPr>
-              <a:t>Inside a forest, the air is shady, cool, humid and calm.</a:t>
-            </a:r>
-            <a:endParaRPr lang="en-US" sz="3600" dirty="0"/>
-          </a:p>
-        </p:txBody>
-      </p:sp>
       <p:pic>
         <p:nvPicPr>
-          <p:cNvPr id="5" name="Image 0" descr="/home/claude/f4/img/v2/f2t_rainforest.jpg">    </p:cNvPr>
+          <p:cNvPr id="3" name="Image 0" descr="/home/claude/f4/img/minesec_sheet.png">    </p:cNvPr>
           <p:cNvPicPr>
             <a:picLocks noChangeAspect="1"/>
           </p:cNvPicPr>
@@ -16375,8 +16651,8 @@
         </p:blipFill>
         <p:spPr>
           <a:xfrm>
-            <a:off x="5349240" y="2071212"/>
-            <a:ext cx="6659575" cy="3693983"/>
+            <a:off x="0" y="658368"/>
+            <a:ext cx="5120640" cy="5833872"/>
           </a:xfrm>
           <a:prstGeom prst="rect">
             <a:avLst/>
@@ -16385,14 +16661,14 @@
       </p:pic>
       <p:sp>
         <p:nvSpPr>
-          <p:cNvPr id="6" name="Text 3"/>
+          <p:cNvPr id="4" name="Text 1"/>
           <p:cNvSpPr/>
           <p:nvPr/>
         </p:nvSpPr>
         <p:spPr>
           <a:xfrm>
-            <a:off x="5349240" y="6089904"/>
-            <a:ext cx="6659575" cy="347472"/>
+            <a:off x="5349240" y="1005840"/>
+            <a:ext cx="6522415" cy="731520"/>
           </a:xfrm>
           <a:prstGeom prst="rect">
             <a:avLst/>
@@ -16401,24 +16677,85 @@
           <a:ln/>
         </p:spPr>
         <p:txBody>
-          <a:bodyPr wrap="square" lIns="0" tIns="0" rIns="0" bIns="0" rtlCol="0" anchor="ctr"/>
+          <a:bodyPr wrap="square" lIns="0" tIns="0" rIns="0" bIns="0" rtlCol="0" anchor="ctr">
+            <a:normAutofit/>
+          </a:bodyPr>
           <a:lstStyle/>
           <a:p>
             <a:pPr algn="ctr" indent="0" marL="0">
               <a:buNone/>
             </a:pPr>
             <a:r>
-              <a:rPr lang="en-US" sz="1600" i="1" dirty="0">
-                <a:solidFill>
-                  <a:srgbClr val="555555"/>
+              <a:rPr lang="en-US" sz="3600" b="1" dirty="0">
+                <a:solidFill>
+                  <a:srgbClr val="990011"/>
                 </a:solidFill>
                 <a:latin typeface="Times New Roman" pitchFamily="34" charset="0"/>
                 <a:ea typeface="Times New Roman" pitchFamily="34" charset="-122"/>
                 <a:cs typeface="Times New Roman" pitchFamily="34" charset="-120"/>
               </a:rPr>
-              <a:t>Illustration: a forest</a:t>
-            </a:r>
-            <a:endParaRPr lang="en-US" sz="1600" dirty="0"/>
+              <a:t>2. Classification of Micro-climates</a:t>
+            </a:r>
+            <a:endParaRPr lang="en-US" sz="3600" dirty="0"/>
+          </a:p>
+        </p:txBody>
+      </p:sp>
+      <p:sp>
+        <p:nvSpPr>
+          <p:cNvPr id="5" name="Text 2"/>
+          <p:cNvSpPr/>
+          <p:nvPr/>
+        </p:nvSpPr>
+        <p:spPr>
+          <a:xfrm>
+            <a:off x="5349240" y="1783080"/>
+            <a:ext cx="6522415" cy="4663440"/>
+          </a:xfrm>
+          <a:prstGeom prst="rect">
+            <a:avLst/>
+          </a:prstGeom>
+          <a:noFill/>
+          <a:ln/>
+        </p:spPr>
+        <p:txBody>
+          <a:bodyPr wrap="square" lIns="0" tIns="0" rIns="0" bIns="0" rtlCol="0" anchor="t"/>
+          <a:lstStyle/>
+          <a:p>
+            <a:pPr algn="l" indent="0" marL="0">
+              <a:spcAft>
+                <a:spcPts val="800"/>
+              </a:spcAft>
+              <a:buNone/>
+            </a:pPr>
+            <a:r>
+              <a:rPr lang="en-US" sz="4000" b="1" dirty="0">
+                <a:solidFill>
+                  <a:srgbClr val="111111"/>
+                </a:solidFill>
+                <a:latin typeface="Times New Roman" pitchFamily="34" charset="0"/>
+                <a:ea typeface="Times New Roman" pitchFamily="34" charset="-122"/>
+                <a:cs typeface="Times New Roman" pitchFamily="34" charset="-120"/>
+              </a:rPr>
+              <a:t>Mountain climate: </a:t>
+            </a:r>
+            <a:pPr algn="l" indent="0" marL="0">
+              <a:spcAft>
+                <a:spcPts val="800"/>
+              </a:spcAft>
+              <a:buNone/>
+            </a:pPr>
+            <a:r>
+              <a:rPr lang="en-US" sz="4000" dirty="0">
+                <a:solidFill>
+                  <a:srgbClr val="111111"/>
+                </a:solidFill>
+                <a:latin typeface="Times New Roman" pitchFamily="34" charset="0"/>
+                <a:ea typeface="Times New Roman" pitchFamily="34" charset="-122"/>
+                <a:cs typeface="Times New Roman" pitchFamily="34" charset="-120"/>
+              </a:rPr>
+              <a:t>On a mountain, temperature and rainfall change with altitude and with the side of the slope. Each level therefore has its own climate and vegetation.</a:t>
+            </a:r>
+            <a:endParaRPr lang="en-US" sz="4000" dirty="0"/>
           </a:p>
         </p:txBody>
       </p:sp>
@@ -16569,7 +16906,7 @@
                 <a:ea typeface="Times New Roman" pitchFamily="34" charset="-122"/>
                 <a:cs typeface="Times New Roman" pitchFamily="34" charset="-120"/>
               </a:rPr>
-              <a:t>2. Characteristics of Urban Climates</a:t>
+              <a:t>2. Classification of Micro-climates</a:t>
             </a:r>
             <a:endParaRPr lang="en-US" sz="3600" dirty="0"/>
           </a:p>
@@ -16584,7 +16921,7 @@
         <p:spPr>
           <a:xfrm>
             <a:off x="365760" y="1783080"/>
-            <a:ext cx="4846320" cy="4617720"/>
+            <a:ext cx="6035040" cy="4617720"/>
           </a:xfrm>
           <a:prstGeom prst="rect">
             <a:avLst/>
@@ -16603,7 +16940,7 @@
               <a:buNone/>
             </a:pPr>
             <a:r>
-              <a:rPr lang="en-US" sz="3200" i="1" dirty="0">
+              <a:rPr lang="en-US" sz="3600" b="1" dirty="0">
                 <a:solidFill>
                   <a:srgbClr val="111111"/>
                 </a:solidFill>
@@ -16611,11 +16948,8 @@
                 <a:ea typeface="Times New Roman" pitchFamily="34" charset="-122"/>
                 <a:cs typeface="Times New Roman" pitchFamily="34" charset="-120"/>
               </a:rPr>
-              <a:t>Compared with the countryside, towns have the following characteristics:</a:t>
-            </a:r>
-            <a:endParaRPr lang="en-US" sz="3200" dirty="0"/>
-          </a:p>
-          <a:p>
+              <a:t>Lakeside climate: </a:t>
+            </a:r>
             <a:pPr algn="l" indent="0" marL="0">
               <a:spcAft>
                 <a:spcPts val="800"/>
@@ -16623,7 +16957,7 @@
               <a:buNone/>
             </a:pPr>
             <a:r>
-              <a:rPr lang="en-US" sz="3200" b="1" dirty="0">
+              <a:rPr lang="en-US" sz="3600" dirty="0">
                 <a:solidFill>
                   <a:srgbClr val="111111"/>
                 </a:solidFill>
@@ -16631,32 +16965,15 @@
                 <a:ea typeface="Times New Roman" pitchFamily="34" charset="-122"/>
                 <a:cs typeface="Times New Roman" pitchFamily="34" charset="-120"/>
               </a:rPr>
-              <a:t>Higher temperatures: </a:t>
-            </a:r>
-            <a:pPr algn="l" indent="0" marL="0">
-              <a:spcAft>
-                <a:spcPts val="800"/>
-              </a:spcAft>
-              <a:buNone/>
-            </a:pPr>
-            <a:r>
-              <a:rPr lang="en-US" sz="3200" dirty="0">
-                <a:solidFill>
-                  <a:srgbClr val="111111"/>
-                </a:solidFill>
-                <a:latin typeface="Times New Roman" pitchFamily="34" charset="0"/>
-                <a:ea typeface="Times New Roman" pitchFamily="34" charset="-122"/>
-                <a:cs typeface="Times New Roman" pitchFamily="34" charset="-120"/>
-              </a:rPr>
-              <a:t>Towns are warmer, especially at night: this is the urban heat island.</a:t>
-            </a:r>
-            <a:endParaRPr lang="en-US" sz="3200" dirty="0"/>
+              <a:t>Along a large lake, such as Lake Lagdo or Lake Chad, the water keeps the air cooler by day and more humid. Lake breezes blow onto the shore in the afternoon.</a:t>
+            </a:r>
+            <a:endParaRPr lang="en-US" sz="3600" dirty="0"/>
           </a:p>
         </p:txBody>
       </p:sp>
       <p:pic>
         <p:nvPicPr>
-          <p:cNvPr id="5" name="Image 0" descr="/home/claude/f4/img/v2/heat_island_big.png">    </p:cNvPr>
+          <p:cNvPr id="5" name="Image 0" descr="/home/claude/f4/img/v2/lsa_lake.jpg">    </p:cNvPr>
           <p:cNvPicPr>
             <a:picLocks noChangeAspect="1"/>
           </p:cNvPicPr>
@@ -16670,8 +16987,8 @@
         </p:blipFill>
         <p:spPr>
           <a:xfrm>
-            <a:off x="5349240" y="2617506"/>
-            <a:ext cx="6659575" cy="2601397"/>
+            <a:off x="6537960" y="2400897"/>
+            <a:ext cx="5470855" cy="3034615"/>
           </a:xfrm>
           <a:prstGeom prst="rect">
             <a:avLst/>
@@ -16686,8 +17003,8 @@
         </p:nvSpPr>
         <p:spPr>
           <a:xfrm>
-            <a:off x="5349240" y="6089904"/>
-            <a:ext cx="6659575" cy="347472"/>
+            <a:off x="6537960" y="6089904"/>
+            <a:ext cx="5470855" cy="347472"/>
           </a:xfrm>
           <a:prstGeom prst="rect">
             <a:avLst/>
@@ -16711,7 +17028,7 @@
                 <a:ea typeface="Times New Roman" pitchFamily="34" charset="-122"/>
                 <a:cs typeface="Times New Roman" pitchFamily="34" charset="-120"/>
               </a:rPr>
-              <a:t>Illustration: the urban heat island</a:t>
+              <a:t>Illustration: a lake shore</a:t>
             </a:r>
             <a:endParaRPr lang="en-US" sz="1600" dirty="0"/>
           </a:p>
@@ -16829,9 +17146,109 @@
           </a:p>
         </p:txBody>
       </p:sp>
+      <p:sp>
+        <p:nvSpPr>
+          <p:cNvPr id="3" name="Text 1"/>
+          <p:cNvSpPr/>
+          <p:nvPr/>
+        </p:nvSpPr>
+        <p:spPr>
+          <a:xfrm>
+            <a:off x="365760" y="1005840"/>
+            <a:ext cx="11460175" cy="731520"/>
+          </a:xfrm>
+          <a:prstGeom prst="rect">
+            <a:avLst/>
+          </a:prstGeom>
+          <a:noFill/>
+          <a:ln/>
+        </p:spPr>
+        <p:txBody>
+          <a:bodyPr wrap="square" lIns="0" tIns="0" rIns="0" bIns="0" rtlCol="0" anchor="ctr">
+            <a:normAutofit/>
+          </a:bodyPr>
+          <a:lstStyle/>
+          <a:p>
+            <a:pPr algn="ctr" indent="0" marL="0">
+              <a:buNone/>
+            </a:pPr>
+            <a:r>
+              <a:rPr lang="en-US" sz="3600" b="1" dirty="0">
+                <a:solidFill>
+                  <a:srgbClr val="990011"/>
+                </a:solidFill>
+                <a:latin typeface="Times New Roman" pitchFamily="34" charset="0"/>
+                <a:ea typeface="Times New Roman" pitchFamily="34" charset="-122"/>
+                <a:cs typeface="Times New Roman" pitchFamily="34" charset="-120"/>
+              </a:rPr>
+              <a:t>2. Classification of Micro-climates</a:t>
+            </a:r>
+            <a:endParaRPr lang="en-US" sz="3600" dirty="0"/>
+          </a:p>
+        </p:txBody>
+      </p:sp>
+      <p:sp>
+        <p:nvSpPr>
+          <p:cNvPr id="4" name="Text 2"/>
+          <p:cNvSpPr/>
+          <p:nvPr/>
+        </p:nvSpPr>
+        <p:spPr>
+          <a:xfrm>
+            <a:off x="365760" y="1783080"/>
+            <a:ext cx="6035040" cy="4617720"/>
+          </a:xfrm>
+          <a:prstGeom prst="rect">
+            <a:avLst/>
+          </a:prstGeom>
+          <a:noFill/>
+          <a:ln/>
+        </p:spPr>
+        <p:txBody>
+          <a:bodyPr wrap="square" lIns="0" tIns="0" rIns="0" bIns="0" rtlCol="0" anchor="t"/>
+          <a:lstStyle/>
+          <a:p>
+            <a:pPr algn="l" indent="0" marL="0">
+              <a:spcAft>
+                <a:spcPts val="800"/>
+              </a:spcAft>
+              <a:buNone/>
+            </a:pPr>
+            <a:r>
+              <a:rPr lang="en-US" sz="3600" b="1" dirty="0">
+                <a:solidFill>
+                  <a:srgbClr val="111111"/>
+                </a:solidFill>
+                <a:latin typeface="Times New Roman" pitchFamily="34" charset="0"/>
+                <a:ea typeface="Times New Roman" pitchFamily="34" charset="-122"/>
+                <a:cs typeface="Times New Roman" pitchFamily="34" charset="-120"/>
+              </a:rPr>
+              <a:t>Forest climate: </a:t>
+            </a:r>
+            <a:pPr algn="l" indent="0" marL="0">
+              <a:spcAft>
+                <a:spcPts val="800"/>
+              </a:spcAft>
+              <a:buNone/>
+            </a:pPr>
+            <a:r>
+              <a:rPr lang="en-US" sz="3600" dirty="0">
+                <a:solidFill>
+                  <a:srgbClr val="111111"/>
+                </a:solidFill>
+                <a:latin typeface="Times New Roman" pitchFamily="34" charset="0"/>
+                <a:ea typeface="Times New Roman" pitchFamily="34" charset="-122"/>
+                <a:cs typeface="Times New Roman" pitchFamily="34" charset="-120"/>
+              </a:rPr>
+              <a:t>Inside a forest, the trees block the sun and the wind and release water vapour. The air is therefore shady, cool, humid and calm, with a small daily range of temperature.</a:t>
+            </a:r>
+            <a:endParaRPr lang="en-US" sz="3600" dirty="0"/>
+          </a:p>
+        </p:txBody>
+      </p:sp>
       <p:pic>
         <p:nvPicPr>
-          <p:cNvPr id="3" name="Image 0" descr="/home/claude/f4/img/minesec_sheet.png">    </p:cNvPr>
+          <p:cNvPr id="5" name="Image 0" descr="/home/claude/f4/img/v2/f2t_rainforest.jpg">    </p:cNvPr>
           <p:cNvPicPr>
             <a:picLocks noChangeAspect="1"/>
           </p:cNvPicPr>
@@ -16845,8 +17262,8 @@
         </p:blipFill>
         <p:spPr>
           <a:xfrm>
-            <a:off x="0" y="658368"/>
-            <a:ext cx="1463040" cy="5833872"/>
+            <a:off x="6537960" y="2400897"/>
+            <a:ext cx="5470855" cy="3034615"/>
           </a:xfrm>
           <a:prstGeom prst="rect">
             <a:avLst/>
@@ -16855,14 +17272,14 @@
       </p:pic>
       <p:sp>
         <p:nvSpPr>
-          <p:cNvPr id="4" name="Text 1"/>
+          <p:cNvPr id="6" name="Text 3"/>
           <p:cNvSpPr/>
           <p:nvPr/>
         </p:nvSpPr>
         <p:spPr>
           <a:xfrm>
-            <a:off x="1691640" y="1005840"/>
-            <a:ext cx="10180015" cy="731520"/>
+            <a:off x="6537960" y="6089904"/>
+            <a:ext cx="5470855" cy="347472"/>
           </a:xfrm>
           <a:prstGeom prst="rect">
             <a:avLst/>
@@ -16871,159 +17288,24 @@
           <a:ln/>
         </p:spPr>
         <p:txBody>
-          <a:bodyPr wrap="square" lIns="0" tIns="0" rIns="0" bIns="0" rtlCol="0" anchor="ctr">
-            <a:normAutofit/>
-          </a:bodyPr>
+          <a:bodyPr wrap="square" lIns="0" tIns="0" rIns="0" bIns="0" rtlCol="0" anchor="ctr"/>
           <a:lstStyle/>
           <a:p>
             <a:pPr algn="ctr" indent="0" marL="0">
               <a:buNone/>
             </a:pPr>
             <a:r>
-              <a:rPr lang="en-US" sz="3600" b="1" dirty="0">
-                <a:solidFill>
-                  <a:srgbClr val="990011"/>
+              <a:rPr lang="en-US" sz="1600" i="1" dirty="0">
+                <a:solidFill>
+                  <a:srgbClr val="555555"/>
                 </a:solidFill>
                 <a:latin typeface="Times New Roman" pitchFamily="34" charset="0"/>
                 <a:ea typeface="Times New Roman" pitchFamily="34" charset="-122"/>
                 <a:cs typeface="Times New Roman" pitchFamily="34" charset="-120"/>
               </a:rPr>
-              <a:t>2. Characteristics of Urban Climates</a:t>
-            </a:r>
-            <a:endParaRPr lang="en-US" sz="3600" dirty="0"/>
-          </a:p>
-        </p:txBody>
-      </p:sp>
-      <p:sp>
-        <p:nvSpPr>
-          <p:cNvPr id="5" name="Text 2"/>
-          <p:cNvSpPr/>
-          <p:nvPr/>
-        </p:nvSpPr>
-        <p:spPr>
-          <a:xfrm>
-            <a:off x="1691640" y="1783080"/>
-            <a:ext cx="10180015" cy="4663440"/>
-          </a:xfrm>
-          <a:prstGeom prst="rect">
-            <a:avLst/>
-          </a:prstGeom>
-          <a:noFill/>
-          <a:ln/>
-        </p:spPr>
-        <p:txBody>
-          <a:bodyPr wrap="square" lIns="0" tIns="0" rIns="0" bIns="0" rtlCol="0" anchor="t"/>
-          <a:lstStyle/>
-          <a:p>
-            <a:pPr algn="l" indent="0" marL="0">
-              <a:spcAft>
-                <a:spcPts val="800"/>
-              </a:spcAft>
-              <a:buNone/>
-            </a:pPr>
-            <a:r>
-              <a:rPr lang="en-US" sz="4000" b="1" dirty="0">
-                <a:solidFill>
-                  <a:srgbClr val="111111"/>
-                </a:solidFill>
-                <a:latin typeface="Times New Roman" pitchFamily="34" charset="0"/>
-                <a:ea typeface="Times New Roman" pitchFamily="34" charset="-122"/>
-                <a:cs typeface="Times New Roman" pitchFamily="34" charset="-120"/>
-              </a:rPr>
-              <a:t>Lower humidity: </a:t>
-            </a:r>
-            <a:pPr algn="l" indent="0" marL="0">
-              <a:spcAft>
-                <a:spcPts val="800"/>
-              </a:spcAft>
-              <a:buNone/>
-            </a:pPr>
-            <a:r>
-              <a:rPr lang="en-US" sz="4000" dirty="0">
-                <a:solidFill>
-                  <a:srgbClr val="111111"/>
-                </a:solidFill>
-                <a:latin typeface="Times New Roman" pitchFamily="34" charset="0"/>
-                <a:ea typeface="Times New Roman" pitchFamily="34" charset="-122"/>
-                <a:cs typeface="Times New Roman" pitchFamily="34" charset="-120"/>
-              </a:rPr>
-              <a:t>Fewer plants and less water mean less evapotranspiration and drier air.</a:t>
-            </a:r>
-            <a:endParaRPr lang="en-US" sz="4000" dirty="0"/>
-          </a:p>
-          <a:p>
-            <a:pPr algn="l" indent="0" marL="0">
-              <a:spcAft>
-                <a:spcPts val="800"/>
-              </a:spcAft>
-              <a:buNone/>
-            </a:pPr>
-            <a:r>
-              <a:rPr lang="en-US" sz="4000" b="1" dirty="0">
-                <a:solidFill>
-                  <a:srgbClr val="111111"/>
-                </a:solidFill>
-                <a:latin typeface="Times New Roman" pitchFamily="34" charset="0"/>
-                <a:ea typeface="Times New Roman" pitchFamily="34" charset="-122"/>
-                <a:cs typeface="Times New Roman" pitchFamily="34" charset="-120"/>
-              </a:rPr>
-              <a:t>Different winds: </a:t>
-            </a:r>
-            <a:pPr algn="l" indent="0" marL="0">
-              <a:spcAft>
-                <a:spcPts val="800"/>
-              </a:spcAft>
-              <a:buNone/>
-            </a:pPr>
-            <a:r>
-              <a:rPr lang="en-US" sz="4000" dirty="0">
-                <a:solidFill>
-                  <a:srgbClr val="111111"/>
-                </a:solidFill>
-                <a:latin typeface="Times New Roman" pitchFamily="34" charset="0"/>
-                <a:ea typeface="Times New Roman" pitchFamily="34" charset="-122"/>
-                <a:cs typeface="Times New Roman" pitchFamily="34" charset="-120"/>
-              </a:rPr>
-              <a:t>Buildings slow the wind or channel it along streets (canyon effect).</a:t>
-            </a:r>
-            <a:endParaRPr lang="en-US" sz="4000" dirty="0"/>
-          </a:p>
-          <a:p>
-            <a:pPr algn="l" indent="0" marL="0">
-              <a:spcAft>
-                <a:spcPts val="800"/>
-              </a:spcAft>
-              <a:buNone/>
-            </a:pPr>
-            <a:r>
-              <a:rPr lang="en-US" sz="4000" b="1" dirty="0">
-                <a:solidFill>
-                  <a:srgbClr val="111111"/>
-                </a:solidFill>
-                <a:latin typeface="Times New Roman" pitchFamily="34" charset="0"/>
-                <a:ea typeface="Times New Roman" pitchFamily="34" charset="-122"/>
-                <a:cs typeface="Times New Roman" pitchFamily="34" charset="-120"/>
-              </a:rPr>
-              <a:t>More pollution: </a:t>
-            </a:r>
-            <a:pPr algn="l" indent="0" marL="0">
-              <a:spcAft>
-                <a:spcPts val="800"/>
-              </a:spcAft>
-              <a:buNone/>
-            </a:pPr>
-            <a:r>
-              <a:rPr lang="en-US" sz="4000" dirty="0">
-                <a:solidFill>
-                  <a:srgbClr val="111111"/>
-                </a:solidFill>
-                <a:latin typeface="Times New Roman" pitchFamily="34" charset="0"/>
-                <a:ea typeface="Times New Roman" pitchFamily="34" charset="-122"/>
-                <a:cs typeface="Times New Roman" pitchFamily="34" charset="-120"/>
-              </a:rPr>
-              <a:t>Dust, smoke and gases from vehicles, generators and industries are concentrated.</a:t>
-            </a:r>
-            <a:endParaRPr lang="en-US" sz="4000" dirty="0"/>
+              <a:t>Illustration: a forest</a:t>
+            </a:r>
+            <a:endParaRPr lang="en-US" sz="1600" dirty="0"/>
           </a:p>
         </p:txBody>
       </p:sp>
@@ -17174,7 +17456,7 @@
                 <a:ea typeface="Times New Roman" pitchFamily="34" charset="-122"/>
                 <a:cs typeface="Times New Roman" pitchFamily="34" charset="-120"/>
               </a:rPr>
-              <a:t>2. Characteristics of Urban Climates</a:t>
+              <a:t>3. Characteristics of Urban Climates</a:t>
             </a:r>
             <a:endParaRPr lang="en-US" sz="3600" dirty="0"/>
           </a:p>
@@ -17189,7 +17471,7 @@
         <p:spPr>
           <a:xfrm>
             <a:off x="365760" y="1783080"/>
-            <a:ext cx="4846320" cy="4617720"/>
+            <a:ext cx="6035040" cy="4617720"/>
           </a:xfrm>
           <a:prstGeom prst="rect">
             <a:avLst/>
@@ -17208,7 +17490,7 @@
               <a:buNone/>
             </a:pPr>
             <a:r>
-              <a:rPr lang="en-US" sz="3600" b="1" dirty="0">
+              <a:rPr lang="en-US" sz="3200" i="1" dirty="0">
                 <a:solidFill>
                   <a:srgbClr val="111111"/>
                 </a:solidFill>
@@ -17216,8 +17498,11 @@
                 <a:ea typeface="Times New Roman" pitchFamily="34" charset="-122"/>
                 <a:cs typeface="Times New Roman" pitchFamily="34" charset="-120"/>
               </a:rPr>
-              <a:t>Slightly more rain: </a:t>
-            </a:r>
+              <a:t>Compared with the countryside, towns have the following climatic characteristics:</a:t>
+            </a:r>
+            <a:endParaRPr lang="en-US" sz="3200" dirty="0"/>
+          </a:p>
+          <a:p>
             <a:pPr algn="l" indent="0" marL="0">
               <a:spcAft>
                 <a:spcPts val="800"/>
@@ -17225,7 +17510,7 @@
               <a:buNone/>
             </a:pPr>
             <a:r>
-              <a:rPr lang="en-US" sz="3600" dirty="0">
+              <a:rPr lang="en-US" sz="3200" b="1" dirty="0">
                 <a:solidFill>
                   <a:srgbClr val="111111"/>
                 </a:solidFill>
@@ -17233,15 +17518,32 @@
                 <a:ea typeface="Times New Roman" pitchFamily="34" charset="-122"/>
                 <a:cs typeface="Times New Roman" pitchFamily="34" charset="-120"/>
               </a:rPr>
-              <a:t>Extra heat and particles can trigger convectional storms over the city.</a:t>
-            </a:r>
-            <a:endParaRPr lang="en-US" sz="3600" dirty="0"/>
+              <a:t>Higher temperatures: </a:t>
+            </a:r>
+            <a:pPr algn="l" indent="0" marL="0">
+              <a:spcAft>
+                <a:spcPts val="800"/>
+              </a:spcAft>
+              <a:buNone/>
+            </a:pPr>
+            <a:r>
+              <a:rPr lang="en-US" sz="3200" dirty="0">
+                <a:solidFill>
+                  <a:srgbClr val="111111"/>
+                </a:solidFill>
+                <a:latin typeface="Times New Roman" pitchFamily="34" charset="0"/>
+                <a:ea typeface="Times New Roman" pitchFamily="34" charset="-122"/>
+                <a:cs typeface="Times New Roman" pitchFamily="34" charset="-120"/>
+              </a:rPr>
+              <a:t>Towns are warmer than the countryside, especially at night, by 2 to 5 °C in large cities. This is the urban heat island, strongest in the town centre.</a:t>
+            </a:r>
+            <a:endParaRPr lang="en-US" sz="3200" dirty="0"/>
           </a:p>
         </p:txBody>
       </p:sp>
       <p:pic>
         <p:nvPicPr>
-          <p:cNvPr id="5" name="Image 0" descr="/home/claude/f4/img/v2/clim2_urban.png">    </p:cNvPr>
+          <p:cNvPr id="5" name="Image 0" descr="/home/claude/f4/img/v2/heat_island_big.png">    </p:cNvPr>
           <p:cNvPicPr>
             <a:picLocks noChangeAspect="1"/>
           </p:cNvPicPr>
@@ -17255,8 +17557,8 @@
         </p:blipFill>
         <p:spPr>
           <a:xfrm>
-            <a:off x="5349240" y="2617506"/>
-            <a:ext cx="6659575" cy="2601397"/>
+            <a:off x="6537960" y="2849678"/>
+            <a:ext cx="5470855" cy="2137053"/>
           </a:xfrm>
           <a:prstGeom prst="rect">
             <a:avLst/>
@@ -17271,8 +17573,8 @@
         </p:nvSpPr>
         <p:spPr>
           <a:xfrm>
-            <a:off x="5349240" y="6089904"/>
-            <a:ext cx="6659575" cy="347472"/>
+            <a:off x="6537960" y="6089904"/>
+            <a:ext cx="5470855" cy="347472"/>
           </a:xfrm>
           <a:prstGeom prst="rect">
             <a:avLst/>
@@ -17296,7 +17598,7 @@
                 <a:ea typeface="Times New Roman" pitchFamily="34" charset="-122"/>
                 <a:cs typeface="Times New Roman" pitchFamily="34" charset="-120"/>
               </a:rPr>
-              <a:t>Illustration: town and countryside compared</a:t>
+              <a:t>Illustration: the urban heat island</a:t>
             </a:r>
             <a:endParaRPr lang="en-US" sz="1600" dirty="0"/>
           </a:p>
@@ -17414,129 +17716,9 @@
           </a:p>
         </p:txBody>
       </p:sp>
-      <p:sp>
-        <p:nvSpPr>
-          <p:cNvPr id="3" name="Text 1"/>
-          <p:cNvSpPr/>
-          <p:nvPr/>
-        </p:nvSpPr>
-        <p:spPr>
-          <a:xfrm>
-            <a:off x="365760" y="1005840"/>
-            <a:ext cx="11460175" cy="731520"/>
-          </a:xfrm>
-          <a:prstGeom prst="rect">
-            <a:avLst/>
-          </a:prstGeom>
-          <a:noFill/>
-          <a:ln/>
-        </p:spPr>
-        <p:txBody>
-          <a:bodyPr wrap="square" lIns="0" tIns="0" rIns="0" bIns="0" rtlCol="0" anchor="ctr">
-            <a:normAutofit/>
-          </a:bodyPr>
-          <a:lstStyle/>
-          <a:p>
-            <a:pPr algn="ctr" indent="0" marL="0">
-              <a:buNone/>
-            </a:pPr>
-            <a:r>
-              <a:rPr lang="en-US" sz="3600" b="1" dirty="0">
-                <a:solidFill>
-                  <a:srgbClr val="990011"/>
-                </a:solidFill>
-                <a:latin typeface="Times New Roman" pitchFamily="34" charset="0"/>
-                <a:ea typeface="Times New Roman" pitchFamily="34" charset="-122"/>
-                <a:cs typeface="Times New Roman" pitchFamily="34" charset="-120"/>
-              </a:rPr>
-              <a:t>3. Factors of the Urban Heat Island</a:t>
-            </a:r>
-            <a:endParaRPr lang="en-US" sz="3600" dirty="0"/>
-          </a:p>
-        </p:txBody>
-      </p:sp>
-      <p:sp>
-        <p:nvSpPr>
-          <p:cNvPr id="4" name="Text 2"/>
-          <p:cNvSpPr/>
-          <p:nvPr/>
-        </p:nvSpPr>
-        <p:spPr>
-          <a:xfrm>
-            <a:off x="365760" y="1783080"/>
-            <a:ext cx="4846320" cy="4617720"/>
-          </a:xfrm>
-          <a:prstGeom prst="rect">
-            <a:avLst/>
-          </a:prstGeom>
-          <a:noFill/>
-          <a:ln/>
-        </p:spPr>
-        <p:txBody>
-          <a:bodyPr wrap="square" lIns="0" tIns="0" rIns="0" bIns="0" rtlCol="0" anchor="t"/>
-          <a:lstStyle/>
-          <a:p>
-            <a:pPr algn="l" indent="0" marL="0">
-              <a:spcAft>
-                <a:spcPts val="800"/>
-              </a:spcAft>
-              <a:buNone/>
-            </a:pPr>
-            <a:r>
-              <a:rPr lang="en-US" sz="3600" i="1" dirty="0">
-                <a:solidFill>
-                  <a:srgbClr val="111111"/>
-                </a:solidFill>
-                <a:latin typeface="Times New Roman" pitchFamily="34" charset="0"/>
-                <a:ea typeface="Times New Roman" pitchFamily="34" charset="-122"/>
-                <a:cs typeface="Times New Roman" pitchFamily="34" charset="-120"/>
-              </a:rPr>
-              <a:t>The urban heat island is caused by the following factors:</a:t>
-            </a:r>
-            <a:endParaRPr lang="en-US" sz="3600" dirty="0"/>
-          </a:p>
-          <a:p>
-            <a:pPr algn="l" indent="0" marL="0">
-              <a:spcAft>
-                <a:spcPts val="800"/>
-              </a:spcAft>
-              <a:buNone/>
-            </a:pPr>
-            <a:r>
-              <a:rPr lang="en-US" sz="3600" b="1" dirty="0">
-                <a:solidFill>
-                  <a:srgbClr val="111111"/>
-                </a:solidFill>
-                <a:latin typeface="Times New Roman" pitchFamily="34" charset="0"/>
-                <a:ea typeface="Times New Roman" pitchFamily="34" charset="-122"/>
-                <a:cs typeface="Times New Roman" pitchFamily="34" charset="-120"/>
-              </a:rPr>
-              <a:t>Surfaces: </a:t>
-            </a:r>
-            <a:pPr algn="l" indent="0" marL="0">
-              <a:spcAft>
-                <a:spcPts val="800"/>
-              </a:spcAft>
-              <a:buNone/>
-            </a:pPr>
-            <a:r>
-              <a:rPr lang="en-US" sz="3600" dirty="0">
-                <a:solidFill>
-                  <a:srgbClr val="111111"/>
-                </a:solidFill>
-                <a:latin typeface="Times New Roman" pitchFamily="34" charset="0"/>
-                <a:ea typeface="Times New Roman" pitchFamily="34" charset="-122"/>
-                <a:cs typeface="Times New Roman" pitchFamily="34" charset="-120"/>
-              </a:rPr>
-              <a:t>Tarred roads, concrete and bricks absorb solar energy by day and release it slowly at night.</a:t>
-            </a:r>
-            <a:endParaRPr lang="en-US" sz="3600" dirty="0"/>
-          </a:p>
-        </p:txBody>
-      </p:sp>
       <p:pic>
         <p:nvPicPr>
-          <p:cNvPr id="5" name="Image 0" descr="/home/claude/f4/img/v2/lsa_douala.jpg">    </p:cNvPr>
+          <p:cNvPr id="3" name="Image 0" descr="/home/claude/f4/img/minesec_sheet.png">    </p:cNvPr>
           <p:cNvPicPr>
             <a:picLocks noChangeAspect="1"/>
           </p:cNvPicPr>
@@ -17550,8 +17732,8 @@
         </p:blipFill>
         <p:spPr>
           <a:xfrm>
-            <a:off x="5349240" y="2071212"/>
-            <a:ext cx="6659575" cy="3693983"/>
+            <a:off x="0" y="658368"/>
+            <a:ext cx="5120640" cy="5833872"/>
           </a:xfrm>
           <a:prstGeom prst="rect">
             <a:avLst/>
@@ -17560,14 +17742,14 @@
       </p:pic>
       <p:sp>
         <p:nvSpPr>
-          <p:cNvPr id="6" name="Text 3"/>
+          <p:cNvPr id="4" name="Text 1"/>
           <p:cNvSpPr/>
           <p:nvPr/>
         </p:nvSpPr>
         <p:spPr>
           <a:xfrm>
-            <a:off x="5349240" y="6089904"/>
-            <a:ext cx="6659575" cy="347472"/>
+            <a:off x="5349240" y="1005840"/>
+            <a:ext cx="6522415" cy="731520"/>
           </a:xfrm>
           <a:prstGeom prst="rect">
             <a:avLst/>
@@ -17576,24 +17758,85 @@
           <a:ln/>
         </p:spPr>
         <p:txBody>
-          <a:bodyPr wrap="square" lIns="0" tIns="0" rIns="0" bIns="0" rtlCol="0" anchor="ctr"/>
+          <a:bodyPr wrap="square" lIns="0" tIns="0" rIns="0" bIns="0" rtlCol="0" anchor="ctr">
+            <a:normAutofit/>
+          </a:bodyPr>
           <a:lstStyle/>
           <a:p>
             <a:pPr algn="ctr" indent="0" marL="0">
               <a:buNone/>
             </a:pPr>
             <a:r>
-              <a:rPr lang="en-US" sz="1600" i="1" dirty="0">
-                <a:solidFill>
-                  <a:srgbClr val="555555"/>
+              <a:rPr lang="en-US" sz="3600" b="1" dirty="0">
+                <a:solidFill>
+                  <a:srgbClr val="990011"/>
                 </a:solidFill>
                 <a:latin typeface="Times New Roman" pitchFamily="34" charset="0"/>
                 <a:ea typeface="Times New Roman" pitchFamily="34" charset="-122"/>
                 <a:cs typeface="Times New Roman" pitchFamily="34" charset="-120"/>
               </a:rPr>
-              <a:t>Illustration: a large city</a:t>
-            </a:r>
-            <a:endParaRPr lang="en-US" sz="1600" dirty="0"/>
+              <a:t>3. Characteristics of Urban Climates</a:t>
+            </a:r>
+            <a:endParaRPr lang="en-US" sz="3600" dirty="0"/>
+          </a:p>
+        </p:txBody>
+      </p:sp>
+      <p:sp>
+        <p:nvSpPr>
+          <p:cNvPr id="5" name="Text 2"/>
+          <p:cNvSpPr/>
+          <p:nvPr/>
+        </p:nvSpPr>
+        <p:spPr>
+          <a:xfrm>
+            <a:off x="5349240" y="1783080"/>
+            <a:ext cx="6522415" cy="4663440"/>
+          </a:xfrm>
+          <a:prstGeom prst="rect">
+            <a:avLst/>
+          </a:prstGeom>
+          <a:noFill/>
+          <a:ln/>
+        </p:spPr>
+        <p:txBody>
+          <a:bodyPr wrap="square" lIns="0" tIns="0" rIns="0" bIns="0" rtlCol="0" anchor="t"/>
+          <a:lstStyle/>
+          <a:p>
+            <a:pPr algn="l" indent="0" marL="0">
+              <a:spcAft>
+                <a:spcPts val="800"/>
+              </a:spcAft>
+              <a:buNone/>
+            </a:pPr>
+            <a:r>
+              <a:rPr lang="en-US" sz="4000" b="1" dirty="0">
+                <a:solidFill>
+                  <a:srgbClr val="111111"/>
+                </a:solidFill>
+                <a:latin typeface="Times New Roman" pitchFamily="34" charset="0"/>
+                <a:ea typeface="Times New Roman" pitchFamily="34" charset="-122"/>
+                <a:cs typeface="Times New Roman" pitchFamily="34" charset="-120"/>
+              </a:rPr>
+              <a:t>Lower humidity: </a:t>
+            </a:r>
+            <a:pPr algn="l" indent="0" marL="0">
+              <a:spcAft>
+                <a:spcPts val="800"/>
+              </a:spcAft>
+              <a:buNone/>
+            </a:pPr>
+            <a:r>
+              <a:rPr lang="en-US" sz="4000" dirty="0">
+                <a:solidFill>
+                  <a:srgbClr val="111111"/>
+                </a:solidFill>
+                <a:latin typeface="Times New Roman" pitchFamily="34" charset="0"/>
+                <a:ea typeface="Times New Roman" pitchFamily="34" charset="-122"/>
+                <a:cs typeface="Times New Roman" pitchFamily="34" charset="-120"/>
+              </a:rPr>
+              <a:t>Rainwater runs quickly into drains, and there are few plants and little open water. As a result, there is less evapotranspiration and the air is drier.</a:t>
+            </a:r>
+            <a:endParaRPr lang="en-US" sz="4000" dirty="0"/>
           </a:p>
         </p:txBody>
       </p:sp>
@@ -17726,7 +17969,7 @@
         <p:spPr>
           <a:xfrm>
             <a:off x="0" y="658368"/>
-            <a:ext cx="3840480" cy="5833872"/>
+            <a:ext cx="5120640" cy="5833872"/>
           </a:xfrm>
           <a:prstGeom prst="rect">
             <a:avLst/>
@@ -17741,8 +17984,8 @@
         </p:nvSpPr>
         <p:spPr>
           <a:xfrm>
-            <a:off x="4069080" y="1005840"/>
-            <a:ext cx="7802575" cy="731520"/>
+            <a:off x="5349240" y="1005840"/>
+            <a:ext cx="6522415" cy="731520"/>
           </a:xfrm>
           <a:prstGeom prst="rect">
             <a:avLst/>
@@ -17768,7 +18011,7 @@
                 <a:ea typeface="Times New Roman" pitchFamily="34" charset="-122"/>
                 <a:cs typeface="Times New Roman" pitchFamily="34" charset="-120"/>
               </a:rPr>
-              <a:t>3. Factors of the Urban Heat Island</a:t>
+              <a:t>3. Characteristics of Urban Climates</a:t>
             </a:r>
             <a:endParaRPr lang="en-US" sz="3600" dirty="0"/>
           </a:p>
@@ -17782,8 +18025,8 @@
         </p:nvSpPr>
         <p:spPr>
           <a:xfrm>
-            <a:off x="4069080" y="1783080"/>
-            <a:ext cx="7802575" cy="4663440"/>
+            <a:off x="5349240" y="1783080"/>
+            <a:ext cx="6522415" cy="4663440"/>
           </a:xfrm>
           <a:prstGeom prst="rect">
             <a:avLst/>
@@ -17810,7 +18053,7 @@
                 <a:ea typeface="Times New Roman" pitchFamily="34" charset="-122"/>
                 <a:cs typeface="Times New Roman" pitchFamily="34" charset="-120"/>
               </a:rPr>
-              <a:t>Anthropogenic heat: </a:t>
+              <a:t>Modified winds: </a:t>
             </a:r>
             <a:pPr algn="l" indent="0" marL="0">
               <a:spcAft>
@@ -17827,44 +18070,7 @@
                 <a:ea typeface="Times New Roman" pitchFamily="34" charset="-122"/>
                 <a:cs typeface="Times New Roman" pitchFamily="34" charset="-120"/>
               </a:rPr>
-              <a:t>Cars, moto-taxis, generators, air conditioners, factories and crowds release heat.</a:t>
-            </a:r>
-            <a:endParaRPr lang="en-US" sz="4000" dirty="0"/>
-          </a:p>
-          <a:p>
-            <a:pPr algn="l" indent="0" marL="0">
-              <a:spcAft>
-                <a:spcPts val="800"/>
-              </a:spcAft>
-              <a:buNone/>
-            </a:pPr>
-            <a:r>
-              <a:rPr lang="en-US" sz="4000" b="1" dirty="0">
-                <a:solidFill>
-                  <a:srgbClr val="111111"/>
-                </a:solidFill>
-                <a:latin typeface="Times New Roman" pitchFamily="34" charset="0"/>
-                <a:ea typeface="Times New Roman" pitchFamily="34" charset="-122"/>
-                <a:cs typeface="Times New Roman" pitchFamily="34" charset="-120"/>
-              </a:rPr>
-              <a:t>Reduced evapotranspiration: </a:t>
-            </a:r>
-            <a:pPr algn="l" indent="0" marL="0">
-              <a:spcAft>
-                <a:spcPts val="800"/>
-              </a:spcAft>
-              <a:buNone/>
-            </a:pPr>
-            <a:r>
-              <a:rPr lang="en-US" sz="4000" dirty="0">
-                <a:solidFill>
-                  <a:srgbClr val="111111"/>
-                </a:solidFill>
-                <a:latin typeface="Times New Roman" pitchFamily="34" charset="0"/>
-                <a:ea typeface="Times New Roman" pitchFamily="34" charset="-122"/>
-                <a:cs typeface="Times New Roman" pitchFamily="34" charset="-120"/>
-              </a:rPr>
-              <a:t>Few trees, gardens and open soils mean little natural cooling.</a:t>
+              <a:t>Buildings slow down the wind, so towns are generally calmer. However, wind can be channelled and strengthened in narrow streets between tall buildings.</a:t>
             </a:r>
             <a:endParaRPr lang="en-US" sz="4000" dirty="0"/>
           </a:p>
@@ -17982,9 +18188,109 @@
           </a:p>
         </p:txBody>
       </p:sp>
+      <p:sp>
+        <p:nvSpPr>
+          <p:cNvPr id="3" name="Text 1"/>
+          <p:cNvSpPr/>
+          <p:nvPr/>
+        </p:nvSpPr>
+        <p:spPr>
+          <a:xfrm>
+            <a:off x="365760" y="1005840"/>
+            <a:ext cx="11460175" cy="731520"/>
+          </a:xfrm>
+          <a:prstGeom prst="rect">
+            <a:avLst/>
+          </a:prstGeom>
+          <a:noFill/>
+          <a:ln/>
+        </p:spPr>
+        <p:txBody>
+          <a:bodyPr wrap="square" lIns="0" tIns="0" rIns="0" bIns="0" rtlCol="0" anchor="ctr">
+            <a:normAutofit/>
+          </a:bodyPr>
+          <a:lstStyle/>
+          <a:p>
+            <a:pPr algn="ctr" indent="0" marL="0">
+              <a:buNone/>
+            </a:pPr>
+            <a:r>
+              <a:rPr lang="en-US" sz="3600" b="1" dirty="0">
+                <a:solidFill>
+                  <a:srgbClr val="990011"/>
+                </a:solidFill>
+                <a:latin typeface="Times New Roman" pitchFamily="34" charset="0"/>
+                <a:ea typeface="Times New Roman" pitchFamily="34" charset="-122"/>
+                <a:cs typeface="Times New Roman" pitchFamily="34" charset="-120"/>
+              </a:rPr>
+              <a:t>3. Characteristics of Urban Climates</a:t>
+            </a:r>
+            <a:endParaRPr lang="en-US" sz="3600" dirty="0"/>
+          </a:p>
+        </p:txBody>
+      </p:sp>
+      <p:sp>
+        <p:nvSpPr>
+          <p:cNvPr id="4" name="Text 2"/>
+          <p:cNvSpPr/>
+          <p:nvPr/>
+        </p:nvSpPr>
+        <p:spPr>
+          <a:xfrm>
+            <a:off x="365760" y="1783080"/>
+            <a:ext cx="6035040" cy="4617720"/>
+          </a:xfrm>
+          <a:prstGeom prst="rect">
+            <a:avLst/>
+          </a:prstGeom>
+          <a:noFill/>
+          <a:ln/>
+        </p:spPr>
+        <p:txBody>
+          <a:bodyPr wrap="square" lIns="0" tIns="0" rIns="0" bIns="0" rtlCol="0" anchor="t"/>
+          <a:lstStyle/>
+          <a:p>
+            <a:pPr algn="l" indent="0" marL="0">
+              <a:spcAft>
+                <a:spcPts val="800"/>
+              </a:spcAft>
+              <a:buNone/>
+            </a:pPr>
+            <a:r>
+              <a:rPr lang="en-US" sz="3400" b="1" dirty="0">
+                <a:solidFill>
+                  <a:srgbClr val="111111"/>
+                </a:solidFill>
+                <a:latin typeface="Times New Roman" pitchFamily="34" charset="0"/>
+                <a:ea typeface="Times New Roman" pitchFamily="34" charset="-122"/>
+                <a:cs typeface="Times New Roman" pitchFamily="34" charset="-120"/>
+              </a:rPr>
+              <a:t>More pollution and more rain: </a:t>
+            </a:r>
+            <a:pPr algn="l" indent="0" marL="0">
+              <a:spcAft>
+                <a:spcPts val="800"/>
+              </a:spcAft>
+              <a:buNone/>
+            </a:pPr>
+            <a:r>
+              <a:rPr lang="en-US" sz="3400" dirty="0">
+                <a:solidFill>
+                  <a:srgbClr val="111111"/>
+                </a:solidFill>
+                <a:latin typeface="Times New Roman" pitchFamily="34" charset="0"/>
+                <a:ea typeface="Times New Roman" pitchFamily="34" charset="-122"/>
+                <a:cs typeface="Times New Roman" pitchFamily="34" charset="-120"/>
+              </a:rPr>
+              <a:t>Dust, smoke and gases from vehicles, generators and factories are concentrated over towns. These particles and the extra heat can trigger more convectional storms over and downwind of large cities.</a:t>
+            </a:r>
+            <a:endParaRPr lang="en-US" sz="3400" dirty="0"/>
+          </a:p>
+        </p:txBody>
+      </p:sp>
       <p:pic>
         <p:nvPicPr>
-          <p:cNvPr id="3" name="Image 0" descr="/home/claude/f4/img/minesec_sheet.png">    </p:cNvPr>
+          <p:cNvPr id="5" name="Image 0" descr="/home/claude/f4/img/v2/clim2_urban.png">    </p:cNvPr>
           <p:cNvPicPr>
             <a:picLocks noChangeAspect="1"/>
           </p:cNvPicPr>
@@ -17998,8 +18304,8 @@
         </p:blipFill>
         <p:spPr>
           <a:xfrm>
-            <a:off x="0" y="658368"/>
-            <a:ext cx="3840480" cy="5833872"/>
+            <a:off x="6537960" y="2849678"/>
+            <a:ext cx="5470855" cy="2137053"/>
           </a:xfrm>
           <a:prstGeom prst="rect">
             <a:avLst/>
@@ -18008,14 +18314,14 @@
       </p:pic>
       <p:sp>
         <p:nvSpPr>
-          <p:cNvPr id="4" name="Text 1"/>
+          <p:cNvPr id="6" name="Text 3"/>
           <p:cNvSpPr/>
           <p:nvPr/>
         </p:nvSpPr>
         <p:spPr>
           <a:xfrm>
-            <a:off x="4069080" y="1005840"/>
-            <a:ext cx="7802575" cy="731520"/>
+            <a:off x="6537960" y="6089904"/>
+            <a:ext cx="5470855" cy="347472"/>
           </a:xfrm>
           <a:prstGeom prst="rect">
             <a:avLst/>
@@ -18024,122 +18330,24 @@
           <a:ln/>
         </p:spPr>
         <p:txBody>
-          <a:bodyPr wrap="square" lIns="0" tIns="0" rIns="0" bIns="0" rtlCol="0" anchor="ctr">
-            <a:normAutofit/>
-          </a:bodyPr>
+          <a:bodyPr wrap="square" lIns="0" tIns="0" rIns="0" bIns="0" rtlCol="0" anchor="ctr"/>
           <a:lstStyle/>
           <a:p>
             <a:pPr algn="ctr" indent="0" marL="0">
               <a:buNone/>
             </a:pPr>
             <a:r>
-              <a:rPr lang="en-US" sz="3600" b="1" dirty="0">
-                <a:solidFill>
-                  <a:srgbClr val="990011"/>
+              <a:rPr lang="en-US" sz="1600" i="1" dirty="0">
+                <a:solidFill>
+                  <a:srgbClr val="555555"/>
                 </a:solidFill>
                 <a:latin typeface="Times New Roman" pitchFamily="34" charset="0"/>
                 <a:ea typeface="Times New Roman" pitchFamily="34" charset="-122"/>
                 <a:cs typeface="Times New Roman" pitchFamily="34" charset="-120"/>
               </a:rPr>
-              <a:t>3. Factors of the Urban Heat Island (continued)</a:t>
-            </a:r>
-            <a:endParaRPr lang="en-US" sz="3600" dirty="0"/>
-          </a:p>
-        </p:txBody>
-      </p:sp>
-      <p:sp>
-        <p:nvSpPr>
-          <p:cNvPr id="5" name="Text 2"/>
-          <p:cNvSpPr/>
-          <p:nvPr/>
-        </p:nvSpPr>
-        <p:spPr>
-          <a:xfrm>
-            <a:off x="4069080" y="1783080"/>
-            <a:ext cx="7802575" cy="4663440"/>
-          </a:xfrm>
-          <a:prstGeom prst="rect">
-            <a:avLst/>
-          </a:prstGeom>
-          <a:noFill/>
-          <a:ln/>
-        </p:spPr>
-        <p:txBody>
-          <a:bodyPr wrap="square" lIns="0" tIns="0" rIns="0" bIns="0" rtlCol="0" anchor="t"/>
-          <a:lstStyle/>
-          <a:p>
-            <a:pPr algn="l" indent="0" marL="0">
-              <a:spcAft>
-                <a:spcPts val="800"/>
-              </a:spcAft>
-              <a:buNone/>
-            </a:pPr>
-            <a:r>
-              <a:rPr lang="en-US" sz="4000" b="1" dirty="0">
-                <a:solidFill>
-                  <a:srgbClr val="111111"/>
-                </a:solidFill>
-                <a:latin typeface="Times New Roman" pitchFamily="34" charset="0"/>
-                <a:ea typeface="Times New Roman" pitchFamily="34" charset="-122"/>
-                <a:cs typeface="Times New Roman" pitchFamily="34" charset="-120"/>
-              </a:rPr>
-              <a:t>Urban geometry: </a:t>
-            </a:r>
-            <a:pPr algn="l" indent="0" marL="0">
-              <a:spcAft>
-                <a:spcPts val="800"/>
-              </a:spcAft>
-              <a:buNone/>
-            </a:pPr>
-            <a:r>
-              <a:rPr lang="en-US" sz="4000" dirty="0">
-                <a:solidFill>
-                  <a:srgbClr val="111111"/>
-                </a:solidFill>
-                <a:latin typeface="Times New Roman" pitchFamily="34" charset="0"/>
-                <a:ea typeface="Times New Roman" pitchFamily="34" charset="-122"/>
-                <a:cs typeface="Times New Roman" pitchFamily="34" charset="-120"/>
-              </a:rPr>
-              <a:t>Tall buildings and narrow streets form "urban canyons" that trap heat and block the wind.</a:t>
-            </a:r>
-            <a:endParaRPr lang="en-US" sz="4000" dirty="0"/>
-          </a:p>
-          <a:p>
-            <a:pPr algn="l" indent="0" marL="0">
-              <a:spcAft>
-                <a:spcPts val="800"/>
-              </a:spcAft>
-              <a:buNone/>
-            </a:pPr>
-            <a:r>
-              <a:rPr lang="en-US" sz="4000" b="1" dirty="0">
-                <a:solidFill>
-                  <a:srgbClr val="111111"/>
-                </a:solidFill>
-                <a:latin typeface="Times New Roman" pitchFamily="34" charset="0"/>
-                <a:ea typeface="Times New Roman" pitchFamily="34" charset="-122"/>
-                <a:cs typeface="Times New Roman" pitchFamily="34" charset="-120"/>
-              </a:rPr>
-              <a:t>Solutions: </a:t>
-            </a:r>
-            <a:pPr algn="l" indent="0" marL="0">
-              <a:spcAft>
-                <a:spcPts val="800"/>
-              </a:spcAft>
-              <a:buNone/>
-            </a:pPr>
-            <a:r>
-              <a:rPr lang="en-US" sz="4000" dirty="0">
-                <a:solidFill>
-                  <a:srgbClr val="111111"/>
-                </a:solidFill>
-                <a:latin typeface="Times New Roman" pitchFamily="34" charset="0"/>
-                <a:ea typeface="Times New Roman" pitchFamily="34" charset="-122"/>
-                <a:cs typeface="Times New Roman" pitchFamily="34" charset="-120"/>
-              </a:rPr>
-              <a:t>Trees, parks, light roofs and less traffic reduce urban heat.</a:t>
-            </a:r>
-            <a:endParaRPr lang="en-US" sz="4000" dirty="0"/>
+              <a:t>Illustration: the urban climate</a:t>
+            </a:r>
+            <a:endParaRPr lang="en-US" sz="1600" dirty="0"/>
           </a:p>
         </p:txBody>
       </p:sp>
@@ -18249,7 +18457,7 @@
                 <a:ea typeface="Calibri" pitchFamily="34" charset="-122"/>
                 <a:cs typeface="Calibri" pitchFamily="34" charset="-120"/>
               </a:rPr>
-              <a:t>FORMATIVE EVALUATION</a:t>
+              <a:t>BOARD SUMMARY</a:t>
             </a:r>
             <a:endParaRPr lang="en-US" sz="1400" dirty="0"/>
           </a:p>
@@ -18272,7 +18480,7 @@
         <p:spPr>
           <a:xfrm>
             <a:off x="0" y="658368"/>
-            <a:ext cx="5120640" cy="5833872"/>
+            <a:ext cx="1463040" cy="5833872"/>
           </a:xfrm>
           <a:prstGeom prst="rect">
             <a:avLst/>
@@ -18287,8 +18495,8 @@
         </p:nvSpPr>
         <p:spPr>
           <a:xfrm>
-            <a:off x="5349240" y="1005840"/>
-            <a:ext cx="6522415" cy="731520"/>
+            <a:off x="1691640" y="1005840"/>
+            <a:ext cx="10180015" cy="731520"/>
           </a:xfrm>
           <a:prstGeom prst="rect">
             <a:avLst/>
@@ -18314,7 +18522,7 @@
                 <a:ea typeface="Times New Roman" pitchFamily="34" charset="-122"/>
                 <a:cs typeface="Times New Roman" pitchFamily="34" charset="-120"/>
               </a:rPr>
-              <a:t>Evaluation 1</a:t>
+              <a:t>4. Factors of Urban Climates</a:t>
             </a:r>
             <a:endParaRPr lang="en-US" sz="3600" dirty="0"/>
           </a:p>
@@ -18328,8 +18536,8 @@
         </p:nvSpPr>
         <p:spPr>
           <a:xfrm>
-            <a:off x="5349240" y="1783080"/>
-            <a:ext cx="6522415" cy="4663440"/>
+            <a:off x="1691640" y="1783080"/>
+            <a:ext cx="10180015" cy="4663440"/>
           </a:xfrm>
           <a:prstGeom prst="rect">
             <a:avLst/>
@@ -18348,7 +18556,7 @@
               <a:buNone/>
             </a:pPr>
             <a:r>
-              <a:rPr lang="en-US" sz="4000" dirty="0">
+              <a:rPr lang="en-US" sz="4000" i="1" dirty="0">
                 <a:solidFill>
                   <a:srgbClr val="111111"/>
                 </a:solidFill>
@@ -18356,7 +18564,44 @@
                 <a:ea typeface="Times New Roman" pitchFamily="34" charset="-122"/>
                 <a:cs typeface="Times New Roman" pitchFamily="34" charset="-120"/>
               </a:rPr>
-              <a:t>What is the urban heat island, and give two of its causes in Garoua?</a:t>
+              <a:t>The urban climate is explained by the following factors:</a:t>
+            </a:r>
+            <a:endParaRPr lang="en-US" sz="4000" dirty="0"/>
+          </a:p>
+          <a:p>
+            <a:pPr algn="l" indent="0" marL="0">
+              <a:spcAft>
+                <a:spcPts val="800"/>
+              </a:spcAft>
+              <a:buNone/>
+            </a:pPr>
+            <a:r>
+              <a:rPr lang="en-US" sz="4000" b="1" dirty="0">
+                <a:solidFill>
+                  <a:srgbClr val="111111"/>
+                </a:solidFill>
+                <a:latin typeface="Times New Roman" pitchFamily="34" charset="0"/>
+                <a:ea typeface="Times New Roman" pitchFamily="34" charset="-122"/>
+                <a:cs typeface="Times New Roman" pitchFamily="34" charset="-120"/>
+              </a:rPr>
+              <a:t>Artificial surfaces: </a:t>
+            </a:r>
+            <a:pPr algn="l" indent="0" marL="0">
+              <a:spcAft>
+                <a:spcPts val="800"/>
+              </a:spcAft>
+              <a:buNone/>
+            </a:pPr>
+            <a:r>
+              <a:rPr lang="en-US" sz="4000" dirty="0">
+                <a:solidFill>
+                  <a:srgbClr val="111111"/>
+                </a:solidFill>
+                <a:latin typeface="Times New Roman" pitchFamily="34" charset="0"/>
+                <a:ea typeface="Times New Roman" pitchFamily="34" charset="-122"/>
+                <a:cs typeface="Times New Roman" pitchFamily="34" charset="-120"/>
+              </a:rPr>
+              <a:t>Tarred roads, concrete and bricks absorb much solar energy by day and release it slowly at night. They also make rainwater run off quickly, so less water is available for evaporation.</a:t>
             </a:r>
             <a:endParaRPr lang="en-US" sz="4000" dirty="0"/>
           </a:p>
@@ -18687,7 +18932,7 @@
                 <a:ea typeface="Calibri" pitchFamily="34" charset="-122"/>
                 <a:cs typeface="Calibri" pitchFamily="34" charset="-120"/>
               </a:rPr>
-              <a:t>FORMATIVE EVALUATION</a:t>
+              <a:t>BOARD SUMMARY</a:t>
             </a:r>
             <a:endParaRPr lang="en-US" sz="1400" dirty="0"/>
           </a:p>
@@ -18710,7 +18955,7 @@
         <p:spPr>
           <a:xfrm>
             <a:off x="0" y="658368"/>
-            <a:ext cx="5120640" cy="5833872"/>
+            <a:ext cx="3840480" cy="5833872"/>
           </a:xfrm>
           <a:prstGeom prst="rect">
             <a:avLst/>
@@ -18725,8 +18970,8 @@
         </p:nvSpPr>
         <p:spPr>
           <a:xfrm>
-            <a:off x="5349240" y="1005840"/>
-            <a:ext cx="6522415" cy="731520"/>
+            <a:off x="4069080" y="1005840"/>
+            <a:ext cx="7802575" cy="731520"/>
           </a:xfrm>
           <a:prstGeom prst="rect">
             <a:avLst/>
@@ -18752,7 +18997,7 @@
                 <a:ea typeface="Times New Roman" pitchFamily="34" charset="-122"/>
                 <a:cs typeface="Times New Roman" pitchFamily="34" charset="-120"/>
               </a:rPr>
-              <a:t>Expected Answer</a:t>
+              <a:t>4. Factors of Urban Climates</a:t>
             </a:r>
             <a:endParaRPr lang="en-US" sz="3600" dirty="0"/>
           </a:p>
@@ -18766,8 +19011,8 @@
         </p:nvSpPr>
         <p:spPr>
           <a:xfrm>
-            <a:off x="5349240" y="1783080"/>
-            <a:ext cx="6522415" cy="4663440"/>
+            <a:off x="4069080" y="1783080"/>
+            <a:ext cx="7802575" cy="4663440"/>
           </a:xfrm>
           <a:prstGeom prst="rect">
             <a:avLst/>
@@ -18786,7 +19031,7 @@
               <a:buNone/>
             </a:pPr>
             <a:r>
-              <a:rPr lang="en-US" sz="4000" dirty="0">
+              <a:rPr lang="en-US" sz="4000" b="1" dirty="0">
                 <a:solidFill>
                   <a:srgbClr val="111111"/>
                 </a:solidFill>
@@ -18794,7 +19039,24 @@
                 <a:ea typeface="Times New Roman" pitchFamily="34" charset="-122"/>
                 <a:cs typeface="Times New Roman" pitchFamily="34" charset="-120"/>
               </a:rPr>
-              <a:t>The town is warmer than the countryside; causes: tar and concrete, heat from vehicles and generators, few trees (any two).</a:t>
+              <a:t>Anthropogenic heat: </a:t>
+            </a:r>
+            <a:pPr algn="l" indent="0" marL="0">
+              <a:spcAft>
+                <a:spcPts val="800"/>
+              </a:spcAft>
+              <a:buNone/>
+            </a:pPr>
+            <a:r>
+              <a:rPr lang="en-US" sz="4000" dirty="0">
+                <a:solidFill>
+                  <a:srgbClr val="111111"/>
+                </a:solidFill>
+                <a:latin typeface="Times New Roman" pitchFamily="34" charset="0"/>
+                <a:ea typeface="Times New Roman" pitchFamily="34" charset="-122"/>
+                <a:cs typeface="Times New Roman" pitchFamily="34" charset="-120"/>
+              </a:rPr>
+              <a:t>Cars, moto-taxis, generators, air conditioners, factories and crowds all release heat. In big cities, this heat can equal a large part of the energy received from the sun in winter.</a:t>
             </a:r>
             <a:endParaRPr lang="en-US" sz="4000" dirty="0"/>
           </a:p>
@@ -18906,7 +19168,7 @@
                 <a:ea typeface="Calibri" pitchFamily="34" charset="-122"/>
                 <a:cs typeface="Calibri" pitchFamily="34" charset="-120"/>
               </a:rPr>
-              <a:t>FORMATIVE EVALUATION</a:t>
+              <a:t>BOARD SUMMARY</a:t>
             </a:r>
             <a:endParaRPr lang="en-US" sz="1400" dirty="0"/>
           </a:p>
@@ -18971,7 +19233,7 @@
                 <a:ea typeface="Times New Roman" pitchFamily="34" charset="-122"/>
                 <a:cs typeface="Times New Roman" pitchFamily="34" charset="-120"/>
               </a:rPr>
-              <a:t>Evaluation 2</a:t>
+              <a:t>4. Factors of Urban Climates</a:t>
             </a:r>
             <a:endParaRPr lang="en-US" sz="3600" dirty="0"/>
           </a:p>
@@ -19005,7 +19267,7 @@
               <a:buNone/>
             </a:pPr>
             <a:r>
-              <a:rPr lang="en-US" sz="4000" dirty="0">
+              <a:rPr lang="en-US" sz="4000" b="1" dirty="0">
                 <a:solidFill>
                   <a:srgbClr val="111111"/>
                 </a:solidFill>
@@ -19013,7 +19275,24 @@
                 <a:ea typeface="Times New Roman" pitchFamily="34" charset="-122"/>
                 <a:cs typeface="Times New Roman" pitchFamily="34" charset="-120"/>
               </a:rPr>
-              <a:t>Give two differences between an urban climate and a rural climate.</a:t>
+              <a:t>Reduced evapotranspiration: </a:t>
+            </a:r>
+            <a:pPr algn="l" indent="0" marL="0">
+              <a:spcAft>
+                <a:spcPts val="800"/>
+              </a:spcAft>
+              <a:buNone/>
+            </a:pPr>
+            <a:r>
+              <a:rPr lang="en-US" sz="4000" dirty="0">
+                <a:solidFill>
+                  <a:srgbClr val="111111"/>
+                </a:solidFill>
+                <a:latin typeface="Times New Roman" pitchFamily="34" charset="0"/>
+                <a:ea typeface="Times New Roman" pitchFamily="34" charset="-122"/>
+                <a:cs typeface="Times New Roman" pitchFamily="34" charset="-120"/>
+              </a:rPr>
+              <a:t>Towns have few trees, gardens and open soils. The energy that would be used to evaporate water is used instead to warm the air.</a:t>
             </a:r>
             <a:endParaRPr lang="en-US" sz="4000" dirty="0"/>
           </a:p>
@@ -19125,7 +19404,7 @@
                 <a:ea typeface="Calibri" pitchFamily="34" charset="-122"/>
                 <a:cs typeface="Calibri" pitchFamily="34" charset="-120"/>
               </a:rPr>
-              <a:t>FORMATIVE EVALUATION</a:t>
+              <a:t>BOARD SUMMARY</a:t>
             </a:r>
             <a:endParaRPr lang="en-US" sz="1400" dirty="0"/>
           </a:p>
@@ -19190,7 +19469,7 @@
                 <a:ea typeface="Times New Roman" pitchFamily="34" charset="-122"/>
                 <a:cs typeface="Times New Roman" pitchFamily="34" charset="-120"/>
               </a:rPr>
-              <a:t>Expected Answer</a:t>
+              <a:t>4. Factors of Urban Climates</a:t>
             </a:r>
             <a:endParaRPr lang="en-US" sz="3600" dirty="0"/>
           </a:p>
@@ -19224,7 +19503,7 @@
               <a:buNone/>
             </a:pPr>
             <a:r>
-              <a:rPr lang="en-US" sz="4000" dirty="0">
+              <a:rPr lang="en-US" sz="4000" b="1" dirty="0">
                 <a:solidFill>
                   <a:srgbClr val="111111"/>
                 </a:solidFill>
@@ -19232,7 +19511,24 @@
                 <a:ea typeface="Times New Roman" pitchFamily="34" charset="-122"/>
                 <a:cs typeface="Times New Roman" pitchFamily="34" charset="-120"/>
               </a:rPr>
-              <a:t>Towns are warmer, drier, less windy and more polluted (any two).</a:t>
+              <a:t>Urban geometry: </a:t>
+            </a:r>
+            <a:pPr algn="l" indent="0" marL="0">
+              <a:spcAft>
+                <a:spcPts val="800"/>
+              </a:spcAft>
+              <a:buNone/>
+            </a:pPr>
+            <a:r>
+              <a:rPr lang="en-US" sz="4000" dirty="0">
+                <a:solidFill>
+                  <a:srgbClr val="111111"/>
+                </a:solidFill>
+                <a:latin typeface="Times New Roman" pitchFamily="34" charset="0"/>
+                <a:ea typeface="Times New Roman" pitchFamily="34" charset="-122"/>
+                <a:cs typeface="Times New Roman" pitchFamily="34" charset="-120"/>
+              </a:rPr>
+              <a:t>Tall buildings and narrow streets form urban canyons that trap the heat radiated by walls and roads. They also block the wind that could carry this heat away.</a:t>
             </a:r>
             <a:endParaRPr lang="en-US" sz="4000" dirty="0"/>
           </a:p>
@@ -19344,7 +19640,7 @@
                 <a:ea typeface="Calibri" pitchFamily="34" charset="-122"/>
                 <a:cs typeface="Calibri" pitchFamily="34" charset="-120"/>
               </a:rPr>
-              <a:t>REMEDIATION</a:t>
+              <a:t>FORMATIVE EVALUATION</a:t>
             </a:r>
             <a:endParaRPr lang="en-US" sz="1400" dirty="0"/>
           </a:p>
@@ -19367,7 +19663,7 @@
         <p:spPr>
           <a:xfrm>
             <a:off x="0" y="658368"/>
-            <a:ext cx="1463040" cy="5833872"/>
+            <a:ext cx="5120640" cy="5833872"/>
           </a:xfrm>
           <a:prstGeom prst="rect">
             <a:avLst/>
@@ -19382,8 +19678,8 @@
         </p:nvSpPr>
         <p:spPr>
           <a:xfrm>
-            <a:off x="1691640" y="1005840"/>
-            <a:ext cx="10180015" cy="731520"/>
+            <a:off x="5349240" y="1005840"/>
+            <a:ext cx="6522415" cy="731520"/>
           </a:xfrm>
           <a:prstGeom prst="rect">
             <a:avLst/>
@@ -19409,7 +19705,7 @@
                 <a:ea typeface="Times New Roman" pitchFamily="34" charset="-122"/>
                 <a:cs typeface="Times New Roman" pitchFamily="34" charset="-120"/>
               </a:rPr>
-              <a:t>Remediation</a:t>
+              <a:t>Evaluation 1</a:t>
             </a:r>
             <a:endParaRPr lang="en-US" sz="3600" dirty="0"/>
           </a:p>
@@ -19423,8 +19719,8 @@
         </p:nvSpPr>
         <p:spPr>
           <a:xfrm>
-            <a:off x="1691640" y="1783080"/>
-            <a:ext cx="10180015" cy="4663440"/>
+            <a:off x="5349240" y="1783080"/>
+            <a:ext cx="6522415" cy="4663440"/>
           </a:xfrm>
           <a:prstGeom prst="rect">
             <a:avLst/>
@@ -19443,7 +19739,7 @@
               <a:buNone/>
             </a:pPr>
             <a:r>
-              <a:rPr lang="en-US" sz="4000" b="1" dirty="0">
+              <a:rPr lang="en-US" sz="4000" dirty="0">
                 <a:solidFill>
                   <a:srgbClr val="111111"/>
                 </a:solidFill>
@@ -19451,73 +19747,7 @@
                 <a:ea typeface="Times New Roman" pitchFamily="34" charset="-122"/>
                 <a:cs typeface="Times New Roman" pitchFamily="34" charset="-120"/>
               </a:rPr>
-              <a:t>Fill in the blanks:</a:t>
-            </a:r>
-            <a:endParaRPr lang="en-US" sz="4000" dirty="0"/>
-          </a:p>
-          <a:p>
-            <a:pPr algn="l" marL="342900" indent="-342900">
-              <a:spcAft>
-                <a:spcPts val="800"/>
-              </a:spcAft>
-              <a:buSzPct val="100000"/>
-              <a:buFont typeface="+mj-lt"/>
-              <a:buAutoNum type="arabicPeriod" startAt="1"/>
-            </a:pPr>
-            <a:r>
-              <a:rPr lang="en-US" sz="4000" dirty="0">
-                <a:solidFill>
-                  <a:srgbClr val="111111"/>
-                </a:solidFill>
-                <a:latin typeface="Times New Roman" pitchFamily="34" charset="0"/>
-                <a:ea typeface="Times New Roman" pitchFamily="34" charset="-122"/>
-                <a:cs typeface="Times New Roman" pitchFamily="34" charset="-120"/>
-              </a:rPr>
-              <a:t>The climate of a small area is a ______.</a:t>
-            </a:r>
-            <a:endParaRPr lang="en-US" sz="4000" dirty="0"/>
-          </a:p>
-          <a:p>
-            <a:pPr algn="l" marL="342900" indent="-342900">
-              <a:spcAft>
-                <a:spcPts val="800"/>
-              </a:spcAft>
-              <a:buSzPct val="100000"/>
-              <a:buFont typeface="+mj-lt"/>
-              <a:buAutoNum type="arabicPeriod" startAt="1"/>
-            </a:pPr>
-            <a:r>
-              <a:rPr lang="en-US" sz="4000" dirty="0">
-                <a:solidFill>
-                  <a:srgbClr val="111111"/>
-                </a:solidFill>
-                <a:latin typeface="Times New Roman" pitchFamily="34" charset="0"/>
-                <a:ea typeface="Times New Roman" pitchFamily="34" charset="-122"/>
-                <a:cs typeface="Times New Roman" pitchFamily="34" charset="-120"/>
-              </a:rPr>
-              <a:t>A town warmer than the countryside is an urban heat ______.</a:t>
-            </a:r>
-            <a:endParaRPr lang="en-US" sz="4000" dirty="0"/>
-          </a:p>
-          <a:p>
-            <a:pPr algn="l" marL="342900" indent="-342900">
-              <a:spcAft>
-                <a:spcPts val="800"/>
-              </a:spcAft>
-              <a:buSzPct val="100000"/>
-              <a:buFont typeface="+mj-lt"/>
-              <a:buAutoNum type="arabicPeriod" startAt="1"/>
-            </a:pPr>
-            <a:r>
-              <a:rPr lang="en-US" sz="4000" dirty="0">
-                <a:solidFill>
-                  <a:srgbClr val="111111"/>
-                </a:solidFill>
-                <a:latin typeface="Times New Roman" pitchFamily="34" charset="0"/>
-                <a:ea typeface="Times New Roman" pitchFamily="34" charset="-122"/>
-                <a:cs typeface="Times New Roman" pitchFamily="34" charset="-120"/>
-              </a:rPr>
-              <a:t>Heat from vehicles and machines is ______ heat.</a:t>
+              <a:t>What is the urban heat island, and give two of its causes in Garoua?</a:t>
             </a:r>
             <a:endParaRPr lang="en-US" sz="4000" dirty="0"/>
           </a:p>
@@ -19629,7 +19859,7 @@
                 <a:ea typeface="Calibri" pitchFamily="34" charset="-122"/>
                 <a:cs typeface="Calibri" pitchFamily="34" charset="-120"/>
               </a:rPr>
-              <a:t>HOMEWORK</a:t>
+              <a:t>FORMATIVE EVALUATION</a:t>
             </a:r>
             <a:endParaRPr lang="en-US" sz="1400" dirty="0"/>
           </a:p>
@@ -19694,7 +19924,7 @@
                 <a:ea typeface="Times New Roman" pitchFamily="34" charset="-122"/>
                 <a:cs typeface="Times New Roman" pitchFamily="34" charset="-120"/>
               </a:rPr>
-              <a:t>Homework</a:t>
+              <a:t>Expected Answer</a:t>
             </a:r>
             <a:endParaRPr lang="en-US" sz="3600" dirty="0"/>
           </a:p>
@@ -19736,7 +19966,7 @@
                 <a:ea typeface="Times New Roman" pitchFamily="34" charset="-122"/>
                 <a:cs typeface="Times New Roman" pitchFamily="34" charset="-120"/>
               </a:rPr>
-              <a:t>State how temperature changes with altitude.</a:t>
+              <a:t>The town is warmer than the countryside; causes: tar and concrete, heat from vehicles and generators, few trees (any two).</a:t>
             </a:r>
             <a:endParaRPr lang="en-US" sz="4000" dirty="0"/>
           </a:p>
@@ -19848,7 +20078,7 @@
                 <a:ea typeface="Calibri" pitchFamily="34" charset="-122"/>
                 <a:cs typeface="Calibri" pitchFamily="34" charset="-120"/>
               </a:rPr>
-              <a:t>NEXT LESSON</a:t>
+              <a:t>FORMATIVE EVALUATION</a:t>
             </a:r>
             <a:endParaRPr lang="en-US" sz="1400" dirty="0"/>
           </a:p>
@@ -19913,7 +20143,7 @@
                 <a:ea typeface="Times New Roman" pitchFamily="34" charset="-122"/>
                 <a:cs typeface="Times New Roman" pitchFamily="34" charset="-120"/>
               </a:rPr>
-              <a:t>Next Lesson</a:t>
+              <a:t>Evaluation 2</a:t>
             </a:r>
             <a:endParaRPr lang="en-US" sz="3600" dirty="0"/>
           </a:p>
@@ -19937,17 +20167,17 @@
           <a:ln/>
         </p:spPr>
         <p:txBody>
-          <a:bodyPr wrap="square" lIns="0" tIns="0" rIns="0" bIns="0" rtlCol="0" anchor="ctr"/>
-          <a:lstStyle/>
-          <a:p>
-            <a:pPr algn="ctr" indent="0" marL="0">
+          <a:bodyPr wrap="square" lIns="0" tIns="0" rIns="0" bIns="0" rtlCol="0" anchor="t"/>
+          <a:lstStyle/>
+          <a:p>
+            <a:pPr algn="l" indent="0" marL="0">
               <a:spcAft>
                 <a:spcPts val="800"/>
               </a:spcAft>
               <a:buNone/>
             </a:pPr>
             <a:r>
-              <a:rPr lang="en-US" sz="4000" b="1" dirty="0">
+              <a:rPr lang="en-US" sz="4000" dirty="0">
                 <a:solidFill>
                   <a:srgbClr val="111111"/>
                 </a:solidFill>
@@ -19955,27 +20185,7 @@
                 <a:ea typeface="Times New Roman" pitchFamily="34" charset="-122"/>
                 <a:cs typeface="Times New Roman" pitchFamily="34" charset="-120"/>
               </a:rPr>
-              <a:t>Our next lesson will be on:</a:t>
-            </a:r>
-            <a:endParaRPr lang="en-US" sz="4000" dirty="0"/>
-          </a:p>
-          <a:p>
-            <a:pPr algn="ctr" indent="0" marL="0">
-              <a:spcAft>
-                <a:spcPts val="800"/>
-              </a:spcAft>
-              <a:buNone/>
-            </a:pPr>
-            <a:r>
-              <a:rPr lang="en-US" sz="4000" b="1" dirty="0">
-                <a:solidFill>
-                  <a:srgbClr val="990011"/>
-                </a:solidFill>
-                <a:latin typeface="Times New Roman" pitchFamily="34" charset="0"/>
-                <a:ea typeface="Times New Roman" pitchFamily="34" charset="-122"/>
-                <a:cs typeface="Times New Roman" pitchFamily="34" charset="-120"/>
-              </a:rPr>
-              <a:t>Lesson 21: Mountain Climates</a:t>
+              <a:t>Give two differences between an urban climate and a rural climate.</a:t>
             </a:r>
             <a:endParaRPr lang="en-US" sz="4000" dirty="0"/>
           </a:p>
@@ -20087,6 +20297,1299 @@
                 <a:ea typeface="Calibri" pitchFamily="34" charset="-122"/>
                 <a:cs typeface="Calibri" pitchFamily="34" charset="-120"/>
               </a:rPr>
+              <a:t>FORMATIVE EVALUATION</a:t>
+            </a:r>
+            <a:endParaRPr lang="en-US" sz="1400" dirty="0"/>
+          </a:p>
+        </p:txBody>
+      </p:sp>
+      <p:pic>
+        <p:nvPicPr>
+          <p:cNvPr id="3" name="Image 0" descr="/home/claude/f4/img/minesec_sheet.png">    </p:cNvPr>
+          <p:cNvPicPr>
+            <a:picLocks noChangeAspect="1"/>
+          </p:cNvPicPr>
+          <p:nvPr/>
+        </p:nvPicPr>
+        <p:blipFill>
+          <a:blip r:embed="rId1"/>
+          <a:stretch>
+            <a:fillRect/>
+          </a:stretch>
+        </p:blipFill>
+        <p:spPr>
+          <a:xfrm>
+            <a:off x="0" y="658368"/>
+            <a:ext cx="5120640" cy="5833872"/>
+          </a:xfrm>
+          <a:prstGeom prst="rect">
+            <a:avLst/>
+          </a:prstGeom>
+        </p:spPr>
+      </p:pic>
+      <p:sp>
+        <p:nvSpPr>
+          <p:cNvPr id="4" name="Text 1"/>
+          <p:cNvSpPr/>
+          <p:nvPr/>
+        </p:nvSpPr>
+        <p:spPr>
+          <a:xfrm>
+            <a:off x="5349240" y="1005840"/>
+            <a:ext cx="6522415" cy="731520"/>
+          </a:xfrm>
+          <a:prstGeom prst="rect">
+            <a:avLst/>
+          </a:prstGeom>
+          <a:noFill/>
+          <a:ln/>
+        </p:spPr>
+        <p:txBody>
+          <a:bodyPr wrap="square" lIns="0" tIns="0" rIns="0" bIns="0" rtlCol="0" anchor="ctr">
+            <a:normAutofit/>
+          </a:bodyPr>
+          <a:lstStyle/>
+          <a:p>
+            <a:pPr algn="ctr" indent="0" marL="0">
+              <a:buNone/>
+            </a:pPr>
+            <a:r>
+              <a:rPr lang="en-US" sz="3600" b="1" dirty="0">
+                <a:solidFill>
+                  <a:srgbClr val="990011"/>
+                </a:solidFill>
+                <a:latin typeface="Times New Roman" pitchFamily="34" charset="0"/>
+                <a:ea typeface="Times New Roman" pitchFamily="34" charset="-122"/>
+                <a:cs typeface="Times New Roman" pitchFamily="34" charset="-120"/>
+              </a:rPr>
+              <a:t>Expected Answer</a:t>
+            </a:r>
+            <a:endParaRPr lang="en-US" sz="3600" dirty="0"/>
+          </a:p>
+        </p:txBody>
+      </p:sp>
+      <p:sp>
+        <p:nvSpPr>
+          <p:cNvPr id="5" name="Text 2"/>
+          <p:cNvSpPr/>
+          <p:nvPr/>
+        </p:nvSpPr>
+        <p:spPr>
+          <a:xfrm>
+            <a:off x="5349240" y="1783080"/>
+            <a:ext cx="6522415" cy="4663440"/>
+          </a:xfrm>
+          <a:prstGeom prst="rect">
+            <a:avLst/>
+          </a:prstGeom>
+          <a:noFill/>
+          <a:ln/>
+        </p:spPr>
+        <p:txBody>
+          <a:bodyPr wrap="square" lIns="0" tIns="0" rIns="0" bIns="0" rtlCol="0" anchor="t"/>
+          <a:lstStyle/>
+          <a:p>
+            <a:pPr algn="l" indent="0" marL="0">
+              <a:spcAft>
+                <a:spcPts val="800"/>
+              </a:spcAft>
+              <a:buNone/>
+            </a:pPr>
+            <a:r>
+              <a:rPr lang="en-US" sz="4000" dirty="0">
+                <a:solidFill>
+                  <a:srgbClr val="111111"/>
+                </a:solidFill>
+                <a:latin typeface="Times New Roman" pitchFamily="34" charset="0"/>
+                <a:ea typeface="Times New Roman" pitchFamily="34" charset="-122"/>
+                <a:cs typeface="Times New Roman" pitchFamily="34" charset="-120"/>
+              </a:rPr>
+              <a:t>Towns are warmer, drier, less windy and more polluted (any two).</a:t>
+            </a:r>
+            <a:endParaRPr lang="en-US" sz="4000" dirty="0"/>
+          </a:p>
+        </p:txBody>
+      </p:sp>
+      <p:sp>
+        <p:nvSpPr>
+          <p:cNvPr id="25" name="Slide Number Placeholder 0"/>
+          <p:cNvSpPr>
+            <a:spLocks noGrp="1"/>
+          </p:cNvSpPr>
+          <p:nvPr>
+            <p:ph type="sldNum" sz="quarter" idx="4294967295"/>
+          </p:nvPr>
+        </p:nvSpPr>
+        <p:spPr>
+          <a:xfrm>
+            <a:off x="27432" y="91440"/>
+            <a:ext cx="585216" cy="475488"/>
+          </a:xfrm>
+          <a:prstGeom prst="rect">
+            <a:avLst/>
+          </a:prstGeom>
+          <a:extLst>
+            <a:ext uri="{C572A759-6A51-4108-AA02-DFA0A04FC94B}">
+              <ma14:wrappingTextBoxFlag xmlns:ma14="http://schemas.microsoft.com/office/mac/drawingml/2011/main" val="0"/>
+            </a:ext>
+          </a:extLst>
+        </p:spPr>
+        <p:txBody>
+          <a:bodyPr/>
+          <a:lstStyle>
+            <a:lvl1pPr>
+              <a:defRPr sz="2000">
+                <a:solidFill>
+                  <a:srgbClr val="FFFFFF"/>
+                </a:solidFill>
+                <a:latin typeface="Calibri"/>
+                <a:ea typeface="Calibri"/>
+                <a:cs typeface="Calibri"/>
+              </a:defRPr>
+            </a:lvl1pPr>
+          </a:lstStyle>
+          <a:p>
+            <a:pPr algn="ctr"/>
+            <a:fld id="{F7021451-1387-4CA6-816F-3879F97B5CBC}" type="slidenum">
+              <a:rPr b="1" lang="en-US"/>
+              <a:t>56</a:t>
+            </a:fld>
+            <a:endParaRPr lang="en-US"/>
+          </a:p>
+        </p:txBody>
+      </p:sp>
+    </p:spTree>
+  </p:cSld>
+  <p:clrMapOvr>
+    <a:masterClrMapping/>
+  </p:clrMapOvr>
+</p:sld>
+</file>
+
+<file path=ppt/slides/slide57.xml><?xml version="1.0" encoding="utf-8"?>
+<p:sld xmlns:a="http://schemas.openxmlformats.org/drawingml/2006/main" xmlns:r="http://schemas.openxmlformats.org/officeDocument/2006/relationships" xmlns:p="http://schemas.openxmlformats.org/presentationml/2006/main">
+  <p:cSld name="Slide 57">
+    <p:spTree>
+      <p:nvGrpSpPr>
+        <p:cNvPr id="1" name=""/>
+        <p:cNvGrpSpPr/>
+        <p:nvPr/>
+      </p:nvGrpSpPr>
+      <p:grpSpPr>
+        <a:xfrm>
+          <a:off x="0" y="0"/>
+          <a:ext cx="0" cy="0"/>
+          <a:chOff x="0" y="0"/>
+          <a:chExt cx="0" cy="0"/>
+        </a:xfrm>
+      </p:grpSpPr>
+      <p:sp>
+        <p:nvSpPr>
+          <p:cNvPr id="2" name="Text 0"/>
+          <p:cNvSpPr/>
+          <p:nvPr/>
+        </p:nvSpPr>
+        <p:spPr>
+          <a:xfrm>
+            <a:off x="457200" y="713232"/>
+            <a:ext cx="11368735" cy="274320"/>
+          </a:xfrm>
+          <a:prstGeom prst="rect">
+            <a:avLst/>
+          </a:prstGeom>
+          <a:noFill/>
+          <a:ln/>
+        </p:spPr>
+        <p:txBody>
+          <a:bodyPr wrap="square" lIns="0" tIns="0" rIns="0" bIns="0" rtlCol="0" anchor="ctr"/>
+          <a:lstStyle/>
+          <a:p>
+            <a:pPr algn="r" indent="0" marL="0">
+              <a:buNone/>
+            </a:pPr>
+            <a:r>
+              <a:rPr lang="en-US" sz="1400" b="1" dirty="0">
+                <a:solidFill>
+                  <a:srgbClr val="1C3F6E"/>
+                </a:solidFill>
+                <a:latin typeface="Calibri" pitchFamily="34" charset="0"/>
+                <a:ea typeface="Calibri" pitchFamily="34" charset="-122"/>
+                <a:cs typeface="Calibri" pitchFamily="34" charset="-120"/>
+              </a:rPr>
+              <a:t>REMEDIATION</a:t>
+            </a:r>
+            <a:endParaRPr lang="en-US" sz="1400" dirty="0"/>
+          </a:p>
+        </p:txBody>
+      </p:sp>
+      <p:pic>
+        <p:nvPicPr>
+          <p:cNvPr id="3" name="Image 0" descr="/home/claude/f4/img/minesec_sheet.png">    </p:cNvPr>
+          <p:cNvPicPr>
+            <a:picLocks noChangeAspect="1"/>
+          </p:cNvPicPr>
+          <p:nvPr/>
+        </p:nvPicPr>
+        <p:blipFill>
+          <a:blip r:embed="rId1"/>
+          <a:stretch>
+            <a:fillRect/>
+          </a:stretch>
+        </p:blipFill>
+        <p:spPr>
+          <a:xfrm>
+            <a:off x="0" y="658368"/>
+            <a:ext cx="1463040" cy="5833872"/>
+          </a:xfrm>
+          <a:prstGeom prst="rect">
+            <a:avLst/>
+          </a:prstGeom>
+        </p:spPr>
+      </p:pic>
+      <p:sp>
+        <p:nvSpPr>
+          <p:cNvPr id="4" name="Text 1"/>
+          <p:cNvSpPr/>
+          <p:nvPr/>
+        </p:nvSpPr>
+        <p:spPr>
+          <a:xfrm>
+            <a:off x="1691640" y="1005840"/>
+            <a:ext cx="10180015" cy="731520"/>
+          </a:xfrm>
+          <a:prstGeom prst="rect">
+            <a:avLst/>
+          </a:prstGeom>
+          <a:noFill/>
+          <a:ln/>
+        </p:spPr>
+        <p:txBody>
+          <a:bodyPr wrap="square" lIns="0" tIns="0" rIns="0" bIns="0" rtlCol="0" anchor="ctr">
+            <a:normAutofit/>
+          </a:bodyPr>
+          <a:lstStyle/>
+          <a:p>
+            <a:pPr algn="ctr" indent="0" marL="0">
+              <a:buNone/>
+            </a:pPr>
+            <a:r>
+              <a:rPr lang="en-US" sz="3600" b="1" dirty="0">
+                <a:solidFill>
+                  <a:srgbClr val="990011"/>
+                </a:solidFill>
+                <a:latin typeface="Times New Roman" pitchFamily="34" charset="0"/>
+                <a:ea typeface="Times New Roman" pitchFamily="34" charset="-122"/>
+                <a:cs typeface="Times New Roman" pitchFamily="34" charset="-120"/>
+              </a:rPr>
+              <a:t>Remediation</a:t>
+            </a:r>
+            <a:endParaRPr lang="en-US" sz="3600" dirty="0"/>
+          </a:p>
+        </p:txBody>
+      </p:sp>
+      <p:sp>
+        <p:nvSpPr>
+          <p:cNvPr id="5" name="Text 2"/>
+          <p:cNvSpPr/>
+          <p:nvPr/>
+        </p:nvSpPr>
+        <p:spPr>
+          <a:xfrm>
+            <a:off x="1691640" y="1783080"/>
+            <a:ext cx="10180015" cy="4663440"/>
+          </a:xfrm>
+          <a:prstGeom prst="rect">
+            <a:avLst/>
+          </a:prstGeom>
+          <a:noFill/>
+          <a:ln/>
+        </p:spPr>
+        <p:txBody>
+          <a:bodyPr wrap="square" lIns="0" tIns="0" rIns="0" bIns="0" rtlCol="0" anchor="t"/>
+          <a:lstStyle/>
+          <a:p>
+            <a:pPr algn="l" indent="0" marL="0">
+              <a:spcAft>
+                <a:spcPts val="800"/>
+              </a:spcAft>
+              <a:buNone/>
+            </a:pPr>
+            <a:r>
+              <a:rPr lang="en-US" sz="4000" b="1" dirty="0">
+                <a:solidFill>
+                  <a:srgbClr val="111111"/>
+                </a:solidFill>
+                <a:latin typeface="Times New Roman" pitchFamily="34" charset="0"/>
+                <a:ea typeface="Times New Roman" pitchFamily="34" charset="-122"/>
+                <a:cs typeface="Times New Roman" pitchFamily="34" charset="-120"/>
+              </a:rPr>
+              <a:t>Fill in the blanks:</a:t>
+            </a:r>
+            <a:endParaRPr lang="en-US" sz="4000" dirty="0"/>
+          </a:p>
+          <a:p>
+            <a:pPr algn="l" marL="342900" indent="-342900">
+              <a:spcAft>
+                <a:spcPts val="800"/>
+              </a:spcAft>
+              <a:buSzPct val="100000"/>
+              <a:buFont typeface="+mj-lt"/>
+              <a:buAutoNum type="arabicPeriod" startAt="1"/>
+            </a:pPr>
+            <a:r>
+              <a:rPr lang="en-US" sz="4000" dirty="0">
+                <a:solidFill>
+                  <a:srgbClr val="111111"/>
+                </a:solidFill>
+                <a:latin typeface="Times New Roman" pitchFamily="34" charset="0"/>
+                <a:ea typeface="Times New Roman" pitchFamily="34" charset="-122"/>
+                <a:cs typeface="Times New Roman" pitchFamily="34" charset="-120"/>
+              </a:rPr>
+              <a:t>The climate of a small area is a ______.</a:t>
+            </a:r>
+            <a:endParaRPr lang="en-US" sz="4000" dirty="0"/>
+          </a:p>
+          <a:p>
+            <a:pPr algn="l" marL="342900" indent="-342900">
+              <a:spcAft>
+                <a:spcPts val="800"/>
+              </a:spcAft>
+              <a:buSzPct val="100000"/>
+              <a:buFont typeface="+mj-lt"/>
+              <a:buAutoNum type="arabicPeriod" startAt="1"/>
+            </a:pPr>
+            <a:r>
+              <a:rPr lang="en-US" sz="4000" dirty="0">
+                <a:solidFill>
+                  <a:srgbClr val="111111"/>
+                </a:solidFill>
+                <a:latin typeface="Times New Roman" pitchFamily="34" charset="0"/>
+                <a:ea typeface="Times New Roman" pitchFamily="34" charset="-122"/>
+                <a:cs typeface="Times New Roman" pitchFamily="34" charset="-120"/>
+              </a:rPr>
+              <a:t>A town warmer than the countryside is an urban heat ______.</a:t>
+            </a:r>
+            <a:endParaRPr lang="en-US" sz="4000" dirty="0"/>
+          </a:p>
+          <a:p>
+            <a:pPr algn="l" marL="342900" indent="-342900">
+              <a:spcAft>
+                <a:spcPts val="800"/>
+              </a:spcAft>
+              <a:buSzPct val="100000"/>
+              <a:buFont typeface="+mj-lt"/>
+              <a:buAutoNum type="arabicPeriod" startAt="1"/>
+            </a:pPr>
+            <a:r>
+              <a:rPr lang="en-US" sz="4000" dirty="0">
+                <a:solidFill>
+                  <a:srgbClr val="111111"/>
+                </a:solidFill>
+                <a:latin typeface="Times New Roman" pitchFamily="34" charset="0"/>
+                <a:ea typeface="Times New Roman" pitchFamily="34" charset="-122"/>
+                <a:cs typeface="Times New Roman" pitchFamily="34" charset="-120"/>
+              </a:rPr>
+              <a:t>Heat from vehicles and machines is ______ heat.</a:t>
+            </a:r>
+            <a:endParaRPr lang="en-US" sz="4000" dirty="0"/>
+          </a:p>
+        </p:txBody>
+      </p:sp>
+      <p:sp>
+        <p:nvSpPr>
+          <p:cNvPr id="25" name="Slide Number Placeholder 0"/>
+          <p:cNvSpPr>
+            <a:spLocks noGrp="1"/>
+          </p:cNvSpPr>
+          <p:nvPr>
+            <p:ph type="sldNum" sz="quarter" idx="4294967295"/>
+          </p:nvPr>
+        </p:nvSpPr>
+        <p:spPr>
+          <a:xfrm>
+            <a:off x="27432" y="91440"/>
+            <a:ext cx="585216" cy="475488"/>
+          </a:xfrm>
+          <a:prstGeom prst="rect">
+            <a:avLst/>
+          </a:prstGeom>
+          <a:extLst>
+            <a:ext uri="{C572A759-6A51-4108-AA02-DFA0A04FC94B}">
+              <ma14:wrappingTextBoxFlag xmlns:ma14="http://schemas.microsoft.com/office/mac/drawingml/2011/main" val="0"/>
+            </a:ext>
+          </a:extLst>
+        </p:spPr>
+        <p:txBody>
+          <a:bodyPr/>
+          <a:lstStyle>
+            <a:lvl1pPr>
+              <a:defRPr sz="2000">
+                <a:solidFill>
+                  <a:srgbClr val="FFFFFF"/>
+                </a:solidFill>
+                <a:latin typeface="Calibri"/>
+                <a:ea typeface="Calibri"/>
+                <a:cs typeface="Calibri"/>
+              </a:defRPr>
+            </a:lvl1pPr>
+          </a:lstStyle>
+          <a:p>
+            <a:pPr algn="ctr"/>
+            <a:fld id="{F7021451-1387-4CA6-816F-3879F97B5CBC}" type="slidenum">
+              <a:rPr b="1" lang="en-US"/>
+              <a:t>57</a:t>
+            </a:fld>
+            <a:endParaRPr lang="en-US"/>
+          </a:p>
+        </p:txBody>
+      </p:sp>
+    </p:spTree>
+  </p:cSld>
+  <p:clrMapOvr>
+    <a:masterClrMapping/>
+  </p:clrMapOvr>
+</p:sld>
+</file>
+
+<file path=ppt/slides/slide58.xml><?xml version="1.0" encoding="utf-8"?>
+<p:sld xmlns:a="http://schemas.openxmlformats.org/drawingml/2006/main" xmlns:r="http://schemas.openxmlformats.org/officeDocument/2006/relationships" xmlns:p="http://schemas.openxmlformats.org/presentationml/2006/main">
+  <p:cSld name="Slide 58">
+    <p:spTree>
+      <p:nvGrpSpPr>
+        <p:cNvPr id="1" name=""/>
+        <p:cNvGrpSpPr/>
+        <p:nvPr/>
+      </p:nvGrpSpPr>
+      <p:grpSpPr>
+        <a:xfrm>
+          <a:off x="0" y="0"/>
+          <a:ext cx="0" cy="0"/>
+          <a:chOff x="0" y="0"/>
+          <a:chExt cx="0" cy="0"/>
+        </a:xfrm>
+      </p:grpSpPr>
+      <p:sp>
+        <p:nvSpPr>
+          <p:cNvPr id="2" name="Text 0"/>
+          <p:cNvSpPr/>
+          <p:nvPr/>
+        </p:nvSpPr>
+        <p:spPr>
+          <a:xfrm>
+            <a:off x="457200" y="713232"/>
+            <a:ext cx="11368735" cy="274320"/>
+          </a:xfrm>
+          <a:prstGeom prst="rect">
+            <a:avLst/>
+          </a:prstGeom>
+          <a:noFill/>
+          <a:ln/>
+        </p:spPr>
+        <p:txBody>
+          <a:bodyPr wrap="square" lIns="0" tIns="0" rIns="0" bIns="0" rtlCol="0" anchor="ctr"/>
+          <a:lstStyle/>
+          <a:p>
+            <a:pPr algn="r" indent="0" marL="0">
+              <a:buNone/>
+            </a:pPr>
+            <a:r>
+              <a:rPr lang="en-US" sz="1400" b="1" dirty="0">
+                <a:solidFill>
+                  <a:srgbClr val="1C3F6E"/>
+                </a:solidFill>
+                <a:latin typeface="Calibri" pitchFamily="34" charset="0"/>
+                <a:ea typeface="Calibri" pitchFamily="34" charset="-122"/>
+                <a:cs typeface="Calibri" pitchFamily="34" charset="-120"/>
+              </a:rPr>
+              <a:t>HOMEWORK</a:t>
+            </a:r>
+            <a:endParaRPr lang="en-US" sz="1400" dirty="0"/>
+          </a:p>
+        </p:txBody>
+      </p:sp>
+      <p:pic>
+        <p:nvPicPr>
+          <p:cNvPr id="3" name="Image 0" descr="/home/claude/f4/img/minesec_sheet.png">    </p:cNvPr>
+          <p:cNvPicPr>
+            <a:picLocks noChangeAspect="1"/>
+          </p:cNvPicPr>
+          <p:nvPr/>
+        </p:nvPicPr>
+        <p:blipFill>
+          <a:blip r:embed="rId1"/>
+          <a:stretch>
+            <a:fillRect/>
+          </a:stretch>
+        </p:blipFill>
+        <p:spPr>
+          <a:xfrm>
+            <a:off x="0" y="658368"/>
+            <a:ext cx="5120640" cy="5833872"/>
+          </a:xfrm>
+          <a:prstGeom prst="rect">
+            <a:avLst/>
+          </a:prstGeom>
+        </p:spPr>
+      </p:pic>
+      <p:sp>
+        <p:nvSpPr>
+          <p:cNvPr id="4" name="Text 1"/>
+          <p:cNvSpPr/>
+          <p:nvPr/>
+        </p:nvSpPr>
+        <p:spPr>
+          <a:xfrm>
+            <a:off x="5349240" y="1005840"/>
+            <a:ext cx="6522415" cy="731520"/>
+          </a:xfrm>
+          <a:prstGeom prst="rect">
+            <a:avLst/>
+          </a:prstGeom>
+          <a:noFill/>
+          <a:ln/>
+        </p:spPr>
+        <p:txBody>
+          <a:bodyPr wrap="square" lIns="0" tIns="0" rIns="0" bIns="0" rtlCol="0" anchor="ctr">
+            <a:normAutofit/>
+          </a:bodyPr>
+          <a:lstStyle/>
+          <a:p>
+            <a:pPr algn="ctr" indent="0" marL="0">
+              <a:buNone/>
+            </a:pPr>
+            <a:r>
+              <a:rPr lang="en-US" sz="3600" b="1" dirty="0">
+                <a:solidFill>
+                  <a:srgbClr val="990011"/>
+                </a:solidFill>
+                <a:latin typeface="Times New Roman" pitchFamily="34" charset="0"/>
+                <a:ea typeface="Times New Roman" pitchFamily="34" charset="-122"/>
+                <a:cs typeface="Times New Roman" pitchFamily="34" charset="-120"/>
+              </a:rPr>
+              <a:t>Homework</a:t>
+            </a:r>
+            <a:endParaRPr lang="en-US" sz="3600" dirty="0"/>
+          </a:p>
+        </p:txBody>
+      </p:sp>
+      <p:sp>
+        <p:nvSpPr>
+          <p:cNvPr id="5" name="Text 2"/>
+          <p:cNvSpPr/>
+          <p:nvPr/>
+        </p:nvSpPr>
+        <p:spPr>
+          <a:xfrm>
+            <a:off x="5349240" y="1783080"/>
+            <a:ext cx="6522415" cy="4663440"/>
+          </a:xfrm>
+          <a:prstGeom prst="rect">
+            <a:avLst/>
+          </a:prstGeom>
+          <a:noFill/>
+          <a:ln/>
+        </p:spPr>
+        <p:txBody>
+          <a:bodyPr wrap="square" lIns="0" tIns="0" rIns="0" bIns="0" rtlCol="0" anchor="t"/>
+          <a:lstStyle/>
+          <a:p>
+            <a:pPr algn="l" indent="0" marL="0">
+              <a:spcAft>
+                <a:spcPts val="800"/>
+              </a:spcAft>
+              <a:buNone/>
+            </a:pPr>
+            <a:r>
+              <a:rPr lang="en-US" sz="4000" dirty="0">
+                <a:solidFill>
+                  <a:srgbClr val="111111"/>
+                </a:solidFill>
+                <a:latin typeface="Times New Roman" pitchFamily="34" charset="0"/>
+                <a:ea typeface="Times New Roman" pitchFamily="34" charset="-122"/>
+                <a:cs typeface="Times New Roman" pitchFamily="34" charset="-120"/>
+              </a:rPr>
+              <a:t>State how temperature changes with altitude.</a:t>
+            </a:r>
+            <a:endParaRPr lang="en-US" sz="4000" dirty="0"/>
+          </a:p>
+        </p:txBody>
+      </p:sp>
+      <p:sp>
+        <p:nvSpPr>
+          <p:cNvPr id="25" name="Slide Number Placeholder 0"/>
+          <p:cNvSpPr>
+            <a:spLocks noGrp="1"/>
+          </p:cNvSpPr>
+          <p:nvPr>
+            <p:ph type="sldNum" sz="quarter" idx="4294967295"/>
+          </p:nvPr>
+        </p:nvSpPr>
+        <p:spPr>
+          <a:xfrm>
+            <a:off x="27432" y="91440"/>
+            <a:ext cx="585216" cy="475488"/>
+          </a:xfrm>
+          <a:prstGeom prst="rect">
+            <a:avLst/>
+          </a:prstGeom>
+          <a:extLst>
+            <a:ext uri="{C572A759-6A51-4108-AA02-DFA0A04FC94B}">
+              <ma14:wrappingTextBoxFlag xmlns:ma14="http://schemas.microsoft.com/office/mac/drawingml/2011/main" val="0"/>
+            </a:ext>
+          </a:extLst>
+        </p:spPr>
+        <p:txBody>
+          <a:bodyPr/>
+          <a:lstStyle>
+            <a:lvl1pPr>
+              <a:defRPr sz="2000">
+                <a:solidFill>
+                  <a:srgbClr val="FFFFFF"/>
+                </a:solidFill>
+                <a:latin typeface="Calibri"/>
+                <a:ea typeface="Calibri"/>
+                <a:cs typeface="Calibri"/>
+              </a:defRPr>
+            </a:lvl1pPr>
+          </a:lstStyle>
+          <a:p>
+            <a:pPr algn="ctr"/>
+            <a:fld id="{F7021451-1387-4CA6-816F-3879F97B5CBC}" type="slidenum">
+              <a:rPr b="1" lang="en-US"/>
+              <a:t>58</a:t>
+            </a:fld>
+            <a:endParaRPr lang="en-US"/>
+          </a:p>
+        </p:txBody>
+      </p:sp>
+    </p:spTree>
+  </p:cSld>
+  <p:clrMapOvr>
+    <a:masterClrMapping/>
+  </p:clrMapOvr>
+</p:sld>
+</file>
+
+<file path=ppt/slides/slide59.xml><?xml version="1.0" encoding="utf-8"?>
+<p:sld xmlns:a="http://schemas.openxmlformats.org/drawingml/2006/main" xmlns:r="http://schemas.openxmlformats.org/officeDocument/2006/relationships" xmlns:p="http://schemas.openxmlformats.org/presentationml/2006/main">
+  <p:cSld name="Slide 59">
+    <p:spTree>
+      <p:nvGrpSpPr>
+        <p:cNvPr id="1" name=""/>
+        <p:cNvGrpSpPr/>
+        <p:nvPr/>
+      </p:nvGrpSpPr>
+      <p:grpSpPr>
+        <a:xfrm>
+          <a:off x="0" y="0"/>
+          <a:ext cx="0" cy="0"/>
+          <a:chOff x="0" y="0"/>
+          <a:chExt cx="0" cy="0"/>
+        </a:xfrm>
+      </p:grpSpPr>
+      <p:sp>
+        <p:nvSpPr>
+          <p:cNvPr id="2" name="Text 0"/>
+          <p:cNvSpPr/>
+          <p:nvPr/>
+        </p:nvSpPr>
+        <p:spPr>
+          <a:xfrm>
+            <a:off x="457200" y="713232"/>
+            <a:ext cx="11368735" cy="274320"/>
+          </a:xfrm>
+          <a:prstGeom prst="rect">
+            <a:avLst/>
+          </a:prstGeom>
+          <a:noFill/>
+          <a:ln/>
+        </p:spPr>
+        <p:txBody>
+          <a:bodyPr wrap="square" lIns="0" tIns="0" rIns="0" bIns="0" rtlCol="0" anchor="ctr"/>
+          <a:lstStyle/>
+          <a:p>
+            <a:pPr algn="r" indent="0" marL="0">
+              <a:buNone/>
+            </a:pPr>
+            <a:r>
+              <a:rPr lang="en-US" sz="1400" b="1" dirty="0">
+                <a:solidFill>
+                  <a:srgbClr val="1C3F6E"/>
+                </a:solidFill>
+                <a:latin typeface="Calibri" pitchFamily="34" charset="0"/>
+                <a:ea typeface="Calibri" pitchFamily="34" charset="-122"/>
+                <a:cs typeface="Calibri" pitchFamily="34" charset="-120"/>
+              </a:rPr>
+              <a:t>NEXT LESSON</a:t>
+            </a:r>
+            <a:endParaRPr lang="en-US" sz="1400" dirty="0"/>
+          </a:p>
+        </p:txBody>
+      </p:sp>
+      <p:pic>
+        <p:nvPicPr>
+          <p:cNvPr id="3" name="Image 0" descr="/home/claude/f4/img/minesec_sheet.png">    </p:cNvPr>
+          <p:cNvPicPr>
+            <a:picLocks noChangeAspect="1"/>
+          </p:cNvPicPr>
+          <p:nvPr/>
+        </p:nvPicPr>
+        <p:blipFill>
+          <a:blip r:embed="rId1"/>
+          <a:stretch>
+            <a:fillRect/>
+          </a:stretch>
+        </p:blipFill>
+        <p:spPr>
+          <a:xfrm>
+            <a:off x="0" y="658368"/>
+            <a:ext cx="5120640" cy="5833872"/>
+          </a:xfrm>
+          <a:prstGeom prst="rect">
+            <a:avLst/>
+          </a:prstGeom>
+        </p:spPr>
+      </p:pic>
+      <p:sp>
+        <p:nvSpPr>
+          <p:cNvPr id="4" name="Text 1"/>
+          <p:cNvSpPr/>
+          <p:nvPr/>
+        </p:nvSpPr>
+        <p:spPr>
+          <a:xfrm>
+            <a:off x="5349240" y="1005840"/>
+            <a:ext cx="6522415" cy="731520"/>
+          </a:xfrm>
+          <a:prstGeom prst="rect">
+            <a:avLst/>
+          </a:prstGeom>
+          <a:noFill/>
+          <a:ln/>
+        </p:spPr>
+        <p:txBody>
+          <a:bodyPr wrap="square" lIns="0" tIns="0" rIns="0" bIns="0" rtlCol="0" anchor="ctr">
+            <a:normAutofit/>
+          </a:bodyPr>
+          <a:lstStyle/>
+          <a:p>
+            <a:pPr algn="ctr" indent="0" marL="0">
+              <a:buNone/>
+            </a:pPr>
+            <a:r>
+              <a:rPr lang="en-US" sz="3600" b="1" dirty="0">
+                <a:solidFill>
+                  <a:srgbClr val="990011"/>
+                </a:solidFill>
+                <a:latin typeface="Times New Roman" pitchFamily="34" charset="0"/>
+                <a:ea typeface="Times New Roman" pitchFamily="34" charset="-122"/>
+                <a:cs typeface="Times New Roman" pitchFamily="34" charset="-120"/>
+              </a:rPr>
+              <a:t>Next Lesson</a:t>
+            </a:r>
+            <a:endParaRPr lang="en-US" sz="3600" dirty="0"/>
+          </a:p>
+        </p:txBody>
+      </p:sp>
+      <p:sp>
+        <p:nvSpPr>
+          <p:cNvPr id="5" name="Text 2"/>
+          <p:cNvSpPr/>
+          <p:nvPr/>
+        </p:nvSpPr>
+        <p:spPr>
+          <a:xfrm>
+            <a:off x="5349240" y="1783080"/>
+            <a:ext cx="6522415" cy="4663440"/>
+          </a:xfrm>
+          <a:prstGeom prst="rect">
+            <a:avLst/>
+          </a:prstGeom>
+          <a:noFill/>
+          <a:ln/>
+        </p:spPr>
+        <p:txBody>
+          <a:bodyPr wrap="square" lIns="0" tIns="0" rIns="0" bIns="0" rtlCol="0" anchor="ctr"/>
+          <a:lstStyle/>
+          <a:p>
+            <a:pPr algn="ctr" indent="0" marL="0">
+              <a:spcAft>
+                <a:spcPts val="800"/>
+              </a:spcAft>
+              <a:buNone/>
+            </a:pPr>
+            <a:r>
+              <a:rPr lang="en-US" sz="4000" b="1" dirty="0">
+                <a:solidFill>
+                  <a:srgbClr val="111111"/>
+                </a:solidFill>
+                <a:latin typeface="Times New Roman" pitchFamily="34" charset="0"/>
+                <a:ea typeface="Times New Roman" pitchFamily="34" charset="-122"/>
+                <a:cs typeface="Times New Roman" pitchFamily="34" charset="-120"/>
+              </a:rPr>
+              <a:t>Our next lesson will be on:</a:t>
+            </a:r>
+            <a:endParaRPr lang="en-US" sz="4000" dirty="0"/>
+          </a:p>
+          <a:p>
+            <a:pPr algn="ctr" indent="0" marL="0">
+              <a:spcAft>
+                <a:spcPts val="800"/>
+              </a:spcAft>
+              <a:buNone/>
+            </a:pPr>
+            <a:r>
+              <a:rPr lang="en-US" sz="4000" b="1" dirty="0">
+                <a:solidFill>
+                  <a:srgbClr val="990011"/>
+                </a:solidFill>
+                <a:latin typeface="Times New Roman" pitchFamily="34" charset="0"/>
+                <a:ea typeface="Times New Roman" pitchFamily="34" charset="-122"/>
+                <a:cs typeface="Times New Roman" pitchFamily="34" charset="-120"/>
+              </a:rPr>
+              <a:t>Lesson 21: Mountain Climates</a:t>
+            </a:r>
+            <a:endParaRPr lang="en-US" sz="4000" dirty="0"/>
+          </a:p>
+        </p:txBody>
+      </p:sp>
+      <p:sp>
+        <p:nvSpPr>
+          <p:cNvPr id="25" name="Slide Number Placeholder 0"/>
+          <p:cNvSpPr>
+            <a:spLocks noGrp="1"/>
+          </p:cNvSpPr>
+          <p:nvPr>
+            <p:ph type="sldNum" sz="quarter" idx="4294967295"/>
+          </p:nvPr>
+        </p:nvSpPr>
+        <p:spPr>
+          <a:xfrm>
+            <a:off x="27432" y="91440"/>
+            <a:ext cx="585216" cy="475488"/>
+          </a:xfrm>
+          <a:prstGeom prst="rect">
+            <a:avLst/>
+          </a:prstGeom>
+          <a:extLst>
+            <a:ext uri="{C572A759-6A51-4108-AA02-DFA0A04FC94B}">
+              <ma14:wrappingTextBoxFlag xmlns:ma14="http://schemas.microsoft.com/office/mac/drawingml/2011/main" val="0"/>
+            </a:ext>
+          </a:extLst>
+        </p:spPr>
+        <p:txBody>
+          <a:bodyPr/>
+          <a:lstStyle>
+            <a:lvl1pPr>
+              <a:defRPr sz="2000">
+                <a:solidFill>
+                  <a:srgbClr val="FFFFFF"/>
+                </a:solidFill>
+                <a:latin typeface="Calibri"/>
+                <a:ea typeface="Calibri"/>
+                <a:cs typeface="Calibri"/>
+              </a:defRPr>
+            </a:lvl1pPr>
+          </a:lstStyle>
+          <a:p>
+            <a:pPr algn="ctr"/>
+            <a:fld id="{F7021451-1387-4CA6-816F-3879F97B5CBC}" type="slidenum">
+              <a:rPr b="1" lang="en-US"/>
+              <a:t>59</a:t>
+            </a:fld>
+            <a:endParaRPr lang="en-US"/>
+          </a:p>
+        </p:txBody>
+      </p:sp>
+    </p:spTree>
+  </p:cSld>
+  <p:clrMapOvr>
+    <a:masterClrMapping/>
+  </p:clrMapOvr>
+</p:sld>
+</file>
+
+<file path=ppt/slides/slide6.xml><?xml version="1.0" encoding="utf-8"?>
+<p:sld xmlns:a="http://schemas.openxmlformats.org/drawingml/2006/main" xmlns:r="http://schemas.openxmlformats.org/officeDocument/2006/relationships" xmlns:p="http://schemas.openxmlformats.org/presentationml/2006/main">
+  <p:cSld name="Slide 6">
+    <p:spTree>
+      <p:nvGrpSpPr>
+        <p:cNvPr id="1" name=""/>
+        <p:cNvGrpSpPr/>
+        <p:nvPr/>
+      </p:nvGrpSpPr>
+      <p:grpSpPr>
+        <a:xfrm>
+          <a:off x="0" y="0"/>
+          <a:ext cx="0" cy="0"/>
+          <a:chOff x="0" y="0"/>
+          <a:chExt cx="0" cy="0"/>
+        </a:xfrm>
+      </p:grpSpPr>
+      <p:sp>
+        <p:nvSpPr>
+          <p:cNvPr id="2" name="Text 0"/>
+          <p:cNvSpPr/>
+          <p:nvPr/>
+        </p:nvSpPr>
+        <p:spPr>
+          <a:xfrm>
+            <a:off x="457200" y="713232"/>
+            <a:ext cx="11368735" cy="274320"/>
+          </a:xfrm>
+          <a:prstGeom prst="rect">
+            <a:avLst/>
+          </a:prstGeom>
+          <a:noFill/>
+          <a:ln/>
+        </p:spPr>
+        <p:txBody>
+          <a:bodyPr wrap="square" lIns="0" tIns="0" rIns="0" bIns="0" rtlCol="0" anchor="ctr"/>
+          <a:lstStyle/>
+          <a:p>
+            <a:pPr algn="r" indent="0" marL="0">
+              <a:buNone/>
+            </a:pPr>
+            <a:r>
+              <a:rPr lang="en-US" sz="1400" b="1" dirty="0">
+                <a:solidFill>
+                  <a:srgbClr val="1C3F6E"/>
+                </a:solidFill>
+                <a:latin typeface="Calibri" pitchFamily="34" charset="0"/>
+                <a:ea typeface="Calibri" pitchFamily="34" charset="-122"/>
+                <a:cs typeface="Calibri" pitchFamily="34" charset="-120"/>
+              </a:rPr>
+              <a:t>LESSON PLAN</a:t>
+            </a:r>
+            <a:endParaRPr lang="en-US" sz="1400" dirty="0"/>
+          </a:p>
+        </p:txBody>
+      </p:sp>
+      <p:pic>
+        <p:nvPicPr>
+          <p:cNvPr id="3" name="Image 0" descr="/home/claude/f4/img/minesec_sheet.png">    </p:cNvPr>
+          <p:cNvPicPr>
+            <a:picLocks noChangeAspect="1"/>
+          </p:cNvPicPr>
+          <p:nvPr/>
+        </p:nvPicPr>
+        <p:blipFill>
+          <a:blip r:embed="rId1"/>
+          <a:stretch>
+            <a:fillRect/>
+          </a:stretch>
+        </p:blipFill>
+        <p:spPr>
+          <a:xfrm>
+            <a:off x="0" y="658368"/>
+            <a:ext cx="2468880" cy="5833872"/>
+          </a:xfrm>
+          <a:prstGeom prst="rect">
+            <a:avLst/>
+          </a:prstGeom>
+        </p:spPr>
+      </p:pic>
+      <p:sp>
+        <p:nvSpPr>
+          <p:cNvPr id="4" name="Text 1"/>
+          <p:cNvSpPr/>
+          <p:nvPr/>
+        </p:nvSpPr>
+        <p:spPr>
+          <a:xfrm>
+            <a:off x="2697480" y="1005840"/>
+            <a:ext cx="9174175" cy="731520"/>
+          </a:xfrm>
+          <a:prstGeom prst="rect">
+            <a:avLst/>
+          </a:prstGeom>
+          <a:noFill/>
+          <a:ln/>
+        </p:spPr>
+        <p:txBody>
+          <a:bodyPr wrap="square" lIns="0" tIns="0" rIns="0" bIns="0" rtlCol="0" anchor="ctr">
+            <a:normAutofit/>
+          </a:bodyPr>
+          <a:lstStyle/>
+          <a:p>
+            <a:pPr algn="ctr" indent="0" marL="0">
+              <a:buNone/>
+            </a:pPr>
+            <a:r>
+              <a:rPr lang="en-US" sz="3600" b="1" dirty="0">
+                <a:solidFill>
+                  <a:srgbClr val="990011"/>
+                </a:solidFill>
+                <a:latin typeface="Times New Roman" pitchFamily="34" charset="0"/>
+                <a:ea typeface="Times New Roman" pitchFamily="34" charset="-122"/>
+                <a:cs typeface="Times New Roman" pitchFamily="34" charset="-120"/>
+              </a:rPr>
+              <a:t>Lesson Plan</a:t>
+            </a:r>
+            <a:endParaRPr lang="en-US" sz="3600" dirty="0"/>
+          </a:p>
+        </p:txBody>
+      </p:sp>
+      <p:sp>
+        <p:nvSpPr>
+          <p:cNvPr id="5" name="Text 2"/>
+          <p:cNvSpPr/>
+          <p:nvPr/>
+        </p:nvSpPr>
+        <p:spPr>
+          <a:xfrm>
+            <a:off x="2697480" y="1783080"/>
+            <a:ext cx="9174175" cy="4663440"/>
+          </a:xfrm>
+          <a:prstGeom prst="rect">
+            <a:avLst/>
+          </a:prstGeom>
+          <a:noFill/>
+          <a:ln/>
+        </p:spPr>
+        <p:txBody>
+          <a:bodyPr wrap="square" lIns="0" tIns="0" rIns="0" bIns="0" rtlCol="0" anchor="t"/>
+          <a:lstStyle/>
+          <a:p>
+            <a:pPr algn="l" marL="342900" indent="-342900">
+              <a:spcAft>
+                <a:spcPts val="800"/>
+              </a:spcAft>
+              <a:buSzPct val="100000"/>
+              <a:buFont typeface="+mj-lt"/>
+              <a:buAutoNum type="arabicPeriod" startAt="1"/>
+            </a:pPr>
+            <a:r>
+              <a:rPr lang="en-US" sz="4000" dirty="0">
+                <a:solidFill>
+                  <a:srgbClr val="111111"/>
+                </a:solidFill>
+                <a:latin typeface="Times New Roman" pitchFamily="34" charset="0"/>
+                <a:ea typeface="Times New Roman" pitchFamily="34" charset="-122"/>
+                <a:cs typeface="Times New Roman" pitchFamily="34" charset="-120"/>
+              </a:rPr>
+              <a:t>Correction of the homework</a:t>
+            </a:r>
+            <a:endParaRPr lang="en-US" sz="4000" dirty="0"/>
+          </a:p>
+          <a:p>
+            <a:pPr algn="l" marL="342900" indent="-342900">
+              <a:spcAft>
+                <a:spcPts val="800"/>
+              </a:spcAft>
+              <a:buSzPct val="100000"/>
+              <a:buFont typeface="+mj-lt"/>
+              <a:buAutoNum type="arabicPeriod" startAt="1"/>
+            </a:pPr>
+            <a:r>
+              <a:rPr lang="en-US" sz="4000" dirty="0">
+                <a:solidFill>
+                  <a:srgbClr val="111111"/>
+                </a:solidFill>
+                <a:latin typeface="Times New Roman" pitchFamily="34" charset="0"/>
+                <a:ea typeface="Times New Roman" pitchFamily="34" charset="-122"/>
+                <a:cs typeface="Times New Roman" pitchFamily="34" charset="-120"/>
+              </a:rPr>
+              <a:t>Objectives and recall</a:t>
+            </a:r>
+            <a:endParaRPr lang="en-US" sz="4000" dirty="0"/>
+          </a:p>
+          <a:p>
+            <a:pPr algn="l" marL="342900" indent="-342900">
+              <a:spcAft>
+                <a:spcPts val="800"/>
+              </a:spcAft>
+              <a:buSzPct val="100000"/>
+              <a:buFont typeface="+mj-lt"/>
+              <a:buAutoNum type="arabicPeriod" startAt="1"/>
+            </a:pPr>
+            <a:r>
+              <a:rPr lang="en-US" sz="4000" dirty="0">
+                <a:solidFill>
+                  <a:srgbClr val="111111"/>
+                </a:solidFill>
+                <a:latin typeface="Times New Roman" pitchFamily="34" charset="0"/>
+                <a:ea typeface="Times New Roman" pitchFamily="34" charset="-122"/>
+                <a:cs typeface="Times New Roman" pitchFamily="34" charset="-120"/>
+              </a:rPr>
+              <a:t>Real-life situation and action to take</a:t>
+            </a:r>
+            <a:endParaRPr lang="en-US" sz="4000" dirty="0"/>
+          </a:p>
+          <a:p>
+            <a:pPr algn="l" marL="342900" indent="-342900">
+              <a:spcAft>
+                <a:spcPts val="800"/>
+              </a:spcAft>
+              <a:buSzPct val="100000"/>
+              <a:buFont typeface="+mj-lt"/>
+              <a:buAutoNum type="arabicPeriod" startAt="1"/>
+            </a:pPr>
+            <a:r>
+              <a:rPr lang="en-US" sz="4000" dirty="0">
+                <a:solidFill>
+                  <a:srgbClr val="111111"/>
+                </a:solidFill>
+                <a:latin typeface="Times New Roman" pitchFamily="34" charset="0"/>
+                <a:ea typeface="Times New Roman" pitchFamily="34" charset="-122"/>
+                <a:cs typeface="Times New Roman" pitchFamily="34" charset="-120"/>
+              </a:rPr>
+              <a:t>Learning activities</a:t>
+            </a:r>
+            <a:endParaRPr lang="en-US" sz="4000" dirty="0"/>
+          </a:p>
+          <a:p>
+            <a:pPr algn="l" marL="342900" indent="-342900">
+              <a:spcAft>
+                <a:spcPts val="800"/>
+              </a:spcAft>
+              <a:buSzPct val="100000"/>
+              <a:buFont typeface="+mj-lt"/>
+              <a:buAutoNum type="arabicPeriod" startAt="1"/>
+            </a:pPr>
+            <a:r>
+              <a:rPr lang="en-US" sz="4000" dirty="0">
+                <a:solidFill>
+                  <a:srgbClr val="111111"/>
+                </a:solidFill>
+                <a:latin typeface="Times New Roman" pitchFamily="34" charset="0"/>
+                <a:ea typeface="Times New Roman" pitchFamily="34" charset="-122"/>
+                <a:cs typeface="Times New Roman" pitchFamily="34" charset="-120"/>
+              </a:rPr>
+              <a:t>Board summary</a:t>
+            </a:r>
+            <a:endParaRPr lang="en-US" sz="4000" dirty="0"/>
+          </a:p>
+          <a:p>
+            <a:pPr algn="l" marL="342900" indent="-342900">
+              <a:spcAft>
+                <a:spcPts val="800"/>
+              </a:spcAft>
+              <a:buSzPct val="100000"/>
+              <a:buFont typeface="+mj-lt"/>
+              <a:buAutoNum type="arabicPeriod" startAt="1"/>
+            </a:pPr>
+            <a:r>
+              <a:rPr lang="en-US" sz="4000" dirty="0">
+                <a:solidFill>
+                  <a:srgbClr val="111111"/>
+                </a:solidFill>
+                <a:latin typeface="Times New Roman" pitchFamily="34" charset="0"/>
+                <a:ea typeface="Times New Roman" pitchFamily="34" charset="-122"/>
+                <a:cs typeface="Times New Roman" pitchFamily="34" charset="-120"/>
+              </a:rPr>
+              <a:t>Evaluation, remediation and homework</a:t>
+            </a:r>
+            <a:endParaRPr lang="en-US" sz="4000" dirty="0"/>
+          </a:p>
+        </p:txBody>
+      </p:sp>
+      <p:sp>
+        <p:nvSpPr>
+          <p:cNvPr id="25" name="Slide Number Placeholder 0"/>
+          <p:cNvSpPr>
+            <a:spLocks noGrp="1"/>
+          </p:cNvSpPr>
+          <p:nvPr>
+            <p:ph type="sldNum" sz="quarter" idx="4294967295"/>
+          </p:nvPr>
+        </p:nvSpPr>
+        <p:spPr>
+          <a:xfrm>
+            <a:off x="27432" y="91440"/>
+            <a:ext cx="585216" cy="475488"/>
+          </a:xfrm>
+          <a:prstGeom prst="rect">
+            <a:avLst/>
+          </a:prstGeom>
+          <a:extLst>
+            <a:ext uri="{C572A759-6A51-4108-AA02-DFA0A04FC94B}">
+              <ma14:wrappingTextBoxFlag xmlns:ma14="http://schemas.microsoft.com/office/mac/drawingml/2011/main" val="0"/>
+            </a:ext>
+          </a:extLst>
+        </p:spPr>
+        <p:txBody>
+          <a:bodyPr/>
+          <a:lstStyle>
+            <a:lvl1pPr>
+              <a:defRPr sz="2000">
+                <a:solidFill>
+                  <a:srgbClr val="FFFFFF"/>
+                </a:solidFill>
+                <a:latin typeface="Calibri"/>
+                <a:ea typeface="Calibri"/>
+                <a:cs typeface="Calibri"/>
+              </a:defRPr>
+            </a:lvl1pPr>
+          </a:lstStyle>
+          <a:p>
+            <a:pPr algn="ctr"/>
+            <a:fld id="{F7021451-1387-4CA6-816F-3879F97B5CBC}" type="slidenum">
+              <a:rPr b="1" lang="en-US"/>
+              <a:t>6</a:t>
+            </a:fld>
+            <a:endParaRPr lang="en-US"/>
+          </a:p>
+        </p:txBody>
+      </p:sp>
+    </p:spTree>
+  </p:cSld>
+  <p:clrMapOvr>
+    <a:masterClrMapping/>
+  </p:clrMapOvr>
+</p:sld>
+</file>
+
+<file path=ppt/slides/slide60.xml><?xml version="1.0" encoding="utf-8"?>
+<p:sld xmlns:a="http://schemas.openxmlformats.org/drawingml/2006/main" xmlns:r="http://schemas.openxmlformats.org/officeDocument/2006/relationships" xmlns:p="http://schemas.openxmlformats.org/presentationml/2006/main">
+  <p:cSld name="Slide 60">
+    <p:spTree>
+      <p:nvGrpSpPr>
+        <p:cNvPr id="1" name=""/>
+        <p:cNvGrpSpPr/>
+        <p:nvPr/>
+      </p:nvGrpSpPr>
+      <p:grpSpPr>
+        <a:xfrm>
+          <a:off x="0" y="0"/>
+          <a:ext cx="0" cy="0"/>
+          <a:chOff x="0" y="0"/>
+          <a:chExt cx="0" cy="0"/>
+        </a:xfrm>
+      </p:grpSpPr>
+      <p:sp>
+        <p:nvSpPr>
+          <p:cNvPr id="2" name="Text 0"/>
+          <p:cNvSpPr/>
+          <p:nvPr/>
+        </p:nvSpPr>
+        <p:spPr>
+          <a:xfrm>
+            <a:off x="457200" y="713232"/>
+            <a:ext cx="11368735" cy="274320"/>
+          </a:xfrm>
+          <a:prstGeom prst="rect">
+            <a:avLst/>
+          </a:prstGeom>
+          <a:noFill/>
+          <a:ln/>
+        </p:spPr>
+        <p:txBody>
+          <a:bodyPr wrap="square" lIns="0" tIns="0" rIns="0" bIns="0" rtlCol="0" anchor="ctr"/>
+          <a:lstStyle/>
+          <a:p>
+            <a:pPr algn="r" indent="0" marL="0">
+              <a:buNone/>
+            </a:pPr>
+            <a:r>
+              <a:rPr lang="en-US" sz="1400" b="1" dirty="0">
+                <a:solidFill>
+                  <a:srgbClr val="1C3F6E"/>
+                </a:solidFill>
+                <a:latin typeface="Calibri" pitchFamily="34" charset="0"/>
+                <a:ea typeface="Calibri" pitchFamily="34" charset="-122"/>
+                <a:cs typeface="Calibri" pitchFamily="34" charset="-120"/>
+              </a:rPr>
               <a:t>BILINGUAL GAME</a:t>
             </a:r>
             <a:endParaRPr lang="en-US" sz="1400" dirty="0"/>
@@ -20134,7 +21637,7 @@
       </p:sp>
       <p:graphicFrame>
         <p:nvGraphicFramePr>
-          <p:cNvPr id="57" name="Table 0"/>
+          <p:cNvPr id="61" name="Table 0"/>
           <p:cNvGraphicFramePr>
             <a:graphicFrameLocks noGrp="1"/>
           </p:cNvGraphicFramePr>
@@ -21170,7 +22673,7 @@
             <a:pPr algn="ctr"/>
             <a:fld id="{F7021451-1387-4CA6-816F-3879F97B5CBC}" type="slidenum">
               <a:rPr b="1" lang="en-US"/>
-              <a:t>56</a:t>
+              <a:t>60</a:t>
             </a:fld>
             <a:endParaRPr lang="en-US"/>
           </a:p>
@@ -21184,9 +22687,9 @@
 </p:sld>
 </file>
 
-<file path=ppt/slides/slide57.xml><?xml version="1.0" encoding="utf-8"?>
+<file path=ppt/slides/slide61.xml><?xml version="1.0" encoding="utf-8"?>
 <p:sld xmlns:a="http://schemas.openxmlformats.org/drawingml/2006/main" xmlns:r="http://schemas.openxmlformats.org/officeDocument/2006/relationships" xmlns:p="http://schemas.openxmlformats.org/presentationml/2006/main">
-  <p:cSld name="Slide 57">
+  <p:cSld name="Slide 61">
     <p:spTree>
       <p:nvGrpSpPr>
         <p:cNvPr id="1" name=""/>
@@ -21281,7 +22784,7 @@
       </p:sp>
       <p:graphicFrame>
         <p:nvGraphicFramePr>
-          <p:cNvPr id="58" name="Table 0"/>
+          <p:cNvPr id="62" name="Table 0"/>
           <p:cNvGraphicFramePr>
             <a:graphicFrameLocks noGrp="1"/>
           </p:cNvGraphicFramePr>
@@ -21903,7 +23406,7 @@
             <a:pPr algn="ctr"/>
             <a:fld id="{F7021451-1387-4CA6-816F-3879F97B5CBC}" type="slidenum">
               <a:rPr b="1" lang="en-US"/>
-              <a:t>57</a:t>
+              <a:t>61</a:t>
             </a:fld>
             <a:endParaRPr lang="en-US"/>
           </a:p>
@@ -21917,9 +23420,9 @@
 </p:sld>
 </file>
 
-<file path=ppt/slides/slide58.xml><?xml version="1.0" encoding="utf-8"?>
+<file path=ppt/slides/slide62.xml><?xml version="1.0" encoding="utf-8"?>
 <p:sld xmlns:a="http://schemas.openxmlformats.org/drawingml/2006/main" xmlns:r="http://schemas.openxmlformats.org/officeDocument/2006/relationships" xmlns:p="http://schemas.openxmlformats.org/presentationml/2006/main">
-  <p:cSld name="Slide 58">
+  <p:cSld name="Slide 62">
     <p:spTree>
       <p:nvGrpSpPr>
         <p:cNvPr id="1" name=""/>
@@ -22014,7 +23517,7 @@
       </p:sp>
       <p:graphicFrame>
         <p:nvGraphicFramePr>
-          <p:cNvPr id="59" name="Table 0"/>
+          <p:cNvPr id="63" name="Table 0"/>
           <p:cNvGraphicFramePr>
             <a:graphicFrameLocks noGrp="1"/>
           </p:cNvGraphicFramePr>
@@ -22124,7 +23627,7 @@
                           <a:ea typeface="Calibri" pitchFamily="34" charset="-122"/>
                           <a:cs typeface="Calibri" pitchFamily="34" charset="-120"/>
                         </a:rPr>
-                        <a:t>DEFINITIONS; Meaning and Classification of Micro-climates; Characteristics of Urban Climates; Factors of the Urban Heat Island.</a:t>
+                        <a:t>DEFINITIONS; Meaning of Micro-climates; Classification of Micro-climates; Characteristics of Urban Climates; Factors of Urban Climates.</a:t>
                       </a:r>
                       <a:endParaRPr lang="en-US" sz="1600" dirty="0">
                         <a:latin typeface="Calibri" charset="0"/>
@@ -22774,7 +24277,7 @@
             <a:pPr algn="ctr"/>
             <a:fld id="{F7021451-1387-4CA6-816F-3879F97B5CBC}" type="slidenum">
               <a:rPr b="1" lang="en-US"/>
-              <a:t>58</a:t>
+              <a:t>62</a:t>
             </a:fld>
             <a:endParaRPr lang="en-US"/>
           </a:p>
@@ -22788,9 +24291,9 @@
 </p:sld>
 </file>
 
-<file path=ppt/slides/slide59.xml><?xml version="1.0" encoding="utf-8"?>
+<file path=ppt/slides/slide63.xml><?xml version="1.0" encoding="utf-8"?>
 <p:sld xmlns:a="http://schemas.openxmlformats.org/drawingml/2006/main" xmlns:r="http://schemas.openxmlformats.org/officeDocument/2006/relationships" xmlns:p="http://schemas.openxmlformats.org/presentationml/2006/main">
-  <p:cSld name="Slide 59">
+  <p:cSld name="Slide 63">
     <p:spTree>
       <p:nvGrpSpPr>
         <p:cNvPr id="1" name=""/>
@@ -23099,7 +24602,7 @@
             <a:pPr algn="ctr"/>
             <a:fld id="{F7021451-1387-4CA6-816F-3879F97B5CBC}" type="slidenum">
               <a:rPr b="1" lang="en-US"/>
-              <a:t>59</a:t>
+              <a:t>63</a:t>
             </a:fld>
             <a:endParaRPr lang="en-US"/>
           </a:p>
@@ -23113,9 +24616,9 @@
 </p:sld>
 </file>
 
-<file path=ppt/slides/slide6.xml><?xml version="1.0" encoding="utf-8"?>
+<file path=ppt/slides/slide64.xml><?xml version="1.0" encoding="utf-8"?>
 <p:sld xmlns:a="http://schemas.openxmlformats.org/drawingml/2006/main" xmlns:r="http://schemas.openxmlformats.org/officeDocument/2006/relationships" xmlns:p="http://schemas.openxmlformats.org/presentationml/2006/main">
-  <p:cSld name="Slide 6">
+  <p:cSld name="Slide 64">
     <p:spTree>
       <p:nvGrpSpPr>
         <p:cNvPr id="1" name=""/>
@@ -23163,7 +24666,7 @@
                 <a:ea typeface="Calibri" pitchFamily="34" charset="-122"/>
                 <a:cs typeface="Calibri" pitchFamily="34" charset="-120"/>
               </a:rPr>
-              <a:t>LESSON PLAN</a:t>
+              <a:t>REFERENCES</a:t>
             </a:r>
             <a:endParaRPr lang="en-US" sz="1400" dirty="0"/>
           </a:p>
@@ -23186,337 +24689,6 @@
         <p:spPr>
           <a:xfrm>
             <a:off x="0" y="658368"/>
-            <a:ext cx="2468880" cy="5833872"/>
-          </a:xfrm>
-          <a:prstGeom prst="rect">
-            <a:avLst/>
-          </a:prstGeom>
-        </p:spPr>
-      </p:pic>
-      <p:sp>
-        <p:nvSpPr>
-          <p:cNvPr id="4" name="Text 1"/>
-          <p:cNvSpPr/>
-          <p:nvPr/>
-        </p:nvSpPr>
-        <p:spPr>
-          <a:xfrm>
-            <a:off x="2697480" y="1005840"/>
-            <a:ext cx="9174175" cy="731520"/>
-          </a:xfrm>
-          <a:prstGeom prst="rect">
-            <a:avLst/>
-          </a:prstGeom>
-          <a:noFill/>
-          <a:ln/>
-        </p:spPr>
-        <p:txBody>
-          <a:bodyPr wrap="square" lIns="0" tIns="0" rIns="0" bIns="0" rtlCol="0" anchor="ctr">
-            <a:normAutofit/>
-          </a:bodyPr>
-          <a:lstStyle/>
-          <a:p>
-            <a:pPr algn="ctr" indent="0" marL="0">
-              <a:buNone/>
-            </a:pPr>
-            <a:r>
-              <a:rPr lang="en-US" sz="3600" b="1" dirty="0">
-                <a:solidFill>
-                  <a:srgbClr val="990011"/>
-                </a:solidFill>
-                <a:latin typeface="Times New Roman" pitchFamily="34" charset="0"/>
-                <a:ea typeface="Times New Roman" pitchFamily="34" charset="-122"/>
-                <a:cs typeface="Times New Roman" pitchFamily="34" charset="-120"/>
-              </a:rPr>
-              <a:t>Lesson Plan</a:t>
-            </a:r>
-            <a:endParaRPr lang="en-US" sz="3600" dirty="0"/>
-          </a:p>
-        </p:txBody>
-      </p:sp>
-      <p:sp>
-        <p:nvSpPr>
-          <p:cNvPr id="5" name="Text 2"/>
-          <p:cNvSpPr/>
-          <p:nvPr/>
-        </p:nvSpPr>
-        <p:spPr>
-          <a:xfrm>
-            <a:off x="2697480" y="1783080"/>
-            <a:ext cx="9174175" cy="4663440"/>
-          </a:xfrm>
-          <a:prstGeom prst="rect">
-            <a:avLst/>
-          </a:prstGeom>
-          <a:noFill/>
-          <a:ln/>
-        </p:spPr>
-        <p:txBody>
-          <a:bodyPr wrap="square" lIns="0" tIns="0" rIns="0" bIns="0" rtlCol="0" anchor="t"/>
-          <a:lstStyle/>
-          <a:p>
-            <a:pPr algn="l" marL="342900" indent="-342900">
-              <a:spcAft>
-                <a:spcPts val="800"/>
-              </a:spcAft>
-              <a:buSzPct val="100000"/>
-              <a:buFont typeface="+mj-lt"/>
-              <a:buAutoNum type="arabicPeriod" startAt="1"/>
-            </a:pPr>
-            <a:r>
-              <a:rPr lang="en-US" sz="4000" dirty="0">
-                <a:solidFill>
-                  <a:srgbClr val="111111"/>
-                </a:solidFill>
-                <a:latin typeface="Times New Roman" pitchFamily="34" charset="0"/>
-                <a:ea typeface="Times New Roman" pitchFamily="34" charset="-122"/>
-                <a:cs typeface="Times New Roman" pitchFamily="34" charset="-120"/>
-              </a:rPr>
-              <a:t>Correction of the homework</a:t>
-            </a:r>
-            <a:endParaRPr lang="en-US" sz="4000" dirty="0"/>
-          </a:p>
-          <a:p>
-            <a:pPr algn="l" marL="342900" indent="-342900">
-              <a:spcAft>
-                <a:spcPts val="800"/>
-              </a:spcAft>
-              <a:buSzPct val="100000"/>
-              <a:buFont typeface="+mj-lt"/>
-              <a:buAutoNum type="arabicPeriod" startAt="1"/>
-            </a:pPr>
-            <a:r>
-              <a:rPr lang="en-US" sz="4000" dirty="0">
-                <a:solidFill>
-                  <a:srgbClr val="111111"/>
-                </a:solidFill>
-                <a:latin typeface="Times New Roman" pitchFamily="34" charset="0"/>
-                <a:ea typeface="Times New Roman" pitchFamily="34" charset="-122"/>
-                <a:cs typeface="Times New Roman" pitchFamily="34" charset="-120"/>
-              </a:rPr>
-              <a:t>Objectives and recall</a:t>
-            </a:r>
-            <a:endParaRPr lang="en-US" sz="4000" dirty="0"/>
-          </a:p>
-          <a:p>
-            <a:pPr algn="l" marL="342900" indent="-342900">
-              <a:spcAft>
-                <a:spcPts val="800"/>
-              </a:spcAft>
-              <a:buSzPct val="100000"/>
-              <a:buFont typeface="+mj-lt"/>
-              <a:buAutoNum type="arabicPeriod" startAt="1"/>
-            </a:pPr>
-            <a:r>
-              <a:rPr lang="en-US" sz="4000" dirty="0">
-                <a:solidFill>
-                  <a:srgbClr val="111111"/>
-                </a:solidFill>
-                <a:latin typeface="Times New Roman" pitchFamily="34" charset="0"/>
-                <a:ea typeface="Times New Roman" pitchFamily="34" charset="-122"/>
-                <a:cs typeface="Times New Roman" pitchFamily="34" charset="-120"/>
-              </a:rPr>
-              <a:t>Real-life situation and action to take</a:t>
-            </a:r>
-            <a:endParaRPr lang="en-US" sz="4000" dirty="0"/>
-          </a:p>
-          <a:p>
-            <a:pPr algn="l" marL="342900" indent="-342900">
-              <a:spcAft>
-                <a:spcPts val="800"/>
-              </a:spcAft>
-              <a:buSzPct val="100000"/>
-              <a:buFont typeface="+mj-lt"/>
-              <a:buAutoNum type="arabicPeriod" startAt="1"/>
-            </a:pPr>
-            <a:r>
-              <a:rPr lang="en-US" sz="4000" dirty="0">
-                <a:solidFill>
-                  <a:srgbClr val="111111"/>
-                </a:solidFill>
-                <a:latin typeface="Times New Roman" pitchFamily="34" charset="0"/>
-                <a:ea typeface="Times New Roman" pitchFamily="34" charset="-122"/>
-                <a:cs typeface="Times New Roman" pitchFamily="34" charset="-120"/>
-              </a:rPr>
-              <a:t>Learning activities</a:t>
-            </a:r>
-            <a:endParaRPr lang="en-US" sz="4000" dirty="0"/>
-          </a:p>
-          <a:p>
-            <a:pPr algn="l" marL="342900" indent="-342900">
-              <a:spcAft>
-                <a:spcPts val="800"/>
-              </a:spcAft>
-              <a:buSzPct val="100000"/>
-              <a:buFont typeface="+mj-lt"/>
-              <a:buAutoNum type="arabicPeriod" startAt="1"/>
-            </a:pPr>
-            <a:r>
-              <a:rPr lang="en-US" sz="4000" dirty="0">
-                <a:solidFill>
-                  <a:srgbClr val="111111"/>
-                </a:solidFill>
-                <a:latin typeface="Times New Roman" pitchFamily="34" charset="0"/>
-                <a:ea typeface="Times New Roman" pitchFamily="34" charset="-122"/>
-                <a:cs typeface="Times New Roman" pitchFamily="34" charset="-120"/>
-              </a:rPr>
-              <a:t>Board summary</a:t>
-            </a:r>
-            <a:endParaRPr lang="en-US" sz="4000" dirty="0"/>
-          </a:p>
-          <a:p>
-            <a:pPr algn="l" marL="342900" indent="-342900">
-              <a:spcAft>
-                <a:spcPts val="800"/>
-              </a:spcAft>
-              <a:buSzPct val="100000"/>
-              <a:buFont typeface="+mj-lt"/>
-              <a:buAutoNum type="arabicPeriod" startAt="1"/>
-            </a:pPr>
-            <a:r>
-              <a:rPr lang="en-US" sz="4000" dirty="0">
-                <a:solidFill>
-                  <a:srgbClr val="111111"/>
-                </a:solidFill>
-                <a:latin typeface="Times New Roman" pitchFamily="34" charset="0"/>
-                <a:ea typeface="Times New Roman" pitchFamily="34" charset="-122"/>
-                <a:cs typeface="Times New Roman" pitchFamily="34" charset="-120"/>
-              </a:rPr>
-              <a:t>Evaluation, remediation and homework</a:t>
-            </a:r>
-            <a:endParaRPr lang="en-US" sz="4000" dirty="0"/>
-          </a:p>
-        </p:txBody>
-      </p:sp>
-      <p:sp>
-        <p:nvSpPr>
-          <p:cNvPr id="25" name="Slide Number Placeholder 0"/>
-          <p:cNvSpPr>
-            <a:spLocks noGrp="1"/>
-          </p:cNvSpPr>
-          <p:nvPr>
-            <p:ph type="sldNum" sz="quarter" idx="4294967295"/>
-          </p:nvPr>
-        </p:nvSpPr>
-        <p:spPr>
-          <a:xfrm>
-            <a:off x="27432" y="91440"/>
-            <a:ext cx="585216" cy="475488"/>
-          </a:xfrm>
-          <a:prstGeom prst="rect">
-            <a:avLst/>
-          </a:prstGeom>
-          <a:extLst>
-            <a:ext uri="{C572A759-6A51-4108-AA02-DFA0A04FC94B}">
-              <ma14:wrappingTextBoxFlag xmlns:ma14="http://schemas.microsoft.com/office/mac/drawingml/2011/main" val="0"/>
-            </a:ext>
-          </a:extLst>
-        </p:spPr>
-        <p:txBody>
-          <a:bodyPr/>
-          <a:lstStyle>
-            <a:lvl1pPr>
-              <a:defRPr sz="2000">
-                <a:solidFill>
-                  <a:srgbClr val="FFFFFF"/>
-                </a:solidFill>
-                <a:latin typeface="Calibri"/>
-                <a:ea typeface="Calibri"/>
-                <a:cs typeface="Calibri"/>
-              </a:defRPr>
-            </a:lvl1pPr>
-          </a:lstStyle>
-          <a:p>
-            <a:pPr algn="ctr"/>
-            <a:fld id="{F7021451-1387-4CA6-816F-3879F97B5CBC}" type="slidenum">
-              <a:rPr b="1" lang="en-US"/>
-              <a:t>6</a:t>
-            </a:fld>
-            <a:endParaRPr lang="en-US"/>
-          </a:p>
-        </p:txBody>
-      </p:sp>
-    </p:spTree>
-  </p:cSld>
-  <p:clrMapOvr>
-    <a:masterClrMapping/>
-  </p:clrMapOvr>
-</p:sld>
-</file>
-
-<file path=ppt/slides/slide60.xml><?xml version="1.0" encoding="utf-8"?>
-<p:sld xmlns:a="http://schemas.openxmlformats.org/drawingml/2006/main" xmlns:r="http://schemas.openxmlformats.org/officeDocument/2006/relationships" xmlns:p="http://schemas.openxmlformats.org/presentationml/2006/main">
-  <p:cSld name="Slide 60">
-    <p:spTree>
-      <p:nvGrpSpPr>
-        <p:cNvPr id="1" name=""/>
-        <p:cNvGrpSpPr/>
-        <p:nvPr/>
-      </p:nvGrpSpPr>
-      <p:grpSpPr>
-        <a:xfrm>
-          <a:off x="0" y="0"/>
-          <a:ext cx="0" cy="0"/>
-          <a:chOff x="0" y="0"/>
-          <a:chExt cx="0" cy="0"/>
-        </a:xfrm>
-      </p:grpSpPr>
-      <p:sp>
-        <p:nvSpPr>
-          <p:cNvPr id="2" name="Text 0"/>
-          <p:cNvSpPr/>
-          <p:nvPr/>
-        </p:nvSpPr>
-        <p:spPr>
-          <a:xfrm>
-            <a:off x="457200" y="713232"/>
-            <a:ext cx="11368735" cy="274320"/>
-          </a:xfrm>
-          <a:prstGeom prst="rect">
-            <a:avLst/>
-          </a:prstGeom>
-          <a:noFill/>
-          <a:ln/>
-        </p:spPr>
-        <p:txBody>
-          <a:bodyPr wrap="square" lIns="0" tIns="0" rIns="0" bIns="0" rtlCol="0" anchor="ctr"/>
-          <a:lstStyle/>
-          <a:p>
-            <a:pPr algn="r" indent="0" marL="0">
-              <a:buNone/>
-            </a:pPr>
-            <a:r>
-              <a:rPr lang="en-US" sz="1400" b="1" dirty="0">
-                <a:solidFill>
-                  <a:srgbClr val="1C3F6E"/>
-                </a:solidFill>
-                <a:latin typeface="Calibri" pitchFamily="34" charset="0"/>
-                <a:ea typeface="Calibri" pitchFamily="34" charset="-122"/>
-                <a:cs typeface="Calibri" pitchFamily="34" charset="-120"/>
-              </a:rPr>
-              <a:t>REFERENCES</a:t>
-            </a:r>
-            <a:endParaRPr lang="en-US" sz="1400" dirty="0"/>
-          </a:p>
-        </p:txBody>
-      </p:sp>
-      <p:pic>
-        <p:nvPicPr>
-          <p:cNvPr id="3" name="Image 0" descr="/home/claude/f4/img/minesec_sheet.png">    </p:cNvPr>
-          <p:cNvPicPr>
-            <a:picLocks noChangeAspect="1"/>
-          </p:cNvPicPr>
-          <p:nvPr/>
-        </p:nvPicPr>
-        <p:blipFill>
-          <a:blip r:embed="rId1"/>
-          <a:stretch>
-            <a:fillRect/>
-          </a:stretch>
-        </p:blipFill>
-        <p:spPr>
-          <a:xfrm>
-            <a:off x="0" y="658368"/>
             <a:ext cx="3840480" cy="5833872"/>
           </a:xfrm>
           <a:prstGeom prst="rect">
@@ -23755,7 +24927,7 @@
             <a:pPr algn="ctr"/>
             <a:fld id="{F7021451-1387-4CA6-816F-3879F97B5CBC}" type="slidenum">
               <a:rPr b="1" lang="en-US"/>
-              <a:t>60</a:t>
+              <a:t>64</a:t>
             </a:fld>
             <a:endParaRPr lang="en-US"/>
           </a:p>
